--- a/ss/PresentationSlides.pptx
+++ b/ss/PresentationSlides.pptx
@@ -73,18 +73,7 @@
                 <a:uFillTx/>
                 <a:latin typeface="Calibri"/>
               </a:rPr>
-              <a:t>Click to move the </a:t>
-            </a:r>
-            <a:r>
-              <a:rPr lang="en-ZA" sz="1800" b="0" u="none" strike="noStrike">
-                <a:solidFill>
-                  <a:schemeClr val="dk1"/>
-                </a:solidFill>
-                <a:effectLst/>
-                <a:uFillTx/>
-                <a:latin typeface="Calibri"/>
-              </a:rPr>
-              <a:t>slide</a:t>
+              <a:t>Click to move the slide</a:t>
             </a:r>
             <a:endParaRPr lang="en-ZA" sz="1800" b="0" u="none" strike="noStrike">
               <a:solidFill>
@@ -137,18 +126,7 @@
                 <a:uFillTx/>
                 <a:latin typeface="Arial"/>
               </a:rPr>
-              <a:t>Click to edit the </a:t>
-            </a:r>
-            <a:r>
-              <a:rPr lang="en-ZA" sz="2000" b="0" u="none" strike="noStrike">
-                <a:solidFill>
-                  <a:srgbClr val="000000"/>
-                </a:solidFill>
-                <a:effectLst/>
-                <a:uFillTx/>
-                <a:latin typeface="Arial"/>
-              </a:rPr>
-              <a:t>notes format</a:t>
+              <a:t>Click to edit the notes format</a:t>
             </a:r>
             <a:endParaRPr lang="en-ZA" sz="2000" b="0" u="none" strike="noStrike">
               <a:solidFill>
@@ -390,7 +368,7 @@
             <a:pPr indent="0" algn="r">
               <a:buNone/>
             </a:pPr>
-            <a:fld id="{1E2EA158-281D-4F18-B15C-A4BFE741713F}" type="slidenum">
+            <a:fld id="{78D37412-30A2-4F82-962D-DDAF5DCD321D}" type="slidenum">
               <a:rPr lang="en-ZA" sz="1400" b="0" u="none" strike="noStrike">
                 <a:solidFill>
                   <a:srgbClr val="000000"/>
@@ -437,7 +415,7 @@
       </p:grpSpPr>
       <p:sp>
         <p:nvSpPr>
-          <p:cNvPr id="104" name="PlaceHolder 1"/>
+          <p:cNvPr id="107" name="PlaceHolder 1"/>
           <p:cNvSpPr>
             <a:spLocks noGrp="1"/>
           </p:cNvSpPr>
@@ -448,7 +426,7 @@
         <p:spPr>
           <a:xfrm>
             <a:off x="685800" y="1143000"/>
-            <a:ext cx="5486040" cy="3085920"/>
+            <a:ext cx="5485680" cy="3085560"/>
           </a:xfrm>
           <a:prstGeom prst="rect">
             <a:avLst/>
@@ -460,7 +438,7 @@
       </p:sp>
       <p:sp>
         <p:nvSpPr>
-          <p:cNvPr id="105" name="PlaceHolder 2"/>
+          <p:cNvPr id="108" name="PlaceHolder 2"/>
           <p:cNvSpPr>
             <a:spLocks noGrp="1"/>
           </p:cNvSpPr>
@@ -471,7 +449,7 @@
         <p:spPr>
           <a:xfrm>
             <a:off x="685800" y="4400640"/>
-            <a:ext cx="5486040" cy="3600000"/>
+            <a:ext cx="5485680" cy="3599640"/>
           </a:xfrm>
           <a:prstGeom prst="rect">
             <a:avLst/>
@@ -491,6 +469,9 @@
                 <a:spcPct val="100000"/>
               </a:lnSpc>
               <a:buNone/>
+              <a:tabLst>
+                <a:tab pos="0" algn="l"/>
+              </a:tabLst>
             </a:pPr>
             <a:r>
               <a:rPr lang="en-US" sz="2000" b="0" u="none" strike="noStrike">
@@ -516,7 +497,7 @@
       </p:sp>
       <p:sp>
         <p:nvSpPr>
-          <p:cNvPr id="106" name="PlaceHolder 3"/>
+          <p:cNvPr id="109" name="PlaceHolder 3"/>
           <p:cNvSpPr>
             <a:spLocks noGrp="1"/>
           </p:cNvSpPr>
@@ -527,7 +508,7 @@
         <p:spPr>
           <a:xfrm>
             <a:off x="3884760" y="8685360"/>
-            <a:ext cx="2971440" cy="458280"/>
+            <a:ext cx="2971080" cy="457920"/>
           </a:xfrm>
           <a:prstGeom prst="rect">
             <a:avLst/>
@@ -547,6 +528,9 @@
                 <a:spcPct val="100000"/>
               </a:lnSpc>
               <a:buNone/>
+              <a:tabLst>
+                <a:tab pos="0" algn="l"/>
+              </a:tabLst>
               <a:defRPr lang="en-US" sz="1200" b="0" u="none" strike="noStrike">
                 <a:solidFill>
                   <a:schemeClr val="dk1"/>
@@ -564,8 +548,11 @@
                 <a:spcPct val="100000"/>
               </a:lnSpc>
               <a:buNone/>
+              <a:tabLst>
+                <a:tab pos="0" algn="l"/>
+              </a:tabLst>
             </a:pPr>
-            <a:fld id="{131BAAAC-CCE4-4F20-B421-A3AC024CD4A8}" type="slidenum">
+            <a:fld id="{9FE3DE98-D1D3-42C5-8BC7-5F6BF0265F92}" type="slidenum">
               <a:rPr lang="en-US" sz="1200" b="0" u="none" strike="noStrike">
                 <a:solidFill>
                   <a:schemeClr val="dk1"/>
@@ -575,7 +562,7 @@
                 <a:latin typeface="+mn-lt"/>
                 <a:ea typeface="+mn-ea"/>
               </a:rPr>
-              <a:t>1</a:t>
+              <a:t>&lt;number&gt;</a:t>
             </a:fld>
             <a:endParaRPr lang="en-ZA" sz="1200" b="0" u="none" strike="noStrike">
               <a:solidFill>
@@ -612,7 +599,7 @@
       </p:grpSpPr>
       <p:sp>
         <p:nvSpPr>
-          <p:cNvPr id="107" name="PlaceHolder 1"/>
+          <p:cNvPr id="110" name="PlaceHolder 1"/>
           <p:cNvSpPr>
             <a:spLocks noGrp="1"/>
           </p:cNvSpPr>
@@ -623,7 +610,7 @@
         <p:spPr>
           <a:xfrm>
             <a:off x="685800" y="1143000"/>
-            <a:ext cx="5486040" cy="3085920"/>
+            <a:ext cx="5485680" cy="3085560"/>
           </a:xfrm>
           <a:prstGeom prst="rect">
             <a:avLst/>
@@ -635,7 +622,7 @@
       </p:sp>
       <p:sp>
         <p:nvSpPr>
-          <p:cNvPr id="108" name="PlaceHolder 2"/>
+          <p:cNvPr id="111" name="PlaceHolder 2"/>
           <p:cNvSpPr>
             <a:spLocks noGrp="1"/>
           </p:cNvSpPr>
@@ -646,7 +633,7 @@
         <p:spPr>
           <a:xfrm>
             <a:off x="685800" y="4400640"/>
-            <a:ext cx="5486040" cy="3600000"/>
+            <a:ext cx="5485680" cy="3599640"/>
           </a:xfrm>
           <a:prstGeom prst="rect">
             <a:avLst/>
@@ -666,6 +653,9 @@
                 <a:spcPct val="100000"/>
               </a:lnSpc>
               <a:buNone/>
+              <a:tabLst>
+                <a:tab pos="0" algn="l"/>
+              </a:tabLst>
             </a:pPr>
             <a:r>
               <a:rPr lang="en-US" sz="2000" b="0" u="none" strike="noStrike">
@@ -691,7 +681,7 @@
       </p:sp>
       <p:sp>
         <p:nvSpPr>
-          <p:cNvPr id="109" name="PlaceHolder 3"/>
+          <p:cNvPr id="112" name="PlaceHolder 3"/>
           <p:cNvSpPr>
             <a:spLocks noGrp="1"/>
           </p:cNvSpPr>
@@ -702,7 +692,7 @@
         <p:spPr>
           <a:xfrm>
             <a:off x="3884760" y="8685360"/>
-            <a:ext cx="2971440" cy="458280"/>
+            <a:ext cx="2971080" cy="457920"/>
           </a:xfrm>
           <a:prstGeom prst="rect">
             <a:avLst/>
@@ -722,6 +712,9 @@
                 <a:spcPct val="100000"/>
               </a:lnSpc>
               <a:buNone/>
+              <a:tabLst>
+                <a:tab pos="0" algn="l"/>
+              </a:tabLst>
               <a:defRPr lang="en-US" sz="1200" b="0" u="none" strike="noStrike">
                 <a:solidFill>
                   <a:schemeClr val="dk1"/>
@@ -739,8 +732,11 @@
                 <a:spcPct val="100000"/>
               </a:lnSpc>
               <a:buNone/>
+              <a:tabLst>
+                <a:tab pos="0" algn="l"/>
+              </a:tabLst>
             </a:pPr>
-            <a:fld id="{70B01106-E3D5-4235-B127-A772CFBF110D}" type="slidenum">
+            <a:fld id="{C61C814D-E0FF-4BD5-BA05-E5C650948D1B}" type="slidenum">
               <a:rPr lang="en-US" sz="1200" b="0" u="none" strike="noStrike">
                 <a:solidFill>
                   <a:schemeClr val="dk1"/>
@@ -750,7 +746,7 @@
                 <a:latin typeface="+mn-lt"/>
                 <a:ea typeface="+mn-ea"/>
               </a:rPr>
-              <a:t>1</a:t>
+              <a:t>&lt;number&gt;</a:t>
             </a:fld>
             <a:endParaRPr lang="en-ZA" sz="1200" b="0" u="none" strike="noStrike">
               <a:solidFill>
@@ -787,7 +783,7 @@
       </p:grpSpPr>
       <p:sp>
         <p:nvSpPr>
-          <p:cNvPr id="110" name="PlaceHolder 1"/>
+          <p:cNvPr id="113" name="PlaceHolder 1"/>
           <p:cNvSpPr>
             <a:spLocks noGrp="1"/>
           </p:cNvSpPr>
@@ -798,7 +794,7 @@
         <p:spPr>
           <a:xfrm>
             <a:off x="685800" y="1143000"/>
-            <a:ext cx="5486040" cy="3085920"/>
+            <a:ext cx="5485680" cy="3085560"/>
           </a:xfrm>
           <a:prstGeom prst="rect">
             <a:avLst/>
@@ -810,7 +806,7 @@
       </p:sp>
       <p:sp>
         <p:nvSpPr>
-          <p:cNvPr id="111" name="PlaceHolder 2"/>
+          <p:cNvPr id="114" name="PlaceHolder 2"/>
           <p:cNvSpPr>
             <a:spLocks noGrp="1"/>
           </p:cNvSpPr>
@@ -821,7 +817,7 @@
         <p:spPr>
           <a:xfrm>
             <a:off x="685800" y="4400640"/>
-            <a:ext cx="5486040" cy="3600000"/>
+            <a:ext cx="5485680" cy="3599640"/>
           </a:xfrm>
           <a:prstGeom prst="rect">
             <a:avLst/>
@@ -841,6 +837,9 @@
                 <a:spcPct val="100000"/>
               </a:lnSpc>
               <a:buNone/>
+              <a:tabLst>
+                <a:tab pos="0" algn="l"/>
+              </a:tabLst>
             </a:pPr>
             <a:r>
               <a:rPr lang="en-US" sz="2000" b="0" u="none" strike="noStrike">
@@ -866,7 +865,7 @@
       </p:sp>
       <p:sp>
         <p:nvSpPr>
-          <p:cNvPr id="112" name="PlaceHolder 3"/>
+          <p:cNvPr id="115" name="PlaceHolder 3"/>
           <p:cNvSpPr>
             <a:spLocks noGrp="1"/>
           </p:cNvSpPr>
@@ -877,7 +876,7 @@
         <p:spPr>
           <a:xfrm>
             <a:off x="3884760" y="8685360"/>
-            <a:ext cx="2971440" cy="458280"/>
+            <a:ext cx="2971080" cy="457920"/>
           </a:xfrm>
           <a:prstGeom prst="rect">
             <a:avLst/>
@@ -897,6 +896,9 @@
                 <a:spcPct val="100000"/>
               </a:lnSpc>
               <a:buNone/>
+              <a:tabLst>
+                <a:tab pos="0" algn="l"/>
+              </a:tabLst>
               <a:defRPr lang="en-US" sz="1200" b="0" u="none" strike="noStrike">
                 <a:solidFill>
                   <a:schemeClr val="dk1"/>
@@ -914,8 +916,11 @@
                 <a:spcPct val="100000"/>
               </a:lnSpc>
               <a:buNone/>
+              <a:tabLst>
+                <a:tab pos="0" algn="l"/>
+              </a:tabLst>
             </a:pPr>
-            <a:fld id="{6F661318-6E36-4F12-9EC3-45156DB4DB11}" type="slidenum">
+            <a:fld id="{99BDDBCB-496C-45AB-A8ED-DB2B6C14F7E4}" type="slidenum">
               <a:rPr lang="en-US" sz="1200" b="0" u="none" strike="noStrike">
                 <a:solidFill>
                   <a:schemeClr val="dk1"/>
@@ -925,7 +930,7 @@
                 <a:latin typeface="+mn-lt"/>
                 <a:ea typeface="+mn-ea"/>
               </a:rPr>
-              <a:t>1</a:t>
+              <a:t>&lt;number&gt;</a:t>
             </a:fld>
             <a:endParaRPr lang="en-ZA" sz="1200" b="0" u="none" strike="noStrike">
               <a:solidFill>
@@ -962,7 +967,7 @@
       </p:grpSpPr>
       <p:sp>
         <p:nvSpPr>
-          <p:cNvPr id="113" name="PlaceHolder 1"/>
+          <p:cNvPr id="116" name="PlaceHolder 1"/>
           <p:cNvSpPr>
             <a:spLocks noGrp="1"/>
           </p:cNvSpPr>
@@ -973,7 +978,7 @@
         <p:spPr>
           <a:xfrm>
             <a:off x="685800" y="1143000"/>
-            <a:ext cx="5486040" cy="3085920"/>
+            <a:ext cx="5485680" cy="3085560"/>
           </a:xfrm>
           <a:prstGeom prst="rect">
             <a:avLst/>
@@ -985,7 +990,7 @@
       </p:sp>
       <p:sp>
         <p:nvSpPr>
-          <p:cNvPr id="114" name="PlaceHolder 2"/>
+          <p:cNvPr id="117" name="PlaceHolder 2"/>
           <p:cNvSpPr>
             <a:spLocks noGrp="1"/>
           </p:cNvSpPr>
@@ -996,7 +1001,7 @@
         <p:spPr>
           <a:xfrm>
             <a:off x="685800" y="4400640"/>
-            <a:ext cx="5486040" cy="3600000"/>
+            <a:ext cx="5485680" cy="3599640"/>
           </a:xfrm>
           <a:prstGeom prst="rect">
             <a:avLst/>
@@ -1018,7 +1023,7 @@
               <a:buNone/>
             </a:pPr>
             <a:r>
-              <a:rPr lang="en-US" sz="2000" b="0" u="none" strike="noStrike">
+              <a:rPr lang="en-ZA" sz="2000" b="0" u="none" strike="noStrike">
                 <a:solidFill>
                   <a:srgbClr val="000000"/>
                 </a:solidFill>
@@ -1026,7 +1031,7 @@
                 <a:uFillTx/>
                 <a:latin typeface="Arial"/>
               </a:rPr>
-              <a:t>~2.5 min. FILL BEFORE PRESENTING: replace every [__] with numbers from results/ablation_test.csv (python -m src.run_experiments ablation --test) and paste the two plots into the dashed boxes. Talking points: plain accuracy is dominated by animals photographed many times, so BAKS averages per image, then per animal, then per dataset. Closed-set score is BAKS; open-set score is the mean of BAKS and BAUS. Tau is chosen on validation and frozen for test.</a:t>
+              <a:t>~2.5 min. Tables: first four rows are the full test split; rows marked * use a 200-query validation subset (the only run that includes the local branch), so treat them as preliminary. Talking points: Fine-tuned MegaDescriptor carries the system (closed BAKS 81.1, open score 73.3). EVA02 and DINOv2 alone are near the 50% of rejecting every query. Adding EVA02 changes test scores by under 0.1 points. On the subset, adding ALIKED raised open score 79.0 to 81.3 (BAUS 91.1 to 94.3) with closed BAKS unchanged; 113 known queries so one query is 0.9 pt. PCA: 256-d costs 0.7 BAKS, 512-d matches, 128/64/32 lose 3.1/6.6/10.2. Paste the tau plot, PCA plot and your extra result into the dashed boxes. Tau is chosen on validation and frozen for test.</a:t>
             </a:r>
             <a:endParaRPr lang="en-ZA" sz="2000" b="0" u="none" strike="noStrike">
               <a:solidFill>
@@ -1041,7 +1046,7 @@
       </p:sp>
       <p:sp>
         <p:nvSpPr>
-          <p:cNvPr id="115" name="PlaceHolder 3"/>
+          <p:cNvPr id="118" name="PlaceHolder 3"/>
           <p:cNvSpPr>
             <a:spLocks noGrp="1"/>
           </p:cNvSpPr>
@@ -1052,7 +1057,7 @@
         <p:spPr>
           <a:xfrm>
             <a:off x="3884760" y="8685360"/>
-            <a:ext cx="2971440" cy="458280"/>
+            <a:ext cx="2971080" cy="457920"/>
           </a:xfrm>
           <a:prstGeom prst="rect">
             <a:avLst/>
@@ -1072,6 +1077,9 @@
                 <a:spcPct val="100000"/>
               </a:lnSpc>
               <a:buNone/>
+              <a:tabLst>
+                <a:tab pos="0" algn="l"/>
+              </a:tabLst>
               <a:defRPr lang="en-US" sz="1200" b="0" u="none" strike="noStrike">
                 <a:solidFill>
                   <a:schemeClr val="dk1"/>
@@ -1089,8 +1097,11 @@
                 <a:spcPct val="100000"/>
               </a:lnSpc>
               <a:buNone/>
+              <a:tabLst>
+                <a:tab pos="0" algn="l"/>
+              </a:tabLst>
             </a:pPr>
-            <a:fld id="{3C42B68C-8C83-4F4B-94F6-21E0A7CA1FC2}" type="slidenum">
+            <a:fld id="{7DED1740-A7F8-4B53-B863-82056A7192B2}" type="slidenum">
               <a:rPr lang="en-US" sz="1200" b="0" u="none" strike="noStrike">
                 <a:solidFill>
                   <a:schemeClr val="dk1"/>
@@ -1100,7 +1111,7 @@
                 <a:latin typeface="+mn-lt"/>
                 <a:ea typeface="+mn-ea"/>
               </a:rPr>
-              <a:t>1</a:t>
+              <a:t>&lt;number&gt;</a:t>
             </a:fld>
             <a:endParaRPr lang="en-ZA" sz="1200" b="0" u="none" strike="noStrike">
               <a:solidFill>
@@ -1137,7 +1148,7 @@
       </p:grpSpPr>
       <p:sp>
         <p:nvSpPr>
-          <p:cNvPr id="116" name="PlaceHolder 1"/>
+          <p:cNvPr id="119" name="PlaceHolder 1"/>
           <p:cNvSpPr>
             <a:spLocks noGrp="1"/>
           </p:cNvSpPr>
@@ -1148,7 +1159,7 @@
         <p:spPr>
           <a:xfrm>
             <a:off x="685800" y="1143000"/>
-            <a:ext cx="5486040" cy="3085920"/>
+            <a:ext cx="5485680" cy="3085560"/>
           </a:xfrm>
           <a:prstGeom prst="rect">
             <a:avLst/>
@@ -1160,7 +1171,7 @@
       </p:sp>
       <p:sp>
         <p:nvSpPr>
-          <p:cNvPr id="117" name="PlaceHolder 2"/>
+          <p:cNvPr id="120" name="PlaceHolder 2"/>
           <p:cNvSpPr>
             <a:spLocks noGrp="1"/>
           </p:cNvSpPr>
@@ -1171,7 +1182,7 @@
         <p:spPr>
           <a:xfrm>
             <a:off x="685800" y="4400640"/>
-            <a:ext cx="5486040" cy="3600000"/>
+            <a:ext cx="5485680" cy="3599640"/>
           </a:xfrm>
           <a:prstGeom prst="rect">
             <a:avLst/>
@@ -1191,6 +1202,9 @@
                 <a:spcPct val="100000"/>
               </a:lnSpc>
               <a:buNone/>
+              <a:tabLst>
+                <a:tab pos="0" algn="l"/>
+              </a:tabLst>
             </a:pPr>
             <a:r>
               <a:rPr lang="en-US" sz="2000" b="0" u="none" strike="noStrike">
@@ -1216,7 +1230,7 @@
       </p:sp>
       <p:sp>
         <p:nvSpPr>
-          <p:cNvPr id="118" name="PlaceHolder 3"/>
+          <p:cNvPr id="121" name="PlaceHolder 3"/>
           <p:cNvSpPr>
             <a:spLocks noGrp="1"/>
           </p:cNvSpPr>
@@ -1227,7 +1241,7 @@
         <p:spPr>
           <a:xfrm>
             <a:off x="3884760" y="8685360"/>
-            <a:ext cx="2971440" cy="458280"/>
+            <a:ext cx="2971080" cy="457920"/>
           </a:xfrm>
           <a:prstGeom prst="rect">
             <a:avLst/>
@@ -1247,6 +1261,9 @@
                 <a:spcPct val="100000"/>
               </a:lnSpc>
               <a:buNone/>
+              <a:tabLst>
+                <a:tab pos="0" algn="l"/>
+              </a:tabLst>
               <a:defRPr lang="en-US" sz="1200" b="0" u="none" strike="noStrike">
                 <a:solidFill>
                   <a:schemeClr val="dk1"/>
@@ -1264,8 +1281,11 @@
                 <a:spcPct val="100000"/>
               </a:lnSpc>
               <a:buNone/>
+              <a:tabLst>
+                <a:tab pos="0" algn="l"/>
+              </a:tabLst>
             </a:pPr>
-            <a:fld id="{C4522F38-1C21-4468-A7C5-50D60277B0F1}" type="slidenum">
+            <a:fld id="{C87F3F72-0BE8-4908-BF18-89734465DEC9}" type="slidenum">
               <a:rPr lang="en-US" sz="1200" b="0" u="none" strike="noStrike">
                 <a:solidFill>
                   <a:schemeClr val="dk1"/>
@@ -1275,7 +1295,7 @@
                 <a:latin typeface="+mn-lt"/>
                 <a:ea typeface="+mn-ea"/>
               </a:rPr>
-              <a:t>1</a:t>
+              <a:t>&lt;number&gt;</a:t>
             </a:fld>
             <a:endParaRPr lang="en-ZA" sz="1200" b="0" u="none" strike="noStrike">
               <a:solidFill>
@@ -1369,6 +1389,9 @@
           <a:lstStyle>
             <a:lvl1pPr indent="0" algn="l">
               <a:buNone/>
+              <a:tabLst>
+                <a:tab pos="0" algn="l"/>
+              </a:tabLst>
               <a:defRPr lang="en-ZA" sz="1800" b="0" u="none" strike="noStrike">
                 <a:solidFill>
                   <a:schemeClr val="dk1"/>
@@ -1382,6 +1405,9 @@
           <a:p>
             <a:pPr indent="0" algn="l">
               <a:buNone/>
+              <a:tabLst>
+                <a:tab pos="0" algn="l"/>
+              </a:tabLst>
             </a:pPr>
             <a:r>
               <a:rPr lang="en-ZA" sz="1800" b="0" u="none" strike="noStrike">
@@ -1392,18 +1418,7 @@
                 <a:uFillTx/>
                 <a:latin typeface="Calibri"/>
               </a:rPr>
-              <a:t>Click to edit the title </a:t>
-            </a:r>
-            <a:r>
-              <a:rPr lang="en-ZA" sz="1800" b="0" u="none" strike="noStrike">
-                <a:solidFill>
-                  <a:schemeClr val="dk1"/>
-                </a:solidFill>
-                <a:effectLst/>
-                <a:uFillTx/>
-                <a:latin typeface="Calibri"/>
-              </a:rPr>
-              <a:t>text format</a:t>
+              <a:t>Click to edit the title text format</a:t>
             </a:r>
             <a:endParaRPr lang="en-ZA" sz="1800" b="0" u="none" strike="noStrike">
               <a:solidFill>
@@ -1579,7 +1594,7 @@
             </a:lvl7pPr>
           </a:lstStyle>
           <a:p>
-            <a:pPr marL="432000" indent="-324000" algn="l">
+            <a:pPr indent="-324000" algn="l">
               <a:spcBef>
                 <a:spcPts val="1417"/>
               </a:spcBef>
@@ -1846,7 +1861,7 @@
         <p:spPr>
           <a:xfrm>
             <a:off x="548640" y="640080"/>
-            <a:ext cx="6400440" cy="365400"/>
+            <a:ext cx="6400080" cy="365040"/>
           </a:xfrm>
           <a:prstGeom prst="rect">
             <a:avLst/>
@@ -1884,29 +1899,7 @@
                 <a:uFillTx/>
                 <a:latin typeface="Calibri"/>
               </a:rPr>
-              <a:t>GROUP MLM  ·  </a:t>
-            </a:r>
-            <a:r>
-              <a:rPr lang="en-US" sz="1400" b="1" u="none" spc="300" strike="noStrike">
-                <a:solidFill>
-                  <a:srgbClr val="C98A1B"/>
-                </a:solidFill>
-                <a:effectLst/>
-                <a:uFillTx/>
-                <a:latin typeface="Calibri"/>
-              </a:rPr>
-              <a:t>WILDLIFEREID-10</a:t>
-            </a:r>
-            <a:r>
-              <a:rPr lang="en-US" sz="1400" b="1" u="none" spc="300" strike="noStrike">
-                <a:solidFill>
-                  <a:srgbClr val="C98A1B"/>
-                </a:solidFill>
-                <a:effectLst/>
-                <a:uFillTx/>
-                <a:latin typeface="Calibri"/>
-              </a:rPr>
-              <a:t>K</a:t>
+              <a:t>GROUP MLM  ·  WILDLIFEREID-10K</a:t>
             </a:r>
             <a:endParaRPr lang="en-ZA" sz="1400" b="0" u="none" strike="noStrike">
               <a:solidFill>
@@ -1928,7 +1921,7 @@
         <p:spPr>
           <a:xfrm>
             <a:off x="548640" y="1097280"/>
-            <a:ext cx="6309000" cy="2102760"/>
+            <a:ext cx="6308640" cy="2102400"/>
           </a:xfrm>
           <a:prstGeom prst="rect">
             <a:avLst/>
@@ -1967,115 +1960,7 @@
                 <a:latin typeface="Cambria"/>
                 <a:ea typeface="Cambria"/>
               </a:rPr>
-              <a:t>Calibrat</a:t>
-            </a:r>
-            <a:r>
-              <a:rPr lang="en-US" sz="4000" b="1" u="none" strike="noStrike">
-                <a:solidFill>
-                  <a:schemeClr val="dk1"/>
-                </a:solidFill>
-                <a:effectLst/>
-                <a:uFillTx/>
-                <a:latin typeface="Cambria"/>
-                <a:ea typeface="Cambria"/>
-              </a:rPr>
-              <a:t>ed </a:t>
-            </a:r>
-            <a:r>
-              <a:rPr lang="en-US" sz="4000" b="1" u="none" strike="noStrike">
-                <a:solidFill>
-                  <a:schemeClr val="dk1"/>
-                </a:solidFill>
-                <a:effectLst/>
-                <a:uFillTx/>
-                <a:latin typeface="Cambria"/>
-                <a:ea typeface="Cambria"/>
-              </a:rPr>
-              <a:t>Multi-</a:t>
-            </a:r>
-            <a:r>
-              <a:rPr lang="en-US" sz="4000" b="1" u="none" strike="noStrike">
-                <a:solidFill>
-                  <a:schemeClr val="dk1"/>
-                </a:solidFill>
-                <a:effectLst/>
-                <a:uFillTx/>
-                <a:latin typeface="Cambria"/>
-                <a:ea typeface="Cambria"/>
-              </a:rPr>
-              <a:t>Scale </a:t>
-            </a:r>
-            <a:r>
-              <a:rPr lang="en-US" sz="4000" b="1" u="none" strike="noStrike">
-                <a:solidFill>
-                  <a:schemeClr val="dk1"/>
-                </a:solidFill>
-                <a:effectLst/>
-                <a:uFillTx/>
-                <a:latin typeface="Cambria"/>
-                <a:ea typeface="Cambria"/>
-              </a:rPr>
-              <a:t>Similari</a:t>
-            </a:r>
-            <a:r>
-              <a:rPr lang="en-US" sz="4000" b="1" u="none" strike="noStrike">
-                <a:solidFill>
-                  <a:schemeClr val="dk1"/>
-                </a:solidFill>
-                <a:effectLst/>
-                <a:uFillTx/>
-                <a:latin typeface="Cambria"/>
-                <a:ea typeface="Cambria"/>
-              </a:rPr>
-              <a:t>ty </a:t>
-            </a:r>
-            <a:r>
-              <a:rPr lang="en-US" sz="4000" b="1" u="none" strike="noStrike">
-                <a:solidFill>
-                  <a:schemeClr val="dk1"/>
-                </a:solidFill>
-                <a:effectLst/>
-                <a:uFillTx/>
-                <a:latin typeface="Cambria"/>
-                <a:ea typeface="Cambria"/>
-              </a:rPr>
-              <a:t>Fusion </a:t>
-            </a:r>
-            <a:r>
-              <a:rPr lang="en-US" sz="4000" b="1" u="none" strike="noStrike">
-                <a:solidFill>
-                  <a:schemeClr val="dk1"/>
-                </a:solidFill>
-                <a:effectLst/>
-                <a:uFillTx/>
-                <a:latin typeface="Cambria"/>
-                <a:ea typeface="Cambria"/>
-              </a:rPr>
-              <a:t>for </a:t>
-            </a:r>
-            <a:r>
-              <a:rPr lang="en-US" sz="4000" b="1" u="none" strike="noStrike">
-                <a:solidFill>
-                  <a:schemeClr val="dk1"/>
-                </a:solidFill>
-                <a:effectLst/>
-                <a:uFillTx/>
-                <a:latin typeface="Cambria"/>
-                <a:ea typeface="Cambria"/>
-              </a:rPr>
-              <a:t>Wildlife </a:t>
-            </a:r>
-            <a:r>
-              <a:rPr lang="en-US" sz="4000" b="1" u="none" strike="noStrike">
-                <a:solidFill>
-                  <a:schemeClr val="dk1"/>
-                </a:solidFill>
-                <a:effectLst/>
-                <a:uFillTx/>
-                <a:latin typeface="Cambria"/>
-                <a:ea typeface="Cambria"/>
-              </a:rPr>
-              <a:t>Re-ID</a:t>
+              <a:t>Calibrated Multi-Scale Similarity Fusion for Wildlife Re-ID</a:t>
             </a:r>
             <a:endParaRPr lang="en-ZA" sz="4000" b="0" u="none" strike="noStrike">
               <a:solidFill>
@@ -2097,7 +1982,7 @@
         <p:spPr>
           <a:xfrm>
             <a:off x="548640" y="3337560"/>
-            <a:ext cx="6034680" cy="1096920"/>
+            <a:ext cx="6034320" cy="1096560"/>
           </a:xfrm>
           <a:prstGeom prst="rect">
             <a:avLst/>
@@ -2135,73 +2020,7 @@
                 <a:uFillTx/>
                 <a:latin typeface="Calibri"/>
               </a:rPr>
-              <a:t>Can combining a </a:t>
-            </a:r>
-            <a:r>
-              <a:rPr lang="en-US" sz="1800" b="0" u="none" strike="noStrike">
-                <a:solidFill>
-                  <a:srgbClr val="3B4A41"/>
-                </a:solidFill>
-                <a:effectLst/>
-                <a:uFillTx/>
-                <a:latin typeface="Calibri"/>
-              </a:rPr>
-              <a:t>global, a general </a:t>
-            </a:r>
-            <a:r>
-              <a:rPr lang="en-US" sz="1800" b="0" u="none" strike="noStrike">
-                <a:solidFill>
-                  <a:srgbClr val="3B4A41"/>
-                </a:solidFill>
-                <a:effectLst/>
-                <a:uFillTx/>
-                <a:latin typeface="Calibri"/>
-              </a:rPr>
-              <a:t>and a local view of </a:t>
-            </a:r>
-            <a:r>
-              <a:rPr lang="en-US" sz="1800" b="0" u="none" strike="noStrike">
-                <a:solidFill>
-                  <a:srgbClr val="3B4A41"/>
-                </a:solidFill>
-                <a:effectLst/>
-                <a:uFillTx/>
-                <a:latin typeface="Calibri"/>
-              </a:rPr>
-              <a:t>an animal identify </a:t>
-            </a:r>
-            <a:r>
-              <a:rPr lang="en-US" sz="1800" b="0" u="none" strike="noStrike">
-                <a:solidFill>
-                  <a:srgbClr val="3B4A41"/>
-                </a:solidFill>
-                <a:effectLst/>
-                <a:uFillTx/>
-                <a:latin typeface="Calibri"/>
-              </a:rPr>
-              <a:t>individuals more </a:t>
-            </a:r>
-            <a:r>
-              <a:rPr lang="en-US" sz="1800" b="0" u="none" strike="noStrike">
-                <a:solidFill>
-                  <a:srgbClr val="3B4A41"/>
-                </a:solidFill>
-                <a:effectLst/>
-                <a:uFillTx/>
-                <a:latin typeface="Calibri"/>
-              </a:rPr>
-              <a:t>reliably than any </a:t>
-            </a:r>
-            <a:r>
-              <a:rPr lang="en-US" sz="1800" b="0" u="none" strike="noStrike">
-                <a:solidFill>
-                  <a:srgbClr val="3B4A41"/>
-                </a:solidFill>
-                <a:effectLst/>
-                <a:uFillTx/>
-                <a:latin typeface="Calibri"/>
-              </a:rPr>
-              <a:t>single one?</a:t>
+              <a:t>Can combining a global, a general and a local view of an animal identify individuals more reliably than any single one?</a:t>
             </a:r>
             <a:endParaRPr lang="en-ZA" sz="1800" b="0" u="none" strike="noStrike">
               <a:solidFill>
@@ -2223,7 +2042,7 @@
         <p:spPr>
           <a:xfrm>
             <a:off x="548640" y="4663440"/>
-            <a:ext cx="2011320" cy="1234080"/>
+            <a:ext cx="2010960" cy="1233720"/>
           </a:xfrm>
           <a:prstGeom prst="roundRect">
             <a:avLst>
@@ -2271,7 +2090,7 @@
         <p:spPr>
           <a:xfrm>
             <a:off x="685800" y="4754880"/>
-            <a:ext cx="1782720" cy="273960"/>
+            <a:ext cx="1782360" cy="273600"/>
           </a:xfrm>
           <a:prstGeom prst="rect">
             <a:avLst/>
@@ -2331,7 +2150,7 @@
         <p:spPr>
           <a:xfrm>
             <a:off x="685800" y="5074920"/>
-            <a:ext cx="1782720" cy="731160"/>
+            <a:ext cx="1782360" cy="730800"/>
           </a:xfrm>
           <a:prstGeom prst="rect">
             <a:avLst/>
@@ -2391,7 +2210,7 @@
         <p:spPr>
           <a:xfrm>
             <a:off x="2697480" y="4663440"/>
-            <a:ext cx="2011320" cy="1234080"/>
+            <a:ext cx="2010960" cy="1233720"/>
           </a:xfrm>
           <a:prstGeom prst="roundRect">
             <a:avLst>
@@ -2439,7 +2258,7 @@
         <p:spPr>
           <a:xfrm>
             <a:off x="2834640" y="4754880"/>
-            <a:ext cx="1782720" cy="273960"/>
+            <a:ext cx="1782360" cy="273600"/>
           </a:xfrm>
           <a:prstGeom prst="rect">
             <a:avLst/>
@@ -2499,7 +2318,7 @@
         <p:spPr>
           <a:xfrm>
             <a:off x="2834640" y="5074920"/>
-            <a:ext cx="1782720" cy="731160"/>
+            <a:ext cx="1782360" cy="730800"/>
           </a:xfrm>
           <a:prstGeom prst="rect">
             <a:avLst/>
@@ -2537,18 +2356,7 @@
                 <a:uFillTx/>
                 <a:latin typeface="Calibri"/>
               </a:rPr>
-              <a:t>Which known individual </a:t>
-            </a:r>
-            <a:r>
-              <a:rPr lang="en-US" sz="1500" b="0" u="none" strike="noStrike">
-                <a:solidFill>
-                  <a:schemeClr val="dk1"/>
-                </a:solidFill>
-                <a:effectLst/>
-                <a:uFillTx/>
-                <a:latin typeface="Calibri"/>
-              </a:rPr>
-              <a:t>is this?</a:t>
+              <a:t>Which known individual is this?</a:t>
             </a:r>
             <a:endParaRPr lang="en-ZA" sz="1500" b="0" u="none" strike="noStrike">
               <a:solidFill>
@@ -2570,7 +2378,7 @@
         <p:spPr>
           <a:xfrm>
             <a:off x="4846320" y="4663440"/>
-            <a:ext cx="2011320" cy="1234080"/>
+            <a:ext cx="2010960" cy="1233720"/>
           </a:xfrm>
           <a:prstGeom prst="roundRect">
             <a:avLst>
@@ -2618,7 +2426,7 @@
         <p:spPr>
           <a:xfrm>
             <a:off x="4983480" y="4754880"/>
-            <a:ext cx="1782720" cy="273960"/>
+            <a:ext cx="1782360" cy="273600"/>
           </a:xfrm>
           <a:prstGeom prst="rect">
             <a:avLst/>
@@ -2678,7 +2486,7 @@
         <p:spPr>
           <a:xfrm>
             <a:off x="4983480" y="5074920"/>
-            <a:ext cx="1782720" cy="731160"/>
+            <a:ext cx="1782360" cy="730800"/>
           </a:xfrm>
           <a:prstGeom prst="rect">
             <a:avLst/>
@@ -2742,7 +2550,7 @@
         <p:spPr>
           <a:xfrm>
             <a:off x="7223760" y="731520"/>
-            <a:ext cx="4388760" cy="3299760"/>
+            <a:ext cx="4388400" cy="3299400"/>
           </a:xfrm>
           <a:prstGeom prst="rect">
             <a:avLst/>
@@ -2766,7 +2574,7 @@
         <p:spPr>
           <a:xfrm>
             <a:off x="7223760" y="4160520"/>
-            <a:ext cx="1416960" cy="1830600"/>
+            <a:ext cx="1416600" cy="1830240"/>
           </a:xfrm>
           <a:prstGeom prst="rect">
             <a:avLst/>
@@ -2786,7 +2594,7 @@
         <p:spPr>
           <a:xfrm>
             <a:off x="8823960" y="4480560"/>
-            <a:ext cx="2834280" cy="731160"/>
+            <a:ext cx="2833920" cy="730800"/>
           </a:xfrm>
           <a:prstGeom prst="rect">
             <a:avLst/>
@@ -2825,31 +2633,7 @@
                 <a:latin typeface="Cambria"/>
                 <a:ea typeface="Cambria"/>
               </a:rPr>
-              <a:t>Which of these </a:t>
-            </a:r>
-            <a:r>
-              <a:rPr lang="en-US" sz="2000" b="0" i="1" u="none" strike="noStrike">
-                <a:solidFill>
-                  <a:srgbClr val="2C5F2D"/>
-                </a:solidFill>
-                <a:effectLst/>
-                <a:uFillTx/>
-                <a:latin typeface="Cambria"/>
-                <a:ea typeface="Cambria"/>
-              </a:rPr>
-              <a:t>individuals is it, </a:t>
-            </a:r>
-            <a:r>
-              <a:rPr lang="en-US" sz="2000" b="0" i="1" u="none" strike="noStrike">
-                <a:solidFill>
-                  <a:srgbClr val="2C5F2D"/>
-                </a:solidFill>
-                <a:effectLst/>
-                <a:uFillTx/>
-                <a:latin typeface="Cambria"/>
-                <a:ea typeface="Cambria"/>
-              </a:rPr>
-              <a:t>by ID?</a:t>
+              <a:t>Which of these individuals is it, by ID?</a:t>
             </a:r>
             <a:endParaRPr lang="en-ZA" sz="2000" b="0" u="none" strike="noStrike">
               <a:solidFill>
@@ -2871,7 +2655,7 @@
         <p:spPr>
           <a:xfrm>
             <a:off x="548640" y="6400800"/>
-            <a:ext cx="9143640" cy="273960"/>
+            <a:ext cx="9143280" cy="273600"/>
           </a:xfrm>
           <a:prstGeom prst="rect">
             <a:avLst/>
@@ -2909,62 +2693,7 @@
                 <a:uFillTx/>
                 <a:latin typeface="Calibri"/>
               </a:rPr>
-              <a:t>Tshephang </a:t>
-            </a:r>
-            <a:r>
-              <a:rPr lang="en-US" sz="1600" b="0" u="none" strike="noStrike">
-                <a:solidFill>
-                  <a:srgbClr val="000000"/>
-                </a:solidFill>
-                <a:effectLst/>
-                <a:uFillTx/>
-                <a:latin typeface="Calibri"/>
-              </a:rPr>
-              <a:t>Matlala   ·  </a:t>
-            </a:r>
-            <a:r>
-              <a:rPr lang="en-US" sz="1600" b="0" u="none" strike="noStrike">
-                <a:solidFill>
-                  <a:srgbClr val="000000"/>
-                </a:solidFill>
-                <a:effectLst/>
-                <a:uFillTx/>
-                <a:latin typeface="Calibri"/>
-              </a:rPr>
-              <a:t>Kamohelo </a:t>
-            </a:r>
-            <a:r>
-              <a:rPr lang="en-US" sz="1600" b="0" u="none" strike="noStrike">
-                <a:solidFill>
-                  <a:srgbClr val="000000"/>
-                </a:solidFill>
-                <a:effectLst/>
-                <a:uFillTx/>
-                <a:latin typeface="Calibri"/>
-              </a:rPr>
-              <a:t>Lebjane  ·  </a:t>
-            </a:r>
-            <a:r>
-              <a:rPr lang="en-US" sz="1600" b="0" u="none" strike="noStrike">
-                <a:solidFill>
-                  <a:srgbClr val="000000"/>
-                </a:solidFill>
-                <a:effectLst/>
-                <a:uFillTx/>
-                <a:latin typeface="Calibri"/>
-              </a:rPr>
-              <a:t>Denzel </a:t>
-            </a:r>
-            <a:r>
-              <a:rPr lang="en-US" sz="1600" b="0" u="none" strike="noStrike">
-                <a:solidFill>
-                  <a:srgbClr val="000000"/>
-                </a:solidFill>
-                <a:effectLst/>
-                <a:uFillTx/>
-                <a:latin typeface="Calibri"/>
-              </a:rPr>
-              <a:t>Zimba</a:t>
+              <a:t>Tshephang Matlala   ·  Kamohelo Lebjane  ·  Denzel Zimba</a:t>
             </a:r>
             <a:endParaRPr lang="en-ZA" sz="1600" b="0" u="none" strike="noStrike">
               <a:solidFill>
@@ -2986,7 +2715,7 @@
         <p:spPr>
           <a:xfrm>
             <a:off x="10698480" y="6400800"/>
-            <a:ext cx="914040" cy="273960"/>
+            <a:ext cx="913680" cy="273600"/>
           </a:xfrm>
           <a:prstGeom prst="rect">
             <a:avLst/>
@@ -3083,7 +2812,7 @@
         <p:spPr>
           <a:xfrm>
             <a:off x="548640" y="365760"/>
-            <a:ext cx="11063880" cy="822600"/>
+            <a:ext cx="11063520" cy="822240"/>
           </a:xfrm>
           <a:prstGeom prst="rect">
             <a:avLst/>
@@ -3122,43 +2851,7 @@
                 <a:latin typeface="Cambria"/>
                 <a:ea typeface="Cambria"/>
               </a:rPr>
-              <a:t>Data </a:t>
-            </a:r>
-            <a:r>
-              <a:rPr lang="en-US" sz="3800" b="1" u="none" strike="noStrike">
-                <a:solidFill>
-                  <a:schemeClr val="dk1"/>
-                </a:solidFill>
-                <a:effectLst/>
-                <a:uFillTx/>
-                <a:latin typeface="Cambria"/>
-                <a:ea typeface="Cambria"/>
-              </a:rPr>
-              <a:t>and </a:t>
-            </a:r>
-            <a:r>
-              <a:rPr lang="en-US" sz="3800" b="1" u="none" strike="noStrike">
-                <a:solidFill>
-                  <a:schemeClr val="dk1"/>
-                </a:solidFill>
-                <a:effectLst/>
-                <a:uFillTx/>
-                <a:latin typeface="Cambria"/>
-                <a:ea typeface="Cambria"/>
-              </a:rPr>
-              <a:t>processi</a:t>
-            </a:r>
-            <a:r>
-              <a:rPr lang="en-US" sz="3800" b="1" u="none" strike="noStrike">
-                <a:solidFill>
-                  <a:schemeClr val="dk1"/>
-                </a:solidFill>
-                <a:effectLst/>
-                <a:uFillTx/>
-                <a:latin typeface="Cambria"/>
-                <a:ea typeface="Cambria"/>
-              </a:rPr>
-              <a:t>ng</a:t>
+              <a:t>Data and processing</a:t>
             </a:r>
             <a:endParaRPr lang="en-ZA" sz="3800" b="0" u="none" strike="noStrike">
               <a:solidFill>
@@ -3180,7 +2873,7 @@
         <p:spPr>
           <a:xfrm>
             <a:off x="548640" y="6400800"/>
-            <a:ext cx="8229240" cy="273960"/>
+            <a:ext cx="8228880" cy="273600"/>
           </a:xfrm>
           <a:prstGeom prst="rect">
             <a:avLst/>
@@ -3218,18 +2911,7 @@
                 <a:uFillTx/>
                 <a:latin typeface="Calibri"/>
               </a:rPr>
-              <a:t>Source: WildlifeReID-10k </a:t>
-            </a:r>
-            <a:r>
-              <a:rPr lang="en-US" sz="1100" b="0" u="none" strike="noStrike">
-                <a:solidFill>
-                  <a:srgbClr val="5B7F6B"/>
-                </a:solidFill>
-                <a:effectLst/>
-                <a:uFillTx/>
-                <a:latin typeface="Calibri"/>
-              </a:rPr>
-              <a:t>benchmark</a:t>
+              <a:t>Source: WildlifeReID-10k benchmark</a:t>
             </a:r>
             <a:endParaRPr lang="en-ZA" sz="1100" b="0" u="none" strike="noStrike">
               <a:solidFill>
@@ -3251,7 +2933,7 @@
         <p:spPr>
           <a:xfrm>
             <a:off x="10698480" y="6400800"/>
-            <a:ext cx="914040" cy="273960"/>
+            <a:ext cx="913680" cy="273600"/>
           </a:xfrm>
           <a:prstGeom prst="rect">
             <a:avLst/>
@@ -3311,7 +2993,7 @@
         <p:spPr>
           <a:xfrm>
             <a:off x="548640" y="1463040"/>
-            <a:ext cx="2605680" cy="1325520"/>
+            <a:ext cx="2605320" cy="1325160"/>
           </a:xfrm>
           <a:prstGeom prst="roundRect">
             <a:avLst>
@@ -3359,7 +3041,7 @@
         <p:spPr>
           <a:xfrm>
             <a:off x="548640" y="1554480"/>
-            <a:ext cx="2605680" cy="731160"/>
+            <a:ext cx="2605320" cy="730800"/>
           </a:xfrm>
           <a:prstGeom prst="rect">
             <a:avLst/>
@@ -3420,7 +3102,7 @@
         <p:spPr>
           <a:xfrm>
             <a:off x="548640" y="2286000"/>
-            <a:ext cx="2605680" cy="365400"/>
+            <a:ext cx="2605320" cy="365040"/>
           </a:xfrm>
           <a:prstGeom prst="rect">
             <a:avLst/>
@@ -3458,51 +3140,7 @@
                 <a:uFillTx/>
                 <a:latin typeface="Calibri"/>
               </a:rPr>
-              <a:t>i</a:t>
-            </a:r>
-            <a:r>
-              <a:rPr lang="en-US" sz="1600" b="0" u="none" strike="noStrike">
-                <a:solidFill>
-                  <a:srgbClr val="3B4A41"/>
-                </a:solidFill>
-                <a:effectLst/>
-                <a:uFillTx/>
-                <a:latin typeface="Calibri"/>
-              </a:rPr>
-              <a:t>m</a:t>
-            </a:r>
-            <a:r>
-              <a:rPr lang="en-US" sz="1600" b="0" u="none" strike="noStrike">
-                <a:solidFill>
-                  <a:srgbClr val="3B4A41"/>
-                </a:solidFill>
-                <a:effectLst/>
-                <a:uFillTx/>
-                <a:latin typeface="Calibri"/>
-              </a:rPr>
-              <a:t>a</a:t>
-            </a:r>
-            <a:r>
-              <a:rPr lang="en-US" sz="1600" b="0" u="none" strike="noStrike">
-                <a:solidFill>
-                  <a:srgbClr val="3B4A41"/>
-                </a:solidFill>
-                <a:effectLst/>
-                <a:uFillTx/>
-                <a:latin typeface="Calibri"/>
-              </a:rPr>
-              <a:t>g</a:t>
-            </a:r>
-            <a:r>
-              <a:rPr lang="en-US" sz="1600" b="0" u="none" strike="noStrike">
-                <a:solidFill>
-                  <a:srgbClr val="3B4A41"/>
-                </a:solidFill>
-                <a:effectLst/>
-                <a:uFillTx/>
-                <a:latin typeface="Calibri"/>
-              </a:rPr>
-              <a:t>es</a:t>
+              <a:t>images</a:t>
             </a:r>
             <a:endParaRPr lang="en-ZA" sz="1600" b="0" u="none" strike="noStrike">
               <a:solidFill>
@@ -3524,7 +3162,7 @@
         <p:spPr>
           <a:xfrm>
             <a:off x="3337560" y="1463040"/>
-            <a:ext cx="2605680" cy="1325520"/>
+            <a:ext cx="2605320" cy="1325160"/>
           </a:xfrm>
           <a:prstGeom prst="roundRect">
             <a:avLst>
@@ -3572,7 +3210,7 @@
         <p:spPr>
           <a:xfrm>
             <a:off x="3337560" y="1554480"/>
-            <a:ext cx="2605680" cy="731160"/>
+            <a:ext cx="2605320" cy="730800"/>
           </a:xfrm>
           <a:prstGeom prst="rect">
             <a:avLst/>
@@ -3611,67 +3249,7 @@
                 <a:latin typeface="Cambria"/>
                 <a:ea typeface="Cambria"/>
               </a:rPr>
-              <a:t>1</a:t>
-            </a:r>
-            <a:r>
-              <a:rPr lang="en-US" sz="4000" b="1" u="none" strike="noStrike">
-                <a:solidFill>
-                  <a:srgbClr val="2C5F2D"/>
-                </a:solidFill>
-                <a:effectLst/>
-                <a:uFillTx/>
-                <a:latin typeface="Cambria"/>
-                <a:ea typeface="Cambria"/>
-              </a:rPr>
-              <a:t>0</a:t>
-            </a:r>
-            <a:r>
-              <a:rPr lang="en-US" sz="4000" b="1" u="none" strike="noStrike">
-                <a:solidFill>
-                  <a:srgbClr val="2C5F2D"/>
-                </a:solidFill>
-                <a:effectLst/>
-                <a:uFillTx/>
-                <a:latin typeface="Cambria"/>
-                <a:ea typeface="Cambria"/>
-              </a:rPr>
-              <a:t>,</a:t>
-            </a:r>
-            <a:r>
-              <a:rPr lang="en-US" sz="4000" b="1" u="none" strike="noStrike">
-                <a:solidFill>
-                  <a:srgbClr val="2C5F2D"/>
-                </a:solidFill>
-                <a:effectLst/>
-                <a:uFillTx/>
-                <a:latin typeface="Cambria"/>
-                <a:ea typeface="Cambria"/>
-              </a:rPr>
-              <a:t>7</a:t>
-            </a:r>
-            <a:r>
-              <a:rPr lang="en-US" sz="4000" b="1" u="none" strike="noStrike">
-                <a:solidFill>
-                  <a:srgbClr val="2C5F2D"/>
-                </a:solidFill>
-                <a:effectLst/>
-                <a:uFillTx/>
-                <a:latin typeface="Cambria"/>
-                <a:ea typeface="Cambria"/>
-              </a:rPr>
-              <a:t>7</a:t>
-            </a:r>
-            <a:r>
-              <a:rPr lang="en-US" sz="4000" b="1" u="none" strike="noStrike">
-                <a:solidFill>
-                  <a:srgbClr val="2C5F2D"/>
-                </a:solidFill>
-                <a:effectLst/>
-                <a:uFillTx/>
-                <a:latin typeface="Cambria"/>
-                <a:ea typeface="Cambria"/>
-              </a:rPr>
-              <a:t>2</a:t>
+              <a:t>10,772</a:t>
             </a:r>
             <a:endParaRPr lang="en-ZA" sz="4000" b="0" u="none" strike="noStrike">
               <a:solidFill>
@@ -3693,7 +3271,7 @@
         <p:spPr>
           <a:xfrm>
             <a:off x="3337560" y="2286000"/>
-            <a:ext cx="2605680" cy="365400"/>
+            <a:ext cx="2605320" cy="365040"/>
           </a:xfrm>
           <a:prstGeom prst="rect">
             <a:avLst/>
@@ -3753,7 +3331,7 @@
         <p:spPr>
           <a:xfrm>
             <a:off x="6126480" y="1463040"/>
-            <a:ext cx="2605680" cy="1325520"/>
+            <a:ext cx="2605320" cy="1325160"/>
           </a:xfrm>
           <a:prstGeom prst="roundRect">
             <a:avLst>
@@ -3801,7 +3379,7 @@
         <p:spPr>
           <a:xfrm>
             <a:off x="6126480" y="1554480"/>
-            <a:ext cx="2605680" cy="731160"/>
+            <a:ext cx="2605320" cy="730800"/>
           </a:xfrm>
           <a:prstGeom prst="rect">
             <a:avLst/>
@@ -3840,19 +3418,7 @@
                 <a:latin typeface="Cambria"/>
                 <a:ea typeface="Cambria"/>
               </a:rPr>
-              <a:t>3</a:t>
-            </a:r>
-            <a:r>
-              <a:rPr lang="en-US" sz="4000" b="1" u="none" strike="noStrike">
-                <a:solidFill>
-                  <a:srgbClr val="2C5F2D"/>
-                </a:solidFill>
-                <a:effectLst/>
-                <a:uFillTx/>
-                <a:latin typeface="Cambria"/>
-                <a:ea typeface="Cambria"/>
-              </a:rPr>
-              <a:t>7</a:t>
+              <a:t>37</a:t>
             </a:r>
             <a:endParaRPr lang="en-ZA" sz="4000" b="0" u="none" strike="noStrike">
               <a:solidFill>
@@ -3874,7 +3440,7 @@
         <p:spPr>
           <a:xfrm>
             <a:off x="6126480" y="2286000"/>
-            <a:ext cx="2605680" cy="365400"/>
+            <a:ext cx="2605320" cy="365040"/>
           </a:xfrm>
           <a:prstGeom prst="rect">
             <a:avLst/>
@@ -3934,7 +3500,7 @@
         <p:spPr>
           <a:xfrm>
             <a:off x="8915400" y="1463040"/>
-            <a:ext cx="2605680" cy="1325520"/>
+            <a:ext cx="2605320" cy="1325160"/>
           </a:xfrm>
           <a:prstGeom prst="roundRect">
             <a:avLst>
@@ -3982,7 +3548,7 @@
         <p:spPr>
           <a:xfrm>
             <a:off x="8915400" y="1554480"/>
-            <a:ext cx="2605680" cy="731160"/>
+            <a:ext cx="2605320" cy="730800"/>
           </a:xfrm>
           <a:prstGeom prst="rect">
             <a:avLst/>
@@ -4021,31 +3587,7 @@
                 <a:latin typeface="Cambria"/>
                 <a:ea typeface="Cambria"/>
               </a:rPr>
-              <a:t>~</a:t>
-            </a:r>
-            <a:r>
-              <a:rPr lang="en-US" sz="4000" b="1" u="none" strike="noStrike">
-                <a:solidFill>
-                  <a:srgbClr val="2C5F2D"/>
-                </a:solidFill>
-                <a:effectLst/>
-                <a:uFillTx/>
-                <a:latin typeface="Cambria"/>
-                <a:ea typeface="Cambria"/>
-              </a:rPr>
-              <a:t>3</a:t>
-            </a:r>
-            <a:r>
-              <a:rPr lang="en-US" sz="4000" b="1" u="none" strike="noStrike">
-                <a:solidFill>
-                  <a:srgbClr val="2C5F2D"/>
-                </a:solidFill>
-                <a:effectLst/>
-                <a:uFillTx/>
-                <a:latin typeface="Cambria"/>
-                <a:ea typeface="Cambria"/>
-              </a:rPr>
-              <a:t>3</a:t>
+              <a:t>~33</a:t>
             </a:r>
             <a:endParaRPr lang="en-ZA" sz="4000" b="0" u="none" strike="noStrike">
               <a:solidFill>
@@ -4067,7 +3609,7 @@
         <p:spPr>
           <a:xfrm>
             <a:off x="8915400" y="2286000"/>
-            <a:ext cx="2605680" cy="365400"/>
+            <a:ext cx="2605320" cy="365040"/>
           </a:xfrm>
           <a:prstGeom prst="rect">
             <a:avLst/>
@@ -4127,7 +3669,7 @@
         <p:spPr>
           <a:xfrm>
             <a:off x="548640" y="3154680"/>
-            <a:ext cx="3565800" cy="2925720"/>
+            <a:ext cx="3565440" cy="2925360"/>
           </a:xfrm>
           <a:prstGeom prst="roundRect">
             <a:avLst>
@@ -4175,7 +3717,7 @@
         <p:spPr>
           <a:xfrm>
             <a:off x="777240" y="3291840"/>
-            <a:ext cx="3108600" cy="456840"/>
+            <a:ext cx="3108240" cy="456480"/>
           </a:xfrm>
           <a:prstGeom prst="rect">
             <a:avLst/>
@@ -4236,7 +3778,7 @@
         <p:spPr>
           <a:xfrm>
             <a:off x="777240" y="3840480"/>
-            <a:ext cx="3108600" cy="2102760"/>
+            <a:ext cx="3108240" cy="2102400"/>
           </a:xfrm>
           <a:prstGeom prst="rect">
             <a:avLst/>
@@ -4313,18 +3855,7 @@
                 <a:uFillTx/>
                 <a:latin typeface="Calibri"/>
               </a:rPr>
-              <a:t>10% of identities held out as “new” </a:t>
-            </a:r>
-            <a:r>
-              <a:rPr lang="en-US" sz="1500" b="0" u="none" strike="noStrike">
-                <a:solidFill>
-                  <a:srgbClr val="3B4A41"/>
-                </a:solidFill>
-                <a:effectLst/>
-                <a:uFillTx/>
-                <a:latin typeface="Calibri"/>
-              </a:rPr>
-              <a:t>animals</a:t>
+              <a:t>10% of identities held out as “new” animals</a:t>
             </a:r>
             <a:endParaRPr lang="en-ZA" sz="1500" b="0" u="none" strike="noStrike">
               <a:solidFill>
@@ -4358,18 +3889,7 @@
                 <a:uFillTx/>
                 <a:latin typeface="Calibri"/>
               </a:rPr>
-              <a:t>Near-duplicate photo clusters move </a:t>
-            </a:r>
-            <a:r>
-              <a:rPr lang="en-US" sz="1500" b="0" u="none" strike="noStrike">
-                <a:solidFill>
-                  <a:srgbClr val="3B4A41"/>
-                </a:solidFill>
-                <a:effectLst/>
-                <a:uFillTx/>
-                <a:latin typeface="Calibri"/>
-              </a:rPr>
-              <a:t>together</a:t>
+              <a:t>Near-duplicate photo clusters move together</a:t>
             </a:r>
             <a:endParaRPr lang="en-ZA" sz="1500" b="0" u="none" strike="noStrike">
               <a:solidFill>
@@ -4391,7 +3911,7 @@
         <p:spPr>
           <a:xfrm>
             <a:off x="4297680" y="3154680"/>
-            <a:ext cx="3565800" cy="2925720"/>
+            <a:ext cx="3565440" cy="2925360"/>
           </a:xfrm>
           <a:prstGeom prst="roundRect">
             <a:avLst>
@@ -4439,7 +3959,7 @@
         <p:spPr>
           <a:xfrm>
             <a:off x="4526280" y="3291840"/>
-            <a:ext cx="3108600" cy="456840"/>
+            <a:ext cx="3108240" cy="456480"/>
           </a:xfrm>
           <a:prstGeom prst="rect">
             <a:avLst/>
@@ -4478,67 +3998,7 @@
                 <a:latin typeface="Cambria"/>
                 <a:ea typeface="Cambria"/>
               </a:rPr>
-              <a:t>Au</a:t>
-            </a:r>
-            <a:r>
-              <a:rPr lang="en-US" sz="2000" b="1" u="none" strike="noStrike">
-                <a:solidFill>
-                  <a:srgbClr val="14231C"/>
-                </a:solidFill>
-                <a:effectLst/>
-                <a:uFillTx/>
-                <a:latin typeface="Cambria"/>
-                <a:ea typeface="Cambria"/>
-              </a:rPr>
-              <a:t>gm</a:t>
-            </a:r>
-            <a:r>
-              <a:rPr lang="en-US" sz="2000" b="1" u="none" strike="noStrike">
-                <a:solidFill>
-                  <a:srgbClr val="14231C"/>
-                </a:solidFill>
-                <a:effectLst/>
-                <a:uFillTx/>
-                <a:latin typeface="Cambria"/>
-                <a:ea typeface="Cambria"/>
-              </a:rPr>
-              <a:t>en</a:t>
-            </a:r>
-            <a:r>
-              <a:rPr lang="en-US" sz="2000" b="1" u="none" strike="noStrike">
-                <a:solidFill>
-                  <a:srgbClr val="14231C"/>
-                </a:solidFill>
-                <a:effectLst/>
-                <a:uFillTx/>
-                <a:latin typeface="Cambria"/>
-                <a:ea typeface="Cambria"/>
-              </a:rPr>
-              <a:t>tat</a:t>
-            </a:r>
-            <a:r>
-              <a:rPr lang="en-US" sz="2000" b="1" u="none" strike="noStrike">
-                <a:solidFill>
-                  <a:srgbClr val="14231C"/>
-                </a:solidFill>
-                <a:effectLst/>
-                <a:uFillTx/>
-                <a:latin typeface="Cambria"/>
-                <a:ea typeface="Cambria"/>
-              </a:rPr>
-              <a:t>io</a:t>
-            </a:r>
-            <a:r>
-              <a:rPr lang="en-US" sz="2000" b="1" u="none" strike="noStrike">
-                <a:solidFill>
-                  <a:srgbClr val="14231C"/>
-                </a:solidFill>
-                <a:effectLst/>
-                <a:uFillTx/>
-                <a:latin typeface="Cambria"/>
-                <a:ea typeface="Cambria"/>
-              </a:rPr>
-              <a:t>n</a:t>
+              <a:t>Augmentation</a:t>
             </a:r>
             <a:endParaRPr lang="en-ZA" sz="2000" b="0" u="none" strike="noStrike">
               <a:solidFill>
@@ -4560,7 +4020,7 @@
         <p:spPr>
           <a:xfrm>
             <a:off x="4526280" y="3840480"/>
-            <a:ext cx="3108600" cy="2102760"/>
+            <a:ext cx="3108240" cy="2102400"/>
           </a:xfrm>
           <a:prstGeom prst="rect">
             <a:avLst/>
@@ -4603,29 +4063,7 @@
                 <a:uFillTx/>
                 <a:latin typeface="Calibri"/>
               </a:rPr>
-              <a:t>Mild crops, ±10° </a:t>
-            </a:r>
-            <a:r>
-              <a:rPr lang="en-US" sz="1500" b="0" u="none" strike="noStrike">
-                <a:solidFill>
-                  <a:srgbClr val="3B4A41"/>
-                </a:solidFill>
-                <a:effectLst/>
-                <a:uFillTx/>
-                <a:latin typeface="Calibri"/>
-              </a:rPr>
-              <a:t>rotation, small </a:t>
-            </a:r>
-            <a:r>
-              <a:rPr lang="en-US" sz="1500" b="0" u="none" strike="noStrike">
-                <a:solidFill>
-                  <a:srgbClr val="3B4A41"/>
-                </a:solidFill>
-                <a:effectLst/>
-                <a:uFillTx/>
-                <a:latin typeface="Calibri"/>
-              </a:rPr>
-              <a:t>hue jitter</a:t>
+              <a:t>Mild crops, ±10° rotation, small hue jitter</a:t>
             </a:r>
             <a:endParaRPr lang="en-ZA" sz="1500" b="0" u="none" strike="noStrike">
               <a:solidFill>
@@ -4659,29 +4097,7 @@
                 <a:uFillTx/>
                 <a:latin typeface="Calibri"/>
               </a:rPr>
-              <a:t>Blur and random </a:t>
-            </a:r>
-            <a:r>
-              <a:rPr lang="en-US" sz="1500" b="0" u="none" strike="noStrike">
-                <a:solidFill>
-                  <a:srgbClr val="3B4A41"/>
-                </a:solidFill>
-                <a:effectLst/>
-                <a:uFillTx/>
-                <a:latin typeface="Calibri"/>
-              </a:rPr>
-              <a:t>erasing for wild </a:t>
-            </a:r>
-            <a:r>
-              <a:rPr lang="en-US" sz="1500" b="0" u="none" strike="noStrike">
-                <a:solidFill>
-                  <a:srgbClr val="3B4A41"/>
-                </a:solidFill>
-                <a:effectLst/>
-                <a:uFillTx/>
-                <a:latin typeface="Calibri"/>
-              </a:rPr>
-              <a:t>conditions</a:t>
+              <a:t>Blur and random erasing for wild conditions</a:t>
             </a:r>
             <a:endParaRPr lang="en-ZA" sz="1500" b="0" u="none" strike="noStrike">
               <a:solidFill>
@@ -4715,40 +4131,7 @@
                 <a:uFillTx/>
                 <a:latin typeface="Calibri"/>
               </a:rPr>
-              <a:t>No horizontal </a:t>
-            </a:r>
-            <a:r>
-              <a:rPr lang="en-US" sz="1500" b="0" u="none" strike="noStrike">
-                <a:solidFill>
-                  <a:srgbClr val="3B4A41"/>
-                </a:solidFill>
-                <a:effectLst/>
-                <a:uFillTx/>
-                <a:latin typeface="Calibri"/>
-              </a:rPr>
-              <a:t>flips: mirroring </a:t>
-            </a:r>
-            <a:r>
-              <a:rPr lang="en-US" sz="1500" b="0" u="none" strike="noStrike">
-                <a:solidFill>
-                  <a:srgbClr val="3B4A41"/>
-                </a:solidFill>
-                <a:effectLst/>
-                <a:uFillTx/>
-                <a:latin typeface="Calibri"/>
-              </a:rPr>
-              <a:t>invents fake </a:t>
-            </a:r>
-            <a:r>
-              <a:rPr lang="en-US" sz="1500" b="0" u="none" strike="noStrike">
-                <a:solidFill>
-                  <a:srgbClr val="3B4A41"/>
-                </a:solidFill>
-                <a:effectLst/>
-                <a:uFillTx/>
-                <a:latin typeface="Calibri"/>
-              </a:rPr>
-              <a:t>identities</a:t>
+              <a:t>No horizontal flips: mirroring invents fake identities</a:t>
             </a:r>
             <a:endParaRPr lang="en-ZA" sz="1500" b="0" u="none" strike="noStrike">
               <a:solidFill>
@@ -4770,7 +4153,7 @@
         <p:spPr>
           <a:xfrm>
             <a:off x="8046720" y="3154680"/>
-            <a:ext cx="3565800" cy="2925720"/>
+            <a:ext cx="3565440" cy="2925360"/>
           </a:xfrm>
           <a:prstGeom prst="roundRect">
             <a:avLst>
@@ -4818,7 +4201,7 @@
         <p:spPr>
           <a:xfrm>
             <a:off x="8275320" y="3291840"/>
-            <a:ext cx="3108600" cy="456840"/>
+            <a:ext cx="3108240" cy="456480"/>
           </a:xfrm>
           <a:prstGeom prst="rect">
             <a:avLst/>
@@ -4879,7 +4262,7 @@
         <p:spPr>
           <a:xfrm>
             <a:off x="8275320" y="3840480"/>
-            <a:ext cx="3108600" cy="2102760"/>
+            <a:ext cx="3108240" cy="2102400"/>
           </a:xfrm>
           <a:prstGeom prst="rect">
             <a:avLst/>
@@ -4922,436 +4305,7 @@
                 <a:uFillTx/>
                 <a:latin typeface="Calibri"/>
               </a:rPr>
-              <a:t>P</a:t>
-            </a:r>
-            <a:r>
-              <a:rPr lang="en-US" sz="1500" b="0" u="none" strike="noStrike">
-                <a:solidFill>
-                  <a:srgbClr val="FFFFFF"/>
-                </a:solidFill>
-                <a:effectLst/>
-                <a:uFillTx/>
-                <a:latin typeface="Calibri"/>
-              </a:rPr>
-              <a:t>C</a:t>
-            </a:r>
-            <a:r>
-              <a:rPr lang="en-US" sz="1500" b="0" u="none" strike="noStrike">
-                <a:solidFill>
-                  <a:srgbClr val="FFFFFF"/>
-                </a:solidFill>
-                <a:effectLst/>
-                <a:uFillTx/>
-                <a:latin typeface="Calibri"/>
-              </a:rPr>
-              <a:t>A</a:t>
-            </a:r>
-            <a:r>
-              <a:rPr lang="en-US" sz="1500" b="0" u="none" strike="noStrike">
-                <a:solidFill>
-                  <a:srgbClr val="FFFFFF"/>
-                </a:solidFill>
-                <a:effectLst/>
-                <a:uFillTx/>
-                <a:latin typeface="Calibri"/>
-              </a:rPr>
-              <a:t> </a:t>
-            </a:r>
-            <a:r>
-              <a:rPr lang="en-US" sz="1500" b="0" u="none" strike="noStrike">
-                <a:solidFill>
-                  <a:srgbClr val="FFFFFF"/>
-                </a:solidFill>
-                <a:effectLst/>
-                <a:uFillTx/>
-                <a:latin typeface="Calibri"/>
-              </a:rPr>
-              <a:t>w</a:t>
-            </a:r>
-            <a:r>
-              <a:rPr lang="en-US" sz="1500" b="0" u="none" strike="noStrike">
-                <a:solidFill>
-                  <a:srgbClr val="FFFFFF"/>
-                </a:solidFill>
-                <a:effectLst/>
-                <a:uFillTx/>
-                <a:latin typeface="Calibri"/>
-              </a:rPr>
-              <a:t>i</a:t>
-            </a:r>
-            <a:r>
-              <a:rPr lang="en-US" sz="1500" b="0" u="none" strike="noStrike">
-                <a:solidFill>
-                  <a:srgbClr val="FFFFFF"/>
-                </a:solidFill>
-                <a:effectLst/>
-                <a:uFillTx/>
-                <a:latin typeface="Calibri"/>
-              </a:rPr>
-              <a:t>t</a:t>
-            </a:r>
-            <a:r>
-              <a:rPr lang="en-US" sz="1500" b="0" u="none" strike="noStrike">
-                <a:solidFill>
-                  <a:srgbClr val="FFFFFF"/>
-                </a:solidFill>
-                <a:effectLst/>
-                <a:uFillTx/>
-                <a:latin typeface="Calibri"/>
-              </a:rPr>
-              <a:t>h</a:t>
-            </a:r>
-            <a:r>
-              <a:rPr lang="en-US" sz="1500" b="0" u="none" strike="noStrike">
-                <a:solidFill>
-                  <a:srgbClr val="FFFFFF"/>
-                </a:solidFill>
-                <a:effectLst/>
-                <a:uFillTx/>
-                <a:latin typeface="Calibri"/>
-              </a:rPr>
-              <a:t> </a:t>
-            </a:r>
-            <a:r>
-              <a:rPr lang="en-US" sz="1500" b="0" u="none" strike="noStrike">
-                <a:solidFill>
-                  <a:srgbClr val="FFFFFF"/>
-                </a:solidFill>
-                <a:effectLst/>
-                <a:uFillTx/>
-                <a:latin typeface="Calibri"/>
-              </a:rPr>
-              <a:t>w</a:t>
-            </a:r>
-            <a:r>
-              <a:rPr lang="en-US" sz="1500" b="0" u="none" strike="noStrike">
-                <a:solidFill>
-                  <a:srgbClr val="FFFFFF"/>
-                </a:solidFill>
-                <a:effectLst/>
-                <a:uFillTx/>
-                <a:latin typeface="Calibri"/>
-              </a:rPr>
-              <a:t>h</a:t>
-            </a:r>
-            <a:r>
-              <a:rPr lang="en-US" sz="1500" b="0" u="none" strike="noStrike">
-                <a:solidFill>
-                  <a:srgbClr val="FFFFFF"/>
-                </a:solidFill>
-                <a:effectLst/>
-                <a:uFillTx/>
-                <a:latin typeface="Calibri"/>
-              </a:rPr>
-              <a:t>i</a:t>
-            </a:r>
-            <a:r>
-              <a:rPr lang="en-US" sz="1500" b="0" u="none" strike="noStrike">
-                <a:solidFill>
-                  <a:srgbClr val="FFFFFF"/>
-                </a:solidFill>
-                <a:effectLst/>
-                <a:uFillTx/>
-                <a:latin typeface="Calibri"/>
-              </a:rPr>
-              <a:t>t</a:t>
-            </a:r>
-            <a:r>
-              <a:rPr lang="en-US" sz="1500" b="0" u="none" strike="noStrike">
-                <a:solidFill>
-                  <a:srgbClr val="FFFFFF"/>
-                </a:solidFill>
-                <a:effectLst/>
-                <a:uFillTx/>
-                <a:latin typeface="Calibri"/>
-              </a:rPr>
-              <a:t>e</a:t>
-            </a:r>
-            <a:r>
-              <a:rPr lang="en-US" sz="1500" b="0" u="none" strike="noStrike">
-                <a:solidFill>
-                  <a:srgbClr val="FFFFFF"/>
-                </a:solidFill>
-                <a:effectLst/>
-                <a:uFillTx/>
-                <a:latin typeface="Calibri"/>
-              </a:rPr>
-              <a:t>n</a:t>
-            </a:r>
-            <a:r>
-              <a:rPr lang="en-US" sz="1500" b="0" u="none" strike="noStrike">
-                <a:solidFill>
-                  <a:srgbClr val="FFFFFF"/>
-                </a:solidFill>
-                <a:effectLst/>
-                <a:uFillTx/>
-                <a:latin typeface="Calibri"/>
-              </a:rPr>
-              <a:t>i</a:t>
-            </a:r>
-            <a:r>
-              <a:rPr lang="en-US" sz="1500" b="0" u="none" strike="noStrike">
-                <a:solidFill>
-                  <a:srgbClr val="FFFFFF"/>
-                </a:solidFill>
-                <a:effectLst/>
-                <a:uFillTx/>
-                <a:latin typeface="Calibri"/>
-              </a:rPr>
-              <a:t>n</a:t>
-            </a:r>
-            <a:r>
-              <a:rPr lang="en-US" sz="1500" b="0" u="none" strike="noStrike">
-                <a:solidFill>
-                  <a:srgbClr val="FFFFFF"/>
-                </a:solidFill>
-                <a:effectLst/>
-                <a:uFillTx/>
-                <a:latin typeface="Calibri"/>
-              </a:rPr>
-              <a:t>g</a:t>
-            </a:r>
-            <a:r>
-              <a:rPr lang="en-US" sz="1500" b="0" u="none" strike="noStrike">
-                <a:solidFill>
-                  <a:srgbClr val="FFFFFF"/>
-                </a:solidFill>
-                <a:effectLst/>
-                <a:uFillTx/>
-                <a:latin typeface="Calibri"/>
-              </a:rPr>
-              <a:t>,</a:t>
-            </a:r>
-            <a:r>
-              <a:rPr lang="en-US" sz="1500" b="0" u="none" strike="noStrike">
-                <a:solidFill>
-                  <a:srgbClr val="FFFFFF"/>
-                </a:solidFill>
-                <a:effectLst/>
-                <a:uFillTx/>
-                <a:latin typeface="Calibri"/>
-              </a:rPr>
-              <a:t> </a:t>
-            </a:r>
-            <a:r>
-              <a:rPr lang="en-US" sz="1500" b="0" u="none" strike="noStrike">
-                <a:solidFill>
-                  <a:srgbClr val="FFFFFF"/>
-                </a:solidFill>
-                <a:effectLst/>
-                <a:uFillTx/>
-                <a:latin typeface="Calibri"/>
-              </a:rPr>
-              <a:t>f</a:t>
-            </a:r>
-            <a:r>
-              <a:rPr lang="en-US" sz="1500" b="0" u="none" strike="noStrike">
-                <a:solidFill>
-                  <a:srgbClr val="FFFFFF"/>
-                </a:solidFill>
-                <a:effectLst/>
-                <a:uFillTx/>
-                <a:latin typeface="Calibri"/>
-              </a:rPr>
-              <a:t>i</a:t>
-            </a:r>
-            <a:r>
-              <a:rPr lang="en-US" sz="1500" b="0" u="none" strike="noStrike">
-                <a:solidFill>
-                  <a:srgbClr val="FFFFFF"/>
-                </a:solidFill>
-                <a:effectLst/>
-                <a:uFillTx/>
-                <a:latin typeface="Calibri"/>
-              </a:rPr>
-              <a:t>t</a:t>
-            </a:r>
-            <a:r>
-              <a:rPr lang="en-US" sz="1500" b="0" u="none" strike="noStrike">
-                <a:solidFill>
-                  <a:srgbClr val="FFFFFF"/>
-                </a:solidFill>
-                <a:effectLst/>
-                <a:uFillTx/>
-                <a:latin typeface="Calibri"/>
-              </a:rPr>
-              <a:t>t</a:t>
-            </a:r>
-            <a:r>
-              <a:rPr lang="en-US" sz="1500" b="0" u="none" strike="noStrike">
-                <a:solidFill>
-                  <a:srgbClr val="FFFFFF"/>
-                </a:solidFill>
-                <a:effectLst/>
-                <a:uFillTx/>
-                <a:latin typeface="Calibri"/>
-              </a:rPr>
-              <a:t>e</a:t>
-            </a:r>
-            <a:r>
-              <a:rPr lang="en-US" sz="1500" b="0" u="none" strike="noStrike">
-                <a:solidFill>
-                  <a:srgbClr val="FFFFFF"/>
-                </a:solidFill>
-                <a:effectLst/>
-                <a:uFillTx/>
-                <a:latin typeface="Calibri"/>
-              </a:rPr>
-              <a:t>d</a:t>
-            </a:r>
-            <a:r>
-              <a:rPr lang="en-US" sz="1500" b="0" u="none" strike="noStrike">
-                <a:solidFill>
-                  <a:srgbClr val="FFFFFF"/>
-                </a:solidFill>
-                <a:effectLst/>
-                <a:uFillTx/>
-                <a:latin typeface="Calibri"/>
-              </a:rPr>
-              <a:t> </a:t>
-            </a:r>
-            <a:r>
-              <a:rPr lang="en-US" sz="1500" b="0" u="none" strike="noStrike">
-                <a:solidFill>
-                  <a:srgbClr val="FFFFFF"/>
-                </a:solidFill>
-                <a:effectLst/>
-                <a:uFillTx/>
-                <a:latin typeface="Calibri"/>
-              </a:rPr>
-              <a:t>o</a:t>
-            </a:r>
-            <a:r>
-              <a:rPr lang="en-US" sz="1500" b="0" u="none" strike="noStrike">
-                <a:solidFill>
-                  <a:srgbClr val="FFFFFF"/>
-                </a:solidFill>
-                <a:effectLst/>
-                <a:uFillTx/>
-                <a:latin typeface="Calibri"/>
-              </a:rPr>
-              <a:t>n</a:t>
-            </a:r>
-            <a:r>
-              <a:rPr lang="en-US" sz="1500" b="0" u="none" strike="noStrike">
-                <a:solidFill>
-                  <a:srgbClr val="FFFFFF"/>
-                </a:solidFill>
-                <a:effectLst/>
-                <a:uFillTx/>
-                <a:latin typeface="Calibri"/>
-              </a:rPr>
-              <a:t> </a:t>
-            </a:r>
-            <a:r>
-              <a:rPr lang="en-US" sz="1500" b="0" u="none" strike="noStrike">
-                <a:solidFill>
-                  <a:srgbClr val="FFFFFF"/>
-                </a:solidFill>
-                <a:effectLst/>
-                <a:uFillTx/>
-                <a:latin typeface="Calibri"/>
-              </a:rPr>
-              <a:t>t</a:t>
-            </a:r>
-            <a:r>
-              <a:rPr lang="en-US" sz="1500" b="0" u="none" strike="noStrike">
-                <a:solidFill>
-                  <a:srgbClr val="FFFFFF"/>
-                </a:solidFill>
-                <a:effectLst/>
-                <a:uFillTx/>
-                <a:latin typeface="Calibri"/>
-              </a:rPr>
-              <a:t>r</a:t>
-            </a:r>
-            <a:r>
-              <a:rPr lang="en-US" sz="1500" b="0" u="none" strike="noStrike">
-                <a:solidFill>
-                  <a:srgbClr val="FFFFFF"/>
-                </a:solidFill>
-                <a:effectLst/>
-                <a:uFillTx/>
-                <a:latin typeface="Calibri"/>
-              </a:rPr>
-              <a:t>a</a:t>
-            </a:r>
-            <a:r>
-              <a:rPr lang="en-US" sz="1500" b="0" u="none" strike="noStrike">
-                <a:solidFill>
-                  <a:srgbClr val="FFFFFF"/>
-                </a:solidFill>
-                <a:effectLst/>
-                <a:uFillTx/>
-                <a:latin typeface="Calibri"/>
-              </a:rPr>
-              <a:t>i</a:t>
-            </a:r>
-            <a:r>
-              <a:rPr lang="en-US" sz="1500" b="0" u="none" strike="noStrike">
-                <a:solidFill>
-                  <a:srgbClr val="FFFFFF"/>
-                </a:solidFill>
-                <a:effectLst/>
-                <a:uFillTx/>
-                <a:latin typeface="Calibri"/>
-              </a:rPr>
-              <a:t>n</a:t>
-            </a:r>
-            <a:r>
-              <a:rPr lang="en-US" sz="1500" b="0" u="none" strike="noStrike">
-                <a:solidFill>
-                  <a:srgbClr val="FFFFFF"/>
-                </a:solidFill>
-                <a:effectLst/>
-                <a:uFillTx/>
-                <a:latin typeface="Calibri"/>
-              </a:rPr>
-              <a:t> </a:t>
-            </a:r>
-            <a:r>
-              <a:rPr lang="en-US" sz="1500" b="0" u="none" strike="noStrike">
-                <a:solidFill>
-                  <a:srgbClr val="FFFFFF"/>
-                </a:solidFill>
-                <a:effectLst/>
-                <a:uFillTx/>
-                <a:latin typeface="Calibri"/>
-              </a:rPr>
-              <a:t>o</a:t>
-            </a:r>
-            <a:r>
-              <a:rPr lang="en-US" sz="1500" b="0" u="none" strike="noStrike">
-                <a:solidFill>
-                  <a:srgbClr val="FFFFFF"/>
-                </a:solidFill>
-                <a:effectLst/>
-                <a:uFillTx/>
-                <a:latin typeface="Calibri"/>
-              </a:rPr>
-              <a:t>n</a:t>
-            </a:r>
-            <a:r>
-              <a:rPr lang="en-US" sz="1500" b="0" u="none" strike="noStrike">
-                <a:solidFill>
-                  <a:srgbClr val="FFFFFF"/>
-                </a:solidFill>
-                <a:effectLst/>
-                <a:uFillTx/>
-                <a:latin typeface="Calibri"/>
-              </a:rPr>
-              <a:t>l</a:t>
-            </a:r>
-            <a:r>
-              <a:rPr lang="en-US" sz="1500" b="0" u="none" strike="noStrike">
-                <a:solidFill>
-                  <a:srgbClr val="FFFFFF"/>
-                </a:solidFill>
-                <a:effectLst/>
-                <a:uFillTx/>
-                <a:latin typeface="Calibri"/>
-              </a:rPr>
-              <a:t>y</a:t>
+              <a:t>PCA with whitening, fitted on train only</a:t>
             </a:r>
             <a:endParaRPr lang="en-ZA" sz="1500" b="0" u="none" strike="noStrike">
               <a:solidFill>
@@ -5385,447 +4339,7 @@
                 <a:uFillTx/>
                 <a:latin typeface="Calibri"/>
               </a:rPr>
-              <a:t>S</a:t>
-            </a:r>
-            <a:r>
-              <a:rPr lang="en-US" sz="1500" b="0" u="none" strike="noStrike">
-                <a:solidFill>
-                  <a:srgbClr val="FFFFFF"/>
-                </a:solidFill>
-                <a:effectLst/>
-                <a:uFillTx/>
-                <a:latin typeface="Calibri"/>
-              </a:rPr>
-              <a:t>w</a:t>
-            </a:r>
-            <a:r>
-              <a:rPr lang="en-US" sz="1500" b="0" u="none" strike="noStrike">
-                <a:solidFill>
-                  <a:srgbClr val="FFFFFF"/>
-                </a:solidFill>
-                <a:effectLst/>
-                <a:uFillTx/>
-                <a:latin typeface="Calibri"/>
-              </a:rPr>
-              <a:t>e</a:t>
-            </a:r>
-            <a:r>
-              <a:rPr lang="en-US" sz="1500" b="0" u="none" strike="noStrike">
-                <a:solidFill>
-                  <a:srgbClr val="FFFFFF"/>
-                </a:solidFill>
-                <a:effectLst/>
-                <a:uFillTx/>
-                <a:latin typeface="Calibri"/>
-              </a:rPr>
-              <a:t>e</a:t>
-            </a:r>
-            <a:r>
-              <a:rPr lang="en-US" sz="1500" b="0" u="none" strike="noStrike">
-                <a:solidFill>
-                  <a:srgbClr val="FFFFFF"/>
-                </a:solidFill>
-                <a:effectLst/>
-                <a:uFillTx/>
-                <a:latin typeface="Calibri"/>
-              </a:rPr>
-              <a:t>p</a:t>
-            </a:r>
-            <a:r>
-              <a:rPr lang="en-US" sz="1500" b="0" u="none" strike="noStrike">
-                <a:solidFill>
-                  <a:srgbClr val="FFFFFF"/>
-                </a:solidFill>
-                <a:effectLst/>
-                <a:uFillTx/>
-                <a:latin typeface="Calibri"/>
-              </a:rPr>
-              <a:t> </a:t>
-            </a:r>
-            <a:r>
-              <a:rPr lang="en-US" sz="1500" b="0" u="none" strike="noStrike">
-                <a:solidFill>
-                  <a:srgbClr val="FFFFFF"/>
-                </a:solidFill>
-                <a:effectLst/>
-                <a:uFillTx/>
-                <a:latin typeface="Calibri"/>
-              </a:rPr>
-              <a:t>3</a:t>
-            </a:r>
-            <a:r>
-              <a:rPr lang="en-US" sz="1500" b="0" u="none" strike="noStrike">
-                <a:solidFill>
-                  <a:srgbClr val="FFFFFF"/>
-                </a:solidFill>
-                <a:effectLst/>
-                <a:uFillTx/>
-                <a:latin typeface="Calibri"/>
-              </a:rPr>
-              <a:t>2</a:t>
-            </a:r>
-            <a:r>
-              <a:rPr lang="en-US" sz="1500" b="0" u="none" strike="noStrike">
-                <a:solidFill>
-                  <a:srgbClr val="FFFFFF"/>
-                </a:solidFill>
-                <a:effectLst/>
-                <a:uFillTx/>
-                <a:latin typeface="Calibri"/>
-              </a:rPr>
-              <a:t>,</a:t>
-            </a:r>
-            <a:r>
-              <a:rPr lang="en-US" sz="1500" b="0" u="none" strike="noStrike">
-                <a:solidFill>
-                  <a:srgbClr val="FFFFFF"/>
-                </a:solidFill>
-                <a:effectLst/>
-                <a:uFillTx/>
-                <a:latin typeface="Calibri"/>
-              </a:rPr>
-              <a:t> </a:t>
-            </a:r>
-            <a:r>
-              <a:rPr lang="en-US" sz="1500" b="0" u="none" strike="noStrike">
-                <a:solidFill>
-                  <a:srgbClr val="FFFFFF"/>
-                </a:solidFill>
-                <a:effectLst/>
-                <a:uFillTx/>
-                <a:latin typeface="Calibri"/>
-              </a:rPr>
-              <a:t>6</a:t>
-            </a:r>
-            <a:r>
-              <a:rPr lang="en-US" sz="1500" b="0" u="none" strike="noStrike">
-                <a:solidFill>
-                  <a:srgbClr val="FFFFFF"/>
-                </a:solidFill>
-                <a:effectLst/>
-                <a:uFillTx/>
-                <a:latin typeface="Calibri"/>
-              </a:rPr>
-              <a:t>4</a:t>
-            </a:r>
-            <a:r>
-              <a:rPr lang="en-US" sz="1500" b="0" u="none" strike="noStrike">
-                <a:solidFill>
-                  <a:srgbClr val="FFFFFF"/>
-                </a:solidFill>
-                <a:effectLst/>
-                <a:uFillTx/>
-                <a:latin typeface="Calibri"/>
-              </a:rPr>
-              <a:t>,</a:t>
-            </a:r>
-            <a:r>
-              <a:rPr lang="en-US" sz="1500" b="0" u="none" strike="noStrike">
-                <a:solidFill>
-                  <a:srgbClr val="FFFFFF"/>
-                </a:solidFill>
-                <a:effectLst/>
-                <a:uFillTx/>
-                <a:latin typeface="Calibri"/>
-              </a:rPr>
-              <a:t> </a:t>
-            </a:r>
-            <a:r>
-              <a:rPr lang="en-US" sz="1500" b="0" u="none" strike="noStrike">
-                <a:solidFill>
-                  <a:srgbClr val="FFFFFF"/>
-                </a:solidFill>
-                <a:effectLst/>
-                <a:uFillTx/>
-                <a:latin typeface="Calibri"/>
-              </a:rPr>
-              <a:t>1</a:t>
-            </a:r>
-            <a:r>
-              <a:rPr lang="en-US" sz="1500" b="0" u="none" strike="noStrike">
-                <a:solidFill>
-                  <a:srgbClr val="FFFFFF"/>
-                </a:solidFill>
-                <a:effectLst/>
-                <a:uFillTx/>
-                <a:latin typeface="Calibri"/>
-              </a:rPr>
-              <a:t>2</a:t>
-            </a:r>
-            <a:r>
-              <a:rPr lang="en-US" sz="1500" b="0" u="none" strike="noStrike">
-                <a:solidFill>
-                  <a:srgbClr val="FFFFFF"/>
-                </a:solidFill>
-                <a:effectLst/>
-                <a:uFillTx/>
-                <a:latin typeface="Calibri"/>
-              </a:rPr>
-              <a:t>8</a:t>
-            </a:r>
-            <a:r>
-              <a:rPr lang="en-US" sz="1500" b="0" u="none" strike="noStrike">
-                <a:solidFill>
-                  <a:srgbClr val="FFFFFF"/>
-                </a:solidFill>
-                <a:effectLst/>
-                <a:uFillTx/>
-                <a:latin typeface="Calibri"/>
-              </a:rPr>
-              <a:t>,</a:t>
-            </a:r>
-            <a:r>
-              <a:rPr lang="en-US" sz="1500" b="0" u="none" strike="noStrike">
-                <a:solidFill>
-                  <a:srgbClr val="FFFFFF"/>
-                </a:solidFill>
-                <a:effectLst/>
-                <a:uFillTx/>
-                <a:latin typeface="Calibri"/>
-              </a:rPr>
-              <a:t> </a:t>
-            </a:r>
-            <a:r>
-              <a:rPr lang="en-US" sz="1500" b="0" u="none" strike="noStrike">
-                <a:solidFill>
-                  <a:srgbClr val="FFFFFF"/>
-                </a:solidFill>
-                <a:effectLst/>
-                <a:uFillTx/>
-                <a:latin typeface="Calibri"/>
-              </a:rPr>
-              <a:t>2</a:t>
-            </a:r>
-            <a:r>
-              <a:rPr lang="en-US" sz="1500" b="0" u="none" strike="noStrike">
-                <a:solidFill>
-                  <a:srgbClr val="FFFFFF"/>
-                </a:solidFill>
-                <a:effectLst/>
-                <a:uFillTx/>
-                <a:latin typeface="Calibri"/>
-              </a:rPr>
-              <a:t>5</a:t>
-            </a:r>
-            <a:r>
-              <a:rPr lang="en-US" sz="1500" b="0" u="none" strike="noStrike">
-                <a:solidFill>
-                  <a:srgbClr val="FFFFFF"/>
-                </a:solidFill>
-                <a:effectLst/>
-                <a:uFillTx/>
-                <a:latin typeface="Calibri"/>
-              </a:rPr>
-              <a:t>6</a:t>
-            </a:r>
-            <a:r>
-              <a:rPr lang="en-US" sz="1500" b="0" u="none" strike="noStrike">
-                <a:solidFill>
-                  <a:srgbClr val="FFFFFF"/>
-                </a:solidFill>
-                <a:effectLst/>
-                <a:uFillTx/>
-                <a:latin typeface="Calibri"/>
-              </a:rPr>
-              <a:t> </a:t>
-            </a:r>
-            <a:r>
-              <a:rPr lang="en-US" sz="1500" b="0" u="none" strike="noStrike">
-                <a:solidFill>
-                  <a:srgbClr val="FFFFFF"/>
-                </a:solidFill>
-                <a:effectLst/>
-                <a:uFillTx/>
-                <a:latin typeface="Calibri"/>
-              </a:rPr>
-              <a:t>a</a:t>
-            </a:r>
-            <a:r>
-              <a:rPr lang="en-US" sz="1500" b="0" u="none" strike="noStrike">
-                <a:solidFill>
-                  <a:srgbClr val="FFFFFF"/>
-                </a:solidFill>
-                <a:effectLst/>
-                <a:uFillTx/>
-                <a:latin typeface="Calibri"/>
-              </a:rPr>
-              <a:t>n</a:t>
-            </a:r>
-            <a:r>
-              <a:rPr lang="en-US" sz="1500" b="0" u="none" strike="noStrike">
-                <a:solidFill>
-                  <a:srgbClr val="FFFFFF"/>
-                </a:solidFill>
-                <a:effectLst/>
-                <a:uFillTx/>
-                <a:latin typeface="Calibri"/>
-              </a:rPr>
-              <a:t>d</a:t>
-            </a:r>
-            <a:r>
-              <a:rPr lang="en-US" sz="1500" b="0" u="none" strike="noStrike">
-                <a:solidFill>
-                  <a:srgbClr val="FFFFFF"/>
-                </a:solidFill>
-                <a:effectLst/>
-                <a:uFillTx/>
-                <a:latin typeface="Calibri"/>
-              </a:rPr>
-              <a:t> </a:t>
-            </a:r>
-            <a:r>
-              <a:rPr lang="en-US" sz="1500" b="0" u="none" strike="noStrike">
-                <a:solidFill>
-                  <a:srgbClr val="FFFFFF"/>
-                </a:solidFill>
-                <a:effectLst/>
-                <a:uFillTx/>
-                <a:latin typeface="Calibri"/>
-              </a:rPr>
-              <a:t>5</a:t>
-            </a:r>
-            <a:r>
-              <a:rPr lang="en-US" sz="1500" b="0" u="none" strike="noStrike">
-                <a:solidFill>
-                  <a:srgbClr val="FFFFFF"/>
-                </a:solidFill>
-                <a:effectLst/>
-                <a:uFillTx/>
-                <a:latin typeface="Calibri"/>
-              </a:rPr>
-              <a:t>1</a:t>
-            </a:r>
-            <a:r>
-              <a:rPr lang="en-US" sz="1500" b="0" u="none" strike="noStrike">
-                <a:solidFill>
-                  <a:srgbClr val="FFFFFF"/>
-                </a:solidFill>
-                <a:effectLst/>
-                <a:uFillTx/>
-                <a:latin typeface="Calibri"/>
-              </a:rPr>
-              <a:t>2</a:t>
-            </a:r>
-            <a:r>
-              <a:rPr lang="en-US" sz="1500" b="0" u="none" strike="noStrike">
-                <a:solidFill>
-                  <a:srgbClr val="FFFFFF"/>
-                </a:solidFill>
-                <a:effectLst/>
-                <a:uFillTx/>
-                <a:latin typeface="Calibri"/>
-              </a:rPr>
-              <a:t> </a:t>
-            </a:r>
-            <a:r>
-              <a:rPr lang="en-US" sz="1500" b="0" u="none" strike="noStrike">
-                <a:solidFill>
-                  <a:srgbClr val="FFFFFF"/>
-                </a:solidFill>
-                <a:effectLst/>
-                <a:uFillTx/>
-                <a:latin typeface="Calibri"/>
-              </a:rPr>
-              <a:t>d</a:t>
-            </a:r>
-            <a:r>
-              <a:rPr lang="en-US" sz="1500" b="0" u="none" strike="noStrike">
-                <a:solidFill>
-                  <a:srgbClr val="FFFFFF"/>
-                </a:solidFill>
-                <a:effectLst/>
-                <a:uFillTx/>
-                <a:latin typeface="Calibri"/>
-              </a:rPr>
-              <a:t>i</a:t>
-            </a:r>
-            <a:r>
-              <a:rPr lang="en-US" sz="1500" b="0" u="none" strike="noStrike">
-                <a:solidFill>
-                  <a:srgbClr val="FFFFFF"/>
-                </a:solidFill>
-                <a:effectLst/>
-                <a:uFillTx/>
-                <a:latin typeface="Calibri"/>
-              </a:rPr>
-              <a:t>m</a:t>
-            </a:r>
-            <a:r>
-              <a:rPr lang="en-US" sz="1500" b="0" u="none" strike="noStrike">
-                <a:solidFill>
-                  <a:srgbClr val="FFFFFF"/>
-                </a:solidFill>
-                <a:effectLst/>
-                <a:uFillTx/>
-                <a:latin typeface="Calibri"/>
-              </a:rPr>
-              <a:t>e</a:t>
-            </a:r>
-            <a:r>
-              <a:rPr lang="en-US" sz="1500" b="0" u="none" strike="noStrike">
-                <a:solidFill>
-                  <a:srgbClr val="FFFFFF"/>
-                </a:solidFill>
-                <a:effectLst/>
-                <a:uFillTx/>
-                <a:latin typeface="Calibri"/>
-              </a:rPr>
-              <a:t>n</a:t>
-            </a:r>
-            <a:r>
-              <a:rPr lang="en-US" sz="1500" b="0" u="none" strike="noStrike">
-                <a:solidFill>
-                  <a:srgbClr val="FFFFFF"/>
-                </a:solidFill>
-                <a:effectLst/>
-                <a:uFillTx/>
-                <a:latin typeface="Calibri"/>
-              </a:rPr>
-              <a:t>s</a:t>
-            </a:r>
-            <a:r>
-              <a:rPr lang="en-US" sz="1500" b="0" u="none" strike="noStrike">
-                <a:solidFill>
-                  <a:srgbClr val="FFFFFF"/>
-                </a:solidFill>
-                <a:effectLst/>
-                <a:uFillTx/>
-                <a:latin typeface="Calibri"/>
-              </a:rPr>
-              <a:t>i</a:t>
-            </a:r>
-            <a:r>
-              <a:rPr lang="en-US" sz="1500" b="0" u="none" strike="noStrike">
-                <a:solidFill>
-                  <a:srgbClr val="FFFFFF"/>
-                </a:solidFill>
-                <a:effectLst/>
-                <a:uFillTx/>
-                <a:latin typeface="Calibri"/>
-              </a:rPr>
-              <a:t>o</a:t>
-            </a:r>
-            <a:r>
-              <a:rPr lang="en-US" sz="1500" b="0" u="none" strike="noStrike">
-                <a:solidFill>
-                  <a:srgbClr val="FFFFFF"/>
-                </a:solidFill>
-                <a:effectLst/>
-                <a:uFillTx/>
-                <a:latin typeface="Calibri"/>
-              </a:rPr>
-              <a:t>n</a:t>
-            </a:r>
-            <a:r>
-              <a:rPr lang="en-US" sz="1500" b="0" u="none" strike="noStrike">
-                <a:solidFill>
-                  <a:srgbClr val="FFFFFF"/>
-                </a:solidFill>
-                <a:effectLst/>
-                <a:uFillTx/>
-                <a:latin typeface="Calibri"/>
-              </a:rPr>
-              <a:t>s</a:t>
+              <a:t>Sweep 32, 64, 128, 256 and 512 dimensions</a:t>
             </a:r>
             <a:endParaRPr lang="en-ZA" sz="1500" b="0" u="none" strike="noStrike">
               <a:solidFill>
@@ -5859,414 +4373,7 @@
                 <a:uFillTx/>
                 <a:latin typeface="Calibri"/>
               </a:rPr>
-              <a:t>F</a:t>
-            </a:r>
-            <a:r>
-              <a:rPr lang="en-US" sz="1500" b="0" u="none" strike="noStrike">
-                <a:solidFill>
-                  <a:srgbClr val="FFFFFF"/>
-                </a:solidFill>
-                <a:effectLst/>
-                <a:uFillTx/>
-                <a:latin typeface="Calibri"/>
-              </a:rPr>
-              <a:t>i</a:t>
-            </a:r>
-            <a:r>
-              <a:rPr lang="en-US" sz="1500" b="0" u="none" strike="noStrike">
-                <a:solidFill>
-                  <a:srgbClr val="FFFFFF"/>
-                </a:solidFill>
-                <a:effectLst/>
-                <a:uFillTx/>
-                <a:latin typeface="Calibri"/>
-              </a:rPr>
-              <a:t>n</a:t>
-            </a:r>
-            <a:r>
-              <a:rPr lang="en-US" sz="1500" b="0" u="none" strike="noStrike">
-                <a:solidFill>
-                  <a:srgbClr val="FFFFFF"/>
-                </a:solidFill>
-                <a:effectLst/>
-                <a:uFillTx/>
-                <a:latin typeface="Calibri"/>
-              </a:rPr>
-              <a:t>d</a:t>
-            </a:r>
-            <a:r>
-              <a:rPr lang="en-US" sz="1500" b="0" u="none" strike="noStrike">
-                <a:solidFill>
-                  <a:srgbClr val="FFFFFF"/>
-                </a:solidFill>
-                <a:effectLst/>
-                <a:uFillTx/>
-                <a:latin typeface="Calibri"/>
-              </a:rPr>
-              <a:t> </a:t>
-            </a:r>
-            <a:r>
-              <a:rPr lang="en-US" sz="1500" b="0" u="none" strike="noStrike">
-                <a:solidFill>
-                  <a:srgbClr val="FFFFFF"/>
-                </a:solidFill>
-                <a:effectLst/>
-                <a:uFillTx/>
-                <a:latin typeface="Calibri"/>
-              </a:rPr>
-              <a:t>w</a:t>
-            </a:r>
-            <a:r>
-              <a:rPr lang="en-US" sz="1500" b="0" u="none" strike="noStrike">
-                <a:solidFill>
-                  <a:srgbClr val="FFFFFF"/>
-                </a:solidFill>
-                <a:effectLst/>
-                <a:uFillTx/>
-                <a:latin typeface="Calibri"/>
-              </a:rPr>
-              <a:t>h</a:t>
-            </a:r>
-            <a:r>
-              <a:rPr lang="en-US" sz="1500" b="0" u="none" strike="noStrike">
-                <a:solidFill>
-                  <a:srgbClr val="FFFFFF"/>
-                </a:solidFill>
-                <a:effectLst/>
-                <a:uFillTx/>
-                <a:latin typeface="Calibri"/>
-              </a:rPr>
-              <a:t>e</a:t>
-            </a:r>
-            <a:r>
-              <a:rPr lang="en-US" sz="1500" b="0" u="none" strike="noStrike">
-                <a:solidFill>
-                  <a:srgbClr val="FFFFFF"/>
-                </a:solidFill>
-                <a:effectLst/>
-                <a:uFillTx/>
-                <a:latin typeface="Calibri"/>
-              </a:rPr>
-              <a:t>r</a:t>
-            </a:r>
-            <a:r>
-              <a:rPr lang="en-US" sz="1500" b="0" u="none" strike="noStrike">
-                <a:solidFill>
-                  <a:srgbClr val="FFFFFF"/>
-                </a:solidFill>
-                <a:effectLst/>
-                <a:uFillTx/>
-                <a:latin typeface="Calibri"/>
-              </a:rPr>
-              <a:t>e</a:t>
-            </a:r>
-            <a:r>
-              <a:rPr lang="en-US" sz="1500" b="0" u="none" strike="noStrike">
-                <a:solidFill>
-                  <a:srgbClr val="FFFFFF"/>
-                </a:solidFill>
-                <a:effectLst/>
-                <a:uFillTx/>
-                <a:latin typeface="Calibri"/>
-              </a:rPr>
-              <a:t> </a:t>
-            </a:r>
-            <a:r>
-              <a:rPr lang="en-US" sz="1500" b="0" u="none" strike="noStrike">
-                <a:solidFill>
-                  <a:srgbClr val="FFFFFF"/>
-                </a:solidFill>
-                <a:effectLst/>
-                <a:uFillTx/>
-                <a:latin typeface="Calibri"/>
-              </a:rPr>
-              <a:t>r</a:t>
-            </a:r>
-            <a:r>
-              <a:rPr lang="en-US" sz="1500" b="0" u="none" strike="noStrike">
-                <a:solidFill>
-                  <a:srgbClr val="FFFFFF"/>
-                </a:solidFill>
-                <a:effectLst/>
-                <a:uFillTx/>
-                <a:latin typeface="Calibri"/>
-              </a:rPr>
-              <a:t>e</a:t>
-            </a:r>
-            <a:r>
-              <a:rPr lang="en-US" sz="1500" b="0" u="none" strike="noStrike">
-                <a:solidFill>
-                  <a:srgbClr val="FFFFFF"/>
-                </a:solidFill>
-                <a:effectLst/>
-                <a:uFillTx/>
-                <a:latin typeface="Calibri"/>
-              </a:rPr>
-              <a:t>t</a:t>
-            </a:r>
-            <a:r>
-              <a:rPr lang="en-US" sz="1500" b="0" u="none" strike="noStrike">
-                <a:solidFill>
-                  <a:srgbClr val="FFFFFF"/>
-                </a:solidFill>
-                <a:effectLst/>
-                <a:uFillTx/>
-                <a:latin typeface="Calibri"/>
-              </a:rPr>
-              <a:t>r</a:t>
-            </a:r>
-            <a:r>
-              <a:rPr lang="en-US" sz="1500" b="0" u="none" strike="noStrike">
-                <a:solidFill>
-                  <a:srgbClr val="FFFFFF"/>
-                </a:solidFill>
-                <a:effectLst/>
-                <a:uFillTx/>
-                <a:latin typeface="Calibri"/>
-              </a:rPr>
-              <a:t>i</a:t>
-            </a:r>
-            <a:r>
-              <a:rPr lang="en-US" sz="1500" b="0" u="none" strike="noStrike">
-                <a:solidFill>
-                  <a:srgbClr val="FFFFFF"/>
-                </a:solidFill>
-                <a:effectLst/>
-                <a:uFillTx/>
-                <a:latin typeface="Calibri"/>
-              </a:rPr>
-              <a:t>e</a:t>
-            </a:r>
-            <a:r>
-              <a:rPr lang="en-US" sz="1500" b="0" u="none" strike="noStrike">
-                <a:solidFill>
-                  <a:srgbClr val="FFFFFF"/>
-                </a:solidFill>
-                <a:effectLst/>
-                <a:uFillTx/>
-                <a:latin typeface="Calibri"/>
-              </a:rPr>
-              <a:t>v</a:t>
-            </a:r>
-            <a:r>
-              <a:rPr lang="en-US" sz="1500" b="0" u="none" strike="noStrike">
-                <a:solidFill>
-                  <a:srgbClr val="FFFFFF"/>
-                </a:solidFill>
-                <a:effectLst/>
-                <a:uFillTx/>
-                <a:latin typeface="Calibri"/>
-              </a:rPr>
-              <a:t>a</a:t>
-            </a:r>
-            <a:r>
-              <a:rPr lang="en-US" sz="1500" b="0" u="none" strike="noStrike">
-                <a:solidFill>
-                  <a:srgbClr val="FFFFFF"/>
-                </a:solidFill>
-                <a:effectLst/>
-                <a:uFillTx/>
-                <a:latin typeface="Calibri"/>
-              </a:rPr>
-              <a:t>l</a:t>
-            </a:r>
-            <a:r>
-              <a:rPr lang="en-US" sz="1500" b="0" u="none" strike="noStrike">
-                <a:solidFill>
-                  <a:srgbClr val="FFFFFF"/>
-                </a:solidFill>
-                <a:effectLst/>
-                <a:uFillTx/>
-                <a:latin typeface="Calibri"/>
-              </a:rPr>
-              <a:t> </a:t>
-            </a:r>
-            <a:r>
-              <a:rPr lang="en-US" sz="1500" b="0" u="none" strike="noStrike">
-                <a:solidFill>
-                  <a:srgbClr val="FFFFFF"/>
-                </a:solidFill>
-                <a:effectLst/>
-                <a:uFillTx/>
-                <a:latin typeface="Calibri"/>
-              </a:rPr>
-              <a:t>s</a:t>
-            </a:r>
-            <a:r>
-              <a:rPr lang="en-US" sz="1500" b="0" u="none" strike="noStrike">
-                <a:solidFill>
-                  <a:srgbClr val="FFFFFF"/>
-                </a:solidFill>
-                <a:effectLst/>
-                <a:uFillTx/>
-                <a:latin typeface="Calibri"/>
-              </a:rPr>
-              <a:t>t</a:t>
-            </a:r>
-            <a:r>
-              <a:rPr lang="en-US" sz="1500" b="0" u="none" strike="noStrike">
-                <a:solidFill>
-                  <a:srgbClr val="FFFFFF"/>
-                </a:solidFill>
-                <a:effectLst/>
-                <a:uFillTx/>
-                <a:latin typeface="Calibri"/>
-              </a:rPr>
-              <a:t>a</a:t>
-            </a:r>
-            <a:r>
-              <a:rPr lang="en-US" sz="1500" b="0" u="none" strike="noStrike">
-                <a:solidFill>
-                  <a:srgbClr val="FFFFFF"/>
-                </a:solidFill>
-                <a:effectLst/>
-                <a:uFillTx/>
-                <a:latin typeface="Calibri"/>
-              </a:rPr>
-              <a:t>r</a:t>
-            </a:r>
-            <a:r>
-              <a:rPr lang="en-US" sz="1500" b="0" u="none" strike="noStrike">
-                <a:solidFill>
-                  <a:srgbClr val="FFFFFF"/>
-                </a:solidFill>
-                <a:effectLst/>
-                <a:uFillTx/>
-                <a:latin typeface="Calibri"/>
-              </a:rPr>
-              <a:t>t</a:t>
-            </a:r>
-            <a:r>
-              <a:rPr lang="en-US" sz="1500" b="0" u="none" strike="noStrike">
-                <a:solidFill>
-                  <a:srgbClr val="FFFFFF"/>
-                </a:solidFill>
-                <a:effectLst/>
-                <a:uFillTx/>
-                <a:latin typeface="Calibri"/>
-              </a:rPr>
-              <a:t>s</a:t>
-            </a:r>
-            <a:r>
-              <a:rPr lang="en-US" sz="1500" b="0" u="none" strike="noStrike">
-                <a:solidFill>
-                  <a:srgbClr val="FFFFFF"/>
-                </a:solidFill>
-                <a:effectLst/>
-                <a:uFillTx/>
-                <a:latin typeface="Calibri"/>
-              </a:rPr>
-              <a:t> </a:t>
-            </a:r>
-            <a:r>
-              <a:rPr lang="en-US" sz="1500" b="0" u="none" strike="noStrike">
-                <a:solidFill>
-                  <a:srgbClr val="FFFFFF"/>
-                </a:solidFill>
-                <a:effectLst/>
-                <a:uFillTx/>
-                <a:latin typeface="Calibri"/>
-              </a:rPr>
-              <a:t>t</a:t>
-            </a:r>
-            <a:r>
-              <a:rPr lang="en-US" sz="1500" b="0" u="none" strike="noStrike">
-                <a:solidFill>
-                  <a:srgbClr val="FFFFFF"/>
-                </a:solidFill>
-                <a:effectLst/>
-                <a:uFillTx/>
-                <a:latin typeface="Calibri"/>
-              </a:rPr>
-              <a:t>o</a:t>
-            </a:r>
-            <a:r>
-              <a:rPr lang="en-US" sz="1500" b="0" u="none" strike="noStrike">
-                <a:solidFill>
-                  <a:srgbClr val="FFFFFF"/>
-                </a:solidFill>
-                <a:effectLst/>
-                <a:uFillTx/>
-                <a:latin typeface="Calibri"/>
-              </a:rPr>
-              <a:t> </a:t>
-            </a:r>
-            <a:r>
-              <a:rPr lang="en-US" sz="1500" b="0" u="none" strike="noStrike">
-                <a:solidFill>
-                  <a:srgbClr val="FFFFFF"/>
-                </a:solidFill>
-                <a:effectLst/>
-                <a:uFillTx/>
-                <a:latin typeface="Calibri"/>
-              </a:rPr>
-              <a:t>d</a:t>
-            </a:r>
-            <a:r>
-              <a:rPr lang="en-US" sz="1500" b="0" u="none" strike="noStrike">
-                <a:solidFill>
-                  <a:srgbClr val="FFFFFF"/>
-                </a:solidFill>
-                <a:effectLst/>
-                <a:uFillTx/>
-                <a:latin typeface="Calibri"/>
-              </a:rPr>
-              <a:t>e</a:t>
-            </a:r>
-            <a:r>
-              <a:rPr lang="en-US" sz="1500" b="0" u="none" strike="noStrike">
-                <a:solidFill>
-                  <a:srgbClr val="FFFFFF"/>
-                </a:solidFill>
-                <a:effectLst/>
-                <a:uFillTx/>
-                <a:latin typeface="Calibri"/>
-              </a:rPr>
-              <a:t>g</a:t>
-            </a:r>
-            <a:r>
-              <a:rPr lang="en-US" sz="1500" b="0" u="none" strike="noStrike">
-                <a:solidFill>
-                  <a:srgbClr val="FFFFFF"/>
-                </a:solidFill>
-                <a:effectLst/>
-                <a:uFillTx/>
-                <a:latin typeface="Calibri"/>
-              </a:rPr>
-              <a:t>r</a:t>
-            </a:r>
-            <a:r>
-              <a:rPr lang="en-US" sz="1500" b="0" u="none" strike="noStrike">
-                <a:solidFill>
-                  <a:srgbClr val="FFFFFF"/>
-                </a:solidFill>
-                <a:effectLst/>
-                <a:uFillTx/>
-                <a:latin typeface="Calibri"/>
-              </a:rPr>
-              <a:t>a</a:t>
-            </a:r>
-            <a:r>
-              <a:rPr lang="en-US" sz="1500" b="0" u="none" strike="noStrike">
-                <a:solidFill>
-                  <a:srgbClr val="FFFFFF"/>
-                </a:solidFill>
-                <a:effectLst/>
-                <a:uFillTx/>
-                <a:latin typeface="Calibri"/>
-              </a:rPr>
-              <a:t>d</a:t>
-            </a:r>
-            <a:r>
-              <a:rPr lang="en-US" sz="1500" b="0" u="none" strike="noStrike">
-                <a:solidFill>
-                  <a:srgbClr val="FFFFFF"/>
-                </a:solidFill>
-                <a:effectLst/>
-                <a:uFillTx/>
-                <a:latin typeface="Calibri"/>
-              </a:rPr>
-              <a:t>e</a:t>
+              <a:t>Find where retrieval starts to degrade</a:t>
             </a:r>
             <a:endParaRPr lang="en-ZA" sz="1500" b="0" u="none" strike="noStrike">
               <a:solidFill>
@@ -6325,7 +4432,7 @@
         <p:spPr>
           <a:xfrm>
             <a:off x="548640" y="365760"/>
-            <a:ext cx="11063880" cy="822600"/>
+            <a:ext cx="11063520" cy="822240"/>
           </a:xfrm>
           <a:prstGeom prst="rect">
             <a:avLst/>
@@ -6386,7 +4493,7 @@
         <p:spPr>
           <a:xfrm>
             <a:off x="10698480" y="6400800"/>
-            <a:ext cx="914040" cy="273960"/>
+            <a:ext cx="913680" cy="273600"/>
           </a:xfrm>
           <a:prstGeom prst="rect">
             <a:avLst/>
@@ -6446,7 +4553,7 @@
         <p:spPr>
           <a:xfrm>
             <a:off x="548640" y="1417320"/>
-            <a:ext cx="2057040" cy="3245760"/>
+            <a:ext cx="2056680" cy="3245400"/>
           </a:xfrm>
           <a:prstGeom prst="roundRect">
             <a:avLst>
@@ -6494,7 +4601,7 @@
         <p:spPr>
           <a:xfrm>
             <a:off x="685800" y="1554480"/>
-            <a:ext cx="365400" cy="365400"/>
+            <a:ext cx="365040" cy="365040"/>
           </a:xfrm>
           <a:prstGeom prst="ellipse">
             <a:avLst/>
@@ -6540,7 +4647,7 @@
         <p:spPr>
           <a:xfrm>
             <a:off x="685800" y="1554480"/>
-            <a:ext cx="365400" cy="365400"/>
+            <a:ext cx="365040" cy="365040"/>
           </a:xfrm>
           <a:prstGeom prst="rect">
             <a:avLst/>
@@ -6604,7 +4711,7 @@
         <p:spPr>
           <a:xfrm>
             <a:off x="640080" y="2267280"/>
-            <a:ext cx="1874160" cy="1409040"/>
+            <a:ext cx="1873800" cy="1408680"/>
           </a:xfrm>
           <a:prstGeom prst="rect">
             <a:avLst/>
@@ -6624,7 +4731,7 @@
         <p:spPr>
           <a:xfrm>
             <a:off x="685800" y="3977640"/>
-            <a:ext cx="1782720" cy="594000"/>
+            <a:ext cx="1782360" cy="593640"/>
           </a:xfrm>
           <a:prstGeom prst="rect">
             <a:avLst/>
@@ -6703,7 +4810,7 @@
           <a:fontRef idx="minor"/>
         </p:style>
         <p:txBody>
-          <a:bodyPr lIns="90000" tIns="-44640" rIns="90000" bIns="-44640" anchor="t">
+          <a:bodyPr lIns="0" tIns="-44640" rIns="0" bIns="-44640" anchor="t">
             <a:noAutofit/>
           </a:bodyPr>
           <a:p>
@@ -6727,7 +4834,7 @@
         <p:spPr>
           <a:xfrm>
             <a:off x="2788920" y="1417320"/>
-            <a:ext cx="2057040" cy="3245760"/>
+            <a:ext cx="2056680" cy="3245400"/>
           </a:xfrm>
           <a:prstGeom prst="roundRect">
             <a:avLst>
@@ -6775,7 +4882,7 @@
         <p:spPr>
           <a:xfrm>
             <a:off x="2926080" y="1554480"/>
-            <a:ext cx="365400" cy="365400"/>
+            <a:ext cx="365040" cy="365040"/>
           </a:xfrm>
           <a:prstGeom prst="ellipse">
             <a:avLst/>
@@ -6821,7 +4928,7 @@
         <p:spPr>
           <a:xfrm>
             <a:off x="2926080" y="1554480"/>
-            <a:ext cx="365400" cy="365400"/>
+            <a:ext cx="365040" cy="365040"/>
           </a:xfrm>
           <a:prstGeom prst="rect">
             <a:avLst/>
@@ -6885,7 +4992,7 @@
         <p:spPr>
           <a:xfrm>
             <a:off x="2880360" y="2301840"/>
-            <a:ext cx="1874160" cy="1339200"/>
+            <a:ext cx="1873800" cy="1338840"/>
           </a:xfrm>
           <a:prstGeom prst="rect">
             <a:avLst/>
@@ -6905,7 +5012,7 @@
         <p:spPr>
           <a:xfrm>
             <a:off x="2926080" y="3977640"/>
-            <a:ext cx="1782720" cy="594000"/>
+            <a:ext cx="1782360" cy="593640"/>
           </a:xfrm>
           <a:prstGeom prst="rect">
             <a:avLst/>
@@ -6984,7 +5091,7 @@
           <a:fontRef idx="minor"/>
         </p:style>
         <p:txBody>
-          <a:bodyPr lIns="90000" tIns="-44640" rIns="90000" bIns="-44640" anchor="t">
+          <a:bodyPr lIns="0" tIns="-44640" rIns="0" bIns="-44640" anchor="t">
             <a:noAutofit/>
           </a:bodyPr>
           <a:p>
@@ -7008,7 +5115,7 @@
         <p:spPr>
           <a:xfrm>
             <a:off x="5029200" y="1417320"/>
-            <a:ext cx="2057040" cy="3245760"/>
+            <a:ext cx="2056680" cy="3245400"/>
           </a:xfrm>
           <a:prstGeom prst="roundRect">
             <a:avLst>
@@ -7056,7 +5163,7 @@
         <p:spPr>
           <a:xfrm>
             <a:off x="5166360" y="1554480"/>
-            <a:ext cx="365400" cy="365400"/>
+            <a:ext cx="365040" cy="365040"/>
           </a:xfrm>
           <a:prstGeom prst="ellipse">
             <a:avLst/>
@@ -7102,7 +5209,7 @@
         <p:spPr>
           <a:xfrm>
             <a:off x="5166360" y="1554480"/>
-            <a:ext cx="365400" cy="365400"/>
+            <a:ext cx="365040" cy="365040"/>
           </a:xfrm>
           <a:prstGeom prst="rect">
             <a:avLst/>
@@ -7166,7 +5273,7 @@
         <p:spPr>
           <a:xfrm>
             <a:off x="5372280" y="2085840"/>
-            <a:ext cx="1371240" cy="1771560"/>
+            <a:ext cx="1370880" cy="1771200"/>
           </a:xfrm>
           <a:prstGeom prst="rect">
             <a:avLst/>
@@ -7186,7 +5293,7 @@
         <p:spPr>
           <a:xfrm>
             <a:off x="5166360" y="3977640"/>
-            <a:ext cx="1782720" cy="594000"/>
+            <a:ext cx="1782360" cy="593640"/>
           </a:xfrm>
           <a:prstGeom prst="rect">
             <a:avLst/>
@@ -7265,7 +5372,7 @@
           <a:fontRef idx="minor"/>
         </p:style>
         <p:txBody>
-          <a:bodyPr lIns="90000" tIns="-44640" rIns="90000" bIns="-44640" anchor="t">
+          <a:bodyPr lIns="0" tIns="-44640" rIns="0" bIns="-44640" anchor="t">
             <a:noAutofit/>
           </a:bodyPr>
           <a:p>
@@ -7289,7 +5396,7 @@
         <p:spPr>
           <a:xfrm>
             <a:off x="7269480" y="1417320"/>
-            <a:ext cx="2057040" cy="3245760"/>
+            <a:ext cx="2056680" cy="3245400"/>
           </a:xfrm>
           <a:prstGeom prst="roundRect">
             <a:avLst>
@@ -7337,7 +5444,7 @@
         <p:spPr>
           <a:xfrm>
             <a:off x="7406640" y="1554480"/>
-            <a:ext cx="365400" cy="365400"/>
+            <a:ext cx="365040" cy="365040"/>
           </a:xfrm>
           <a:prstGeom prst="ellipse">
             <a:avLst/>
@@ -7383,7 +5490,7 @@
         <p:spPr>
           <a:xfrm>
             <a:off x="7406640" y="1554480"/>
-            <a:ext cx="365400" cy="365400"/>
+            <a:ext cx="365040" cy="365040"/>
           </a:xfrm>
           <a:prstGeom prst="rect">
             <a:avLst/>
@@ -7443,7 +5550,7 @@
         <p:spPr>
           <a:xfrm>
             <a:off x="7406640" y="2148840"/>
-            <a:ext cx="1782720" cy="1645560"/>
+            <a:ext cx="1782360" cy="1645200"/>
           </a:xfrm>
           <a:prstGeom prst="rect">
             <a:avLst/>
@@ -7503,7 +5610,7 @@
         <p:spPr>
           <a:xfrm>
             <a:off x="7406640" y="3977640"/>
-            <a:ext cx="1782720" cy="594000"/>
+            <a:ext cx="1782360" cy="593640"/>
           </a:xfrm>
           <a:prstGeom prst="rect">
             <a:avLst/>
@@ -7582,7 +5689,7 @@
           <a:fontRef idx="minor"/>
         </p:style>
         <p:txBody>
-          <a:bodyPr lIns="90000" tIns="-44640" rIns="90000" bIns="-44640" anchor="t">
+          <a:bodyPr lIns="0" tIns="-44640" rIns="0" bIns="-44640" anchor="t">
             <a:noAutofit/>
           </a:bodyPr>
           <a:p>
@@ -7606,7 +5713,7 @@
         <p:spPr>
           <a:xfrm>
             <a:off x="9509760" y="1417320"/>
-            <a:ext cx="2057040" cy="3245760"/>
+            <a:ext cx="2370240" cy="3245400"/>
           </a:xfrm>
           <a:prstGeom prst="roundRect">
             <a:avLst>
@@ -7654,7 +5761,7 @@
         <p:spPr>
           <a:xfrm>
             <a:off x="9646920" y="1554480"/>
-            <a:ext cx="365400" cy="365400"/>
+            <a:ext cx="365040" cy="365040"/>
           </a:xfrm>
           <a:prstGeom prst="ellipse">
             <a:avLst/>
@@ -7700,7 +5807,7 @@
         <p:spPr>
           <a:xfrm>
             <a:off x="9646920" y="1554480"/>
-            <a:ext cx="365400" cy="365400"/>
+            <a:ext cx="365040" cy="365040"/>
           </a:xfrm>
           <a:prstGeom prst="rect">
             <a:avLst/>
@@ -7760,7 +5867,7 @@
         <p:spPr>
           <a:xfrm>
             <a:off x="9646920" y="2148840"/>
-            <a:ext cx="1782720" cy="1645560"/>
+            <a:ext cx="2233080" cy="1645200"/>
           </a:xfrm>
           <a:prstGeom prst="rect">
             <a:avLst/>
@@ -7798,7 +5905,7 @@
                 <a:uFillTx/>
                 <a:latin typeface="Calibri"/>
               </a:rPr>
-              <a:t>S = 0.4·Sg + 0.3·Sc + 0.3·Sl</a:t>
+              <a:t>S = 0.4·Sg + 0.3·Sc +0.3·Sl</a:t>
             </a:r>
             <a:endParaRPr lang="en-ZA" sz="1600" b="0" u="none" strike="noStrike">
               <a:solidFill>
@@ -7820,7 +5927,7 @@
         <p:spPr>
           <a:xfrm>
             <a:off x="9646920" y="3977640"/>
-            <a:ext cx="1782720" cy="594000"/>
+            <a:ext cx="1782360" cy="593640"/>
           </a:xfrm>
           <a:prstGeom prst="rect">
             <a:avLst/>
@@ -7880,7 +5987,7 @@
         <p:spPr>
           <a:xfrm>
             <a:off x="2606040" y="2743200"/>
-            <a:ext cx="182520" cy="365400"/>
+            <a:ext cx="182160" cy="365040"/>
           </a:xfrm>
           <a:prstGeom prst="rect">
             <a:avLst/>
@@ -7940,7 +6047,7 @@
         <p:spPr>
           <a:xfrm>
             <a:off x="4846320" y="2743200"/>
-            <a:ext cx="182520" cy="365400"/>
+            <a:ext cx="182160" cy="365040"/>
           </a:xfrm>
           <a:prstGeom prst="rect">
             <a:avLst/>
@@ -8000,7 +6107,7 @@
         <p:spPr>
           <a:xfrm>
             <a:off x="7086600" y="2743200"/>
-            <a:ext cx="182520" cy="365400"/>
+            <a:ext cx="182160" cy="365040"/>
           </a:xfrm>
           <a:prstGeom prst="rect">
             <a:avLst/>
@@ -8060,7 +6167,7 @@
         <p:spPr>
           <a:xfrm>
             <a:off x="9326880" y="2743200"/>
-            <a:ext cx="182520" cy="365400"/>
+            <a:ext cx="182160" cy="365040"/>
           </a:xfrm>
           <a:prstGeom prst="rect">
             <a:avLst/>
@@ -8120,7 +6227,7 @@
         <p:spPr>
           <a:xfrm>
             <a:off x="548640" y="4892040"/>
-            <a:ext cx="3565800" cy="639720"/>
+            <a:ext cx="3565440" cy="639360"/>
           </a:xfrm>
           <a:prstGeom prst="rect">
             <a:avLst/>
@@ -8191,7 +6298,7 @@
         <p:spPr>
           <a:xfrm>
             <a:off x="4297680" y="4892040"/>
-            <a:ext cx="3565800" cy="639720"/>
+            <a:ext cx="3565440" cy="639360"/>
           </a:xfrm>
           <a:prstGeom prst="rect">
             <a:avLst/>
@@ -8262,7 +6369,7 @@
         <p:spPr>
           <a:xfrm>
             <a:off x="8046720" y="4892040"/>
-            <a:ext cx="3565800" cy="639720"/>
+            <a:ext cx="3565440" cy="639360"/>
           </a:xfrm>
           <a:prstGeom prst="rect">
             <a:avLst/>
@@ -8333,7 +6440,7 @@
         <p:spPr>
           <a:xfrm>
             <a:off x="548640" y="5757840"/>
-            <a:ext cx="11063880" cy="639720"/>
+            <a:ext cx="11063520" cy="639360"/>
           </a:xfrm>
           <a:prstGeom prst="rect">
             <a:avLst/>
@@ -8460,7 +6567,7 @@
         <p:spPr>
           <a:xfrm>
             <a:off x="548640" y="365760"/>
-            <a:ext cx="11063880" cy="822600"/>
+            <a:ext cx="11063520" cy="822240"/>
           </a:xfrm>
           <a:prstGeom prst="rect">
             <a:avLst/>
@@ -8521,7 +6628,7 @@
         <p:spPr>
           <a:xfrm>
             <a:off x="10698480" y="6400800"/>
-            <a:ext cx="914040" cy="273960"/>
+            <a:ext cx="913680" cy="273600"/>
           </a:xfrm>
           <a:prstGeom prst="rect">
             <a:avLst/>
@@ -8580,7 +6687,7 @@
         </p:nvGraphicFramePr>
         <p:xfrm>
           <a:off x="548640" y="1463040"/>
-          <a:ext cx="6949080" cy="3401280"/>
+          <a:ext cx="6949080" cy="3966480"/>
         </p:xfrm>
         <a:graphic>
           <a:graphicData uri="http://schemas.openxmlformats.org/drawingml/2006/table">
@@ -9009,7 +7116,7 @@
                           <a:uFillTx/>
                           <a:latin typeface="Calibri"/>
                         </a:rPr>
-                        <a:t>[__]</a:t>
+                        <a:t>52.3</a:t>
                       </a:r>
                       <a:endParaRPr lang="en-ZA" sz="1600" b="0" u="none" strike="noStrike">
                         <a:solidFill>
@@ -9074,7 +7181,7 @@
                           <a:uFillTx/>
                           <a:latin typeface="Calibri"/>
                         </a:rPr>
-                        <a:t>[__]</a:t>
+                        <a:t>52.0</a:t>
                       </a:r>
                       <a:endParaRPr lang="en-ZA" sz="1600" b="0" u="none" strike="noStrike">
                         <a:solidFill>
@@ -9139,7 +7246,7 @@
                           <a:uFillTx/>
                           <a:latin typeface="Calibri"/>
                         </a:rPr>
-                        <a:t>[__]</a:t>
+                        <a:t>98.4</a:t>
                       </a:r>
                       <a:endParaRPr lang="en-ZA" sz="1600" b="0" u="none" strike="noStrike">
                         <a:solidFill>
@@ -9204,7 +7311,7 @@
                           <a:uFillTx/>
                           <a:latin typeface="Calibri"/>
                         </a:rPr>
-                        <a:t>[__]</a:t>
+                        <a:t>21.0</a:t>
                       </a:r>
                       <a:endParaRPr lang="en-ZA" sz="1600" b="0" u="none" strike="noStrike">
                         <a:solidFill>
@@ -9271,7 +7378,7 @@
                           <a:uFillTx/>
                           <a:latin typeface="Calibri"/>
                         </a:rPr>
-                        <a:t>Global</a:t>
+                        <a:t>EVA02 alone</a:t>
                       </a:r>
                       <a:endParaRPr lang="en-ZA" sz="1600" b="0" u="none" strike="noStrike">
                         <a:solidFill>
@@ -9336,7 +7443,7 @@
                           <a:uFillTx/>
                           <a:latin typeface="Calibri"/>
                         </a:rPr>
-                        <a:t>[__]</a:t>
+                        <a:t>42.7</a:t>
                       </a:r>
                       <a:endParaRPr lang="en-ZA" sz="1600" b="0" u="none" strike="noStrike">
                         <a:solidFill>
@@ -9401,7 +7508,7 @@
                           <a:uFillTx/>
                           <a:latin typeface="Calibri"/>
                         </a:rPr>
-                        <a:t>[__]</a:t>
+                        <a:t>50.4</a:t>
                       </a:r>
                       <a:endParaRPr lang="en-ZA" sz="1600" b="0" u="none" strike="noStrike">
                         <a:solidFill>
@@ -9466,7 +7573,7 @@
                           <a:uFillTx/>
                           <a:latin typeface="Calibri"/>
                         </a:rPr>
-                        <a:t>[__]</a:t>
+                        <a:t>95.1</a:t>
                       </a:r>
                       <a:endParaRPr lang="en-ZA" sz="1600" b="0" u="none" strike="noStrike">
                         <a:solidFill>
@@ -9531,7 +7638,7 @@
                           <a:uFillTx/>
                           <a:latin typeface="Calibri"/>
                         </a:rPr>
-                        <a:t>[__]</a:t>
+                        <a:t>16.1</a:t>
                       </a:r>
                       <a:endParaRPr lang="en-ZA" sz="1600" b="0" u="none" strike="noStrike">
                         <a:solidFill>
@@ -9570,6 +7677,333 @@
                     </a:lnB>
                     <a:solidFill>
                       <a:srgbClr val="F2F5F1"/>
+                    </a:solidFill>
+                  </a:tcPr>
+                </a:tc>
+              </a:tr>
+              <a:tr h="566640">
+                <a:tc>
+                  <a:txBody>
+                    <a:bodyPr anchor="ctr">
+                      <a:noAutofit/>
+                    </a:bodyPr>
+                    <a:p>
+                      <a:pPr defTabSz="914400">
+                        <a:lnSpc>
+                          <a:spcPct val="100000"/>
+                        </a:lnSpc>
+                        <a:tabLst>
+                          <a:tab pos="0" algn="l"/>
+                        </a:tabLst>
+                      </a:pPr>
+                      <a:r>
+                        <a:rPr lang="en-US" sz="1600" b="0" u="none" strike="noStrike">
+                          <a:solidFill>
+                            <a:srgbClr val="14231C"/>
+                          </a:solidFill>
+                          <a:effectLst/>
+                          <a:uFillTx/>
+                          <a:latin typeface="Calibri"/>
+                        </a:rPr>
+                        <a:t>Global (fine-tuned)</a:t>
+                      </a:r>
+                      <a:endParaRPr lang="en-ZA" sz="1600" b="0" u="none" strike="noStrike">
+                        <a:solidFill>
+                          <a:srgbClr val="000000"/>
+                        </a:solidFill>
+                        <a:effectLst/>
+                        <a:uFillTx/>
+                        <a:latin typeface="Arial"/>
+                      </a:endParaRPr>
+                    </a:p>
+                  </a:txBody>
+                  <a:tcPr anchor="ctr" marL="91440" marR="91440" marT="45720" marB="45720">
+                    <a:lnL w="12240">
+                      <a:solidFill>
+                        <a:srgbClr val="DDE6DF"/>
+                      </a:solidFill>
+                      <a:prstDash val="solid"/>
+                    </a:lnL>
+                    <a:lnR w="12240">
+                      <a:solidFill>
+                        <a:srgbClr val="DDE6DF"/>
+                      </a:solidFill>
+                      <a:prstDash val="solid"/>
+                    </a:lnR>
+                    <a:lnT w="12240">
+                      <a:solidFill>
+                        <a:srgbClr val="DDE6DF"/>
+                      </a:solidFill>
+                      <a:prstDash val="solid"/>
+                    </a:lnT>
+                    <a:lnB w="12240">
+                      <a:solidFill>
+                        <a:srgbClr val="DDE6DF"/>
+                      </a:solidFill>
+                      <a:prstDash val="solid"/>
+                    </a:lnB>
+                    <a:solidFill>
+                      <a:srgbClr val="FFFFFF"/>
+                    </a:solidFill>
+                  </a:tcPr>
+                </a:tc>
+                <a:tc>
+                  <a:txBody>
+                    <a:bodyPr anchor="ctr">
+                      <a:noAutofit/>
+                    </a:bodyPr>
+                    <a:p>
+                      <a:pPr algn="r" defTabSz="914400">
+                        <a:lnSpc>
+                          <a:spcPct val="100000"/>
+                        </a:lnSpc>
+                        <a:tabLst>
+                          <a:tab pos="0" algn="l"/>
+                        </a:tabLst>
+                      </a:pPr>
+                      <a:r>
+                        <a:rPr lang="en-US" sz="1600" b="0" u="none" strike="noStrike">
+                          <a:solidFill>
+                            <a:srgbClr val="14231C"/>
+                          </a:solidFill>
+                          <a:effectLst/>
+                          <a:uFillTx/>
+                          <a:latin typeface="Calibri"/>
+                        </a:rPr>
+                        <a:t>81.1</a:t>
+                      </a:r>
+                      <a:endParaRPr lang="en-ZA" sz="1600" b="0" u="none" strike="noStrike">
+                        <a:solidFill>
+                          <a:srgbClr val="000000"/>
+                        </a:solidFill>
+                        <a:effectLst/>
+                        <a:uFillTx/>
+                        <a:latin typeface="Arial"/>
+                      </a:endParaRPr>
+                    </a:p>
+                  </a:txBody>
+                  <a:tcPr anchor="ctr" marL="91440" marR="91440" marT="45720" marB="45720">
+                    <a:lnL w="12240">
+                      <a:solidFill>
+                        <a:srgbClr val="DDE6DF"/>
+                      </a:solidFill>
+                      <a:prstDash val="solid"/>
+                    </a:lnL>
+                    <a:lnR w="12240">
+                      <a:solidFill>
+                        <a:srgbClr val="DDE6DF"/>
+                      </a:solidFill>
+                      <a:prstDash val="solid"/>
+                    </a:lnR>
+                    <a:lnT w="12240">
+                      <a:solidFill>
+                        <a:srgbClr val="DDE6DF"/>
+                      </a:solidFill>
+                      <a:prstDash val="solid"/>
+                    </a:lnT>
+                    <a:lnB w="12240">
+                      <a:solidFill>
+                        <a:srgbClr val="DDE6DF"/>
+                      </a:solidFill>
+                      <a:prstDash val="solid"/>
+                    </a:lnB>
+                    <a:solidFill>
+                      <a:srgbClr val="FFFFFF"/>
+                    </a:solidFill>
+                  </a:tcPr>
+                </a:tc>
+                <a:tc>
+                  <a:txBody>
+                    <a:bodyPr anchor="ctr">
+                      <a:noAutofit/>
+                    </a:bodyPr>
+                    <a:p>
+                      <a:pPr algn="r" defTabSz="914400">
+                        <a:lnSpc>
+                          <a:spcPct val="100000"/>
+                        </a:lnSpc>
+                        <a:tabLst>
+                          <a:tab pos="0" algn="l"/>
+                        </a:tabLst>
+                      </a:pPr>
+                      <a:r>
+                        <a:rPr lang="en-US" sz="1600" b="0" u="none" strike="noStrike">
+                          <a:solidFill>
+                            <a:srgbClr val="14231C"/>
+                          </a:solidFill>
+                          <a:effectLst/>
+                          <a:uFillTx/>
+                          <a:latin typeface="Calibri"/>
+                        </a:rPr>
+                        <a:t>73.3</a:t>
+                      </a:r>
+                      <a:endParaRPr lang="en-ZA" sz="1600" b="0" u="none" strike="noStrike">
+                        <a:solidFill>
+                          <a:srgbClr val="000000"/>
+                        </a:solidFill>
+                        <a:effectLst/>
+                        <a:uFillTx/>
+                        <a:latin typeface="Arial"/>
+                      </a:endParaRPr>
+                    </a:p>
+                  </a:txBody>
+                  <a:tcPr anchor="ctr" marL="91440" marR="91440" marT="45720" marB="45720">
+                    <a:lnL w="12240">
+                      <a:solidFill>
+                        <a:srgbClr val="DDE6DF"/>
+                      </a:solidFill>
+                      <a:prstDash val="solid"/>
+                    </a:lnL>
+                    <a:lnR w="12240">
+                      <a:solidFill>
+                        <a:srgbClr val="DDE6DF"/>
+                      </a:solidFill>
+                      <a:prstDash val="solid"/>
+                    </a:lnR>
+                    <a:lnT w="12240">
+                      <a:solidFill>
+                        <a:srgbClr val="DDE6DF"/>
+                      </a:solidFill>
+                      <a:prstDash val="solid"/>
+                    </a:lnT>
+                    <a:lnB w="12240">
+                      <a:solidFill>
+                        <a:srgbClr val="DDE6DF"/>
+                      </a:solidFill>
+                      <a:prstDash val="solid"/>
+                    </a:lnB>
+                    <a:solidFill>
+                      <a:srgbClr val="FFFFFF"/>
+                    </a:solidFill>
+                  </a:tcPr>
+                </a:tc>
+                <a:tc>
+                  <a:txBody>
+                    <a:bodyPr anchor="ctr">
+                      <a:noAutofit/>
+                    </a:bodyPr>
+                    <a:p>
+                      <a:pPr algn="r" defTabSz="914400">
+                        <a:lnSpc>
+                          <a:spcPct val="100000"/>
+                        </a:lnSpc>
+                        <a:tabLst>
+                          <a:tab pos="0" algn="l"/>
+                        </a:tabLst>
+                      </a:pPr>
+                      <a:r>
+                        <a:rPr lang="en-US" sz="1600" b="0" u="none" strike="noStrike">
+                          <a:solidFill>
+                            <a:srgbClr val="14231C"/>
+                          </a:solidFill>
+                          <a:effectLst/>
+                          <a:uFillTx/>
+                          <a:latin typeface="Calibri"/>
+                        </a:rPr>
+                        <a:t>83.3</a:t>
+                      </a:r>
+                      <a:endParaRPr lang="en-ZA" sz="1600" b="0" u="none" strike="noStrike">
+                        <a:solidFill>
+                          <a:srgbClr val="000000"/>
+                        </a:solidFill>
+                        <a:effectLst/>
+                        <a:uFillTx/>
+                        <a:latin typeface="Arial"/>
+                      </a:endParaRPr>
+                    </a:p>
+                  </a:txBody>
+                  <a:tcPr anchor="ctr" marL="91440" marR="91440" marT="45720" marB="45720">
+                    <a:lnL w="12240">
+                      <a:solidFill>
+                        <a:srgbClr val="DDE6DF"/>
+                      </a:solidFill>
+                      <a:prstDash val="solid"/>
+                    </a:lnL>
+                    <a:lnR w="12240">
+                      <a:solidFill>
+                        <a:srgbClr val="DDE6DF"/>
+                      </a:solidFill>
+                      <a:prstDash val="solid"/>
+                    </a:lnR>
+                    <a:lnT w="12240">
+                      <a:solidFill>
+                        <a:srgbClr val="DDE6DF"/>
+                      </a:solidFill>
+                      <a:prstDash val="solid"/>
+                    </a:lnT>
+                    <a:lnB w="12240">
+                      <a:solidFill>
+                        <a:srgbClr val="DDE6DF"/>
+                      </a:solidFill>
+                      <a:prstDash val="solid"/>
+                    </a:lnB>
+                    <a:solidFill>
+                      <a:srgbClr val="FFFFFF"/>
+                    </a:solidFill>
+                  </a:tcPr>
+                </a:tc>
+                <a:tc>
+                  <a:txBody>
+                    <a:bodyPr anchor="ctr">
+                      <a:noAutofit/>
+                    </a:bodyPr>
+                    <a:p>
+                      <a:pPr algn="r" defTabSz="914400">
+                        <a:lnSpc>
+                          <a:spcPct val="100000"/>
+                        </a:lnSpc>
+                        <a:tabLst>
+                          <a:tab pos="0" algn="l"/>
+                        </a:tabLst>
+                      </a:pPr>
+                      <a:r>
+                        <a:rPr lang="en-US" sz="1600" b="0" u="none" strike="noStrike">
+                          <a:solidFill>
+                            <a:srgbClr val="14231C"/>
+                          </a:solidFill>
+                          <a:effectLst/>
+                          <a:uFillTx/>
+                          <a:latin typeface="Calibri"/>
+                        </a:rPr>
+                        <a:t>72.8</a:t>
+                      </a:r>
+                      <a:endParaRPr lang="en-ZA" sz="1600" b="0" u="none" strike="noStrike">
+                        <a:solidFill>
+                          <a:srgbClr val="000000"/>
+                        </a:solidFill>
+                        <a:effectLst/>
+                        <a:uFillTx/>
+                        <a:latin typeface="Arial"/>
+                      </a:endParaRPr>
+                    </a:p>
+                  </a:txBody>
+                  <a:tcPr anchor="ctr" marL="91440" marR="91440" marT="45720" marB="45720">
+                    <a:lnL w="12240">
+                      <a:solidFill>
+                        <a:srgbClr val="DDE6DF"/>
+                      </a:solidFill>
+                      <a:prstDash val="solid"/>
+                    </a:lnL>
+                    <a:lnR w="12240">
+                      <a:solidFill>
+                        <a:srgbClr val="DDE6DF"/>
+                      </a:solidFill>
+                      <a:prstDash val="solid"/>
+                    </a:lnR>
+                    <a:lnT w="12240">
+                      <a:solidFill>
+                        <a:srgbClr val="DDE6DF"/>
+                      </a:solidFill>
+                      <a:prstDash val="solid"/>
+                    </a:lnT>
+                    <a:lnB w="12240">
+                      <a:solidFill>
+                        <a:srgbClr val="DDE6DF"/>
+                      </a:solidFill>
+                      <a:prstDash val="solid"/>
+                    </a:lnB>
+                    <a:solidFill>
+                      <a:srgbClr val="FFFFFF"/>
                     </a:solidFill>
                   </a:tcPr>
                 </a:tc>
@@ -9636,7 +8070,7 @@
                       <a:prstDash val="solid"/>
                     </a:lnB>
                     <a:solidFill>
-                      <a:srgbClr val="FFFFFF"/>
+                      <a:srgbClr val="F2F5F1"/>
                     </a:solidFill>
                   </a:tcPr>
                 </a:tc>
@@ -9663,269 +8097,7 @@
                           <a:uFillTx/>
                           <a:latin typeface="Calibri"/>
                         </a:rPr>
-                        <a:t>[__]</a:t>
-                      </a:r>
-                      <a:endParaRPr lang="en-ZA" sz="1600" b="0" u="none" strike="noStrike">
-                        <a:solidFill>
-                          <a:srgbClr val="000000"/>
-                        </a:solidFill>
-                        <a:effectLst/>
-                        <a:uFillTx/>
-                        <a:latin typeface="Arial"/>
-                      </a:endParaRPr>
-                    </a:p>
-                  </a:txBody>
-                  <a:tcPr anchor="ctr" marL="91440" marR="91440" marT="45720" marB="45720">
-                    <a:lnL w="12240">
-                      <a:solidFill>
-                        <a:srgbClr val="DDE6DF"/>
-                      </a:solidFill>
-                      <a:prstDash val="solid"/>
-                    </a:lnL>
-                    <a:lnR w="12240">
-                      <a:solidFill>
-                        <a:srgbClr val="DDE6DF"/>
-                      </a:solidFill>
-                      <a:prstDash val="solid"/>
-                    </a:lnR>
-                    <a:lnT w="12240">
-                      <a:solidFill>
-                        <a:srgbClr val="DDE6DF"/>
-                      </a:solidFill>
-                      <a:prstDash val="solid"/>
-                    </a:lnT>
-                    <a:lnB w="12240">
-                      <a:solidFill>
-                        <a:srgbClr val="DDE6DF"/>
-                      </a:solidFill>
-                      <a:prstDash val="solid"/>
-                    </a:lnB>
-                    <a:solidFill>
-                      <a:srgbClr val="FFFFFF"/>
-                    </a:solidFill>
-                  </a:tcPr>
-                </a:tc>
-                <a:tc>
-                  <a:txBody>
-                    <a:bodyPr anchor="ctr">
-                      <a:noAutofit/>
-                    </a:bodyPr>
-                    <a:p>
-                      <a:pPr algn="r" defTabSz="914400">
-                        <a:lnSpc>
-                          <a:spcPct val="100000"/>
-                        </a:lnSpc>
-                        <a:tabLst>
-                          <a:tab pos="0" algn="l"/>
-                        </a:tabLst>
-                      </a:pPr>
-                      <a:r>
-                        <a:rPr lang="en-US" sz="1600" b="0" u="none" strike="noStrike">
-                          <a:solidFill>
-                            <a:srgbClr val="14231C"/>
-                          </a:solidFill>
-                          <a:effectLst/>
-                          <a:uFillTx/>
-                          <a:latin typeface="Calibri"/>
-                        </a:rPr>
-                        <a:t>[__]</a:t>
-                      </a:r>
-                      <a:endParaRPr lang="en-ZA" sz="1600" b="0" u="none" strike="noStrike">
-                        <a:solidFill>
-                          <a:srgbClr val="000000"/>
-                        </a:solidFill>
-                        <a:effectLst/>
-                        <a:uFillTx/>
-                        <a:latin typeface="Arial"/>
-                      </a:endParaRPr>
-                    </a:p>
-                  </a:txBody>
-                  <a:tcPr anchor="ctr" marL="91440" marR="91440" marT="45720" marB="45720">
-                    <a:lnL w="12240">
-                      <a:solidFill>
-                        <a:srgbClr val="DDE6DF"/>
-                      </a:solidFill>
-                      <a:prstDash val="solid"/>
-                    </a:lnL>
-                    <a:lnR w="12240">
-                      <a:solidFill>
-                        <a:srgbClr val="DDE6DF"/>
-                      </a:solidFill>
-                      <a:prstDash val="solid"/>
-                    </a:lnR>
-                    <a:lnT w="12240">
-                      <a:solidFill>
-                        <a:srgbClr val="DDE6DF"/>
-                      </a:solidFill>
-                      <a:prstDash val="solid"/>
-                    </a:lnT>
-                    <a:lnB w="12240">
-                      <a:solidFill>
-                        <a:srgbClr val="DDE6DF"/>
-                      </a:solidFill>
-                      <a:prstDash val="solid"/>
-                    </a:lnB>
-                    <a:solidFill>
-                      <a:srgbClr val="FFFFFF"/>
-                    </a:solidFill>
-                  </a:tcPr>
-                </a:tc>
-                <a:tc>
-                  <a:txBody>
-                    <a:bodyPr anchor="ctr">
-                      <a:noAutofit/>
-                    </a:bodyPr>
-                    <a:p>
-                      <a:pPr algn="r" defTabSz="914400">
-                        <a:lnSpc>
-                          <a:spcPct val="100000"/>
-                        </a:lnSpc>
-                        <a:tabLst>
-                          <a:tab pos="0" algn="l"/>
-                        </a:tabLst>
-                      </a:pPr>
-                      <a:r>
-                        <a:rPr lang="en-US" sz="1600" b="0" u="none" strike="noStrike">
-                          <a:solidFill>
-                            <a:srgbClr val="14231C"/>
-                          </a:solidFill>
-                          <a:effectLst/>
-                          <a:uFillTx/>
-                          <a:latin typeface="Calibri"/>
-                        </a:rPr>
-                        <a:t>[__]</a:t>
-                      </a:r>
-                      <a:endParaRPr lang="en-ZA" sz="1600" b="0" u="none" strike="noStrike">
-                        <a:solidFill>
-                          <a:srgbClr val="000000"/>
-                        </a:solidFill>
-                        <a:effectLst/>
-                        <a:uFillTx/>
-                        <a:latin typeface="Arial"/>
-                      </a:endParaRPr>
-                    </a:p>
-                  </a:txBody>
-                  <a:tcPr anchor="ctr" marL="91440" marR="91440" marT="45720" marB="45720">
-                    <a:lnL w="12240">
-                      <a:solidFill>
-                        <a:srgbClr val="DDE6DF"/>
-                      </a:solidFill>
-                      <a:prstDash val="solid"/>
-                    </a:lnL>
-                    <a:lnR w="12240">
-                      <a:solidFill>
-                        <a:srgbClr val="DDE6DF"/>
-                      </a:solidFill>
-                      <a:prstDash val="solid"/>
-                    </a:lnR>
-                    <a:lnT w="12240">
-                      <a:solidFill>
-                        <a:srgbClr val="DDE6DF"/>
-                      </a:solidFill>
-                      <a:prstDash val="solid"/>
-                    </a:lnT>
-                    <a:lnB w="12240">
-                      <a:solidFill>
-                        <a:srgbClr val="DDE6DF"/>
-                      </a:solidFill>
-                      <a:prstDash val="solid"/>
-                    </a:lnB>
-                    <a:solidFill>
-                      <a:srgbClr val="FFFFFF"/>
-                    </a:solidFill>
-                  </a:tcPr>
-                </a:tc>
-                <a:tc>
-                  <a:txBody>
-                    <a:bodyPr anchor="ctr">
-                      <a:noAutofit/>
-                    </a:bodyPr>
-                    <a:p>
-                      <a:pPr algn="r" defTabSz="914400">
-                        <a:lnSpc>
-                          <a:spcPct val="100000"/>
-                        </a:lnSpc>
-                        <a:tabLst>
-                          <a:tab pos="0" algn="l"/>
-                        </a:tabLst>
-                      </a:pPr>
-                      <a:r>
-                        <a:rPr lang="en-US" sz="1600" b="0" u="none" strike="noStrike">
-                          <a:solidFill>
-                            <a:srgbClr val="14231C"/>
-                          </a:solidFill>
-                          <a:effectLst/>
-                          <a:uFillTx/>
-                          <a:latin typeface="Calibri"/>
-                        </a:rPr>
-                        <a:t>[__]</a:t>
-                      </a:r>
-                      <a:endParaRPr lang="en-ZA" sz="1600" b="0" u="none" strike="noStrike">
-                        <a:solidFill>
-                          <a:srgbClr val="000000"/>
-                        </a:solidFill>
-                        <a:effectLst/>
-                        <a:uFillTx/>
-                        <a:latin typeface="Arial"/>
-                      </a:endParaRPr>
-                    </a:p>
-                  </a:txBody>
-                  <a:tcPr anchor="ctr" marL="91440" marR="91440" marT="45720" marB="45720">
-                    <a:lnL w="12240">
-                      <a:solidFill>
-                        <a:srgbClr val="DDE6DF"/>
-                      </a:solidFill>
-                      <a:prstDash val="solid"/>
-                    </a:lnL>
-                    <a:lnR w="12240">
-                      <a:solidFill>
-                        <a:srgbClr val="DDE6DF"/>
-                      </a:solidFill>
-                      <a:prstDash val="solid"/>
-                    </a:lnR>
-                    <a:lnT w="12240">
-                      <a:solidFill>
-                        <a:srgbClr val="DDE6DF"/>
-                      </a:solidFill>
-                      <a:prstDash val="solid"/>
-                    </a:lnT>
-                    <a:lnB w="12240">
-                      <a:solidFill>
-                        <a:srgbClr val="DDE6DF"/>
-                      </a:solidFill>
-                      <a:prstDash val="solid"/>
-                    </a:lnB>
-                    <a:solidFill>
-                      <a:srgbClr val="FFFFFF"/>
-                    </a:solidFill>
-                  </a:tcPr>
-                </a:tc>
-              </a:tr>
-              <a:tr h="566640">
-                <a:tc>
-                  <a:txBody>
-                    <a:bodyPr anchor="ctr">
-                      <a:noAutofit/>
-                    </a:bodyPr>
-                    <a:p>
-                      <a:pPr defTabSz="914400">
-                        <a:lnSpc>
-                          <a:spcPct val="100000"/>
-                        </a:lnSpc>
-                        <a:tabLst>
-                          <a:tab pos="0" algn="l"/>
-                        </a:tabLst>
-                      </a:pPr>
-                      <a:r>
-                        <a:rPr lang="en-US" sz="1600" b="0" u="none" strike="noStrike">
-                          <a:solidFill>
-                            <a:srgbClr val="14231C"/>
-                          </a:solidFill>
-                          <a:effectLst/>
-                          <a:uFillTx/>
-                          <a:latin typeface="Calibri"/>
-                        </a:rPr>
-                        <a:t>Global + ALIKED</a:t>
+                        <a:t>81.1</a:t>
                       </a:r>
                       <a:endParaRPr lang="en-ZA" sz="1600" b="0" u="none" strike="noStrike">
                         <a:solidFill>
@@ -9990,7 +8162,7 @@
                           <a:uFillTx/>
                           <a:latin typeface="Calibri"/>
                         </a:rPr>
-                        <a:t>[__]</a:t>
+                        <a:t>73.3</a:t>
                       </a:r>
                       <a:endParaRPr lang="en-ZA" sz="1600" b="0" u="none" strike="noStrike">
                         <a:solidFill>
@@ -10055,7 +8227,7 @@
                           <a:uFillTx/>
                           <a:latin typeface="Calibri"/>
                         </a:rPr>
-                        <a:t>[__]</a:t>
+                        <a:t>83.5</a:t>
                       </a:r>
                       <a:endParaRPr lang="en-ZA" sz="1600" b="0" u="none" strike="noStrike">
                         <a:solidFill>
@@ -10120,72 +8292,7 @@
                           <a:uFillTx/>
                           <a:latin typeface="Calibri"/>
                         </a:rPr>
-                        <a:t>[__]</a:t>
-                      </a:r>
-                      <a:endParaRPr lang="en-ZA" sz="1600" b="0" u="none" strike="noStrike">
-                        <a:solidFill>
-                          <a:srgbClr val="000000"/>
-                        </a:solidFill>
-                        <a:effectLst/>
-                        <a:uFillTx/>
-                        <a:latin typeface="Arial"/>
-                      </a:endParaRPr>
-                    </a:p>
-                  </a:txBody>
-                  <a:tcPr anchor="ctr" marL="91440" marR="91440" marT="45720" marB="45720">
-                    <a:lnL w="12240">
-                      <a:solidFill>
-                        <a:srgbClr val="DDE6DF"/>
-                      </a:solidFill>
-                      <a:prstDash val="solid"/>
-                    </a:lnL>
-                    <a:lnR w="12240">
-                      <a:solidFill>
-                        <a:srgbClr val="DDE6DF"/>
-                      </a:solidFill>
-                      <a:prstDash val="solid"/>
-                    </a:lnR>
-                    <a:lnT w="12240">
-                      <a:solidFill>
-                        <a:srgbClr val="DDE6DF"/>
-                      </a:solidFill>
-                      <a:prstDash val="solid"/>
-                    </a:lnT>
-                    <a:lnB w="12240">
-                      <a:solidFill>
-                        <a:srgbClr val="DDE6DF"/>
-                      </a:solidFill>
-                      <a:prstDash val="solid"/>
-                    </a:lnB>
-                    <a:solidFill>
-                      <a:srgbClr val="F2F5F1"/>
-                    </a:solidFill>
-                  </a:tcPr>
-                </a:tc>
-                <a:tc>
-                  <a:txBody>
-                    <a:bodyPr anchor="ctr">
-                      <a:noAutofit/>
-                    </a:bodyPr>
-                    <a:p>
-                      <a:pPr algn="r" defTabSz="914400">
-                        <a:lnSpc>
-                          <a:spcPct val="100000"/>
-                        </a:lnSpc>
-                        <a:tabLst>
-                          <a:tab pos="0" algn="l"/>
-                        </a:tabLst>
-                      </a:pPr>
-                      <a:r>
-                        <a:rPr lang="en-US" sz="1600" b="0" u="none" strike="noStrike">
-                          <a:solidFill>
-                            <a:srgbClr val="14231C"/>
-                          </a:solidFill>
-                          <a:effectLst/>
-                          <a:uFillTx/>
-                          <a:latin typeface="Calibri"/>
-                        </a:rPr>
-                        <a:t>[__]</a:t>
+                        <a:t>72.9</a:t>
                       </a:r>
                       <a:endParaRPr lang="en-ZA" sz="1600" b="0" u="none" strike="noStrike">
                         <a:solidFill>
@@ -10252,7 +8359,7 @@
                           <a:uFillTx/>
                           <a:latin typeface="Calibri"/>
                         </a:rPr>
-                        <a:t>All three, fused</a:t>
+                        <a:t>Global + EVA02 *</a:t>
                       </a:r>
                       <a:endParaRPr lang="en-ZA" sz="1600" b="0" u="none" strike="noStrike">
                         <a:solidFill>
@@ -10317,7 +8424,7 @@
                           <a:uFillTx/>
                           <a:latin typeface="Calibri"/>
                         </a:rPr>
-                        <a:t>[__]</a:t>
+                        <a:t>81.8</a:t>
                       </a:r>
                       <a:endParaRPr lang="en-ZA" sz="1600" b="0" u="none" strike="noStrike">
                         <a:solidFill>
@@ -10382,7 +8489,7 @@
                           <a:uFillTx/>
                           <a:latin typeface="Calibri"/>
                         </a:rPr>
-                        <a:t>[__]</a:t>
+                        <a:t>79.0</a:t>
                       </a:r>
                       <a:endParaRPr lang="en-ZA" sz="1600" b="0" u="none" strike="noStrike">
                         <a:solidFill>
@@ -10447,7 +8554,7 @@
                           <a:uFillTx/>
                           <a:latin typeface="Calibri"/>
                         </a:rPr>
-                        <a:t>[__]</a:t>
+                        <a:t>91.1</a:t>
                       </a:r>
                       <a:endParaRPr lang="en-ZA" sz="1600" b="0" u="none" strike="noStrike">
                         <a:solidFill>
@@ -10512,7 +8619,334 @@
                           <a:uFillTx/>
                           <a:latin typeface="Calibri"/>
                         </a:rPr>
-                        <a:t>[__]</a:t>
+                        <a:t>75.8</a:t>
+                      </a:r>
+                      <a:endParaRPr lang="en-ZA" sz="1600" b="0" u="none" strike="noStrike">
+                        <a:solidFill>
+                          <a:srgbClr val="000000"/>
+                        </a:solidFill>
+                        <a:effectLst/>
+                        <a:uFillTx/>
+                        <a:latin typeface="Arial"/>
+                      </a:endParaRPr>
+                    </a:p>
+                  </a:txBody>
+                  <a:tcPr anchor="ctr" marL="91440" marR="91440" marT="45720" marB="45720">
+                    <a:lnL w="12240">
+                      <a:solidFill>
+                        <a:srgbClr val="DDE6DF"/>
+                      </a:solidFill>
+                      <a:prstDash val="solid"/>
+                    </a:lnL>
+                    <a:lnR w="12240">
+                      <a:solidFill>
+                        <a:srgbClr val="DDE6DF"/>
+                      </a:solidFill>
+                      <a:prstDash val="solid"/>
+                    </a:lnR>
+                    <a:lnT w="12240">
+                      <a:solidFill>
+                        <a:srgbClr val="DDE6DF"/>
+                      </a:solidFill>
+                      <a:prstDash val="solid"/>
+                    </a:lnT>
+                    <a:lnB w="12240">
+                      <a:solidFill>
+                        <a:srgbClr val="DDE6DF"/>
+                      </a:solidFill>
+                      <a:prstDash val="solid"/>
+                    </a:lnB>
+                    <a:solidFill>
+                      <a:srgbClr val="FBF1DC"/>
+                    </a:solidFill>
+                  </a:tcPr>
+                </a:tc>
+              </a:tr>
+              <a:tr h="566640">
+                <a:tc>
+                  <a:txBody>
+                    <a:bodyPr anchor="ctr">
+                      <a:noAutofit/>
+                    </a:bodyPr>
+                    <a:p>
+                      <a:pPr defTabSz="914400">
+                        <a:lnSpc>
+                          <a:spcPct val="100000"/>
+                        </a:lnSpc>
+                        <a:tabLst>
+                          <a:tab pos="0" algn="l"/>
+                        </a:tabLst>
+                      </a:pPr>
+                      <a:r>
+                        <a:rPr lang="en-US" sz="1600" b="1" u="none" strike="noStrike">
+                          <a:solidFill>
+                            <a:srgbClr val="14231C"/>
+                          </a:solidFill>
+                          <a:effectLst/>
+                          <a:uFillTx/>
+                          <a:latin typeface="Calibri"/>
+                        </a:rPr>
+                        <a:t>All three, fused *</a:t>
+                      </a:r>
+                      <a:endParaRPr lang="en-ZA" sz="1600" b="0" u="none" strike="noStrike">
+                        <a:solidFill>
+                          <a:srgbClr val="000000"/>
+                        </a:solidFill>
+                        <a:effectLst/>
+                        <a:uFillTx/>
+                        <a:latin typeface="Arial"/>
+                      </a:endParaRPr>
+                    </a:p>
+                  </a:txBody>
+                  <a:tcPr anchor="ctr" marL="91440" marR="91440" marT="45720" marB="45720">
+                    <a:lnL w="12240">
+                      <a:solidFill>
+                        <a:srgbClr val="DDE6DF"/>
+                      </a:solidFill>
+                      <a:prstDash val="solid"/>
+                    </a:lnL>
+                    <a:lnR w="12240">
+                      <a:solidFill>
+                        <a:srgbClr val="DDE6DF"/>
+                      </a:solidFill>
+                      <a:prstDash val="solid"/>
+                    </a:lnR>
+                    <a:lnT w="12240">
+                      <a:solidFill>
+                        <a:srgbClr val="DDE6DF"/>
+                      </a:solidFill>
+                      <a:prstDash val="solid"/>
+                    </a:lnT>
+                    <a:lnB w="12240">
+                      <a:solidFill>
+                        <a:srgbClr val="DDE6DF"/>
+                      </a:solidFill>
+                      <a:prstDash val="solid"/>
+                    </a:lnB>
+                    <a:solidFill>
+                      <a:srgbClr val="FBF1DC"/>
+                    </a:solidFill>
+                  </a:tcPr>
+                </a:tc>
+                <a:tc>
+                  <a:txBody>
+                    <a:bodyPr anchor="ctr">
+                      <a:noAutofit/>
+                    </a:bodyPr>
+                    <a:p>
+                      <a:pPr algn="r" defTabSz="914400">
+                        <a:lnSpc>
+                          <a:spcPct val="100000"/>
+                        </a:lnSpc>
+                        <a:tabLst>
+                          <a:tab pos="0" algn="l"/>
+                        </a:tabLst>
+                      </a:pPr>
+                      <a:r>
+                        <a:rPr lang="en-US" sz="1600" b="1" u="none" strike="noStrike">
+                          <a:solidFill>
+                            <a:srgbClr val="14231C"/>
+                          </a:solidFill>
+                          <a:effectLst/>
+                          <a:uFillTx/>
+                          <a:latin typeface="Calibri"/>
+                        </a:rPr>
+                        <a:t>81.7</a:t>
+                      </a:r>
+                      <a:endParaRPr lang="en-ZA" sz="1600" b="0" u="none" strike="noStrike">
+                        <a:solidFill>
+                          <a:srgbClr val="000000"/>
+                        </a:solidFill>
+                        <a:effectLst/>
+                        <a:uFillTx/>
+                        <a:latin typeface="Arial"/>
+                      </a:endParaRPr>
+                    </a:p>
+                  </a:txBody>
+                  <a:tcPr anchor="ctr" marL="91440" marR="91440" marT="45720" marB="45720">
+                    <a:lnL w="12240">
+                      <a:solidFill>
+                        <a:srgbClr val="DDE6DF"/>
+                      </a:solidFill>
+                      <a:prstDash val="solid"/>
+                    </a:lnL>
+                    <a:lnR w="12240">
+                      <a:solidFill>
+                        <a:srgbClr val="DDE6DF"/>
+                      </a:solidFill>
+                      <a:prstDash val="solid"/>
+                    </a:lnR>
+                    <a:lnT w="12240">
+                      <a:solidFill>
+                        <a:srgbClr val="DDE6DF"/>
+                      </a:solidFill>
+                      <a:prstDash val="solid"/>
+                    </a:lnT>
+                    <a:lnB w="12240">
+                      <a:solidFill>
+                        <a:srgbClr val="DDE6DF"/>
+                      </a:solidFill>
+                      <a:prstDash val="solid"/>
+                    </a:lnB>
+                    <a:solidFill>
+                      <a:srgbClr val="FBF1DC"/>
+                    </a:solidFill>
+                  </a:tcPr>
+                </a:tc>
+                <a:tc>
+                  <a:txBody>
+                    <a:bodyPr anchor="ctr">
+                      <a:noAutofit/>
+                    </a:bodyPr>
+                    <a:p>
+                      <a:pPr algn="r" defTabSz="914400">
+                        <a:lnSpc>
+                          <a:spcPct val="100000"/>
+                        </a:lnSpc>
+                        <a:tabLst>
+                          <a:tab pos="0" algn="l"/>
+                        </a:tabLst>
+                      </a:pPr>
+                      <a:r>
+                        <a:rPr lang="en-US" sz="1600" b="1" u="none" strike="noStrike">
+                          <a:solidFill>
+                            <a:srgbClr val="14231C"/>
+                          </a:solidFill>
+                          <a:effectLst/>
+                          <a:uFillTx/>
+                          <a:latin typeface="Calibri"/>
+                        </a:rPr>
+                        <a:t>81.3</a:t>
+                      </a:r>
+                      <a:endParaRPr lang="en-ZA" sz="1600" b="0" u="none" strike="noStrike">
+                        <a:solidFill>
+                          <a:srgbClr val="000000"/>
+                        </a:solidFill>
+                        <a:effectLst/>
+                        <a:uFillTx/>
+                        <a:latin typeface="Arial"/>
+                      </a:endParaRPr>
+                    </a:p>
+                  </a:txBody>
+                  <a:tcPr anchor="ctr" marL="91440" marR="91440" marT="45720" marB="45720">
+                    <a:lnL w="12240">
+                      <a:solidFill>
+                        <a:srgbClr val="DDE6DF"/>
+                      </a:solidFill>
+                      <a:prstDash val="solid"/>
+                    </a:lnL>
+                    <a:lnR w="12240">
+                      <a:solidFill>
+                        <a:srgbClr val="DDE6DF"/>
+                      </a:solidFill>
+                      <a:prstDash val="solid"/>
+                    </a:lnR>
+                    <a:lnT w="12240">
+                      <a:solidFill>
+                        <a:srgbClr val="DDE6DF"/>
+                      </a:solidFill>
+                      <a:prstDash val="solid"/>
+                    </a:lnT>
+                    <a:lnB w="12240">
+                      <a:solidFill>
+                        <a:srgbClr val="DDE6DF"/>
+                      </a:solidFill>
+                      <a:prstDash val="solid"/>
+                    </a:lnB>
+                    <a:solidFill>
+                      <a:srgbClr val="FBF1DC"/>
+                    </a:solidFill>
+                  </a:tcPr>
+                </a:tc>
+                <a:tc>
+                  <a:txBody>
+                    <a:bodyPr anchor="ctr">
+                      <a:noAutofit/>
+                    </a:bodyPr>
+                    <a:p>
+                      <a:pPr algn="r" defTabSz="914400">
+                        <a:lnSpc>
+                          <a:spcPct val="100000"/>
+                        </a:lnSpc>
+                        <a:tabLst>
+                          <a:tab pos="0" algn="l"/>
+                        </a:tabLst>
+                      </a:pPr>
+                      <a:r>
+                        <a:rPr lang="en-US" sz="1600" b="1" u="none" strike="noStrike">
+                          <a:solidFill>
+                            <a:srgbClr val="14231C"/>
+                          </a:solidFill>
+                          <a:effectLst/>
+                          <a:uFillTx/>
+                          <a:latin typeface="Calibri"/>
+                        </a:rPr>
+                        <a:t>94.3</a:t>
+                      </a:r>
+                      <a:endParaRPr lang="en-ZA" sz="1600" b="0" u="none" strike="noStrike">
+                        <a:solidFill>
+                          <a:srgbClr val="000000"/>
+                        </a:solidFill>
+                        <a:effectLst/>
+                        <a:uFillTx/>
+                        <a:latin typeface="Arial"/>
+                      </a:endParaRPr>
+                    </a:p>
+                  </a:txBody>
+                  <a:tcPr anchor="ctr" marL="91440" marR="91440" marT="45720" marB="45720">
+                    <a:lnL w="12240">
+                      <a:solidFill>
+                        <a:srgbClr val="DDE6DF"/>
+                      </a:solidFill>
+                      <a:prstDash val="solid"/>
+                    </a:lnL>
+                    <a:lnR w="12240">
+                      <a:solidFill>
+                        <a:srgbClr val="DDE6DF"/>
+                      </a:solidFill>
+                      <a:prstDash val="solid"/>
+                    </a:lnR>
+                    <a:lnT w="12240">
+                      <a:solidFill>
+                        <a:srgbClr val="DDE6DF"/>
+                      </a:solidFill>
+                      <a:prstDash val="solid"/>
+                    </a:lnT>
+                    <a:lnB w="12240">
+                      <a:solidFill>
+                        <a:srgbClr val="DDE6DF"/>
+                      </a:solidFill>
+                      <a:prstDash val="solid"/>
+                    </a:lnB>
+                    <a:solidFill>
+                      <a:srgbClr val="FBF1DC"/>
+                    </a:solidFill>
+                  </a:tcPr>
+                </a:tc>
+                <a:tc>
+                  <a:txBody>
+                    <a:bodyPr anchor="ctr">
+                      <a:noAutofit/>
+                    </a:bodyPr>
+                    <a:p>
+                      <a:pPr algn="r" defTabSz="914400">
+                        <a:lnSpc>
+                          <a:spcPct val="100000"/>
+                        </a:lnSpc>
+                        <a:tabLst>
+                          <a:tab pos="0" algn="l"/>
+                        </a:tabLst>
+                      </a:pPr>
+                      <a:r>
+                        <a:rPr lang="en-US" sz="1600" b="1" u="none" strike="noStrike">
+                          <a:solidFill>
+                            <a:srgbClr val="14231C"/>
+                          </a:solidFill>
+                          <a:effectLst/>
+                          <a:uFillTx/>
+                          <a:latin typeface="Calibri"/>
+                        </a:rPr>
+                        <a:t>78.6</a:t>
                       </a:r>
                       <a:endParaRPr lang="en-ZA" sz="1600" b="0" u="none" strike="noStrike">
                         <a:solidFill>
@@ -10567,8 +9001,8 @@
         </p:nvSpPr>
         <p:spPr>
           <a:xfrm>
-            <a:off x="548640" y="5173200"/>
-            <a:ext cx="6949080" cy="731160"/>
+            <a:off x="548640" y="5559840"/>
+            <a:ext cx="6948720" cy="730800"/>
           </a:xfrm>
           <a:prstGeom prst="rect">
             <a:avLst/>
@@ -10761,6 +9195,41 @@
               <a:latin typeface="Arial"/>
             </a:endParaRPr>
           </a:p>
+          <a:p>
+            <a:pPr marL="216000" indent="-216000" defTabSz="914400">
+              <a:lnSpc>
+                <a:spcPct val="100000"/>
+              </a:lnSpc>
+              <a:buClr>
+                <a:srgbClr val="3B4A41"/>
+              </a:buClr>
+              <a:buSzPct val="45000"/>
+              <a:buFont typeface="Wingdings" charset="2"/>
+              <a:buChar char=""/>
+              <a:tabLst>
+                <a:tab pos="0" algn="l"/>
+              </a:tabLst>
+            </a:pPr>
+            <a:r>
+              <a:rPr lang="en-US" sz="1300" b="1" u="none" strike="noStrike">
+                <a:solidFill>
+                  <a:srgbClr val="3B4A41"/>
+                </a:solidFill>
+                <a:effectLst/>
+                <a:uFillTx/>
+                <a:latin typeface="Calibri"/>
+              </a:rPr>
+              <a:t>* Reduced validation subset (200 queries); other rows are the full test split. Local branch is preliminary.</a:t>
+            </a:r>
+            <a:endParaRPr lang="en-ZA" sz="1300" b="0" u="none" strike="noStrike">
+              <a:solidFill>
+                <a:srgbClr val="000000"/>
+              </a:solidFill>
+              <a:effectLst/>
+              <a:uFillTx/>
+              <a:latin typeface="Arial"/>
+            </a:endParaRPr>
+          </a:p>
         </p:txBody>
       </p:sp>
       <p:sp>
@@ -10771,8 +9240,8 @@
         </p:nvSpPr>
         <p:spPr>
           <a:xfrm>
-            <a:off x="7863840" y="1463040"/>
-            <a:ext cx="3748680" cy="2102760"/>
+            <a:off x="7863840" y="830520"/>
+            <a:ext cx="3748320" cy="1689480"/>
           </a:xfrm>
           <a:prstGeom prst="roundRect">
             <a:avLst>
@@ -10820,8 +9289,8 @@
         </p:nvSpPr>
         <p:spPr>
           <a:xfrm>
-            <a:off x="8046720" y="2103120"/>
-            <a:ext cx="3382920" cy="411120"/>
+            <a:off x="8046720" y="1712880"/>
+            <a:ext cx="3382560" cy="410760"/>
           </a:xfrm>
           <a:prstGeom prst="rect">
             <a:avLst/>
@@ -10880,8 +9349,8 @@
         </p:nvSpPr>
         <p:spPr>
           <a:xfrm>
-            <a:off x="7863840" y="3749040"/>
-            <a:ext cx="3748680" cy="2102760"/>
+            <a:off x="7863840" y="2892960"/>
+            <a:ext cx="3748320" cy="1329480"/>
           </a:xfrm>
           <a:prstGeom prst="roundRect">
             <a:avLst>
@@ -10929,8 +9398,8 @@
         </p:nvSpPr>
         <p:spPr>
           <a:xfrm>
-            <a:off x="8046720" y="4389120"/>
-            <a:ext cx="3382920" cy="411120"/>
+            <a:off x="8046720" y="3143160"/>
+            <a:ext cx="3382560" cy="410760"/>
           </a:xfrm>
           <a:prstGeom prst="rect">
             <a:avLst/>
@@ -10989,8 +9458,8 @@
         </p:nvSpPr>
         <p:spPr>
           <a:xfrm>
-            <a:off x="8046720" y="4846320"/>
-            <a:ext cx="3382920" cy="365400"/>
+            <a:off x="8046720" y="3593160"/>
+            <a:ext cx="3382560" cy="365040"/>
           </a:xfrm>
           <a:prstGeom prst="rect">
             <a:avLst/>
@@ -11029,6 +9498,175 @@
                 <a:latin typeface="Calibri"/>
               </a:rPr>
               <a:t>32 to 512 dimensions vs uncompressed</a:t>
+            </a:r>
+            <a:endParaRPr lang="en-ZA" sz="1300" b="0" u="none" strike="noStrike">
+              <a:solidFill>
+                <a:srgbClr val="000000"/>
+              </a:solidFill>
+              <a:effectLst/>
+              <a:uFillTx/>
+              <a:latin typeface="Arial"/>
+            </a:endParaRPr>
+          </a:p>
+        </p:txBody>
+      </p:sp>
+      <p:sp>
+        <p:nvSpPr>
+          <p:cNvPr id="99" name="Extra 0"/>
+          <p:cNvSpPr/>
+          <p:nvPr/>
+        </p:nvSpPr>
+        <p:spPr>
+          <a:xfrm>
+            <a:off x="7863840" y="4860000"/>
+            <a:ext cx="3748320" cy="1329480"/>
+          </a:xfrm>
+          <a:prstGeom prst="roundRect">
+            <a:avLst>
+              <a:gd name="adj" fmla="val 5217"/>
+            </a:avLst>
+          </a:prstGeom>
+          <a:solidFill>
+            <a:srgbClr val="FFFFFF"/>
+          </a:solidFill>
+          <a:ln w="19050">
+            <a:solidFill>
+              <a:srgbClr val="8FA698"/>
+            </a:solidFill>
+            <a:prstDash val="dash"/>
+            <a:round/>
+          </a:ln>
+        </p:spPr>
+        <p:style>
+          <a:lnRef idx="0"/>
+          <a:fillRef idx="0"/>
+          <a:effectRef idx="0"/>
+          <a:fontRef idx="minor"/>
+        </p:style>
+        <p:txBody>
+          <a:bodyPr lIns="90000" tIns="45000" rIns="90000" bIns="45000" anchor="t">
+            <a:noAutofit/>
+          </a:bodyPr>
+          <a:p>
+            <a:endParaRPr lang="en-ZA" sz="1800" b="0" u="none" strike="noStrike">
+              <a:solidFill>
+                <a:srgbClr val="000000"/>
+              </a:solidFill>
+              <a:effectLst/>
+              <a:uFillTx/>
+              <a:latin typeface="Arial"/>
+            </a:endParaRPr>
+          </a:p>
+        </p:txBody>
+      </p:sp>
+      <p:sp>
+        <p:nvSpPr>
+          <p:cNvPr id="100" name="Extra 1"/>
+          <p:cNvSpPr/>
+          <p:nvPr/>
+        </p:nvSpPr>
+        <p:spPr>
+          <a:xfrm>
+            <a:off x="8046720" y="4573080"/>
+            <a:ext cx="3382560" cy="410760"/>
+          </a:xfrm>
+          <a:prstGeom prst="rect">
+            <a:avLst/>
+          </a:prstGeom>
+          <a:noFill/>
+          <a:ln w="0">
+            <a:noFill/>
+          </a:ln>
+        </p:spPr>
+        <p:style>
+          <a:lnRef idx="0"/>
+          <a:fillRef idx="0"/>
+          <a:effectRef idx="0"/>
+          <a:fontRef idx="minor"/>
+        </p:style>
+        <p:txBody>
+          <a:bodyPr lIns="0" tIns="0" rIns="0" bIns="0" anchor="ctr">
+            <a:noAutofit/>
+          </a:bodyPr>
+          <a:p>
+            <a:pPr algn="ctr" defTabSz="914400">
+              <a:lnSpc>
+                <a:spcPct val="100000"/>
+              </a:lnSpc>
+              <a:tabLst>
+                <a:tab pos="0" algn="l"/>
+              </a:tabLst>
+            </a:pPr>
+            <a:r>
+              <a:rPr lang="en-US" sz="1800" b="1" u="none" strike="noStrike">
+                <a:solidFill>
+                  <a:srgbClr val="14231C"/>
+                </a:solidFill>
+                <a:effectLst/>
+                <a:uFillTx/>
+                <a:latin typeface="Calibri"/>
+              </a:rPr>
+              <a:t>Slot: additional result</a:t>
+            </a:r>
+            <a:endParaRPr lang="en-ZA" sz="1800" b="0" u="none" strike="noStrike">
+              <a:solidFill>
+                <a:srgbClr val="000000"/>
+              </a:solidFill>
+              <a:effectLst/>
+              <a:uFillTx/>
+              <a:latin typeface="Arial"/>
+            </a:endParaRPr>
+          </a:p>
+        </p:txBody>
+      </p:sp>
+      <p:sp>
+        <p:nvSpPr>
+          <p:cNvPr id="101" name="Extra 2"/>
+          <p:cNvSpPr/>
+          <p:nvPr/>
+        </p:nvSpPr>
+        <p:spPr>
+          <a:xfrm>
+            <a:off x="8046720" y="5023080"/>
+            <a:ext cx="3382560" cy="365040"/>
+          </a:xfrm>
+          <a:prstGeom prst="rect">
+            <a:avLst/>
+          </a:prstGeom>
+          <a:noFill/>
+          <a:ln w="0">
+            <a:noFill/>
+          </a:ln>
+        </p:spPr>
+        <p:style>
+          <a:lnRef idx="0"/>
+          <a:fillRef idx="0"/>
+          <a:effectRef idx="0"/>
+          <a:fontRef idx="minor"/>
+        </p:style>
+        <p:txBody>
+          <a:bodyPr lIns="0" tIns="0" rIns="0" bIns="0" anchor="ctr">
+            <a:noAutofit/>
+          </a:bodyPr>
+          <a:p>
+            <a:pPr algn="ctr" defTabSz="914400">
+              <a:lnSpc>
+                <a:spcPct val="100000"/>
+              </a:lnSpc>
+              <a:tabLst>
+                <a:tab pos="0" algn="l"/>
+              </a:tabLst>
+            </a:pPr>
+            <a:r>
+              <a:rPr lang="en-US" sz="1300" b="0" u="none" strike="noStrike">
+                <a:solidFill>
+                  <a:srgbClr val="3B4A41"/>
+                </a:solidFill>
+                <a:effectLst/>
+                <a:uFillTx/>
+                <a:latin typeface="Calibri"/>
+              </a:rPr>
+              <a:t>Your extra plot or table</a:t>
             </a:r>
             <a:endParaRPr lang="en-ZA" sz="1300" b="0" u="none" strike="noStrike">
               <a:solidFill>
@@ -11080,14 +9718,14 @@
       </p:grpSpPr>
       <p:sp>
         <p:nvSpPr>
-          <p:cNvPr id="99" name="Title"/>
+          <p:cNvPr id="102" name="Title"/>
           <p:cNvSpPr/>
           <p:nvPr/>
         </p:nvSpPr>
         <p:spPr>
           <a:xfrm>
             <a:off x="548640" y="365760"/>
-            <a:ext cx="11063880" cy="822600"/>
+            <a:ext cx="11063520" cy="822240"/>
           </a:xfrm>
           <a:prstGeom prst="rect">
             <a:avLst/>
@@ -11141,14 +9779,14 @@
       </p:sp>
       <p:sp>
         <p:nvSpPr>
-          <p:cNvPr id="100" name="PageNo"/>
+          <p:cNvPr id="103" name="PageNo"/>
           <p:cNvSpPr/>
           <p:nvPr/>
         </p:nvSpPr>
         <p:spPr>
           <a:xfrm>
             <a:off x="10698480" y="6400800"/>
-            <a:ext cx="914040" cy="273960"/>
+            <a:ext cx="913680" cy="273600"/>
           </a:xfrm>
           <a:prstGeom prst="rect">
             <a:avLst/>
@@ -11201,14 +9839,14 @@
       </p:sp>
       <p:sp>
         <p:nvSpPr>
-          <p:cNvPr id="101" name="Text 3"/>
+          <p:cNvPr id="104" name="Text 3"/>
           <p:cNvSpPr/>
           <p:nvPr/>
         </p:nvSpPr>
         <p:spPr>
           <a:xfrm>
             <a:off x="548640" y="1463040"/>
-            <a:ext cx="4480200" cy="1371240"/>
+            <a:ext cx="4479840" cy="1370880"/>
           </a:xfrm>
           <a:prstGeom prst="rect">
             <a:avLst/>
@@ -11262,14 +9900,14 @@
       </p:sp>
       <p:sp>
         <p:nvSpPr>
-          <p:cNvPr id="102" name="Text 4"/>
+          <p:cNvPr id="105" name="Text 4"/>
           <p:cNvSpPr/>
           <p:nvPr/>
         </p:nvSpPr>
         <p:spPr>
           <a:xfrm>
             <a:off x="548640" y="3017520"/>
-            <a:ext cx="4480200" cy="2377080"/>
+            <a:ext cx="4479840" cy="2376720"/>
           </a:xfrm>
           <a:prstGeom prst="rect">
             <a:avLst/>
@@ -11395,13 +10033,13 @@
       </p:sp>
       <p:graphicFrame>
         <p:nvGraphicFramePr>
-          <p:cNvPr id="103" name="Table 0"/>
+          <p:cNvPr id="106" name="Table 0"/>
           <p:cNvGraphicFramePr/>
           <p:nvPr/>
         </p:nvGraphicFramePr>
         <p:xfrm>
           <a:off x="5486400" y="1463040"/>
-          <a:ext cx="6126120" cy="3968280"/>
+          <a:ext cx="6126120" cy="4004280"/>
         </p:xfrm>
         <a:graphic>
           <a:graphicData uri="http://schemas.openxmlformats.org/drawingml/2006/table">
@@ -11632,7 +10270,7 @@
                           <a:uFillTx/>
                           <a:latin typeface="Calibri"/>
                         </a:rPr>
-                        <a:t>Strength of the main embedding</a:t>
+                        <a:t>Fine-tuned model carries the system: 81.1 BAKS, 73.3 open</a:t>
                       </a:r>
                       <a:endParaRPr lang="en-ZA" sz="1600" b="0" u="none" strike="noStrike">
                         <a:solidFill>
@@ -11764,7 +10402,7 @@
                           <a:uFillTx/>
                           <a:latin typeface="Calibri"/>
                         </a:rPr>
-                        <a:t>Value of generic features</a:t>
+                        <a:t>Weak alone: 42.7 BAKS, 50.4 open (about reject-all)</a:t>
                       </a:r>
                       <a:endParaRPr lang="en-ZA" sz="1600" b="0" u="none" strike="noStrike">
                         <a:solidFill>
@@ -11896,7 +10534,7 @@
                           <a:uFillTx/>
                           <a:latin typeface="Calibri"/>
                         </a:rPr>
-                        <a:t>Value of local patterns</a:t>
+                        <a:t>Local branch alone: not run separately</a:t>
                       </a:r>
                       <a:endParaRPr lang="en-ZA" sz="1600" b="0" u="none" strike="noStrike">
                         <a:solidFill>
@@ -12028,7 +10666,7 @@
                           <a:uFillTx/>
                           <a:latin typeface="Calibri"/>
                         </a:rPr>
-                        <a:t>Gain from a second embedding</a:t>
+                        <a:t>Under 0.1 point change on test</a:t>
                       </a:r>
                       <a:endParaRPr lang="en-ZA" sz="1600" b="0" u="none" strike="noStrike">
                         <a:solidFill>
@@ -12160,7 +10798,7 @@
                           <a:uFillTx/>
                           <a:latin typeface="Calibri"/>
                         </a:rPr>
-                        <a:t>Gain from local matching</a:t>
+                        <a:t>Not run alone; added to G+EVA02: 79.0 to 81.3 open (subset)</a:t>
                       </a:r>
                       <a:endParaRPr lang="en-ZA" sz="1600" b="0" u="none" strike="noStrike">
                         <a:solidFill>
@@ -12292,7 +10930,7 @@
                           <a:uFillTx/>
                           <a:latin typeface="Calibri"/>
                         </a:rPr>
-                        <a:t>Does full fusion win?</a:t>
+                        <a:t>Preliminary: 81.3 open, 94.3 BAUS (subset)</a:t>
                       </a:r>
                       <a:endParaRPr lang="en-ZA" sz="1600" b="0" u="none" strike="noStrike">
                         <a:solidFill>

--- a/ss/PresentationSlides.pptx
+++ b/ss/PresentationSlides.pptx
@@ -1,27 +1,127 @@
 
 <file path=ppt/presentation.xml><?xml version="1.0" encoding="utf-8"?>
-<p:presentation xmlns:a="http://schemas.openxmlformats.org/drawingml/2006/main" xmlns:p="http://schemas.openxmlformats.org/presentationml/2006/main" xmlns:r="http://schemas.openxmlformats.org/officeDocument/2006/relationships" xmlns:p14="http://schemas.microsoft.com/office/powerpoint/2010/main" xmlns:p15="http://schemas.microsoft.com/office/powerpoint/2012/main" xmlns:mc="http://schemas.openxmlformats.org/markup-compatibility/2006">
+<p:presentation xmlns:a="http://schemas.openxmlformats.org/drawingml/2006/main" xmlns:r="http://schemas.openxmlformats.org/officeDocument/2006/relationships" xmlns:p="http://schemas.openxmlformats.org/presentationml/2006/main">
   <p:sldMasterIdLst>
-    <p:sldMasterId id="2147483648" r:id="rId2"/>
+    <p:sldMasterId id="2147483648" r:id="rId1"/>
   </p:sldMasterIdLst>
   <p:notesMasterIdLst>
-    <p:notesMasterId r:id="rId3"/>
+    <p:notesMasterId r:id="rId7"/>
   </p:notesMasterIdLst>
   <p:sldIdLst>
-    <p:sldId id="256" r:id="rId4"/>
-    <p:sldId id="257" r:id="rId5"/>
-    <p:sldId id="258" r:id="rId6"/>
-    <p:sldId id="259" r:id="rId7"/>
-    <p:sldId id="260" r:id="rId8"/>
+    <p:sldId id="256" r:id="rId2"/>
+    <p:sldId id="257" r:id="rId3"/>
+    <p:sldId id="258" r:id="rId4"/>
+    <p:sldId id="259" r:id="rId5"/>
+    <p:sldId id="260" r:id="rId6"/>
   </p:sldIdLst>
   <p:sldSz cx="12192000" cy="6858000"/>
   <p:notesSz cx="6858000" cy="12192000"/>
+  <p:defaultTextStyle>
+    <a:defPPr>
+      <a:defRPr lang="en-US"/>
+    </a:defPPr>
+    <a:lvl1pPr marL="0" algn="l" defTabSz="914400" rtl="0" eaLnBrk="1" latinLnBrk="0" hangingPunct="1">
+      <a:defRPr sz="1800" kern="1200">
+        <a:solidFill>
+          <a:schemeClr val="tx1"/>
+        </a:solidFill>
+        <a:latin typeface="+mn-lt"/>
+        <a:ea typeface="+mn-ea"/>
+        <a:cs typeface="+mn-cs"/>
+      </a:defRPr>
+    </a:lvl1pPr>
+    <a:lvl2pPr marL="457200" algn="l" defTabSz="914400" rtl="0" eaLnBrk="1" latinLnBrk="0" hangingPunct="1">
+      <a:defRPr sz="1800" kern="1200">
+        <a:solidFill>
+          <a:schemeClr val="tx1"/>
+        </a:solidFill>
+        <a:latin typeface="+mn-lt"/>
+        <a:ea typeface="+mn-ea"/>
+        <a:cs typeface="+mn-cs"/>
+      </a:defRPr>
+    </a:lvl2pPr>
+    <a:lvl3pPr marL="914400" algn="l" defTabSz="914400" rtl="0" eaLnBrk="1" latinLnBrk="0" hangingPunct="1">
+      <a:defRPr sz="1800" kern="1200">
+        <a:solidFill>
+          <a:schemeClr val="tx1"/>
+        </a:solidFill>
+        <a:latin typeface="+mn-lt"/>
+        <a:ea typeface="+mn-ea"/>
+        <a:cs typeface="+mn-cs"/>
+      </a:defRPr>
+    </a:lvl3pPr>
+    <a:lvl4pPr marL="1371600" algn="l" defTabSz="914400" rtl="0" eaLnBrk="1" latinLnBrk="0" hangingPunct="1">
+      <a:defRPr sz="1800" kern="1200">
+        <a:solidFill>
+          <a:schemeClr val="tx1"/>
+        </a:solidFill>
+        <a:latin typeface="+mn-lt"/>
+        <a:ea typeface="+mn-ea"/>
+        <a:cs typeface="+mn-cs"/>
+      </a:defRPr>
+    </a:lvl4pPr>
+    <a:lvl5pPr marL="1828800" algn="l" defTabSz="914400" rtl="0" eaLnBrk="1" latinLnBrk="0" hangingPunct="1">
+      <a:defRPr sz="1800" kern="1200">
+        <a:solidFill>
+          <a:schemeClr val="tx1"/>
+        </a:solidFill>
+        <a:latin typeface="+mn-lt"/>
+        <a:ea typeface="+mn-ea"/>
+        <a:cs typeface="+mn-cs"/>
+      </a:defRPr>
+    </a:lvl5pPr>
+    <a:lvl6pPr marL="2286000" algn="l" defTabSz="914400" rtl="0" eaLnBrk="1" latinLnBrk="0" hangingPunct="1">
+      <a:defRPr sz="1800" kern="1200">
+        <a:solidFill>
+          <a:schemeClr val="tx1"/>
+        </a:solidFill>
+        <a:latin typeface="+mn-lt"/>
+        <a:ea typeface="+mn-ea"/>
+        <a:cs typeface="+mn-cs"/>
+      </a:defRPr>
+    </a:lvl6pPr>
+    <a:lvl7pPr marL="2743200" algn="l" defTabSz="914400" rtl="0" eaLnBrk="1" latinLnBrk="0" hangingPunct="1">
+      <a:defRPr sz="1800" kern="1200">
+        <a:solidFill>
+          <a:schemeClr val="tx1"/>
+        </a:solidFill>
+        <a:latin typeface="+mn-lt"/>
+        <a:ea typeface="+mn-ea"/>
+        <a:cs typeface="+mn-cs"/>
+      </a:defRPr>
+    </a:lvl7pPr>
+    <a:lvl8pPr marL="3200400" algn="l" defTabSz="914400" rtl="0" eaLnBrk="1" latinLnBrk="0" hangingPunct="1">
+      <a:defRPr sz="1800" kern="1200">
+        <a:solidFill>
+          <a:schemeClr val="tx1"/>
+        </a:solidFill>
+        <a:latin typeface="+mn-lt"/>
+        <a:ea typeface="+mn-ea"/>
+        <a:cs typeface="+mn-cs"/>
+      </a:defRPr>
+    </a:lvl8pPr>
+    <a:lvl9pPr marL="3657600" algn="l" defTabSz="914400" rtl="0" eaLnBrk="1" latinLnBrk="0" hangingPunct="1">
+      <a:defRPr sz="1800" kern="1200">
+        <a:solidFill>
+          <a:schemeClr val="tx1"/>
+        </a:solidFill>
+        <a:latin typeface="+mn-lt"/>
+        <a:ea typeface="+mn-ea"/>
+        <a:cs typeface="+mn-cs"/>
+      </a:defRPr>
+    </a:lvl9pPr>
+  </p:defaultTextStyle>
 </p:presentation>
 </file>
 
 <file path=ppt/notesMasters/notesMaster1.xml><?xml version="1.0" encoding="utf-8"?>
-<p:notesMaster xmlns:a="http://schemas.openxmlformats.org/drawingml/2006/main" xmlns:p="http://schemas.openxmlformats.org/presentationml/2006/main" xmlns:r="http://schemas.openxmlformats.org/officeDocument/2006/relationships" xmlns:p14="http://schemas.microsoft.com/office/powerpoint/2010/main" xmlns:p15="http://schemas.microsoft.com/office/powerpoint/2012/main" xmlns:mc="http://schemas.openxmlformats.org/markup-compatibility/2006">
+<p:notesMaster xmlns:a="http://schemas.openxmlformats.org/drawingml/2006/main" xmlns:r="http://schemas.openxmlformats.org/officeDocument/2006/relationships" xmlns:p="http://schemas.openxmlformats.org/presentationml/2006/main">
   <p:cSld>
+    <p:bg>
+      <p:bgRef idx="1001">
+        <a:schemeClr val="bg1"/>
+      </p:bgRef>
+    </p:bg>
     <p:spTree>
       <p:nvGrpSpPr>
         <p:cNvPr id="1" name=""/>
@@ -40,7 +140,7 @@
         <p:nvSpPr>
           <p:cNvPr id="4" name="PlaceHolder 1"/>
           <p:cNvSpPr>
-            <a:spLocks noGrp="1"/>
+            <a:spLocks noGrp="1" noRot="1" noChangeAspect="1"/>
           </p:cNvSpPr>
           <p:nvPr>
             <p:ph type="sldImg"/>
@@ -63,6 +163,7 @@
           <a:bodyPr lIns="0" tIns="0" rIns="0" bIns="0" anchor="ctr">
             <a:noAutofit/>
           </a:bodyPr>
+          <a:lstStyle/>
           <a:p>
             <a:r>
               <a:rPr lang="en-ZA" sz="1800" b="0" u="none" strike="noStrike">
@@ -75,14 +176,6 @@
               </a:rPr>
               <a:t>Click to move the slide</a:t>
             </a:r>
-            <a:endParaRPr lang="en-ZA" sz="1800" b="0" u="none" strike="noStrike">
-              <a:solidFill>
-                <a:schemeClr val="dk1"/>
-              </a:solidFill>
-              <a:effectLst/>
-              <a:uFillTx/>
-              <a:latin typeface="Calibri"/>
-            </a:endParaRPr>
           </a:p>
         </p:txBody>
       </p:sp>
@@ -113,6 +206,7 @@
           <a:bodyPr lIns="0" tIns="0" rIns="0" bIns="0" anchor="t">
             <a:noAutofit/>
           </a:bodyPr>
+          <a:lstStyle/>
           <a:p>
             <a:pPr indent="0" algn="l">
               <a:buNone/>
@@ -128,14 +222,6 @@
               </a:rPr>
               <a:t>Click to edit the notes format</a:t>
             </a:r>
-            <a:endParaRPr lang="en-ZA" sz="2000" b="0" u="none" strike="noStrike">
-              <a:solidFill>
-                <a:srgbClr val="000000"/>
-              </a:solidFill>
-              <a:effectLst/>
-              <a:uFillTx/>
-              <a:latin typeface="Arial"/>
-            </a:endParaRPr>
           </a:p>
         </p:txBody>
       </p:sp>
@@ -166,6 +252,7 @@
           <a:bodyPr lIns="0" tIns="0" rIns="0" bIns="0" anchor="t">
             <a:noAutofit/>
           </a:bodyPr>
+          <a:lstStyle/>
           <a:p>
             <a:pPr indent="0" algn="l">
               <a:buNone/>
@@ -181,14 +268,6 @@
               </a:rPr>
               <a:t> </a:t>
             </a:r>
-            <a:endParaRPr lang="en-ZA" sz="1400" b="0" u="none" strike="noStrike">
-              <a:solidFill>
-                <a:srgbClr val="000000"/>
-              </a:solidFill>
-              <a:effectLst/>
-              <a:uFillTx/>
-              <a:latin typeface="Times New Roman"/>
-            </a:endParaRPr>
           </a:p>
         </p:txBody>
       </p:sp>
@@ -247,14 +326,6 @@
               </a:rPr>
               <a:t> </a:t>
             </a:r>
-            <a:endParaRPr lang="en-ZA" sz="1400" b="0" u="none" strike="noStrike">
-              <a:solidFill>
-                <a:srgbClr val="000000"/>
-              </a:solidFill>
-              <a:effectLst/>
-              <a:uFillTx/>
-              <a:latin typeface="Times New Roman"/>
-            </a:endParaRPr>
           </a:p>
         </p:txBody>
       </p:sp>
@@ -313,14 +384,6 @@
               </a:rPr>
               <a:t> </a:t>
             </a:r>
-            <a:endParaRPr lang="en-ZA" sz="1400" b="0" u="none" strike="noStrike">
-              <a:solidFill>
-                <a:srgbClr val="000000"/>
-              </a:solidFill>
-              <a:effectLst/>
-              <a:uFillTx/>
-              <a:latin typeface="Times New Roman"/>
-            </a:endParaRPr>
           </a:p>
         </p:txBody>
       </p:sp>
@@ -377,7 +440,7 @@
                 <a:uFillTx/>
                 <a:latin typeface="Times New Roman"/>
               </a:rPr>
-              <a:t>1</a:t>
+              <a:t>‹#›</a:t>
             </a:fld>
             <a:endParaRPr lang="en-ZA" sz="1400" b="0" u="none" strike="noStrike">
               <a:solidFill>
@@ -392,12 +455,104 @@
       </p:sp>
     </p:spTree>
   </p:cSld>
-  <p:clrMap bg1="lt1" bg2="lt2" tx1="dk1" tx2="dk2" accent1="accent1" accent2="accent2" accent3="accent3" accent4="accent4" accent5="accent5" accent6="accent6" hlink="hlink" folHlink="folHlink"/>
+  <p:clrMap bg1="lt1" tx1="dk1" bg2="lt2" tx2="dk2" accent1="accent1" accent2="accent2" accent3="accent3" accent4="accent4" accent5="accent5" accent6="accent6" hlink="hlink" folHlink="folHlink"/>
+  <p:notesStyle>
+    <a:lvl1pPr marL="0" algn="l" defTabSz="914400" rtl="0" eaLnBrk="1" latinLnBrk="0" hangingPunct="1">
+      <a:defRPr sz="1200" kern="1200">
+        <a:solidFill>
+          <a:schemeClr val="tx1"/>
+        </a:solidFill>
+        <a:latin typeface="+mn-lt"/>
+        <a:ea typeface="+mn-ea"/>
+        <a:cs typeface="+mn-cs"/>
+      </a:defRPr>
+    </a:lvl1pPr>
+    <a:lvl2pPr marL="457200" algn="l" defTabSz="914400" rtl="0" eaLnBrk="1" latinLnBrk="0" hangingPunct="1">
+      <a:defRPr sz="1200" kern="1200">
+        <a:solidFill>
+          <a:schemeClr val="tx1"/>
+        </a:solidFill>
+        <a:latin typeface="+mn-lt"/>
+        <a:ea typeface="+mn-ea"/>
+        <a:cs typeface="+mn-cs"/>
+      </a:defRPr>
+    </a:lvl2pPr>
+    <a:lvl3pPr marL="914400" algn="l" defTabSz="914400" rtl="0" eaLnBrk="1" latinLnBrk="0" hangingPunct="1">
+      <a:defRPr sz="1200" kern="1200">
+        <a:solidFill>
+          <a:schemeClr val="tx1"/>
+        </a:solidFill>
+        <a:latin typeface="+mn-lt"/>
+        <a:ea typeface="+mn-ea"/>
+        <a:cs typeface="+mn-cs"/>
+      </a:defRPr>
+    </a:lvl3pPr>
+    <a:lvl4pPr marL="1371600" algn="l" defTabSz="914400" rtl="0" eaLnBrk="1" latinLnBrk="0" hangingPunct="1">
+      <a:defRPr sz="1200" kern="1200">
+        <a:solidFill>
+          <a:schemeClr val="tx1"/>
+        </a:solidFill>
+        <a:latin typeface="+mn-lt"/>
+        <a:ea typeface="+mn-ea"/>
+        <a:cs typeface="+mn-cs"/>
+      </a:defRPr>
+    </a:lvl4pPr>
+    <a:lvl5pPr marL="1828800" algn="l" defTabSz="914400" rtl="0" eaLnBrk="1" latinLnBrk="0" hangingPunct="1">
+      <a:defRPr sz="1200" kern="1200">
+        <a:solidFill>
+          <a:schemeClr val="tx1"/>
+        </a:solidFill>
+        <a:latin typeface="+mn-lt"/>
+        <a:ea typeface="+mn-ea"/>
+        <a:cs typeface="+mn-cs"/>
+      </a:defRPr>
+    </a:lvl5pPr>
+    <a:lvl6pPr marL="2286000" algn="l" defTabSz="914400" rtl="0" eaLnBrk="1" latinLnBrk="0" hangingPunct="1">
+      <a:defRPr sz="1200" kern="1200">
+        <a:solidFill>
+          <a:schemeClr val="tx1"/>
+        </a:solidFill>
+        <a:latin typeface="+mn-lt"/>
+        <a:ea typeface="+mn-ea"/>
+        <a:cs typeface="+mn-cs"/>
+      </a:defRPr>
+    </a:lvl6pPr>
+    <a:lvl7pPr marL="2743200" algn="l" defTabSz="914400" rtl="0" eaLnBrk="1" latinLnBrk="0" hangingPunct="1">
+      <a:defRPr sz="1200" kern="1200">
+        <a:solidFill>
+          <a:schemeClr val="tx1"/>
+        </a:solidFill>
+        <a:latin typeface="+mn-lt"/>
+        <a:ea typeface="+mn-ea"/>
+        <a:cs typeface="+mn-cs"/>
+      </a:defRPr>
+    </a:lvl7pPr>
+    <a:lvl8pPr marL="3200400" algn="l" defTabSz="914400" rtl="0" eaLnBrk="1" latinLnBrk="0" hangingPunct="1">
+      <a:defRPr sz="1200" kern="1200">
+        <a:solidFill>
+          <a:schemeClr val="tx1"/>
+        </a:solidFill>
+        <a:latin typeface="+mn-lt"/>
+        <a:ea typeface="+mn-ea"/>
+        <a:cs typeface="+mn-cs"/>
+      </a:defRPr>
+    </a:lvl8pPr>
+    <a:lvl9pPr marL="3657600" algn="l" defTabSz="914400" rtl="0" eaLnBrk="1" latinLnBrk="0" hangingPunct="1">
+      <a:defRPr sz="1200" kern="1200">
+        <a:solidFill>
+          <a:schemeClr val="tx1"/>
+        </a:solidFill>
+        <a:latin typeface="+mn-lt"/>
+        <a:ea typeface="+mn-ea"/>
+        <a:cs typeface="+mn-cs"/>
+      </a:defRPr>
+    </a:lvl9pPr>
+  </p:notesStyle>
 </p:notesMaster>
 </file>
 
 <file path=ppt/notesSlides/notesSlide1.xml><?xml version="1.0" encoding="utf-8"?>
-<p:notes xmlns:a="http://schemas.openxmlformats.org/drawingml/2006/main" xmlns:p="http://schemas.openxmlformats.org/presentationml/2006/main" xmlns:r="http://schemas.openxmlformats.org/officeDocument/2006/relationships" xmlns:p14="http://schemas.microsoft.com/office/powerpoint/2010/main" xmlns:p15="http://schemas.microsoft.com/office/powerpoint/2012/main" xmlns:mc="http://schemas.openxmlformats.org/markup-compatibility/2006">
+<p:notes xmlns:a="http://schemas.openxmlformats.org/drawingml/2006/main" xmlns:r="http://schemas.openxmlformats.org/officeDocument/2006/relationships" xmlns:p="http://schemas.openxmlformats.org/presentationml/2006/main">
   <p:cSld>
     <p:spTree>
       <p:nvGrpSpPr>
@@ -417,7 +572,7 @@
         <p:nvSpPr>
           <p:cNvPr id="107" name="PlaceHolder 1"/>
           <p:cNvSpPr>
-            <a:spLocks noGrp="1"/>
+            <a:spLocks noGrp="1" noRot="1" noChangeAspect="1"/>
           </p:cNvSpPr>
           <p:nvPr>
             <p:ph type="sldImg"/>
@@ -463,6 +618,7 @@
           <a:bodyPr lIns="91440" tIns="45720" rIns="91440" bIns="45720" anchor="t">
             <a:noAutofit/>
           </a:bodyPr>
+          <a:lstStyle/>
           <a:p>
             <a:pPr indent="0" algn="l">
               <a:lnSpc>
@@ -562,7 +718,7 @@
                 <a:latin typeface="+mn-lt"/>
                 <a:ea typeface="+mn-ea"/>
               </a:rPr>
-              <a:t>&lt;number&gt;</a:t>
+              <a:t>1</a:t>
             </a:fld>
             <a:endParaRPr lang="en-ZA" sz="1200" b="0" u="none" strike="noStrike">
               <a:solidFill>
@@ -577,11 +733,14 @@
       </p:sp>
     </p:spTree>
   </p:cSld>
+  <p:clrMapOvr>
+    <a:masterClrMapping/>
+  </p:clrMapOvr>
 </p:notes>
 </file>
 
 <file path=ppt/notesSlides/notesSlide2.xml><?xml version="1.0" encoding="utf-8"?>
-<p:notes xmlns:a="http://schemas.openxmlformats.org/drawingml/2006/main" xmlns:p="http://schemas.openxmlformats.org/presentationml/2006/main" xmlns:r="http://schemas.openxmlformats.org/officeDocument/2006/relationships" xmlns:p14="http://schemas.microsoft.com/office/powerpoint/2010/main" xmlns:p15="http://schemas.microsoft.com/office/powerpoint/2012/main" xmlns:mc="http://schemas.openxmlformats.org/markup-compatibility/2006">
+<p:notes xmlns:a="http://schemas.openxmlformats.org/drawingml/2006/main" xmlns:r="http://schemas.openxmlformats.org/officeDocument/2006/relationships" xmlns:p="http://schemas.openxmlformats.org/presentationml/2006/main">
   <p:cSld>
     <p:spTree>
       <p:nvGrpSpPr>
@@ -601,7 +760,7 @@
         <p:nvSpPr>
           <p:cNvPr id="110" name="PlaceHolder 1"/>
           <p:cNvSpPr>
-            <a:spLocks noGrp="1"/>
+            <a:spLocks noGrp="1" noRot="1" noChangeAspect="1"/>
           </p:cNvSpPr>
           <p:nvPr>
             <p:ph type="sldImg"/>
@@ -647,6 +806,7 @@
           <a:bodyPr lIns="91440" tIns="45720" rIns="91440" bIns="45720" anchor="t">
             <a:noAutofit/>
           </a:bodyPr>
+          <a:lstStyle/>
           <a:p>
             <a:pPr indent="0" algn="l">
               <a:lnSpc>
@@ -746,7 +906,7 @@
                 <a:latin typeface="+mn-lt"/>
                 <a:ea typeface="+mn-ea"/>
               </a:rPr>
-              <a:t>&lt;number&gt;</a:t>
+              <a:t>2</a:t>
             </a:fld>
             <a:endParaRPr lang="en-ZA" sz="1200" b="0" u="none" strike="noStrike">
               <a:solidFill>
@@ -761,11 +921,14 @@
       </p:sp>
     </p:spTree>
   </p:cSld>
+  <p:clrMapOvr>
+    <a:masterClrMapping/>
+  </p:clrMapOvr>
 </p:notes>
 </file>
 
 <file path=ppt/notesSlides/notesSlide3.xml><?xml version="1.0" encoding="utf-8"?>
-<p:notes xmlns:a="http://schemas.openxmlformats.org/drawingml/2006/main" xmlns:p="http://schemas.openxmlformats.org/presentationml/2006/main" xmlns:r="http://schemas.openxmlformats.org/officeDocument/2006/relationships" xmlns:p14="http://schemas.microsoft.com/office/powerpoint/2010/main" xmlns:p15="http://schemas.microsoft.com/office/powerpoint/2012/main" xmlns:mc="http://schemas.openxmlformats.org/markup-compatibility/2006">
+<p:notes xmlns:a="http://schemas.openxmlformats.org/drawingml/2006/main" xmlns:r="http://schemas.openxmlformats.org/officeDocument/2006/relationships" xmlns:p="http://schemas.openxmlformats.org/presentationml/2006/main">
   <p:cSld>
     <p:spTree>
       <p:nvGrpSpPr>
@@ -785,7 +948,7 @@
         <p:nvSpPr>
           <p:cNvPr id="113" name="PlaceHolder 1"/>
           <p:cNvSpPr>
-            <a:spLocks noGrp="1"/>
+            <a:spLocks noGrp="1" noRot="1" noChangeAspect="1"/>
           </p:cNvSpPr>
           <p:nvPr>
             <p:ph type="sldImg"/>
@@ -831,6 +994,7 @@
           <a:bodyPr lIns="91440" tIns="45720" rIns="91440" bIns="45720" anchor="t">
             <a:noAutofit/>
           </a:bodyPr>
+          <a:lstStyle/>
           <a:p>
             <a:pPr indent="0" algn="l">
               <a:lnSpc>
@@ -930,7 +1094,7 @@
                 <a:latin typeface="+mn-lt"/>
                 <a:ea typeface="+mn-ea"/>
               </a:rPr>
-              <a:t>&lt;number&gt;</a:t>
+              <a:t>3</a:t>
             </a:fld>
             <a:endParaRPr lang="en-ZA" sz="1200" b="0" u="none" strike="noStrike">
               <a:solidFill>
@@ -945,11 +1109,14 @@
       </p:sp>
     </p:spTree>
   </p:cSld>
+  <p:clrMapOvr>
+    <a:masterClrMapping/>
+  </p:clrMapOvr>
 </p:notes>
 </file>
 
 <file path=ppt/notesSlides/notesSlide4.xml><?xml version="1.0" encoding="utf-8"?>
-<p:notes xmlns:a="http://schemas.openxmlformats.org/drawingml/2006/main" xmlns:p="http://schemas.openxmlformats.org/presentationml/2006/main" xmlns:r="http://schemas.openxmlformats.org/officeDocument/2006/relationships" xmlns:p14="http://schemas.microsoft.com/office/powerpoint/2010/main" xmlns:p15="http://schemas.microsoft.com/office/powerpoint/2012/main" xmlns:mc="http://schemas.openxmlformats.org/markup-compatibility/2006">
+<p:notes xmlns:a="http://schemas.openxmlformats.org/drawingml/2006/main" xmlns:r="http://schemas.openxmlformats.org/officeDocument/2006/relationships" xmlns:p="http://schemas.openxmlformats.org/presentationml/2006/main">
   <p:cSld>
     <p:spTree>
       <p:nvGrpSpPr>
@@ -969,7 +1136,7 @@
         <p:nvSpPr>
           <p:cNvPr id="116" name="PlaceHolder 1"/>
           <p:cNvSpPr>
-            <a:spLocks noGrp="1"/>
+            <a:spLocks noGrp="1" noRot="1" noChangeAspect="1"/>
           </p:cNvSpPr>
           <p:nvPr>
             <p:ph type="sldImg"/>
@@ -978,7 +1145,7 @@
         <p:spPr>
           <a:xfrm>
             <a:off x="685800" y="1143000"/>
-            <a:ext cx="5485680" cy="3085560"/>
+            <a:ext cx="5486400" cy="3086100"/>
           </a:xfrm>
           <a:prstGeom prst="rect">
             <a:avLst/>
@@ -1015,6 +1182,7 @@
           <a:bodyPr lIns="91440" tIns="45720" rIns="91440" bIns="45720" anchor="t">
             <a:noAutofit/>
           </a:bodyPr>
+          <a:lstStyle/>
           <a:p>
             <a:pPr indent="0" algn="l">
               <a:lnSpc>
@@ -1033,14 +1201,6 @@
               </a:rPr>
               <a:t>~2.5 min. Tables: first four rows are the full test split; rows marked * use a 200-query validation subset (the only run that includes the local branch), so treat them as preliminary. Talking points: Fine-tuned MegaDescriptor carries the system (closed BAKS 81.1, open score 73.3). EVA02 and DINOv2 alone are near the 50% of rejecting every query. Adding EVA02 changes test scores by under 0.1 points. On the subset, adding ALIKED raised open score 79.0 to 81.3 (BAUS 91.1 to 94.3) with closed BAKS unchanged; 113 known queries so one query is 0.9 pt. PCA: 256-d costs 0.7 BAKS, 512-d matches, 128/64/32 lose 3.1/6.6/10.2. Paste the tau plot, PCA plot and your extra result into the dashed boxes. Tau is chosen on validation and frozen for test.</a:t>
             </a:r>
-            <a:endParaRPr lang="en-ZA" sz="2000" b="0" u="none" strike="noStrike">
-              <a:solidFill>
-                <a:srgbClr val="000000"/>
-              </a:solidFill>
-              <a:effectLst/>
-              <a:uFillTx/>
-              <a:latin typeface="Arial"/>
-            </a:endParaRPr>
           </a:p>
         </p:txBody>
       </p:sp>
@@ -1111,7 +1271,7 @@
                 <a:latin typeface="+mn-lt"/>
                 <a:ea typeface="+mn-ea"/>
               </a:rPr>
-              <a:t>&lt;number&gt;</a:t>
+              <a:t>4</a:t>
             </a:fld>
             <a:endParaRPr lang="en-ZA" sz="1200" b="0" u="none" strike="noStrike">
               <a:solidFill>
@@ -1126,11 +1286,14 @@
       </p:sp>
     </p:spTree>
   </p:cSld>
+  <p:clrMapOvr>
+    <a:masterClrMapping/>
+  </p:clrMapOvr>
 </p:notes>
 </file>
 
 <file path=ppt/notesSlides/notesSlide5.xml><?xml version="1.0" encoding="utf-8"?>
-<p:notes xmlns:a="http://schemas.openxmlformats.org/drawingml/2006/main" xmlns:p="http://schemas.openxmlformats.org/presentationml/2006/main" xmlns:r="http://schemas.openxmlformats.org/officeDocument/2006/relationships" xmlns:p14="http://schemas.microsoft.com/office/powerpoint/2010/main" xmlns:p15="http://schemas.microsoft.com/office/powerpoint/2012/main" xmlns:mc="http://schemas.openxmlformats.org/markup-compatibility/2006">
+<p:notes xmlns:a="http://schemas.openxmlformats.org/drawingml/2006/main" xmlns:r="http://schemas.openxmlformats.org/officeDocument/2006/relationships" xmlns:p="http://schemas.openxmlformats.org/presentationml/2006/main">
   <p:cSld>
     <p:spTree>
       <p:nvGrpSpPr>
@@ -1150,7 +1313,7 @@
         <p:nvSpPr>
           <p:cNvPr id="119" name="PlaceHolder 1"/>
           <p:cNvSpPr>
-            <a:spLocks noGrp="1"/>
+            <a:spLocks noGrp="1" noRot="1" noChangeAspect="1"/>
           </p:cNvSpPr>
           <p:nvPr>
             <p:ph type="sldImg"/>
@@ -1159,7 +1322,7 @@
         <p:spPr>
           <a:xfrm>
             <a:off x="685800" y="1143000"/>
-            <a:ext cx="5485680" cy="3085560"/>
+            <a:ext cx="5486400" cy="3086100"/>
           </a:xfrm>
           <a:prstGeom prst="rect">
             <a:avLst/>
@@ -1196,6 +1359,7 @@
           <a:bodyPr lIns="91440" tIns="45720" rIns="91440" bIns="45720" anchor="t">
             <a:noAutofit/>
           </a:bodyPr>
+          <a:lstStyle/>
           <a:p>
             <a:pPr indent="0" algn="l">
               <a:lnSpc>
@@ -1295,7 +1459,7 @@
                 <a:latin typeface="+mn-lt"/>
                 <a:ea typeface="+mn-ea"/>
               </a:rPr>
-              <a:t>&lt;number&gt;</a:t>
+              <a:t>5</a:t>
             </a:fld>
             <a:endParaRPr lang="en-ZA" sz="1200" b="0" u="none" strike="noStrike">
               <a:solidFill>
@@ -1310,11 +1474,14 @@
       </p:sp>
     </p:spTree>
   </p:cSld>
+  <p:clrMapOvr>
+    <a:masterClrMapping/>
+  </p:clrMapOvr>
 </p:notes>
 </file>
 
 <file path=ppt/slideLayouts/slideLayout1.xml><?xml version="1.0" encoding="utf-8"?>
-<p:sldLayout xmlns:a="http://schemas.openxmlformats.org/drawingml/2006/main" xmlns:p="http://schemas.openxmlformats.org/presentationml/2006/main" xmlns:r="http://schemas.openxmlformats.org/officeDocument/2006/relationships" xmlns:p14="http://schemas.microsoft.com/office/powerpoint/2010/main" xmlns:p15="http://schemas.microsoft.com/office/powerpoint/2012/main" xmlns:mc="http://schemas.openxmlformats.org/markup-compatibility/2006" type="blank" preserve="1">
+<p:sldLayout xmlns:a="http://schemas.openxmlformats.org/drawingml/2006/main" xmlns:r="http://schemas.openxmlformats.org/officeDocument/2006/relationships" xmlns:p="http://schemas.openxmlformats.org/presentationml/2006/main" type="blank" preserve="1">
   <p:cSld name="DEFAULT">
     <p:spTree>
       <p:nvGrpSpPr>
@@ -1332,17 +1499,21 @@
       </p:grpSpPr>
     </p:spTree>
   </p:cSld>
+  <p:clrMapOvr>
+    <a:masterClrMapping/>
+  </p:clrMapOvr>
 </p:sldLayout>
 </file>
 
 <file path=ppt/slideMasters/slideMaster1.xml><?xml version="1.0" encoding="utf-8"?>
-<p:sldMaster xmlns:a="http://schemas.openxmlformats.org/drawingml/2006/main" xmlns:p="http://schemas.openxmlformats.org/presentationml/2006/main" xmlns:r="http://schemas.openxmlformats.org/officeDocument/2006/relationships" xmlns:p14="http://schemas.microsoft.com/office/powerpoint/2010/main" xmlns:p15="http://schemas.microsoft.com/office/powerpoint/2012/main" xmlns:mc="http://schemas.openxmlformats.org/markup-compatibility/2006">
+<p:sldMaster xmlns:a="http://schemas.openxmlformats.org/drawingml/2006/main" xmlns:r="http://schemas.openxmlformats.org/officeDocument/2006/relationships" xmlns:p="http://schemas.openxmlformats.org/presentationml/2006/main">
   <p:cSld>
     <p:bg>
       <p:bgPr>
         <a:solidFill>
           <a:srgbClr val="FFFFFF"/>
         </a:solidFill>
+        <a:effectLst/>
       </p:bgPr>
     </p:bg>
     <p:spTree>
@@ -1420,14 +1591,6 @@
               </a:rPr>
               <a:t>Click to edit the title text format</a:t>
             </a:r>
-            <a:endParaRPr lang="en-ZA" sz="1800" b="0" u="none" strike="noStrike">
-              <a:solidFill>
-                <a:schemeClr val="dk1"/>
-              </a:solidFill>
-              <a:effectLst/>
-              <a:uFillTx/>
-              <a:latin typeface="Calibri"/>
-            </a:endParaRPr>
           </a:p>
         </p:txBody>
       </p:sp>
@@ -1616,14 +1779,6 @@
               </a:rPr>
               <a:t>Click to edit the outline text format</a:t>
             </a:r>
-            <a:endParaRPr lang="en-ZA" sz="3200" b="0" u="none" strike="noStrike">
-              <a:solidFill>
-                <a:schemeClr val="dk1"/>
-              </a:solidFill>
-              <a:effectLst/>
-              <a:uFillTx/>
-              <a:latin typeface="Calibri"/>
-            </a:endParaRPr>
           </a:p>
           <a:p>
             <a:pPr marL="864000" lvl="1" indent="-324000" algn="l">
@@ -1648,14 +1803,6 @@
               </a:rPr>
               <a:t>Second Outline Level</a:t>
             </a:r>
-            <a:endParaRPr lang="en-ZA" sz="2400" b="0" u="none" strike="noStrike">
-              <a:solidFill>
-                <a:schemeClr val="dk1"/>
-              </a:solidFill>
-              <a:effectLst/>
-              <a:uFillTx/>
-              <a:latin typeface="Calibri"/>
-            </a:endParaRPr>
           </a:p>
           <a:p>
             <a:pPr marL="1296000" lvl="2" indent="-288000" algn="l">
@@ -1680,14 +1827,6 @@
               </a:rPr>
               <a:t>Third Outline Level</a:t>
             </a:r>
-            <a:endParaRPr lang="en-ZA" sz="2000" b="0" u="none" strike="noStrike">
-              <a:solidFill>
-                <a:schemeClr val="dk1"/>
-              </a:solidFill>
-              <a:effectLst/>
-              <a:uFillTx/>
-              <a:latin typeface="Calibri"/>
-            </a:endParaRPr>
           </a:p>
           <a:p>
             <a:pPr marL="1728000" lvl="3" indent="-216000" algn="l">
@@ -1712,14 +1851,6 @@
               </a:rPr>
               <a:t>Fourth Outline Level</a:t>
             </a:r>
-            <a:endParaRPr lang="en-ZA" sz="2000" b="0" u="none" strike="noStrike">
-              <a:solidFill>
-                <a:schemeClr val="dk1"/>
-              </a:solidFill>
-              <a:effectLst/>
-              <a:uFillTx/>
-              <a:latin typeface="Calibri"/>
-            </a:endParaRPr>
           </a:p>
           <a:p>
             <a:pPr marL="2160000" lvl="4" indent="-216000" algn="l">
@@ -1744,14 +1875,6 @@
               </a:rPr>
               <a:t>Fifth Outline Level</a:t>
             </a:r>
-            <a:endParaRPr lang="en-ZA" sz="2000" b="0" u="none" strike="noStrike">
-              <a:solidFill>
-                <a:schemeClr val="dk1"/>
-              </a:solidFill>
-              <a:effectLst/>
-              <a:uFillTx/>
-              <a:latin typeface="Calibri"/>
-            </a:endParaRPr>
           </a:p>
           <a:p>
             <a:pPr marL="2592000" lvl="5" indent="-216000" algn="l">
@@ -1776,14 +1899,6 @@
               </a:rPr>
               <a:t>Sixth Outline Level</a:t>
             </a:r>
-            <a:endParaRPr lang="en-ZA" sz="2000" b="0" u="none" strike="noStrike">
-              <a:solidFill>
-                <a:schemeClr val="dk1"/>
-              </a:solidFill>
-              <a:effectLst/>
-              <a:uFillTx/>
-              <a:latin typeface="Calibri"/>
-            </a:endParaRPr>
           </a:p>
           <a:p>
             <a:pPr marL="3024000" lvl="6" indent="-216000" algn="l">
@@ -1808,14 +1923,6 @@
               </a:rPr>
               <a:t>Seventh Outline Level</a:t>
             </a:r>
-            <a:endParaRPr lang="en-ZA" sz="2000" b="0" u="none" strike="noStrike">
-              <a:solidFill>
-                <a:schemeClr val="dk1"/>
-              </a:solidFill>
-              <a:effectLst/>
-              <a:uFillTx/>
-              <a:latin typeface="Calibri"/>
-            </a:endParaRPr>
           </a:p>
         </p:txBody>
       </p:sp>
@@ -1823,19 +1930,300 @@
   </p:cSld>
   <p:clrMap bg1="lt1" tx1="dk1" bg2="lt2" tx2="dk2" accent1="accent1" accent2="accent2" accent3="accent3" accent4="accent4" accent5="accent5" accent6="accent6" hlink="hlink" folHlink="folHlink"/>
   <p:sldLayoutIdLst>
-    <p:sldLayoutId id="2147483649" r:id="rId2"/>
+    <p:sldLayoutId id="2147483649" r:id="rId1"/>
   </p:sldLayoutIdLst>
+  <p:txStyles>
+    <p:titleStyle>
+      <a:lvl1pPr algn="l" defTabSz="914400" rtl="0" eaLnBrk="1" latinLnBrk="0" hangingPunct="1">
+        <a:lnSpc>
+          <a:spcPct val="90000"/>
+        </a:lnSpc>
+        <a:spcBef>
+          <a:spcPct val="0"/>
+        </a:spcBef>
+        <a:buNone/>
+        <a:defRPr sz="4400" kern="1200">
+          <a:solidFill>
+            <a:schemeClr val="tx1"/>
+          </a:solidFill>
+          <a:latin typeface="+mj-lt"/>
+          <a:ea typeface="+mj-ea"/>
+          <a:cs typeface="+mj-cs"/>
+        </a:defRPr>
+      </a:lvl1pPr>
+    </p:titleStyle>
+    <p:bodyStyle>
+      <a:lvl1pPr marL="228600" indent="-228600" algn="l" defTabSz="914400" rtl="0" eaLnBrk="1" latinLnBrk="0" hangingPunct="1">
+        <a:lnSpc>
+          <a:spcPct val="90000"/>
+        </a:lnSpc>
+        <a:spcBef>
+          <a:spcPts val="1000"/>
+        </a:spcBef>
+        <a:buFont typeface="Arial" panose="020B0604020202020204" pitchFamily="34" charset="0"/>
+        <a:buChar char="•"/>
+        <a:defRPr sz="2800" kern="1200">
+          <a:solidFill>
+            <a:schemeClr val="tx1"/>
+          </a:solidFill>
+          <a:latin typeface="+mn-lt"/>
+          <a:ea typeface="+mn-ea"/>
+          <a:cs typeface="+mn-cs"/>
+        </a:defRPr>
+      </a:lvl1pPr>
+      <a:lvl2pPr marL="685800" indent="-228600" algn="l" defTabSz="914400" rtl="0" eaLnBrk="1" latinLnBrk="0" hangingPunct="1">
+        <a:lnSpc>
+          <a:spcPct val="90000"/>
+        </a:lnSpc>
+        <a:spcBef>
+          <a:spcPts val="500"/>
+        </a:spcBef>
+        <a:buFont typeface="Arial" panose="020B0604020202020204" pitchFamily="34" charset="0"/>
+        <a:buChar char="•"/>
+        <a:defRPr sz="2400" kern="1200">
+          <a:solidFill>
+            <a:schemeClr val="tx1"/>
+          </a:solidFill>
+          <a:latin typeface="+mn-lt"/>
+          <a:ea typeface="+mn-ea"/>
+          <a:cs typeface="+mn-cs"/>
+        </a:defRPr>
+      </a:lvl2pPr>
+      <a:lvl3pPr marL="1143000" indent="-228600" algn="l" defTabSz="914400" rtl="0" eaLnBrk="1" latinLnBrk="0" hangingPunct="1">
+        <a:lnSpc>
+          <a:spcPct val="90000"/>
+        </a:lnSpc>
+        <a:spcBef>
+          <a:spcPts val="500"/>
+        </a:spcBef>
+        <a:buFont typeface="Arial" panose="020B0604020202020204" pitchFamily="34" charset="0"/>
+        <a:buChar char="•"/>
+        <a:defRPr sz="2000" kern="1200">
+          <a:solidFill>
+            <a:schemeClr val="tx1"/>
+          </a:solidFill>
+          <a:latin typeface="+mn-lt"/>
+          <a:ea typeface="+mn-ea"/>
+          <a:cs typeface="+mn-cs"/>
+        </a:defRPr>
+      </a:lvl3pPr>
+      <a:lvl4pPr marL="1600200" indent="-228600" algn="l" defTabSz="914400" rtl="0" eaLnBrk="1" latinLnBrk="0" hangingPunct="1">
+        <a:lnSpc>
+          <a:spcPct val="90000"/>
+        </a:lnSpc>
+        <a:spcBef>
+          <a:spcPts val="500"/>
+        </a:spcBef>
+        <a:buFont typeface="Arial" panose="020B0604020202020204" pitchFamily="34" charset="0"/>
+        <a:buChar char="•"/>
+        <a:defRPr sz="1800" kern="1200">
+          <a:solidFill>
+            <a:schemeClr val="tx1"/>
+          </a:solidFill>
+          <a:latin typeface="+mn-lt"/>
+          <a:ea typeface="+mn-ea"/>
+          <a:cs typeface="+mn-cs"/>
+        </a:defRPr>
+      </a:lvl4pPr>
+      <a:lvl5pPr marL="2057400" indent="-228600" algn="l" defTabSz="914400" rtl="0" eaLnBrk="1" latinLnBrk="0" hangingPunct="1">
+        <a:lnSpc>
+          <a:spcPct val="90000"/>
+        </a:lnSpc>
+        <a:spcBef>
+          <a:spcPts val="500"/>
+        </a:spcBef>
+        <a:buFont typeface="Arial" panose="020B0604020202020204" pitchFamily="34" charset="0"/>
+        <a:buChar char="•"/>
+        <a:defRPr sz="1800" kern="1200">
+          <a:solidFill>
+            <a:schemeClr val="tx1"/>
+          </a:solidFill>
+          <a:latin typeface="+mn-lt"/>
+          <a:ea typeface="+mn-ea"/>
+          <a:cs typeface="+mn-cs"/>
+        </a:defRPr>
+      </a:lvl5pPr>
+      <a:lvl6pPr marL="2514600" indent="-228600" algn="l" defTabSz="914400" rtl="0" eaLnBrk="1" latinLnBrk="0" hangingPunct="1">
+        <a:lnSpc>
+          <a:spcPct val="90000"/>
+        </a:lnSpc>
+        <a:spcBef>
+          <a:spcPts val="500"/>
+        </a:spcBef>
+        <a:buFont typeface="Arial" panose="020B0604020202020204" pitchFamily="34" charset="0"/>
+        <a:buChar char="•"/>
+        <a:defRPr sz="1800" kern="1200">
+          <a:solidFill>
+            <a:schemeClr val="tx1"/>
+          </a:solidFill>
+          <a:latin typeface="+mn-lt"/>
+          <a:ea typeface="+mn-ea"/>
+          <a:cs typeface="+mn-cs"/>
+        </a:defRPr>
+      </a:lvl6pPr>
+      <a:lvl7pPr marL="2971800" indent="-228600" algn="l" defTabSz="914400" rtl="0" eaLnBrk="1" latinLnBrk="0" hangingPunct="1">
+        <a:lnSpc>
+          <a:spcPct val="90000"/>
+        </a:lnSpc>
+        <a:spcBef>
+          <a:spcPts val="500"/>
+        </a:spcBef>
+        <a:buFont typeface="Arial" panose="020B0604020202020204" pitchFamily="34" charset="0"/>
+        <a:buChar char="•"/>
+        <a:defRPr sz="1800" kern="1200">
+          <a:solidFill>
+            <a:schemeClr val="tx1"/>
+          </a:solidFill>
+          <a:latin typeface="+mn-lt"/>
+          <a:ea typeface="+mn-ea"/>
+          <a:cs typeface="+mn-cs"/>
+        </a:defRPr>
+      </a:lvl7pPr>
+      <a:lvl8pPr marL="3429000" indent="-228600" algn="l" defTabSz="914400" rtl="0" eaLnBrk="1" latinLnBrk="0" hangingPunct="1">
+        <a:lnSpc>
+          <a:spcPct val="90000"/>
+        </a:lnSpc>
+        <a:spcBef>
+          <a:spcPts val="500"/>
+        </a:spcBef>
+        <a:buFont typeface="Arial" panose="020B0604020202020204" pitchFamily="34" charset="0"/>
+        <a:buChar char="•"/>
+        <a:defRPr sz="1800" kern="1200">
+          <a:solidFill>
+            <a:schemeClr val="tx1"/>
+          </a:solidFill>
+          <a:latin typeface="+mn-lt"/>
+          <a:ea typeface="+mn-ea"/>
+          <a:cs typeface="+mn-cs"/>
+        </a:defRPr>
+      </a:lvl8pPr>
+      <a:lvl9pPr marL="3886200" indent="-228600" algn="l" defTabSz="914400" rtl="0" eaLnBrk="1" latinLnBrk="0" hangingPunct="1">
+        <a:lnSpc>
+          <a:spcPct val="90000"/>
+        </a:lnSpc>
+        <a:spcBef>
+          <a:spcPts val="500"/>
+        </a:spcBef>
+        <a:buFont typeface="Arial" panose="020B0604020202020204" pitchFamily="34" charset="0"/>
+        <a:buChar char="•"/>
+        <a:defRPr sz="1800" kern="1200">
+          <a:solidFill>
+            <a:schemeClr val="tx1"/>
+          </a:solidFill>
+          <a:latin typeface="+mn-lt"/>
+          <a:ea typeface="+mn-ea"/>
+          <a:cs typeface="+mn-cs"/>
+        </a:defRPr>
+      </a:lvl9pPr>
+    </p:bodyStyle>
+    <p:otherStyle>
+      <a:defPPr>
+        <a:defRPr lang="en-US"/>
+      </a:defPPr>
+      <a:lvl1pPr marL="0" algn="l" defTabSz="914400" rtl="0" eaLnBrk="1" latinLnBrk="0" hangingPunct="1">
+        <a:defRPr sz="1800" kern="1200">
+          <a:solidFill>
+            <a:schemeClr val="tx1"/>
+          </a:solidFill>
+          <a:latin typeface="+mn-lt"/>
+          <a:ea typeface="+mn-ea"/>
+          <a:cs typeface="+mn-cs"/>
+        </a:defRPr>
+      </a:lvl1pPr>
+      <a:lvl2pPr marL="457200" algn="l" defTabSz="914400" rtl="0" eaLnBrk="1" latinLnBrk="0" hangingPunct="1">
+        <a:defRPr sz="1800" kern="1200">
+          <a:solidFill>
+            <a:schemeClr val="tx1"/>
+          </a:solidFill>
+          <a:latin typeface="+mn-lt"/>
+          <a:ea typeface="+mn-ea"/>
+          <a:cs typeface="+mn-cs"/>
+        </a:defRPr>
+      </a:lvl2pPr>
+      <a:lvl3pPr marL="914400" algn="l" defTabSz="914400" rtl="0" eaLnBrk="1" latinLnBrk="0" hangingPunct="1">
+        <a:defRPr sz="1800" kern="1200">
+          <a:solidFill>
+            <a:schemeClr val="tx1"/>
+          </a:solidFill>
+          <a:latin typeface="+mn-lt"/>
+          <a:ea typeface="+mn-ea"/>
+          <a:cs typeface="+mn-cs"/>
+        </a:defRPr>
+      </a:lvl3pPr>
+      <a:lvl4pPr marL="1371600" algn="l" defTabSz="914400" rtl="0" eaLnBrk="1" latinLnBrk="0" hangingPunct="1">
+        <a:defRPr sz="1800" kern="1200">
+          <a:solidFill>
+            <a:schemeClr val="tx1"/>
+          </a:solidFill>
+          <a:latin typeface="+mn-lt"/>
+          <a:ea typeface="+mn-ea"/>
+          <a:cs typeface="+mn-cs"/>
+        </a:defRPr>
+      </a:lvl4pPr>
+      <a:lvl5pPr marL="1828800" algn="l" defTabSz="914400" rtl="0" eaLnBrk="1" latinLnBrk="0" hangingPunct="1">
+        <a:defRPr sz="1800" kern="1200">
+          <a:solidFill>
+            <a:schemeClr val="tx1"/>
+          </a:solidFill>
+          <a:latin typeface="+mn-lt"/>
+          <a:ea typeface="+mn-ea"/>
+          <a:cs typeface="+mn-cs"/>
+        </a:defRPr>
+      </a:lvl5pPr>
+      <a:lvl6pPr marL="2286000" algn="l" defTabSz="914400" rtl="0" eaLnBrk="1" latinLnBrk="0" hangingPunct="1">
+        <a:defRPr sz="1800" kern="1200">
+          <a:solidFill>
+            <a:schemeClr val="tx1"/>
+          </a:solidFill>
+          <a:latin typeface="+mn-lt"/>
+          <a:ea typeface="+mn-ea"/>
+          <a:cs typeface="+mn-cs"/>
+        </a:defRPr>
+      </a:lvl6pPr>
+      <a:lvl7pPr marL="2743200" algn="l" defTabSz="914400" rtl="0" eaLnBrk="1" latinLnBrk="0" hangingPunct="1">
+        <a:defRPr sz="1800" kern="1200">
+          <a:solidFill>
+            <a:schemeClr val="tx1"/>
+          </a:solidFill>
+          <a:latin typeface="+mn-lt"/>
+          <a:ea typeface="+mn-ea"/>
+          <a:cs typeface="+mn-cs"/>
+        </a:defRPr>
+      </a:lvl7pPr>
+      <a:lvl8pPr marL="3200400" algn="l" defTabSz="914400" rtl="0" eaLnBrk="1" latinLnBrk="0" hangingPunct="1">
+        <a:defRPr sz="1800" kern="1200">
+          <a:solidFill>
+            <a:schemeClr val="tx1"/>
+          </a:solidFill>
+          <a:latin typeface="+mn-lt"/>
+          <a:ea typeface="+mn-ea"/>
+          <a:cs typeface="+mn-cs"/>
+        </a:defRPr>
+      </a:lvl8pPr>
+      <a:lvl9pPr marL="3657600" algn="l" defTabSz="914400" rtl="0" eaLnBrk="1" latinLnBrk="0" hangingPunct="1">
+        <a:defRPr sz="1800" kern="1200">
+          <a:solidFill>
+            <a:schemeClr val="tx1"/>
+          </a:solidFill>
+          <a:latin typeface="+mn-lt"/>
+          <a:ea typeface="+mn-ea"/>
+          <a:cs typeface="+mn-cs"/>
+        </a:defRPr>
+      </a:lvl9pPr>
+    </p:otherStyle>
+  </p:txStyles>
 </p:sldMaster>
 </file>
 
 <file path=ppt/slides/slide1.xml><?xml version="1.0" encoding="utf-8"?>
-<p:sld xmlns:a="http://schemas.openxmlformats.org/drawingml/2006/main" xmlns:p="http://schemas.openxmlformats.org/presentationml/2006/main" xmlns:r="http://schemas.openxmlformats.org/officeDocument/2006/relationships" xmlns:p14="http://schemas.microsoft.com/office/powerpoint/2010/main" xmlns:p15="http://schemas.microsoft.com/office/powerpoint/2012/main" xmlns:mc="http://schemas.openxmlformats.org/markup-compatibility/2006">
+<p:sld xmlns:a="http://schemas.openxmlformats.org/drawingml/2006/main" xmlns:r="http://schemas.openxmlformats.org/officeDocument/2006/relationships" xmlns:p="http://schemas.openxmlformats.org/presentationml/2006/main">
   <p:cSld>
     <p:bg>
       <p:bgPr>
         <a:solidFill>
           <a:srgbClr val="FFFFFF"/>
         </a:solidFill>
+        <a:effectLst/>
       </p:bgPr>
     </p:bg>
     <p:spTree>
@@ -1872,15 +2260,22 @@
           </a:ln>
         </p:spPr>
         <p:style>
-          <a:lnRef idx="0"/>
-          <a:fillRef idx="0"/>
-          <a:effectRef idx="0"/>
+          <a:lnRef idx="0">
+            <a:scrgbClr r="0" g="0" b="0"/>
+          </a:lnRef>
+          <a:fillRef idx="0">
+            <a:scrgbClr r="0" g="0" b="0"/>
+          </a:fillRef>
+          <a:effectRef idx="0">
+            <a:scrgbClr r="0" g="0" b="0"/>
+          </a:effectRef>
           <a:fontRef idx="minor"/>
         </p:style>
         <p:txBody>
           <a:bodyPr lIns="0" tIns="0" rIns="0" bIns="0" anchor="ctr">
             <a:noAutofit/>
           </a:bodyPr>
+          <a:lstStyle/>
           <a:p>
             <a:pPr defTabSz="914400">
               <a:lnSpc>
@@ -1891,7 +2286,7 @@
               </a:tabLst>
             </a:pPr>
             <a:r>
-              <a:rPr lang="en-US" sz="1400" b="1" u="none" spc="300" strike="noStrike">
+              <a:rPr lang="en-US" sz="1400" b="1" u="none" strike="noStrike" spc="300">
                 <a:solidFill>
                   <a:srgbClr val="C98A1B"/>
                 </a:solidFill>
@@ -1932,15 +2327,22 @@
           </a:ln>
         </p:spPr>
         <p:style>
-          <a:lnRef idx="0"/>
-          <a:fillRef idx="0"/>
-          <a:effectRef idx="0"/>
+          <a:lnRef idx="0">
+            <a:scrgbClr r="0" g="0" b="0"/>
+          </a:lnRef>
+          <a:fillRef idx="0">
+            <a:scrgbClr r="0" g="0" b="0"/>
+          </a:fillRef>
+          <a:effectRef idx="0">
+            <a:scrgbClr r="0" g="0" b="0"/>
+          </a:effectRef>
           <a:fontRef idx="minor"/>
         </p:style>
         <p:txBody>
           <a:bodyPr lIns="0" tIns="0" rIns="0" bIns="0" anchor="t">
             <a:noAutofit/>
           </a:bodyPr>
+          <a:lstStyle/>
           <a:p>
             <a:pPr defTabSz="914400">
               <a:lnSpc>
@@ -1993,15 +2395,22 @@
           </a:ln>
         </p:spPr>
         <p:style>
-          <a:lnRef idx="0"/>
-          <a:fillRef idx="0"/>
-          <a:effectRef idx="0"/>
+          <a:lnRef idx="0">
+            <a:scrgbClr r="0" g="0" b="0"/>
+          </a:lnRef>
+          <a:fillRef idx="0">
+            <a:scrgbClr r="0" g="0" b="0"/>
+          </a:fillRef>
+          <a:effectRef idx="0">
+            <a:scrgbClr r="0" g="0" b="0"/>
+          </a:effectRef>
           <a:fontRef idx="minor"/>
         </p:style>
         <p:txBody>
           <a:bodyPr lIns="0" tIns="0" rIns="0" bIns="0" anchor="t">
             <a:noAutofit/>
           </a:bodyPr>
+          <a:lstStyle/>
           <a:p>
             <a:pPr defTabSz="914400">
               <a:lnSpc>
@@ -2060,15 +2469,22 @@
           </a:ln>
         </p:spPr>
         <p:style>
-          <a:lnRef idx="0"/>
-          <a:fillRef idx="0"/>
-          <a:effectRef idx="0"/>
+          <a:lnRef idx="0">
+            <a:scrgbClr r="0" g="0" b="0"/>
+          </a:lnRef>
+          <a:fillRef idx="0">
+            <a:scrgbClr r="0" g="0" b="0"/>
+          </a:fillRef>
+          <a:effectRef idx="0">
+            <a:scrgbClr r="0" g="0" b="0"/>
+          </a:effectRef>
           <a:fontRef idx="minor"/>
         </p:style>
         <p:txBody>
           <a:bodyPr lIns="90000" tIns="45000" rIns="90000" bIns="45000" anchor="t">
             <a:noAutofit/>
           </a:bodyPr>
+          <a:lstStyle/>
           <a:p>
             <a:endParaRPr lang="en-ZA" sz="1800" b="0" u="none" strike="noStrike">
               <a:solidFill>
@@ -2101,15 +2517,22 @@
           </a:ln>
         </p:spPr>
         <p:style>
-          <a:lnRef idx="0"/>
-          <a:fillRef idx="0"/>
-          <a:effectRef idx="0"/>
+          <a:lnRef idx="0">
+            <a:scrgbClr r="0" g="0" b="0"/>
+          </a:lnRef>
+          <a:fillRef idx="0">
+            <a:scrgbClr r="0" g="0" b="0"/>
+          </a:fillRef>
+          <a:effectRef idx="0">
+            <a:scrgbClr r="0" g="0" b="0"/>
+          </a:effectRef>
           <a:fontRef idx="minor"/>
         </p:style>
         <p:txBody>
           <a:bodyPr lIns="0" tIns="0" rIns="0" bIns="0" anchor="ctr">
             <a:noAutofit/>
           </a:bodyPr>
+          <a:lstStyle/>
           <a:p>
             <a:pPr defTabSz="914400">
               <a:lnSpc>
@@ -2161,15 +2584,22 @@
           </a:ln>
         </p:spPr>
         <p:style>
-          <a:lnRef idx="0"/>
-          <a:fillRef idx="0"/>
-          <a:effectRef idx="0"/>
+          <a:lnRef idx="0">
+            <a:scrgbClr r="0" g="0" b="0"/>
+          </a:lnRef>
+          <a:fillRef idx="0">
+            <a:scrgbClr r="0" g="0" b="0"/>
+          </a:fillRef>
+          <a:effectRef idx="0">
+            <a:scrgbClr r="0" g="0" b="0"/>
+          </a:effectRef>
           <a:fontRef idx="minor"/>
         </p:style>
         <p:txBody>
           <a:bodyPr lIns="0" tIns="0" rIns="0" bIns="0" anchor="t">
             <a:noAutofit/>
           </a:bodyPr>
+          <a:lstStyle/>
           <a:p>
             <a:pPr defTabSz="914400">
               <a:lnSpc>
@@ -2228,15 +2658,22 @@
           </a:ln>
         </p:spPr>
         <p:style>
-          <a:lnRef idx="0"/>
-          <a:fillRef idx="0"/>
-          <a:effectRef idx="0"/>
+          <a:lnRef idx="0">
+            <a:scrgbClr r="0" g="0" b="0"/>
+          </a:lnRef>
+          <a:fillRef idx="0">
+            <a:scrgbClr r="0" g="0" b="0"/>
+          </a:fillRef>
+          <a:effectRef idx="0">
+            <a:scrgbClr r="0" g="0" b="0"/>
+          </a:effectRef>
           <a:fontRef idx="minor"/>
         </p:style>
         <p:txBody>
           <a:bodyPr lIns="90000" tIns="45000" rIns="90000" bIns="45000" anchor="t">
             <a:noAutofit/>
           </a:bodyPr>
+          <a:lstStyle/>
           <a:p>
             <a:endParaRPr lang="en-ZA" sz="1800" b="0" u="none" strike="noStrike">
               <a:solidFill>
@@ -2269,15 +2706,22 @@
           </a:ln>
         </p:spPr>
         <p:style>
-          <a:lnRef idx="0"/>
-          <a:fillRef idx="0"/>
-          <a:effectRef idx="0"/>
+          <a:lnRef idx="0">
+            <a:scrgbClr r="0" g="0" b="0"/>
+          </a:lnRef>
+          <a:fillRef idx="0">
+            <a:scrgbClr r="0" g="0" b="0"/>
+          </a:fillRef>
+          <a:effectRef idx="0">
+            <a:scrgbClr r="0" g="0" b="0"/>
+          </a:effectRef>
           <a:fontRef idx="minor"/>
         </p:style>
         <p:txBody>
           <a:bodyPr lIns="0" tIns="0" rIns="0" bIns="0" anchor="ctr">
             <a:noAutofit/>
           </a:bodyPr>
+          <a:lstStyle/>
           <a:p>
             <a:pPr defTabSz="914400">
               <a:lnSpc>
@@ -2329,15 +2773,22 @@
           </a:ln>
         </p:spPr>
         <p:style>
-          <a:lnRef idx="0"/>
-          <a:fillRef idx="0"/>
-          <a:effectRef idx="0"/>
+          <a:lnRef idx="0">
+            <a:scrgbClr r="0" g="0" b="0"/>
+          </a:lnRef>
+          <a:fillRef idx="0">
+            <a:scrgbClr r="0" g="0" b="0"/>
+          </a:fillRef>
+          <a:effectRef idx="0">
+            <a:scrgbClr r="0" g="0" b="0"/>
+          </a:effectRef>
           <a:fontRef idx="minor"/>
         </p:style>
         <p:txBody>
           <a:bodyPr lIns="0" tIns="0" rIns="0" bIns="0" anchor="t">
             <a:noAutofit/>
           </a:bodyPr>
+          <a:lstStyle/>
           <a:p>
             <a:pPr defTabSz="914400">
               <a:lnSpc>
@@ -2396,15 +2847,22 @@
           </a:ln>
         </p:spPr>
         <p:style>
-          <a:lnRef idx="0"/>
-          <a:fillRef idx="0"/>
-          <a:effectRef idx="0"/>
+          <a:lnRef idx="0">
+            <a:scrgbClr r="0" g="0" b="0"/>
+          </a:lnRef>
+          <a:fillRef idx="0">
+            <a:scrgbClr r="0" g="0" b="0"/>
+          </a:fillRef>
+          <a:effectRef idx="0">
+            <a:scrgbClr r="0" g="0" b="0"/>
+          </a:effectRef>
           <a:fontRef idx="minor"/>
         </p:style>
         <p:txBody>
           <a:bodyPr lIns="90000" tIns="45000" rIns="90000" bIns="45000" anchor="t">
             <a:noAutofit/>
           </a:bodyPr>
+          <a:lstStyle/>
           <a:p>
             <a:endParaRPr lang="en-ZA" sz="1800" b="0" u="none" strike="noStrike">
               <a:solidFill>
@@ -2437,15 +2895,22 @@
           </a:ln>
         </p:spPr>
         <p:style>
-          <a:lnRef idx="0"/>
-          <a:fillRef idx="0"/>
-          <a:effectRef idx="0"/>
+          <a:lnRef idx="0">
+            <a:scrgbClr r="0" g="0" b="0"/>
+          </a:lnRef>
+          <a:fillRef idx="0">
+            <a:scrgbClr r="0" g="0" b="0"/>
+          </a:fillRef>
+          <a:effectRef idx="0">
+            <a:scrgbClr r="0" g="0" b="0"/>
+          </a:effectRef>
           <a:fontRef idx="minor"/>
         </p:style>
         <p:txBody>
           <a:bodyPr lIns="0" tIns="0" rIns="0" bIns="0" anchor="ctr">
             <a:noAutofit/>
           </a:bodyPr>
+          <a:lstStyle/>
           <a:p>
             <a:pPr defTabSz="914400">
               <a:lnSpc>
@@ -2497,15 +2962,22 @@
           </a:ln>
         </p:spPr>
         <p:style>
-          <a:lnRef idx="0"/>
-          <a:fillRef idx="0"/>
-          <a:effectRef idx="0"/>
+          <a:lnRef idx="0">
+            <a:scrgbClr r="0" g="0" b="0"/>
+          </a:lnRef>
+          <a:fillRef idx="0">
+            <a:scrgbClr r="0" g="0" b="0"/>
+          </a:fillRef>
+          <a:effectRef idx="0">
+            <a:scrgbClr r="0" g="0" b="0"/>
+          </a:effectRef>
           <a:fontRef idx="minor"/>
         </p:style>
         <p:txBody>
           <a:bodyPr lIns="0" tIns="0" rIns="0" bIns="0" anchor="t">
             <a:noAutofit/>
           </a:bodyPr>
+          <a:lstStyle/>
           <a:p>
             <a:pPr defTabSz="914400">
               <a:lnSpc>
@@ -2544,7 +3016,7 @@
           <p:nvPr/>
         </p:nvPicPr>
         <p:blipFill>
-          <a:blip r:embed="rId1"/>
+          <a:blip r:embed="rId3"/>
           <a:stretch/>
         </p:blipFill>
         <p:spPr>
@@ -2568,7 +3040,7 @@
           <p:nvPr/>
         </p:nvPicPr>
         <p:blipFill>
-          <a:blip r:embed="rId2"/>
+          <a:blip r:embed="rId4"/>
           <a:stretch/>
         </p:blipFill>
         <p:spPr>
@@ -2605,15 +3077,22 @@
           </a:ln>
         </p:spPr>
         <p:style>
-          <a:lnRef idx="0"/>
-          <a:fillRef idx="0"/>
-          <a:effectRef idx="0"/>
+          <a:lnRef idx="0">
+            <a:scrgbClr r="0" g="0" b="0"/>
+          </a:lnRef>
+          <a:fillRef idx="0">
+            <a:scrgbClr r="0" g="0" b="0"/>
+          </a:fillRef>
+          <a:effectRef idx="0">
+            <a:scrgbClr r="0" g="0" b="0"/>
+          </a:effectRef>
           <a:fontRef idx="minor"/>
         </p:style>
         <p:txBody>
           <a:bodyPr lIns="0" tIns="0" rIns="0" bIns="0" anchor="t">
             <a:noAutofit/>
           </a:bodyPr>
+          <a:lstStyle/>
           <a:p>
             <a:pPr defTabSz="914400">
               <a:lnSpc>
@@ -2666,15 +3145,22 @@
           </a:ln>
         </p:spPr>
         <p:style>
-          <a:lnRef idx="0"/>
-          <a:fillRef idx="0"/>
-          <a:effectRef idx="0"/>
+          <a:lnRef idx="0">
+            <a:scrgbClr r="0" g="0" b="0"/>
+          </a:lnRef>
+          <a:fillRef idx="0">
+            <a:scrgbClr r="0" g="0" b="0"/>
+          </a:fillRef>
+          <a:effectRef idx="0">
+            <a:scrgbClr r="0" g="0" b="0"/>
+          </a:effectRef>
           <a:fontRef idx="minor"/>
         </p:style>
         <p:txBody>
           <a:bodyPr lIns="0" tIns="0" rIns="0" bIns="0" anchor="ctr">
             <a:noAutofit/>
           </a:bodyPr>
+          <a:lstStyle/>
           <a:p>
             <a:pPr defTabSz="914400">
               <a:lnSpc>
@@ -2726,15 +3212,22 @@
           </a:ln>
         </p:spPr>
         <p:style>
-          <a:lnRef idx="0"/>
-          <a:fillRef idx="0"/>
-          <a:effectRef idx="0"/>
+          <a:lnRef idx="0">
+            <a:scrgbClr r="0" g="0" b="0"/>
+          </a:lnRef>
+          <a:fillRef idx="0">
+            <a:scrgbClr r="0" g="0" b="0"/>
+          </a:fillRef>
+          <a:effectRef idx="0">
+            <a:scrgbClr r="0" g="0" b="0"/>
+          </a:effectRef>
           <a:fontRef idx="minor"/>
         </p:style>
         <p:txBody>
           <a:bodyPr lIns="0" tIns="0" rIns="0" bIns="0" anchor="ctr">
             <a:noAutofit/>
           </a:bodyPr>
+          <a:lstStyle/>
           <a:p>
             <a:pPr algn="r" defTabSz="914400">
               <a:lnSpc>
@@ -2768,25 +3261,21 @@
       </p:sp>
     </p:spTree>
   </p:cSld>
-  <mc:AlternateContent>
-    <mc:Choice Requires="p14">
-      <p:transition spd="slow" p14:dur="2000"/>
-    </mc:Choice>
-    <mc:Fallback>
-      <p:transition spd="slow"/>
-    </mc:Fallback>
-  </mc:AlternateContent>
+  <p:clrMapOvr>
+    <a:masterClrMapping/>
+  </p:clrMapOvr>
 </p:sld>
 </file>
 
 <file path=ppt/slides/slide2.xml><?xml version="1.0" encoding="utf-8"?>
-<p:sld xmlns:a="http://schemas.openxmlformats.org/drawingml/2006/main" xmlns:p="http://schemas.openxmlformats.org/presentationml/2006/main" xmlns:r="http://schemas.openxmlformats.org/officeDocument/2006/relationships" xmlns:p14="http://schemas.microsoft.com/office/powerpoint/2010/main" xmlns:p15="http://schemas.microsoft.com/office/powerpoint/2012/main" xmlns:mc="http://schemas.openxmlformats.org/markup-compatibility/2006">
+<p:sld xmlns:a="http://schemas.openxmlformats.org/drawingml/2006/main" xmlns:r="http://schemas.openxmlformats.org/officeDocument/2006/relationships" xmlns:p="http://schemas.openxmlformats.org/presentationml/2006/main">
   <p:cSld>
     <p:bg>
       <p:bgPr>
         <a:solidFill>
           <a:srgbClr val="FFFFFF"/>
         </a:solidFill>
+        <a:effectLst/>
       </p:bgPr>
     </p:bg>
     <p:spTree>
@@ -2823,15 +3312,22 @@
           </a:ln>
         </p:spPr>
         <p:style>
-          <a:lnRef idx="0"/>
-          <a:fillRef idx="0"/>
-          <a:effectRef idx="0"/>
+          <a:lnRef idx="0">
+            <a:scrgbClr r="0" g="0" b="0"/>
+          </a:lnRef>
+          <a:fillRef idx="0">
+            <a:scrgbClr r="0" g="0" b="0"/>
+          </a:fillRef>
+          <a:effectRef idx="0">
+            <a:scrgbClr r="0" g="0" b="0"/>
+          </a:effectRef>
           <a:fontRef idx="minor"/>
         </p:style>
         <p:txBody>
           <a:bodyPr lIns="0" tIns="0" rIns="0" bIns="0" anchor="ctr">
             <a:noAutofit/>
           </a:bodyPr>
+          <a:lstStyle/>
           <a:p>
             <a:pPr defTabSz="914400">
               <a:lnSpc>
@@ -2884,15 +3380,22 @@
           </a:ln>
         </p:spPr>
         <p:style>
-          <a:lnRef idx="0"/>
-          <a:fillRef idx="0"/>
-          <a:effectRef idx="0"/>
+          <a:lnRef idx="0">
+            <a:scrgbClr r="0" g="0" b="0"/>
+          </a:lnRef>
+          <a:fillRef idx="0">
+            <a:scrgbClr r="0" g="0" b="0"/>
+          </a:fillRef>
+          <a:effectRef idx="0">
+            <a:scrgbClr r="0" g="0" b="0"/>
+          </a:effectRef>
           <a:fontRef idx="minor"/>
         </p:style>
         <p:txBody>
           <a:bodyPr lIns="0" tIns="0" rIns="0" bIns="0" anchor="ctr">
             <a:noAutofit/>
           </a:bodyPr>
+          <a:lstStyle/>
           <a:p>
             <a:pPr defTabSz="914400">
               <a:lnSpc>
@@ -2944,15 +3447,22 @@
           </a:ln>
         </p:spPr>
         <p:style>
-          <a:lnRef idx="0"/>
-          <a:fillRef idx="0"/>
-          <a:effectRef idx="0"/>
+          <a:lnRef idx="0">
+            <a:scrgbClr r="0" g="0" b="0"/>
+          </a:lnRef>
+          <a:fillRef idx="0">
+            <a:scrgbClr r="0" g="0" b="0"/>
+          </a:fillRef>
+          <a:effectRef idx="0">
+            <a:scrgbClr r="0" g="0" b="0"/>
+          </a:effectRef>
           <a:fontRef idx="minor"/>
         </p:style>
         <p:txBody>
           <a:bodyPr lIns="0" tIns="0" rIns="0" bIns="0" anchor="ctr">
             <a:noAutofit/>
           </a:bodyPr>
+          <a:lstStyle/>
           <a:p>
             <a:pPr algn="r" defTabSz="914400">
               <a:lnSpc>
@@ -3011,15 +3521,22 @@
           </a:ln>
         </p:spPr>
         <p:style>
-          <a:lnRef idx="0"/>
-          <a:fillRef idx="0"/>
-          <a:effectRef idx="0"/>
+          <a:lnRef idx="0">
+            <a:scrgbClr r="0" g="0" b="0"/>
+          </a:lnRef>
+          <a:fillRef idx="0">
+            <a:scrgbClr r="0" g="0" b="0"/>
+          </a:fillRef>
+          <a:effectRef idx="0">
+            <a:scrgbClr r="0" g="0" b="0"/>
+          </a:effectRef>
           <a:fontRef idx="minor"/>
         </p:style>
         <p:txBody>
           <a:bodyPr lIns="90000" tIns="45000" rIns="90000" bIns="45000" anchor="t">
             <a:noAutofit/>
           </a:bodyPr>
+          <a:lstStyle/>
           <a:p>
             <a:endParaRPr lang="en-ZA" sz="1800" b="0" u="none" strike="noStrike">
               <a:solidFill>
@@ -3052,15 +3569,22 @@
           </a:ln>
         </p:spPr>
         <p:style>
-          <a:lnRef idx="0"/>
-          <a:fillRef idx="0"/>
-          <a:effectRef idx="0"/>
+          <a:lnRef idx="0">
+            <a:scrgbClr r="0" g="0" b="0"/>
+          </a:lnRef>
+          <a:fillRef idx="0">
+            <a:scrgbClr r="0" g="0" b="0"/>
+          </a:fillRef>
+          <a:effectRef idx="0">
+            <a:scrgbClr r="0" g="0" b="0"/>
+          </a:effectRef>
           <a:fontRef idx="minor"/>
         </p:style>
         <p:txBody>
           <a:bodyPr lIns="0" tIns="0" rIns="0" bIns="0" anchor="ctr">
             <a:noAutofit/>
           </a:bodyPr>
+          <a:lstStyle/>
           <a:p>
             <a:pPr algn="ctr" defTabSz="914400">
               <a:lnSpc>
@@ -3113,15 +3637,22 @@
           </a:ln>
         </p:spPr>
         <p:style>
-          <a:lnRef idx="0"/>
-          <a:fillRef idx="0"/>
-          <a:effectRef idx="0"/>
+          <a:lnRef idx="0">
+            <a:scrgbClr r="0" g="0" b="0"/>
+          </a:lnRef>
+          <a:fillRef idx="0">
+            <a:scrgbClr r="0" g="0" b="0"/>
+          </a:fillRef>
+          <a:effectRef idx="0">
+            <a:scrgbClr r="0" g="0" b="0"/>
+          </a:effectRef>
           <a:fontRef idx="minor"/>
         </p:style>
         <p:txBody>
           <a:bodyPr lIns="0" tIns="0" rIns="0" bIns="0" anchor="ctr">
             <a:noAutofit/>
           </a:bodyPr>
+          <a:lstStyle/>
           <a:p>
             <a:pPr algn="ctr" defTabSz="914400">
               <a:lnSpc>
@@ -3180,15 +3711,22 @@
           </a:ln>
         </p:spPr>
         <p:style>
-          <a:lnRef idx="0"/>
-          <a:fillRef idx="0"/>
-          <a:effectRef idx="0"/>
+          <a:lnRef idx="0">
+            <a:scrgbClr r="0" g="0" b="0"/>
+          </a:lnRef>
+          <a:fillRef idx="0">
+            <a:scrgbClr r="0" g="0" b="0"/>
+          </a:fillRef>
+          <a:effectRef idx="0">
+            <a:scrgbClr r="0" g="0" b="0"/>
+          </a:effectRef>
           <a:fontRef idx="minor"/>
         </p:style>
         <p:txBody>
           <a:bodyPr lIns="90000" tIns="45000" rIns="90000" bIns="45000" anchor="t">
             <a:noAutofit/>
           </a:bodyPr>
+          <a:lstStyle/>
           <a:p>
             <a:endParaRPr lang="en-ZA" sz="1800" b="0" u="none" strike="noStrike">
               <a:solidFill>
@@ -3221,15 +3759,22 @@
           </a:ln>
         </p:spPr>
         <p:style>
-          <a:lnRef idx="0"/>
-          <a:fillRef idx="0"/>
-          <a:effectRef idx="0"/>
+          <a:lnRef idx="0">
+            <a:scrgbClr r="0" g="0" b="0"/>
+          </a:lnRef>
+          <a:fillRef idx="0">
+            <a:scrgbClr r="0" g="0" b="0"/>
+          </a:fillRef>
+          <a:effectRef idx="0">
+            <a:scrgbClr r="0" g="0" b="0"/>
+          </a:effectRef>
           <a:fontRef idx="minor"/>
         </p:style>
         <p:txBody>
           <a:bodyPr lIns="0" tIns="0" rIns="0" bIns="0" anchor="ctr">
             <a:noAutofit/>
           </a:bodyPr>
+          <a:lstStyle/>
           <a:p>
             <a:pPr algn="ctr" defTabSz="914400">
               <a:lnSpc>
@@ -3282,15 +3827,22 @@
           </a:ln>
         </p:spPr>
         <p:style>
-          <a:lnRef idx="0"/>
-          <a:fillRef idx="0"/>
-          <a:effectRef idx="0"/>
+          <a:lnRef idx="0">
+            <a:scrgbClr r="0" g="0" b="0"/>
+          </a:lnRef>
+          <a:fillRef idx="0">
+            <a:scrgbClr r="0" g="0" b="0"/>
+          </a:fillRef>
+          <a:effectRef idx="0">
+            <a:scrgbClr r="0" g="0" b="0"/>
+          </a:effectRef>
           <a:fontRef idx="minor"/>
         </p:style>
         <p:txBody>
           <a:bodyPr lIns="0" tIns="0" rIns="0" bIns="0" anchor="ctr">
             <a:noAutofit/>
           </a:bodyPr>
+          <a:lstStyle/>
           <a:p>
             <a:pPr algn="ctr" defTabSz="914400">
               <a:lnSpc>
@@ -3349,15 +3901,22 @@
           </a:ln>
         </p:spPr>
         <p:style>
-          <a:lnRef idx="0"/>
-          <a:fillRef idx="0"/>
-          <a:effectRef idx="0"/>
+          <a:lnRef idx="0">
+            <a:scrgbClr r="0" g="0" b="0"/>
+          </a:lnRef>
+          <a:fillRef idx="0">
+            <a:scrgbClr r="0" g="0" b="0"/>
+          </a:fillRef>
+          <a:effectRef idx="0">
+            <a:scrgbClr r="0" g="0" b="0"/>
+          </a:effectRef>
           <a:fontRef idx="minor"/>
         </p:style>
         <p:txBody>
           <a:bodyPr lIns="90000" tIns="45000" rIns="90000" bIns="45000" anchor="t">
             <a:noAutofit/>
           </a:bodyPr>
+          <a:lstStyle/>
           <a:p>
             <a:endParaRPr lang="en-ZA" sz="1800" b="0" u="none" strike="noStrike">
               <a:solidFill>
@@ -3390,15 +3949,22 @@
           </a:ln>
         </p:spPr>
         <p:style>
-          <a:lnRef idx="0"/>
-          <a:fillRef idx="0"/>
-          <a:effectRef idx="0"/>
+          <a:lnRef idx="0">
+            <a:scrgbClr r="0" g="0" b="0"/>
+          </a:lnRef>
+          <a:fillRef idx="0">
+            <a:scrgbClr r="0" g="0" b="0"/>
+          </a:fillRef>
+          <a:effectRef idx="0">
+            <a:scrgbClr r="0" g="0" b="0"/>
+          </a:effectRef>
           <a:fontRef idx="minor"/>
         </p:style>
         <p:txBody>
           <a:bodyPr lIns="0" tIns="0" rIns="0" bIns="0" anchor="ctr">
             <a:noAutofit/>
           </a:bodyPr>
+          <a:lstStyle/>
           <a:p>
             <a:pPr algn="ctr" defTabSz="914400">
               <a:lnSpc>
@@ -3451,15 +4017,22 @@
           </a:ln>
         </p:spPr>
         <p:style>
-          <a:lnRef idx="0"/>
-          <a:fillRef idx="0"/>
-          <a:effectRef idx="0"/>
+          <a:lnRef idx="0">
+            <a:scrgbClr r="0" g="0" b="0"/>
+          </a:lnRef>
+          <a:fillRef idx="0">
+            <a:scrgbClr r="0" g="0" b="0"/>
+          </a:fillRef>
+          <a:effectRef idx="0">
+            <a:scrgbClr r="0" g="0" b="0"/>
+          </a:effectRef>
           <a:fontRef idx="minor"/>
         </p:style>
         <p:txBody>
           <a:bodyPr lIns="0" tIns="0" rIns="0" bIns="0" anchor="ctr">
             <a:noAutofit/>
           </a:bodyPr>
+          <a:lstStyle/>
           <a:p>
             <a:pPr algn="ctr" defTabSz="914400">
               <a:lnSpc>
@@ -3518,15 +4091,22 @@
           </a:ln>
         </p:spPr>
         <p:style>
-          <a:lnRef idx="0"/>
-          <a:fillRef idx="0"/>
-          <a:effectRef idx="0"/>
+          <a:lnRef idx="0">
+            <a:scrgbClr r="0" g="0" b="0"/>
+          </a:lnRef>
+          <a:fillRef idx="0">
+            <a:scrgbClr r="0" g="0" b="0"/>
+          </a:fillRef>
+          <a:effectRef idx="0">
+            <a:scrgbClr r="0" g="0" b="0"/>
+          </a:effectRef>
           <a:fontRef idx="minor"/>
         </p:style>
         <p:txBody>
           <a:bodyPr lIns="90000" tIns="45000" rIns="90000" bIns="45000" anchor="t">
             <a:noAutofit/>
           </a:bodyPr>
+          <a:lstStyle/>
           <a:p>
             <a:endParaRPr lang="en-ZA" sz="1800" b="0" u="none" strike="noStrike">
               <a:solidFill>
@@ -3559,15 +4139,22 @@
           </a:ln>
         </p:spPr>
         <p:style>
-          <a:lnRef idx="0"/>
-          <a:fillRef idx="0"/>
-          <a:effectRef idx="0"/>
+          <a:lnRef idx="0">
+            <a:scrgbClr r="0" g="0" b="0"/>
+          </a:lnRef>
+          <a:fillRef idx="0">
+            <a:scrgbClr r="0" g="0" b="0"/>
+          </a:fillRef>
+          <a:effectRef idx="0">
+            <a:scrgbClr r="0" g="0" b="0"/>
+          </a:effectRef>
           <a:fontRef idx="minor"/>
         </p:style>
         <p:txBody>
           <a:bodyPr lIns="0" tIns="0" rIns="0" bIns="0" anchor="ctr">
             <a:noAutofit/>
           </a:bodyPr>
+          <a:lstStyle/>
           <a:p>
             <a:pPr algn="ctr" defTabSz="914400">
               <a:lnSpc>
@@ -3620,15 +4207,22 @@
           </a:ln>
         </p:spPr>
         <p:style>
-          <a:lnRef idx="0"/>
-          <a:fillRef idx="0"/>
-          <a:effectRef idx="0"/>
+          <a:lnRef idx="0">
+            <a:scrgbClr r="0" g="0" b="0"/>
+          </a:lnRef>
+          <a:fillRef idx="0">
+            <a:scrgbClr r="0" g="0" b="0"/>
+          </a:fillRef>
+          <a:effectRef idx="0">
+            <a:scrgbClr r="0" g="0" b="0"/>
+          </a:effectRef>
           <a:fontRef idx="minor"/>
         </p:style>
         <p:txBody>
           <a:bodyPr lIns="0" tIns="0" rIns="0" bIns="0" anchor="ctr">
             <a:noAutofit/>
           </a:bodyPr>
+          <a:lstStyle/>
           <a:p>
             <a:pPr algn="ctr" defTabSz="914400">
               <a:lnSpc>
@@ -3687,15 +4281,22 @@
           </a:ln>
         </p:spPr>
         <p:style>
-          <a:lnRef idx="0"/>
-          <a:fillRef idx="0"/>
-          <a:effectRef idx="0"/>
+          <a:lnRef idx="0">
+            <a:scrgbClr r="0" g="0" b="0"/>
+          </a:lnRef>
+          <a:fillRef idx="0">
+            <a:scrgbClr r="0" g="0" b="0"/>
+          </a:fillRef>
+          <a:effectRef idx="0">
+            <a:scrgbClr r="0" g="0" b="0"/>
+          </a:effectRef>
           <a:fontRef idx="minor"/>
         </p:style>
         <p:txBody>
           <a:bodyPr lIns="90000" tIns="45000" rIns="90000" bIns="45000" anchor="t">
             <a:noAutofit/>
           </a:bodyPr>
+          <a:lstStyle/>
           <a:p>
             <a:endParaRPr lang="en-ZA" sz="1800" b="0" u="none" strike="noStrike">
               <a:solidFill>
@@ -3728,15 +4329,22 @@
           </a:ln>
         </p:spPr>
         <p:style>
-          <a:lnRef idx="0"/>
-          <a:fillRef idx="0"/>
-          <a:effectRef idx="0"/>
+          <a:lnRef idx="0">
+            <a:scrgbClr r="0" g="0" b="0"/>
+          </a:lnRef>
+          <a:fillRef idx="0">
+            <a:scrgbClr r="0" g="0" b="0"/>
+          </a:fillRef>
+          <a:effectRef idx="0">
+            <a:scrgbClr r="0" g="0" b="0"/>
+          </a:effectRef>
           <a:fontRef idx="minor"/>
         </p:style>
         <p:txBody>
           <a:bodyPr lIns="0" tIns="0" rIns="0" bIns="0" anchor="ctr">
             <a:noAutofit/>
           </a:bodyPr>
+          <a:lstStyle/>
           <a:p>
             <a:pPr defTabSz="914400">
               <a:lnSpc>
@@ -3789,15 +4397,22 @@
           </a:ln>
         </p:spPr>
         <p:style>
-          <a:lnRef idx="0"/>
-          <a:fillRef idx="0"/>
-          <a:effectRef idx="0"/>
+          <a:lnRef idx="0">
+            <a:scrgbClr r="0" g="0" b="0"/>
+          </a:lnRef>
+          <a:fillRef idx="0">
+            <a:scrgbClr r="0" g="0" b="0"/>
+          </a:fillRef>
+          <a:effectRef idx="0">
+            <a:scrgbClr r="0" g="0" b="0"/>
+          </a:effectRef>
           <a:fontRef idx="minor"/>
         </p:style>
         <p:txBody>
           <a:bodyPr lIns="0" tIns="0" rIns="0" bIns="0" anchor="t">
             <a:noAutofit/>
           </a:bodyPr>
+          <a:lstStyle/>
           <a:p>
             <a:pPr marL="343080" indent="-343080" defTabSz="914400">
               <a:lnSpc>
@@ -3929,15 +4544,22 @@
           </a:ln>
         </p:spPr>
         <p:style>
-          <a:lnRef idx="0"/>
-          <a:fillRef idx="0"/>
-          <a:effectRef idx="0"/>
+          <a:lnRef idx="0">
+            <a:scrgbClr r="0" g="0" b="0"/>
+          </a:lnRef>
+          <a:fillRef idx="0">
+            <a:scrgbClr r="0" g="0" b="0"/>
+          </a:fillRef>
+          <a:effectRef idx="0">
+            <a:scrgbClr r="0" g="0" b="0"/>
+          </a:effectRef>
           <a:fontRef idx="minor"/>
         </p:style>
         <p:txBody>
           <a:bodyPr lIns="90000" tIns="45000" rIns="90000" bIns="45000" anchor="t">
             <a:noAutofit/>
           </a:bodyPr>
+          <a:lstStyle/>
           <a:p>
             <a:endParaRPr lang="en-ZA" sz="1800" b="0" u="none" strike="noStrike">
               <a:solidFill>
@@ -3970,15 +4592,22 @@
           </a:ln>
         </p:spPr>
         <p:style>
-          <a:lnRef idx="0"/>
-          <a:fillRef idx="0"/>
-          <a:effectRef idx="0"/>
+          <a:lnRef idx="0">
+            <a:scrgbClr r="0" g="0" b="0"/>
+          </a:lnRef>
+          <a:fillRef idx="0">
+            <a:scrgbClr r="0" g="0" b="0"/>
+          </a:fillRef>
+          <a:effectRef idx="0">
+            <a:scrgbClr r="0" g="0" b="0"/>
+          </a:effectRef>
           <a:fontRef idx="minor"/>
         </p:style>
         <p:txBody>
           <a:bodyPr lIns="0" tIns="0" rIns="0" bIns="0" anchor="ctr">
             <a:noAutofit/>
           </a:bodyPr>
+          <a:lstStyle/>
           <a:p>
             <a:pPr defTabSz="914400">
               <a:lnSpc>
@@ -4031,15 +4660,22 @@
           </a:ln>
         </p:spPr>
         <p:style>
-          <a:lnRef idx="0"/>
-          <a:fillRef idx="0"/>
-          <a:effectRef idx="0"/>
+          <a:lnRef idx="0">
+            <a:scrgbClr r="0" g="0" b="0"/>
+          </a:lnRef>
+          <a:fillRef idx="0">
+            <a:scrgbClr r="0" g="0" b="0"/>
+          </a:fillRef>
+          <a:effectRef idx="0">
+            <a:scrgbClr r="0" g="0" b="0"/>
+          </a:effectRef>
           <a:fontRef idx="minor"/>
         </p:style>
         <p:txBody>
           <a:bodyPr lIns="0" tIns="0" rIns="0" bIns="0" anchor="t">
             <a:noAutofit/>
           </a:bodyPr>
+          <a:lstStyle/>
           <a:p>
             <a:pPr marL="343080" indent="-343080" defTabSz="914400">
               <a:lnSpc>
@@ -4171,15 +4807,22 @@
           </a:ln>
         </p:spPr>
         <p:style>
-          <a:lnRef idx="0"/>
-          <a:fillRef idx="0"/>
-          <a:effectRef idx="0"/>
+          <a:lnRef idx="0">
+            <a:scrgbClr r="0" g="0" b="0"/>
+          </a:lnRef>
+          <a:fillRef idx="0">
+            <a:scrgbClr r="0" g="0" b="0"/>
+          </a:fillRef>
+          <a:effectRef idx="0">
+            <a:scrgbClr r="0" g="0" b="0"/>
+          </a:effectRef>
           <a:fontRef idx="minor"/>
         </p:style>
         <p:txBody>
           <a:bodyPr lIns="90000" tIns="45000" rIns="90000" bIns="45000" anchor="t">
             <a:noAutofit/>
           </a:bodyPr>
+          <a:lstStyle/>
           <a:p>
             <a:endParaRPr lang="en-ZA" sz="1800" b="0" u="none" strike="noStrike">
               <a:solidFill>
@@ -4212,15 +4855,22 @@
           </a:ln>
         </p:spPr>
         <p:style>
-          <a:lnRef idx="0"/>
-          <a:fillRef idx="0"/>
-          <a:effectRef idx="0"/>
+          <a:lnRef idx="0">
+            <a:scrgbClr r="0" g="0" b="0"/>
+          </a:lnRef>
+          <a:fillRef idx="0">
+            <a:scrgbClr r="0" g="0" b="0"/>
+          </a:fillRef>
+          <a:effectRef idx="0">
+            <a:scrgbClr r="0" g="0" b="0"/>
+          </a:effectRef>
           <a:fontRef idx="minor"/>
         </p:style>
         <p:txBody>
           <a:bodyPr lIns="0" tIns="0" rIns="0" bIns="0" anchor="ctr">
             <a:noAutofit/>
           </a:bodyPr>
+          <a:lstStyle/>
           <a:p>
             <a:pPr defTabSz="914400">
               <a:lnSpc>
@@ -4273,15 +4923,22 @@
           </a:ln>
         </p:spPr>
         <p:style>
-          <a:lnRef idx="0"/>
-          <a:fillRef idx="0"/>
-          <a:effectRef idx="0"/>
+          <a:lnRef idx="0">
+            <a:scrgbClr r="0" g="0" b="0"/>
+          </a:lnRef>
+          <a:fillRef idx="0">
+            <a:scrgbClr r="0" g="0" b="0"/>
+          </a:fillRef>
+          <a:effectRef idx="0">
+            <a:scrgbClr r="0" g="0" b="0"/>
+          </a:effectRef>
           <a:fontRef idx="minor"/>
         </p:style>
         <p:txBody>
           <a:bodyPr lIns="0" tIns="0" rIns="0" bIns="0" anchor="t">
             <a:noAutofit/>
           </a:bodyPr>
+          <a:lstStyle/>
           <a:p>
             <a:pPr marL="343080" indent="-343080" defTabSz="914400">
               <a:lnSpc>
@@ -4388,25 +5045,21 @@
       </p:sp>
     </p:spTree>
   </p:cSld>
-  <mc:AlternateContent>
-    <mc:Choice Requires="p14">
-      <p:transition spd="slow" p14:dur="2000"/>
-    </mc:Choice>
-    <mc:Fallback>
-      <p:transition spd="slow"/>
-    </mc:Fallback>
-  </mc:AlternateContent>
+  <p:clrMapOvr>
+    <a:masterClrMapping/>
+  </p:clrMapOvr>
 </p:sld>
 </file>
 
 <file path=ppt/slides/slide3.xml><?xml version="1.0" encoding="utf-8"?>
-<p:sld xmlns:a="http://schemas.openxmlformats.org/drawingml/2006/main" xmlns:p="http://schemas.openxmlformats.org/presentationml/2006/main" xmlns:r="http://schemas.openxmlformats.org/officeDocument/2006/relationships" xmlns:p14="http://schemas.microsoft.com/office/powerpoint/2010/main" xmlns:p15="http://schemas.microsoft.com/office/powerpoint/2012/main" xmlns:mc="http://schemas.openxmlformats.org/markup-compatibility/2006">
+<p:sld xmlns:a="http://schemas.openxmlformats.org/drawingml/2006/main" xmlns:r="http://schemas.openxmlformats.org/officeDocument/2006/relationships" xmlns:p="http://schemas.openxmlformats.org/presentationml/2006/main">
   <p:cSld>
     <p:bg>
       <p:bgPr>
         <a:solidFill>
           <a:srgbClr val="FFFFFF"/>
         </a:solidFill>
+        <a:effectLst/>
       </p:bgPr>
     </p:bg>
     <p:spTree>
@@ -4443,15 +5096,22 @@
           </a:ln>
         </p:spPr>
         <p:style>
-          <a:lnRef idx="0"/>
-          <a:fillRef idx="0"/>
-          <a:effectRef idx="0"/>
+          <a:lnRef idx="0">
+            <a:scrgbClr r="0" g="0" b="0"/>
+          </a:lnRef>
+          <a:fillRef idx="0">
+            <a:scrgbClr r="0" g="0" b="0"/>
+          </a:fillRef>
+          <a:effectRef idx="0">
+            <a:scrgbClr r="0" g="0" b="0"/>
+          </a:effectRef>
           <a:fontRef idx="minor"/>
         </p:style>
         <p:txBody>
           <a:bodyPr lIns="0" tIns="0" rIns="0" bIns="0" anchor="ctr">
             <a:noAutofit/>
           </a:bodyPr>
+          <a:lstStyle/>
           <a:p>
             <a:pPr defTabSz="914400">
               <a:lnSpc>
@@ -4504,15 +5164,22 @@
           </a:ln>
         </p:spPr>
         <p:style>
-          <a:lnRef idx="0"/>
-          <a:fillRef idx="0"/>
-          <a:effectRef idx="0"/>
+          <a:lnRef idx="0">
+            <a:scrgbClr r="0" g="0" b="0"/>
+          </a:lnRef>
+          <a:fillRef idx="0">
+            <a:scrgbClr r="0" g="0" b="0"/>
+          </a:fillRef>
+          <a:effectRef idx="0">
+            <a:scrgbClr r="0" g="0" b="0"/>
+          </a:effectRef>
           <a:fontRef idx="minor"/>
         </p:style>
         <p:txBody>
           <a:bodyPr lIns="0" tIns="0" rIns="0" bIns="0" anchor="ctr">
             <a:noAutofit/>
           </a:bodyPr>
+          <a:lstStyle/>
           <a:p>
             <a:pPr algn="r" defTabSz="914400">
               <a:lnSpc>
@@ -4571,15 +5238,22 @@
           </a:ln>
         </p:spPr>
         <p:style>
-          <a:lnRef idx="0"/>
-          <a:fillRef idx="0"/>
-          <a:effectRef idx="0"/>
+          <a:lnRef idx="0">
+            <a:scrgbClr r="0" g="0" b="0"/>
+          </a:lnRef>
+          <a:fillRef idx="0">
+            <a:scrgbClr r="0" g="0" b="0"/>
+          </a:fillRef>
+          <a:effectRef idx="0">
+            <a:scrgbClr r="0" g="0" b="0"/>
+          </a:effectRef>
           <a:fontRef idx="minor"/>
         </p:style>
         <p:txBody>
           <a:bodyPr lIns="90000" tIns="45000" rIns="90000" bIns="45000" anchor="t">
             <a:noAutofit/>
           </a:bodyPr>
+          <a:lstStyle/>
           <a:p>
             <a:endParaRPr lang="en-ZA" sz="1800" b="0" u="none" strike="noStrike">
               <a:solidFill>
@@ -4617,15 +5291,22 @@
           </a:ln>
         </p:spPr>
         <p:style>
-          <a:lnRef idx="0"/>
-          <a:fillRef idx="0"/>
-          <a:effectRef idx="0"/>
+          <a:lnRef idx="0">
+            <a:scrgbClr r="0" g="0" b="0"/>
+          </a:lnRef>
+          <a:fillRef idx="0">
+            <a:scrgbClr r="0" g="0" b="0"/>
+          </a:fillRef>
+          <a:effectRef idx="0">
+            <a:scrgbClr r="0" g="0" b="0"/>
+          </a:effectRef>
           <a:fontRef idx="minor"/>
         </p:style>
         <p:txBody>
           <a:bodyPr lIns="90000" tIns="45000" rIns="90000" bIns="45000" anchor="t">
             <a:noAutofit/>
           </a:bodyPr>
+          <a:lstStyle/>
           <a:p>
             <a:endParaRPr lang="en-ZA" sz="1800" b="0" u="none" strike="noStrike">
               <a:solidFill>
@@ -4658,15 +5339,22 @@
           </a:ln>
         </p:spPr>
         <p:style>
-          <a:lnRef idx="0"/>
-          <a:fillRef idx="0"/>
-          <a:effectRef idx="0"/>
+          <a:lnRef idx="0">
+            <a:scrgbClr r="0" g="0" b="0"/>
+          </a:lnRef>
+          <a:fillRef idx="0">
+            <a:scrgbClr r="0" g="0" b="0"/>
+          </a:fillRef>
+          <a:effectRef idx="0">
+            <a:scrgbClr r="0" g="0" b="0"/>
+          </a:effectRef>
           <a:fontRef idx="minor"/>
         </p:style>
         <p:txBody>
           <a:bodyPr lIns="0" tIns="0" rIns="0" bIns="0" anchor="ctr">
             <a:noAutofit/>
           </a:bodyPr>
+          <a:lstStyle/>
           <a:p>
             <a:pPr algn="ctr" defTabSz="914400">
               <a:lnSpc>
@@ -4705,7 +5393,7 @@
           <p:nvPr/>
         </p:nvPicPr>
         <p:blipFill>
-          <a:blip r:embed="rId1"/>
+          <a:blip r:embed="rId3"/>
           <a:stretch/>
         </p:blipFill>
         <p:spPr>
@@ -4742,15 +5430,22 @@
           </a:ln>
         </p:spPr>
         <p:style>
-          <a:lnRef idx="0"/>
-          <a:fillRef idx="0"/>
-          <a:effectRef idx="0"/>
+          <a:lnRef idx="0">
+            <a:scrgbClr r="0" g="0" b="0"/>
+          </a:lnRef>
+          <a:fillRef idx="0">
+            <a:scrgbClr r="0" g="0" b="0"/>
+          </a:fillRef>
+          <a:effectRef idx="0">
+            <a:scrgbClr r="0" g="0" b="0"/>
+          </a:effectRef>
           <a:fontRef idx="minor"/>
         </p:style>
         <p:txBody>
           <a:bodyPr lIns="0" tIns="0" rIns="0" bIns="0" anchor="t">
             <a:noAutofit/>
           </a:bodyPr>
+          <a:lstStyle/>
           <a:p>
             <a:pPr defTabSz="914400">
               <a:lnSpc>
@@ -4804,15 +5499,22 @@
           </a:ln>
         </p:spPr>
         <p:style>
-          <a:lnRef idx="0"/>
-          <a:fillRef idx="0"/>
-          <a:effectRef idx="0"/>
+          <a:lnRef idx="0">
+            <a:scrgbClr r="0" g="0" b="0"/>
+          </a:lnRef>
+          <a:fillRef idx="0">
+            <a:scrgbClr r="0" g="0" b="0"/>
+          </a:fillRef>
+          <a:effectRef idx="0">
+            <a:scrgbClr r="0" g="0" b="0"/>
+          </a:effectRef>
           <a:fontRef idx="minor"/>
         </p:style>
         <p:txBody>
           <a:bodyPr lIns="0" tIns="-44640" rIns="0" bIns="-44640" anchor="t">
             <a:noAutofit/>
           </a:bodyPr>
+          <a:lstStyle/>
           <a:p>
             <a:endParaRPr lang="en-ZA" sz="1800" b="0" u="none" strike="noStrike">
               <a:solidFill>
@@ -4852,15 +5554,22 @@
           </a:ln>
         </p:spPr>
         <p:style>
-          <a:lnRef idx="0"/>
-          <a:fillRef idx="0"/>
-          <a:effectRef idx="0"/>
+          <a:lnRef idx="0">
+            <a:scrgbClr r="0" g="0" b="0"/>
+          </a:lnRef>
+          <a:fillRef idx="0">
+            <a:scrgbClr r="0" g="0" b="0"/>
+          </a:fillRef>
+          <a:effectRef idx="0">
+            <a:scrgbClr r="0" g="0" b="0"/>
+          </a:effectRef>
           <a:fontRef idx="minor"/>
         </p:style>
         <p:txBody>
           <a:bodyPr lIns="90000" tIns="45000" rIns="90000" bIns="45000" anchor="t">
             <a:noAutofit/>
           </a:bodyPr>
+          <a:lstStyle/>
           <a:p>
             <a:endParaRPr lang="en-ZA" sz="1800" b="0" u="none" strike="noStrike">
               <a:solidFill>
@@ -4898,15 +5607,22 @@
           </a:ln>
         </p:spPr>
         <p:style>
-          <a:lnRef idx="0"/>
-          <a:fillRef idx="0"/>
-          <a:effectRef idx="0"/>
+          <a:lnRef idx="0">
+            <a:scrgbClr r="0" g="0" b="0"/>
+          </a:lnRef>
+          <a:fillRef idx="0">
+            <a:scrgbClr r="0" g="0" b="0"/>
+          </a:fillRef>
+          <a:effectRef idx="0">
+            <a:scrgbClr r="0" g="0" b="0"/>
+          </a:effectRef>
           <a:fontRef idx="minor"/>
         </p:style>
         <p:txBody>
           <a:bodyPr lIns="90000" tIns="45000" rIns="90000" bIns="45000" anchor="t">
             <a:noAutofit/>
           </a:bodyPr>
+          <a:lstStyle/>
           <a:p>
             <a:endParaRPr lang="en-ZA" sz="1800" b="0" u="none" strike="noStrike">
               <a:solidFill>
@@ -4939,15 +5655,22 @@
           </a:ln>
         </p:spPr>
         <p:style>
-          <a:lnRef idx="0"/>
-          <a:fillRef idx="0"/>
-          <a:effectRef idx="0"/>
+          <a:lnRef idx="0">
+            <a:scrgbClr r="0" g="0" b="0"/>
+          </a:lnRef>
+          <a:fillRef idx="0">
+            <a:scrgbClr r="0" g="0" b="0"/>
+          </a:fillRef>
+          <a:effectRef idx="0">
+            <a:scrgbClr r="0" g="0" b="0"/>
+          </a:effectRef>
           <a:fontRef idx="minor"/>
         </p:style>
         <p:txBody>
           <a:bodyPr lIns="0" tIns="0" rIns="0" bIns="0" anchor="ctr">
             <a:noAutofit/>
           </a:bodyPr>
+          <a:lstStyle/>
           <a:p>
             <a:pPr algn="ctr" defTabSz="914400">
               <a:lnSpc>
@@ -4986,7 +5709,7 @@
           <p:nvPr/>
         </p:nvPicPr>
         <p:blipFill>
-          <a:blip r:embed="rId2"/>
+          <a:blip r:embed="rId4"/>
           <a:stretch/>
         </p:blipFill>
         <p:spPr>
@@ -5023,15 +5746,22 @@
           </a:ln>
         </p:spPr>
         <p:style>
-          <a:lnRef idx="0"/>
-          <a:fillRef idx="0"/>
-          <a:effectRef idx="0"/>
+          <a:lnRef idx="0">
+            <a:scrgbClr r="0" g="0" b="0"/>
+          </a:lnRef>
+          <a:fillRef idx="0">
+            <a:scrgbClr r="0" g="0" b="0"/>
+          </a:fillRef>
+          <a:effectRef idx="0">
+            <a:scrgbClr r="0" g="0" b="0"/>
+          </a:effectRef>
           <a:fontRef idx="minor"/>
         </p:style>
         <p:txBody>
           <a:bodyPr lIns="0" tIns="0" rIns="0" bIns="0" anchor="t">
             <a:noAutofit/>
           </a:bodyPr>
+          <a:lstStyle/>
           <a:p>
             <a:pPr defTabSz="914400">
               <a:lnSpc>
@@ -5085,15 +5815,22 @@
           </a:ln>
         </p:spPr>
         <p:style>
-          <a:lnRef idx="0"/>
-          <a:fillRef idx="0"/>
-          <a:effectRef idx="0"/>
+          <a:lnRef idx="0">
+            <a:scrgbClr r="0" g="0" b="0"/>
+          </a:lnRef>
+          <a:fillRef idx="0">
+            <a:scrgbClr r="0" g="0" b="0"/>
+          </a:fillRef>
+          <a:effectRef idx="0">
+            <a:scrgbClr r="0" g="0" b="0"/>
+          </a:effectRef>
           <a:fontRef idx="minor"/>
         </p:style>
         <p:txBody>
           <a:bodyPr lIns="0" tIns="-44640" rIns="0" bIns="-44640" anchor="t">
             <a:noAutofit/>
           </a:bodyPr>
+          <a:lstStyle/>
           <a:p>
             <a:endParaRPr lang="en-ZA" sz="1800" b="0" u="none" strike="noStrike">
               <a:solidFill>
@@ -5133,15 +5870,22 @@
           </a:ln>
         </p:spPr>
         <p:style>
-          <a:lnRef idx="0"/>
-          <a:fillRef idx="0"/>
-          <a:effectRef idx="0"/>
+          <a:lnRef idx="0">
+            <a:scrgbClr r="0" g="0" b="0"/>
+          </a:lnRef>
+          <a:fillRef idx="0">
+            <a:scrgbClr r="0" g="0" b="0"/>
+          </a:fillRef>
+          <a:effectRef idx="0">
+            <a:scrgbClr r="0" g="0" b="0"/>
+          </a:effectRef>
           <a:fontRef idx="minor"/>
         </p:style>
         <p:txBody>
           <a:bodyPr lIns="90000" tIns="45000" rIns="90000" bIns="45000" anchor="t">
             <a:noAutofit/>
           </a:bodyPr>
+          <a:lstStyle/>
           <a:p>
             <a:endParaRPr lang="en-ZA" sz="1800" b="0" u="none" strike="noStrike">
               <a:solidFill>
@@ -5179,15 +5923,22 @@
           </a:ln>
         </p:spPr>
         <p:style>
-          <a:lnRef idx="0"/>
-          <a:fillRef idx="0"/>
-          <a:effectRef idx="0"/>
+          <a:lnRef idx="0">
+            <a:scrgbClr r="0" g="0" b="0"/>
+          </a:lnRef>
+          <a:fillRef idx="0">
+            <a:scrgbClr r="0" g="0" b="0"/>
+          </a:fillRef>
+          <a:effectRef idx="0">
+            <a:scrgbClr r="0" g="0" b="0"/>
+          </a:effectRef>
           <a:fontRef idx="minor"/>
         </p:style>
         <p:txBody>
           <a:bodyPr lIns="90000" tIns="45000" rIns="90000" bIns="45000" anchor="t">
             <a:noAutofit/>
           </a:bodyPr>
+          <a:lstStyle/>
           <a:p>
             <a:endParaRPr lang="en-ZA" sz="1800" b="0" u="none" strike="noStrike">
               <a:solidFill>
@@ -5220,15 +5971,22 @@
           </a:ln>
         </p:spPr>
         <p:style>
-          <a:lnRef idx="0"/>
-          <a:fillRef idx="0"/>
-          <a:effectRef idx="0"/>
+          <a:lnRef idx="0">
+            <a:scrgbClr r="0" g="0" b="0"/>
+          </a:lnRef>
+          <a:fillRef idx="0">
+            <a:scrgbClr r="0" g="0" b="0"/>
+          </a:fillRef>
+          <a:effectRef idx="0">
+            <a:scrgbClr r="0" g="0" b="0"/>
+          </a:effectRef>
           <a:fontRef idx="minor"/>
         </p:style>
         <p:txBody>
           <a:bodyPr lIns="0" tIns="0" rIns="0" bIns="0" anchor="ctr">
             <a:noAutofit/>
           </a:bodyPr>
+          <a:lstStyle/>
           <a:p>
             <a:pPr algn="ctr" defTabSz="914400">
               <a:lnSpc>
@@ -5267,7 +6025,7 @@
           <p:nvPr/>
         </p:nvPicPr>
         <p:blipFill>
-          <a:blip r:embed="rId3"/>
+          <a:blip r:embed="rId5"/>
           <a:stretch/>
         </p:blipFill>
         <p:spPr>
@@ -5304,15 +6062,22 @@
           </a:ln>
         </p:spPr>
         <p:style>
-          <a:lnRef idx="0"/>
-          <a:fillRef idx="0"/>
-          <a:effectRef idx="0"/>
+          <a:lnRef idx="0">
+            <a:scrgbClr r="0" g="0" b="0"/>
+          </a:lnRef>
+          <a:fillRef idx="0">
+            <a:scrgbClr r="0" g="0" b="0"/>
+          </a:fillRef>
+          <a:effectRef idx="0">
+            <a:scrgbClr r="0" g="0" b="0"/>
+          </a:effectRef>
           <a:fontRef idx="minor"/>
         </p:style>
         <p:txBody>
           <a:bodyPr lIns="0" tIns="0" rIns="0" bIns="0" anchor="t">
             <a:noAutofit/>
           </a:bodyPr>
+          <a:lstStyle/>
           <a:p>
             <a:pPr defTabSz="914400">
               <a:lnSpc>
@@ -5366,15 +6131,22 @@
           </a:ln>
         </p:spPr>
         <p:style>
-          <a:lnRef idx="0"/>
-          <a:fillRef idx="0"/>
-          <a:effectRef idx="0"/>
+          <a:lnRef idx="0">
+            <a:scrgbClr r="0" g="0" b="0"/>
+          </a:lnRef>
+          <a:fillRef idx="0">
+            <a:scrgbClr r="0" g="0" b="0"/>
+          </a:fillRef>
+          <a:effectRef idx="0">
+            <a:scrgbClr r="0" g="0" b="0"/>
+          </a:effectRef>
           <a:fontRef idx="minor"/>
         </p:style>
         <p:txBody>
           <a:bodyPr lIns="0" tIns="-44640" rIns="0" bIns="-44640" anchor="t">
             <a:noAutofit/>
           </a:bodyPr>
+          <a:lstStyle/>
           <a:p>
             <a:endParaRPr lang="en-ZA" sz="1800" b="0" u="none" strike="noStrike">
               <a:solidFill>
@@ -5414,15 +6186,22 @@
           </a:ln>
         </p:spPr>
         <p:style>
-          <a:lnRef idx="0"/>
-          <a:fillRef idx="0"/>
-          <a:effectRef idx="0"/>
+          <a:lnRef idx="0">
+            <a:scrgbClr r="0" g="0" b="0"/>
+          </a:lnRef>
+          <a:fillRef idx="0">
+            <a:scrgbClr r="0" g="0" b="0"/>
+          </a:fillRef>
+          <a:effectRef idx="0">
+            <a:scrgbClr r="0" g="0" b="0"/>
+          </a:effectRef>
           <a:fontRef idx="minor"/>
         </p:style>
         <p:txBody>
           <a:bodyPr lIns="90000" tIns="45000" rIns="90000" bIns="45000" anchor="t">
             <a:noAutofit/>
           </a:bodyPr>
+          <a:lstStyle/>
           <a:p>
             <a:endParaRPr lang="en-ZA" sz="1800" b="0" u="none" strike="noStrike">
               <a:solidFill>
@@ -5460,15 +6239,22 @@
           </a:ln>
         </p:spPr>
         <p:style>
-          <a:lnRef idx="0"/>
-          <a:fillRef idx="0"/>
-          <a:effectRef idx="0"/>
+          <a:lnRef idx="0">
+            <a:scrgbClr r="0" g="0" b="0"/>
+          </a:lnRef>
+          <a:fillRef idx="0">
+            <a:scrgbClr r="0" g="0" b="0"/>
+          </a:fillRef>
+          <a:effectRef idx="0">
+            <a:scrgbClr r="0" g="0" b="0"/>
+          </a:effectRef>
           <a:fontRef idx="minor"/>
         </p:style>
         <p:txBody>
           <a:bodyPr lIns="90000" tIns="45000" rIns="90000" bIns="45000" anchor="t">
             <a:noAutofit/>
           </a:bodyPr>
+          <a:lstStyle/>
           <a:p>
             <a:endParaRPr lang="en-ZA" sz="1800" b="0" u="none" strike="noStrike">
               <a:solidFill>
@@ -5501,15 +6287,22 @@
           </a:ln>
         </p:spPr>
         <p:style>
-          <a:lnRef idx="0"/>
-          <a:fillRef idx="0"/>
-          <a:effectRef idx="0"/>
+          <a:lnRef idx="0">
+            <a:scrgbClr r="0" g="0" b="0"/>
+          </a:lnRef>
+          <a:fillRef idx="0">
+            <a:scrgbClr r="0" g="0" b="0"/>
+          </a:fillRef>
+          <a:effectRef idx="0">
+            <a:scrgbClr r="0" g="0" b="0"/>
+          </a:effectRef>
           <a:fontRef idx="minor"/>
         </p:style>
         <p:txBody>
           <a:bodyPr lIns="0" tIns="0" rIns="0" bIns="0" anchor="ctr">
             <a:noAutofit/>
           </a:bodyPr>
+          <a:lstStyle/>
           <a:p>
             <a:pPr algn="ctr" defTabSz="914400">
               <a:lnSpc>
@@ -5561,15 +6354,22 @@
           </a:ln>
         </p:spPr>
         <p:style>
-          <a:lnRef idx="0"/>
-          <a:fillRef idx="0"/>
-          <a:effectRef idx="0"/>
+          <a:lnRef idx="0">
+            <a:scrgbClr r="0" g="0" b="0"/>
+          </a:lnRef>
+          <a:fillRef idx="0">
+            <a:scrgbClr r="0" g="0" b="0"/>
+          </a:fillRef>
+          <a:effectRef idx="0">
+            <a:scrgbClr r="0" g="0" b="0"/>
+          </a:effectRef>
           <a:fontRef idx="minor"/>
         </p:style>
         <p:txBody>
           <a:bodyPr lIns="0" tIns="0" rIns="0" bIns="0" anchor="t">
             <a:noAutofit/>
           </a:bodyPr>
+          <a:lstStyle/>
           <a:p>
             <a:pPr defTabSz="914400">
               <a:lnSpc>
@@ -5621,15 +6421,22 @@
           </a:ln>
         </p:spPr>
         <p:style>
-          <a:lnRef idx="0"/>
-          <a:fillRef idx="0"/>
-          <a:effectRef idx="0"/>
+          <a:lnRef idx="0">
+            <a:scrgbClr r="0" g="0" b="0"/>
+          </a:lnRef>
+          <a:fillRef idx="0">
+            <a:scrgbClr r="0" g="0" b="0"/>
+          </a:fillRef>
+          <a:effectRef idx="0">
+            <a:scrgbClr r="0" g="0" b="0"/>
+          </a:effectRef>
           <a:fontRef idx="minor"/>
         </p:style>
         <p:txBody>
           <a:bodyPr lIns="0" tIns="0" rIns="0" bIns="0" anchor="t">
             <a:noAutofit/>
           </a:bodyPr>
+          <a:lstStyle/>
           <a:p>
             <a:pPr defTabSz="914400">
               <a:lnSpc>
@@ -5683,15 +6490,22 @@
           </a:ln>
         </p:spPr>
         <p:style>
-          <a:lnRef idx="0"/>
-          <a:fillRef idx="0"/>
-          <a:effectRef idx="0"/>
+          <a:lnRef idx="0">
+            <a:scrgbClr r="0" g="0" b="0"/>
+          </a:lnRef>
+          <a:fillRef idx="0">
+            <a:scrgbClr r="0" g="0" b="0"/>
+          </a:fillRef>
+          <a:effectRef idx="0">
+            <a:scrgbClr r="0" g="0" b="0"/>
+          </a:effectRef>
           <a:fontRef idx="minor"/>
         </p:style>
         <p:txBody>
           <a:bodyPr lIns="0" tIns="-44640" rIns="0" bIns="-44640" anchor="t">
             <a:noAutofit/>
           </a:bodyPr>
+          <a:lstStyle/>
           <a:p>
             <a:endParaRPr lang="en-ZA" sz="1800" b="0" u="none" strike="noStrike">
               <a:solidFill>
@@ -5731,15 +6545,22 @@
           </a:ln>
         </p:spPr>
         <p:style>
-          <a:lnRef idx="0"/>
-          <a:fillRef idx="0"/>
-          <a:effectRef idx="0"/>
+          <a:lnRef idx="0">
+            <a:scrgbClr r="0" g="0" b="0"/>
+          </a:lnRef>
+          <a:fillRef idx="0">
+            <a:scrgbClr r="0" g="0" b="0"/>
+          </a:fillRef>
+          <a:effectRef idx="0">
+            <a:scrgbClr r="0" g="0" b="0"/>
+          </a:effectRef>
           <a:fontRef idx="minor"/>
         </p:style>
         <p:txBody>
           <a:bodyPr lIns="90000" tIns="45000" rIns="90000" bIns="45000" anchor="t">
             <a:noAutofit/>
           </a:bodyPr>
+          <a:lstStyle/>
           <a:p>
             <a:endParaRPr lang="en-ZA" sz="1800" b="0" u="none" strike="noStrike">
               <a:solidFill>
@@ -5777,15 +6598,22 @@
           </a:ln>
         </p:spPr>
         <p:style>
-          <a:lnRef idx="0"/>
-          <a:fillRef idx="0"/>
-          <a:effectRef idx="0"/>
+          <a:lnRef idx="0">
+            <a:scrgbClr r="0" g="0" b="0"/>
+          </a:lnRef>
+          <a:fillRef idx="0">
+            <a:scrgbClr r="0" g="0" b="0"/>
+          </a:fillRef>
+          <a:effectRef idx="0">
+            <a:scrgbClr r="0" g="0" b="0"/>
+          </a:effectRef>
           <a:fontRef idx="minor"/>
         </p:style>
         <p:txBody>
           <a:bodyPr lIns="90000" tIns="45000" rIns="90000" bIns="45000" anchor="t">
             <a:noAutofit/>
           </a:bodyPr>
+          <a:lstStyle/>
           <a:p>
             <a:endParaRPr lang="en-ZA" sz="1800" b="0" u="none" strike="noStrike">
               <a:solidFill>
@@ -5818,15 +6646,22 @@
           </a:ln>
         </p:spPr>
         <p:style>
-          <a:lnRef idx="0"/>
-          <a:fillRef idx="0"/>
-          <a:effectRef idx="0"/>
+          <a:lnRef idx="0">
+            <a:scrgbClr r="0" g="0" b="0"/>
+          </a:lnRef>
+          <a:fillRef idx="0">
+            <a:scrgbClr r="0" g="0" b="0"/>
+          </a:fillRef>
+          <a:effectRef idx="0">
+            <a:scrgbClr r="0" g="0" b="0"/>
+          </a:effectRef>
           <a:fontRef idx="minor"/>
         </p:style>
         <p:txBody>
           <a:bodyPr lIns="0" tIns="0" rIns="0" bIns="0" anchor="ctr">
             <a:noAutofit/>
           </a:bodyPr>
+          <a:lstStyle/>
           <a:p>
             <a:pPr algn="ctr" defTabSz="914400">
               <a:lnSpc>
@@ -5878,15 +6713,22 @@
           </a:ln>
         </p:spPr>
         <p:style>
-          <a:lnRef idx="0"/>
-          <a:fillRef idx="0"/>
-          <a:effectRef idx="0"/>
+          <a:lnRef idx="0">
+            <a:scrgbClr r="0" g="0" b="0"/>
+          </a:lnRef>
+          <a:fillRef idx="0">
+            <a:scrgbClr r="0" g="0" b="0"/>
+          </a:fillRef>
+          <a:effectRef idx="0">
+            <a:scrgbClr r="0" g="0" b="0"/>
+          </a:effectRef>
           <a:fontRef idx="minor"/>
         </p:style>
         <p:txBody>
           <a:bodyPr lIns="0" tIns="0" rIns="0" bIns="0" anchor="t">
             <a:noAutofit/>
           </a:bodyPr>
+          <a:lstStyle/>
           <a:p>
             <a:pPr defTabSz="914400">
               <a:lnSpc>
@@ -5938,15 +6780,22 @@
           </a:ln>
         </p:spPr>
         <p:style>
-          <a:lnRef idx="0"/>
-          <a:fillRef idx="0"/>
-          <a:effectRef idx="0"/>
+          <a:lnRef idx="0">
+            <a:scrgbClr r="0" g="0" b="0"/>
+          </a:lnRef>
+          <a:fillRef idx="0">
+            <a:scrgbClr r="0" g="0" b="0"/>
+          </a:fillRef>
+          <a:effectRef idx="0">
+            <a:scrgbClr r="0" g="0" b="0"/>
+          </a:effectRef>
           <a:fontRef idx="minor"/>
         </p:style>
         <p:txBody>
           <a:bodyPr lIns="0" tIns="0" rIns="0" bIns="0" anchor="t">
             <a:noAutofit/>
           </a:bodyPr>
+          <a:lstStyle/>
           <a:p>
             <a:pPr defTabSz="914400">
               <a:lnSpc>
@@ -5998,15 +6847,22 @@
           </a:ln>
         </p:spPr>
         <p:style>
-          <a:lnRef idx="0"/>
-          <a:fillRef idx="0"/>
-          <a:effectRef idx="0"/>
+          <a:lnRef idx="0">
+            <a:scrgbClr r="0" g="0" b="0"/>
+          </a:lnRef>
+          <a:fillRef idx="0">
+            <a:scrgbClr r="0" g="0" b="0"/>
+          </a:fillRef>
+          <a:effectRef idx="0">
+            <a:scrgbClr r="0" g="0" b="0"/>
+          </a:effectRef>
           <a:fontRef idx="minor"/>
         </p:style>
         <p:txBody>
           <a:bodyPr lIns="0" tIns="0" rIns="0" bIns="0" anchor="ctr">
             <a:noAutofit/>
           </a:bodyPr>
+          <a:lstStyle/>
           <a:p>
             <a:pPr algn="ctr" defTabSz="914400">
               <a:lnSpc>
@@ -6058,15 +6914,22 @@
           </a:ln>
         </p:spPr>
         <p:style>
-          <a:lnRef idx="0"/>
-          <a:fillRef idx="0"/>
-          <a:effectRef idx="0"/>
+          <a:lnRef idx="0">
+            <a:scrgbClr r="0" g="0" b="0"/>
+          </a:lnRef>
+          <a:fillRef idx="0">
+            <a:scrgbClr r="0" g="0" b="0"/>
+          </a:fillRef>
+          <a:effectRef idx="0">
+            <a:scrgbClr r="0" g="0" b="0"/>
+          </a:effectRef>
           <a:fontRef idx="minor"/>
         </p:style>
         <p:txBody>
           <a:bodyPr lIns="0" tIns="0" rIns="0" bIns="0" anchor="ctr">
             <a:noAutofit/>
           </a:bodyPr>
+          <a:lstStyle/>
           <a:p>
             <a:pPr algn="ctr" defTabSz="914400">
               <a:lnSpc>
@@ -6118,15 +6981,22 @@
           </a:ln>
         </p:spPr>
         <p:style>
-          <a:lnRef idx="0"/>
-          <a:fillRef idx="0"/>
-          <a:effectRef idx="0"/>
+          <a:lnRef idx="0">
+            <a:scrgbClr r="0" g="0" b="0"/>
+          </a:lnRef>
+          <a:fillRef idx="0">
+            <a:scrgbClr r="0" g="0" b="0"/>
+          </a:fillRef>
+          <a:effectRef idx="0">
+            <a:scrgbClr r="0" g="0" b="0"/>
+          </a:effectRef>
           <a:fontRef idx="minor"/>
         </p:style>
         <p:txBody>
           <a:bodyPr lIns="0" tIns="0" rIns="0" bIns="0" anchor="ctr">
             <a:noAutofit/>
           </a:bodyPr>
+          <a:lstStyle/>
           <a:p>
             <a:pPr algn="ctr" defTabSz="914400">
               <a:lnSpc>
@@ -6178,15 +7048,22 @@
           </a:ln>
         </p:spPr>
         <p:style>
-          <a:lnRef idx="0"/>
-          <a:fillRef idx="0"/>
-          <a:effectRef idx="0"/>
+          <a:lnRef idx="0">
+            <a:scrgbClr r="0" g="0" b="0"/>
+          </a:lnRef>
+          <a:fillRef idx="0">
+            <a:scrgbClr r="0" g="0" b="0"/>
+          </a:fillRef>
+          <a:effectRef idx="0">
+            <a:scrgbClr r="0" g="0" b="0"/>
+          </a:effectRef>
           <a:fontRef idx="minor"/>
         </p:style>
         <p:txBody>
           <a:bodyPr lIns="0" tIns="0" rIns="0" bIns="0" anchor="ctr">
             <a:noAutofit/>
           </a:bodyPr>
+          <a:lstStyle/>
           <a:p>
             <a:pPr algn="ctr" defTabSz="914400">
               <a:lnSpc>
@@ -6238,15 +7115,22 @@
           </a:ln>
         </p:spPr>
         <p:style>
-          <a:lnRef idx="0"/>
-          <a:fillRef idx="0"/>
-          <a:effectRef idx="0"/>
+          <a:lnRef idx="0">
+            <a:scrgbClr r="0" g="0" b="0"/>
+          </a:lnRef>
+          <a:fillRef idx="0">
+            <a:scrgbClr r="0" g="0" b="0"/>
+          </a:fillRef>
+          <a:effectRef idx="0">
+            <a:scrgbClr r="0" g="0" b="0"/>
+          </a:effectRef>
           <a:fontRef idx="minor"/>
         </p:style>
         <p:txBody>
           <a:bodyPr lIns="0" tIns="0" rIns="0" bIns="0" anchor="t">
             <a:noAutofit/>
           </a:bodyPr>
+          <a:lstStyle/>
           <a:p>
             <a:pPr defTabSz="914400">
               <a:lnSpc>
@@ -6309,15 +7193,22 @@
           </a:ln>
         </p:spPr>
         <p:style>
-          <a:lnRef idx="0"/>
-          <a:fillRef idx="0"/>
-          <a:effectRef idx="0"/>
+          <a:lnRef idx="0">
+            <a:scrgbClr r="0" g="0" b="0"/>
+          </a:lnRef>
+          <a:fillRef idx="0">
+            <a:scrgbClr r="0" g="0" b="0"/>
+          </a:fillRef>
+          <a:effectRef idx="0">
+            <a:scrgbClr r="0" g="0" b="0"/>
+          </a:effectRef>
           <a:fontRef idx="minor"/>
         </p:style>
         <p:txBody>
           <a:bodyPr lIns="0" tIns="0" rIns="0" bIns="0" anchor="t">
             <a:noAutofit/>
           </a:bodyPr>
+          <a:lstStyle/>
           <a:p>
             <a:pPr defTabSz="914400">
               <a:lnSpc>
@@ -6380,15 +7271,22 @@
           </a:ln>
         </p:spPr>
         <p:style>
-          <a:lnRef idx="0"/>
-          <a:fillRef idx="0"/>
-          <a:effectRef idx="0"/>
+          <a:lnRef idx="0">
+            <a:scrgbClr r="0" g="0" b="0"/>
+          </a:lnRef>
+          <a:fillRef idx="0">
+            <a:scrgbClr r="0" g="0" b="0"/>
+          </a:fillRef>
+          <a:effectRef idx="0">
+            <a:scrgbClr r="0" g="0" b="0"/>
+          </a:effectRef>
           <a:fontRef idx="minor"/>
         </p:style>
         <p:txBody>
           <a:bodyPr lIns="0" tIns="0" rIns="0" bIns="0" anchor="t">
             <a:noAutofit/>
           </a:bodyPr>
+          <a:lstStyle/>
           <a:p>
             <a:pPr defTabSz="914400">
               <a:lnSpc>
@@ -6453,15 +7351,22 @@
           </a:ln>
         </p:spPr>
         <p:style>
-          <a:lnRef idx="0"/>
-          <a:fillRef idx="0"/>
-          <a:effectRef idx="0"/>
+          <a:lnRef idx="0">
+            <a:scrgbClr r="0" g="0" b="0"/>
+          </a:lnRef>
+          <a:fillRef idx="0">
+            <a:scrgbClr r="0" g="0" b="0"/>
+          </a:fillRef>
+          <a:effectRef idx="0">
+            <a:scrgbClr r="0" g="0" b="0"/>
+          </a:effectRef>
           <a:fontRef idx="minor"/>
         </p:style>
         <p:txBody>
           <a:bodyPr lIns="1440" tIns="1440" rIns="1440" bIns="1440" anchor="ctr">
             <a:noAutofit/>
           </a:bodyPr>
+          <a:lstStyle/>
           <a:p>
             <a:pPr defTabSz="914400">
               <a:lnSpc>
@@ -6523,25 +7428,21 @@
       </p:sp>
     </p:spTree>
   </p:cSld>
-  <mc:AlternateContent>
-    <mc:Choice Requires="p14">
-      <p:transition spd="slow" p14:dur="2000"/>
-    </mc:Choice>
-    <mc:Fallback>
-      <p:transition spd="slow"/>
-    </mc:Fallback>
-  </mc:AlternateContent>
+  <p:clrMapOvr>
+    <a:masterClrMapping/>
+  </p:clrMapOvr>
 </p:sld>
 </file>
 
 <file path=ppt/slides/slide4.xml><?xml version="1.0" encoding="utf-8"?>
-<p:sld xmlns:a="http://schemas.openxmlformats.org/drawingml/2006/main" xmlns:p="http://schemas.openxmlformats.org/presentationml/2006/main" xmlns:r="http://schemas.openxmlformats.org/officeDocument/2006/relationships" xmlns:p14="http://schemas.microsoft.com/office/powerpoint/2010/main" xmlns:p15="http://schemas.microsoft.com/office/powerpoint/2012/main" xmlns:mc="http://schemas.openxmlformats.org/markup-compatibility/2006">
+<p:sld xmlns:a="http://schemas.openxmlformats.org/drawingml/2006/main" xmlns:r="http://schemas.openxmlformats.org/officeDocument/2006/relationships" xmlns:p="http://schemas.openxmlformats.org/presentationml/2006/main">
   <p:cSld>
     <p:bg>
       <p:bgPr>
         <a:solidFill>
           <a:srgbClr val="FFFFFF"/>
         </a:solidFill>
+        <a:effectLst/>
       </p:bgPr>
     </p:bg>
     <p:spTree>
@@ -6578,15 +7479,22 @@
           </a:ln>
         </p:spPr>
         <p:style>
-          <a:lnRef idx="0"/>
-          <a:fillRef idx="0"/>
-          <a:effectRef idx="0"/>
+          <a:lnRef idx="0">
+            <a:scrgbClr r="0" g="0" b="0"/>
+          </a:lnRef>
+          <a:fillRef idx="0">
+            <a:scrgbClr r="0" g="0" b="0"/>
+          </a:fillRef>
+          <a:effectRef idx="0">
+            <a:scrgbClr r="0" g="0" b="0"/>
+          </a:effectRef>
           <a:fontRef idx="minor"/>
         </p:style>
         <p:txBody>
           <a:bodyPr lIns="0" tIns="0" rIns="0" bIns="0" anchor="ctr">
             <a:noAutofit/>
           </a:bodyPr>
+          <a:lstStyle/>
           <a:p>
             <a:pPr defTabSz="914400">
               <a:lnSpc>
@@ -6639,15 +7547,22 @@
           </a:ln>
         </p:spPr>
         <p:style>
-          <a:lnRef idx="0"/>
-          <a:fillRef idx="0"/>
-          <a:effectRef idx="0"/>
+          <a:lnRef idx="0">
+            <a:scrgbClr r="0" g="0" b="0"/>
+          </a:lnRef>
+          <a:fillRef idx="0">
+            <a:scrgbClr r="0" g="0" b="0"/>
+          </a:fillRef>
+          <a:effectRef idx="0">
+            <a:scrgbClr r="0" g="0" b="0"/>
+          </a:effectRef>
           <a:fontRef idx="minor"/>
         </p:style>
         <p:txBody>
           <a:bodyPr lIns="0" tIns="0" rIns="0" bIns="0" anchor="ctr">
             <a:noAutofit/>
           </a:bodyPr>
+          <a:lstStyle/>
           <a:p>
             <a:pPr algn="r" defTabSz="914400">
               <a:lnSpc>
@@ -6683,29 +7598,64 @@
         <p:nvGraphicFramePr>
           <p:cNvPr id="92" name="Table 0"/>
           <p:cNvGraphicFramePr/>
-          <p:nvPr/>
+          <p:nvPr>
+            <p:extLst>
+              <p:ext uri="{D42A27DB-BD31-4B8C-83A1-F6EECF244321}">
+                <p14:modId xmlns:p14="http://schemas.microsoft.com/office/powerpoint/2010/main" val="806429931"/>
+              </p:ext>
+            </p:extLst>
+          </p:nvPr>
         </p:nvGraphicFramePr>
         <p:xfrm>
           <a:off x="548640" y="1463040"/>
-          <a:ext cx="6949080" cy="3966480"/>
+          <a:ext cx="6949440" cy="3462240"/>
         </p:xfrm>
         <a:graphic>
           <a:graphicData uri="http://schemas.openxmlformats.org/drawingml/2006/table">
             <a:tbl>
               <a:tblPr/>
               <a:tblGrid>
-                <a:gridCol w="2103120"/>
-                <a:gridCol w="1463040"/>
-                <a:gridCol w="1188720"/>
-                <a:gridCol w="1005840"/>
-                <a:gridCol w="1188720"/>
+                <a:gridCol w="2103120">
+                  <a:extLst>
+                    <a:ext uri="{9D8B030D-6E8A-4147-A177-3AD203B41FA5}">
+                      <a16:colId xmlns:a16="http://schemas.microsoft.com/office/drawing/2014/main" val="20000"/>
+                    </a:ext>
+                  </a:extLst>
+                </a:gridCol>
+                <a:gridCol w="1463040">
+                  <a:extLst>
+                    <a:ext uri="{9D8B030D-6E8A-4147-A177-3AD203B41FA5}">
+                      <a16:colId xmlns:a16="http://schemas.microsoft.com/office/drawing/2014/main" val="20001"/>
+                    </a:ext>
+                  </a:extLst>
+                </a:gridCol>
+                <a:gridCol w="1188720">
+                  <a:extLst>
+                    <a:ext uri="{9D8B030D-6E8A-4147-A177-3AD203B41FA5}">
+                      <a16:colId xmlns:a16="http://schemas.microsoft.com/office/drawing/2014/main" val="20002"/>
+                    </a:ext>
+                  </a:extLst>
+                </a:gridCol>
+                <a:gridCol w="1005840">
+                  <a:extLst>
+                    <a:ext uri="{9D8B030D-6E8A-4147-A177-3AD203B41FA5}">
+                      <a16:colId xmlns:a16="http://schemas.microsoft.com/office/drawing/2014/main" val="20003"/>
+                    </a:ext>
+                  </a:extLst>
+                </a:gridCol>
+                <a:gridCol w="1188720">
+                  <a:extLst>
+                    <a:ext uri="{9D8B030D-6E8A-4147-A177-3AD203B41FA5}">
+                      <a16:colId xmlns:a16="http://schemas.microsoft.com/office/drawing/2014/main" val="20004"/>
+                    </a:ext>
+                  </a:extLst>
+                </a:gridCol>
               </a:tblGrid>
               <a:tr h="566640">
                 <a:tc>
                   <a:txBody>
-                    <a:bodyPr anchor="ctr">
-                      <a:noAutofit/>
-                    </a:bodyPr>
+                    <a:bodyPr/>
+                    <a:lstStyle/>
                     <a:p>
                       <a:pPr defTabSz="914400">
                         <a:lnSpc>
@@ -6736,7 +7686,7 @@
                       </a:endParaRPr>
                     </a:p>
                   </a:txBody>
-                  <a:tcPr anchor="ctr" marL="91440" marR="91440" marT="45720" marB="45720">
+                  <a:tcPr anchor="ctr">
                     <a:lnL w="12240">
                       <a:solidFill>
                         <a:srgbClr val="DDE6DF"/>
@@ -6755,11 +7705,14 @@
                       </a:solidFill>
                       <a:prstDash val="solid"/>
                     </a:lnT>
-                    <a:lnB w="12240">
-                      <a:solidFill>
-                        <a:srgbClr val="DDE6DF"/>
-                      </a:solidFill>
-                      <a:prstDash val="solid"/>
+                    <a:lnB w="12240" cap="flat" cmpd="sng" algn="ctr">
+                      <a:solidFill>
+                        <a:srgbClr val="DDE6DF"/>
+                      </a:solidFill>
+                      <a:prstDash val="solid"/>
+                      <a:round/>
+                      <a:headEnd type="none" w="med" len="med"/>
+                      <a:tailEnd type="none" w="med" len="med"/>
                     </a:lnB>
                     <a:solidFill>
                       <a:srgbClr val="2C5F2D"/>
@@ -6768,9 +7721,8 @@
                 </a:tc>
                 <a:tc>
                   <a:txBody>
-                    <a:bodyPr anchor="ctr">
-                      <a:noAutofit/>
-                    </a:bodyPr>
+                    <a:bodyPr/>
+                    <a:lstStyle/>
                     <a:p>
                       <a:pPr algn="r" defTabSz="914400">
                         <a:lnSpc>
@@ -6801,7 +7753,7 @@
                       </a:endParaRPr>
                     </a:p>
                   </a:txBody>
-                  <a:tcPr anchor="ctr" marL="91440" marR="91440" marT="45720" marB="45720">
+                  <a:tcPr anchor="ctr">
                     <a:lnL w="12240">
                       <a:solidFill>
                         <a:srgbClr val="DDE6DF"/>
@@ -6820,11 +7772,14 @@
                       </a:solidFill>
                       <a:prstDash val="solid"/>
                     </a:lnT>
-                    <a:lnB w="12240">
-                      <a:solidFill>
-                        <a:srgbClr val="DDE6DF"/>
-                      </a:solidFill>
-                      <a:prstDash val="solid"/>
+                    <a:lnB w="12240" cap="flat" cmpd="sng" algn="ctr">
+                      <a:solidFill>
+                        <a:srgbClr val="DDE6DF"/>
+                      </a:solidFill>
+                      <a:prstDash val="solid"/>
+                      <a:round/>
+                      <a:headEnd type="none" w="med" len="med"/>
+                      <a:tailEnd type="none" w="med" len="med"/>
                     </a:lnB>
                     <a:solidFill>
                       <a:srgbClr val="2C5F2D"/>
@@ -6833,9 +7788,8 @@
                 </a:tc>
                 <a:tc>
                   <a:txBody>
-                    <a:bodyPr anchor="ctr">
-                      <a:noAutofit/>
-                    </a:bodyPr>
+                    <a:bodyPr/>
+                    <a:lstStyle/>
                     <a:p>
                       <a:pPr algn="r" defTabSz="914400">
                         <a:lnSpc>
@@ -6866,7 +7820,7 @@
                       </a:endParaRPr>
                     </a:p>
                   </a:txBody>
-                  <a:tcPr anchor="ctr" marL="91440" marR="91440" marT="45720" marB="45720">
+                  <a:tcPr anchor="ctr">
                     <a:lnL w="12240">
                       <a:solidFill>
                         <a:srgbClr val="DDE6DF"/>
@@ -6885,11 +7839,14 @@
                       </a:solidFill>
                       <a:prstDash val="solid"/>
                     </a:lnT>
-                    <a:lnB w="12240">
-                      <a:solidFill>
-                        <a:srgbClr val="DDE6DF"/>
-                      </a:solidFill>
-                      <a:prstDash val="solid"/>
+                    <a:lnB w="12240" cap="flat" cmpd="sng" algn="ctr">
+                      <a:solidFill>
+                        <a:srgbClr val="DDE6DF"/>
+                      </a:solidFill>
+                      <a:prstDash val="solid"/>
+                      <a:round/>
+                      <a:headEnd type="none" w="med" len="med"/>
+                      <a:tailEnd type="none" w="med" len="med"/>
                     </a:lnB>
                     <a:solidFill>
                       <a:srgbClr val="2C5F2D"/>
@@ -6898,9 +7855,8 @@
                 </a:tc>
                 <a:tc>
                   <a:txBody>
-                    <a:bodyPr anchor="ctr">
-                      <a:noAutofit/>
-                    </a:bodyPr>
+                    <a:bodyPr/>
+                    <a:lstStyle/>
                     <a:p>
                       <a:pPr algn="r" defTabSz="914400">
                         <a:lnSpc>
@@ -6931,7 +7887,7 @@
                       </a:endParaRPr>
                     </a:p>
                   </a:txBody>
-                  <a:tcPr anchor="ctr" marL="91440" marR="91440" marT="45720" marB="45720">
+                  <a:tcPr anchor="ctr">
                     <a:lnL w="12240">
                       <a:solidFill>
                         <a:srgbClr val="DDE6DF"/>
@@ -6950,11 +7906,14 @@
                       </a:solidFill>
                       <a:prstDash val="solid"/>
                     </a:lnT>
-                    <a:lnB w="12240">
-                      <a:solidFill>
-                        <a:srgbClr val="DDE6DF"/>
-                      </a:solidFill>
-                      <a:prstDash val="solid"/>
+                    <a:lnB w="12240" cap="flat" cmpd="sng" algn="ctr">
+                      <a:solidFill>
+                        <a:srgbClr val="DDE6DF"/>
+                      </a:solidFill>
+                      <a:prstDash val="solid"/>
+                      <a:round/>
+                      <a:headEnd type="none" w="med" len="med"/>
+                      <a:tailEnd type="none" w="med" len="med"/>
                     </a:lnB>
                     <a:solidFill>
                       <a:srgbClr val="2C5F2D"/>
@@ -6963,9 +7922,8 @@
                 </a:tc>
                 <a:tc>
                   <a:txBody>
-                    <a:bodyPr anchor="ctr">
-                      <a:noAutofit/>
-                    </a:bodyPr>
+                    <a:bodyPr/>
+                    <a:lstStyle/>
                     <a:p>
                       <a:pPr algn="r" defTabSz="914400">
                         <a:lnSpc>
@@ -6996,7 +7954,7 @@
                       </a:endParaRPr>
                     </a:p>
                   </a:txBody>
-                  <a:tcPr anchor="ctr" marL="91440" marR="91440" marT="45720" marB="45720">
+                  <a:tcPr anchor="ctr">
                     <a:lnL w="12240">
                       <a:solidFill>
                         <a:srgbClr val="DDE6DF"/>
@@ -7015,24 +7973,2455 @@
                       </a:solidFill>
                       <a:prstDash val="solid"/>
                     </a:lnT>
-                    <a:lnB w="12240">
-                      <a:solidFill>
-                        <a:srgbClr val="DDE6DF"/>
-                      </a:solidFill>
-                      <a:prstDash val="solid"/>
+                    <a:lnB w="12240" cap="flat" cmpd="sng" algn="ctr">
+                      <a:solidFill>
+                        <a:srgbClr val="DDE6DF"/>
+                      </a:solidFill>
+                      <a:prstDash val="solid"/>
+                      <a:round/>
+                      <a:headEnd type="none" w="med" len="med"/>
+                      <a:tailEnd type="none" w="med" len="med"/>
                     </a:lnB>
                     <a:solidFill>
                       <a:srgbClr val="2C5F2D"/>
                     </a:solidFill>
                   </a:tcPr>
                 </a:tc>
+                <a:extLst>
+                  <a:ext uri="{0D108BD9-81ED-4DB2-BD59-A6C34878D82A}">
+                    <a16:rowId xmlns:a16="http://schemas.microsoft.com/office/drawing/2014/main" val="10000"/>
+                  </a:ext>
+                </a:extLst>
               </a:tr>
               <a:tr h="566640">
                 <a:tc>
                   <a:txBody>
-                    <a:bodyPr anchor="ctr">
-                      <a:noAutofit/>
-                    </a:bodyPr>
+                    <a:bodyPr/>
+                    <a:lstStyle/>
+                    <a:p>
+                      <a:pPr algn="l">
+                        <a:buNone/>
+                      </a:pPr>
+                      <a:r>
+                        <a:rPr lang="en-US" sz="1600" b="0" dirty="0">
+                          <a:effectLst/>
+                        </a:rPr>
+                        <a:t>DINOv2 baseline</a:t>
+                      </a:r>
+                    </a:p>
+                  </a:txBody>
+                  <a:tcPr anchor="ctr">
+                    <a:lnL w="12240">
+                      <a:solidFill>
+                        <a:srgbClr val="DDE6DF"/>
+                      </a:solidFill>
+                      <a:prstDash val="solid"/>
+                    </a:lnL>
+                    <a:lnR w="12240">
+                      <a:solidFill>
+                        <a:srgbClr val="DDE6DF"/>
+                      </a:solidFill>
+                      <a:prstDash val="solid"/>
+                    </a:lnR>
+                    <a:lnT w="12240">
+                      <a:solidFill>
+                        <a:srgbClr val="DDE6DF"/>
+                      </a:solidFill>
+                      <a:prstDash val="solid"/>
+                    </a:lnT>
+                    <a:lnB w="12240">
+                      <a:solidFill>
+                        <a:srgbClr val="DDE6DF"/>
+                      </a:solidFill>
+                      <a:prstDash val="solid"/>
+                    </a:lnB>
+                    <a:solidFill>
+                      <a:srgbClr val="FFFFFF"/>
+                    </a:solidFill>
+                  </a:tcPr>
+                </a:tc>
+                <a:tc>
+                  <a:txBody>
+                    <a:bodyPr/>
+                    <a:lstStyle/>
+                    <a:p>
+                      <a:pPr algn="ctr">
+                        <a:buNone/>
+                      </a:pPr>
+                      <a:r>
+                        <a:rPr lang="en-US" sz="1600" b="0">
+                          <a:effectLst/>
+                        </a:rPr>
+                        <a:t>0.5651</a:t>
+                      </a:r>
+                    </a:p>
+                  </a:txBody>
+                  <a:tcPr anchor="ctr">
+                    <a:lnL w="12240">
+                      <a:solidFill>
+                        <a:srgbClr val="DDE6DF"/>
+                      </a:solidFill>
+                      <a:prstDash val="solid"/>
+                    </a:lnL>
+                    <a:lnR w="12240">
+                      <a:solidFill>
+                        <a:srgbClr val="DDE6DF"/>
+                      </a:solidFill>
+                      <a:prstDash val="solid"/>
+                    </a:lnR>
+                    <a:lnT w="12240">
+                      <a:solidFill>
+                        <a:srgbClr val="DDE6DF"/>
+                      </a:solidFill>
+                      <a:prstDash val="solid"/>
+                    </a:lnT>
+                    <a:lnB w="12240">
+                      <a:solidFill>
+                        <a:srgbClr val="DDE6DF"/>
+                      </a:solidFill>
+                      <a:prstDash val="solid"/>
+                    </a:lnB>
+                    <a:solidFill>
+                      <a:srgbClr val="FFFFFF"/>
+                    </a:solidFill>
+                  </a:tcPr>
+                </a:tc>
+                <a:tc>
+                  <a:txBody>
+                    <a:bodyPr/>
+                    <a:lstStyle/>
+                    <a:p>
+                      <a:pPr algn="ctr">
+                        <a:buNone/>
+                      </a:pPr>
+                      <a:r>
+                        <a:rPr lang="en-US" sz="1600" b="0">
+                          <a:effectLst/>
+                        </a:rPr>
+                        <a:t>0.5186 </a:t>
+                      </a:r>
+                      <a:r>
+                        <a:rPr lang="en-US" sz="1600" b="0" i="1">
+                          <a:effectLst/>
+                        </a:rPr>
+                        <a:t>(0.1897)</a:t>
+                      </a:r>
+                      <a:endParaRPr lang="en-US" sz="1600" b="0">
+                        <a:effectLst/>
+                      </a:endParaRPr>
+                    </a:p>
+                  </a:txBody>
+                  <a:tcPr anchor="ctr">
+                    <a:lnL w="12240">
+                      <a:solidFill>
+                        <a:srgbClr val="DDE6DF"/>
+                      </a:solidFill>
+                      <a:prstDash val="solid"/>
+                    </a:lnL>
+                    <a:lnR w="12240">
+                      <a:solidFill>
+                        <a:srgbClr val="DDE6DF"/>
+                      </a:solidFill>
+                      <a:prstDash val="solid"/>
+                    </a:lnR>
+                    <a:lnT w="12240">
+                      <a:solidFill>
+                        <a:srgbClr val="DDE6DF"/>
+                      </a:solidFill>
+                      <a:prstDash val="solid"/>
+                    </a:lnT>
+                    <a:lnB w="12240">
+                      <a:solidFill>
+                        <a:srgbClr val="DDE6DF"/>
+                      </a:solidFill>
+                      <a:prstDash val="solid"/>
+                    </a:lnB>
+                    <a:solidFill>
+                      <a:srgbClr val="FFFFFF"/>
+                    </a:solidFill>
+                  </a:tcPr>
+                </a:tc>
+                <a:tc>
+                  <a:txBody>
+                    <a:bodyPr/>
+                    <a:lstStyle/>
+                    <a:p>
+                      <a:pPr algn="ctr">
+                        <a:buNone/>
+                      </a:pPr>
+                      <a:r>
+                        <a:rPr lang="en-US" sz="1600" b="0">
+                          <a:effectLst/>
+                        </a:rPr>
+                        <a:t>0.8474</a:t>
+                      </a:r>
+                    </a:p>
+                  </a:txBody>
+                  <a:tcPr anchor="ctr">
+                    <a:lnL w="12240">
+                      <a:solidFill>
+                        <a:srgbClr val="DDE6DF"/>
+                      </a:solidFill>
+                      <a:prstDash val="solid"/>
+                    </a:lnL>
+                    <a:lnR w="12240">
+                      <a:solidFill>
+                        <a:srgbClr val="DDE6DF"/>
+                      </a:solidFill>
+                      <a:prstDash val="solid"/>
+                    </a:lnR>
+                    <a:lnT w="12240">
+                      <a:solidFill>
+                        <a:srgbClr val="DDE6DF"/>
+                      </a:solidFill>
+                      <a:prstDash val="solid"/>
+                    </a:lnT>
+                    <a:lnB w="12240">
+                      <a:solidFill>
+                        <a:srgbClr val="DDE6DF"/>
+                      </a:solidFill>
+                      <a:prstDash val="solid"/>
+                    </a:lnB>
+                    <a:solidFill>
+                      <a:srgbClr val="FFFFFF"/>
+                    </a:solidFill>
+                  </a:tcPr>
+                </a:tc>
+                <a:tc>
+                  <a:txBody>
+                    <a:bodyPr/>
+                    <a:lstStyle/>
+                    <a:p>
+                      <a:pPr algn="ctr">
+                        <a:buNone/>
+                      </a:pPr>
+                      <a:r>
+                        <a:rPr lang="en-US" sz="1600" b="0">
+                          <a:effectLst/>
+                        </a:rPr>
+                        <a:t>0.2555</a:t>
+                      </a:r>
+                    </a:p>
+                  </a:txBody>
+                  <a:tcPr anchor="ctr">
+                    <a:lnL w="12240">
+                      <a:solidFill>
+                        <a:srgbClr val="DDE6DF"/>
+                      </a:solidFill>
+                      <a:prstDash val="solid"/>
+                    </a:lnL>
+                    <a:lnR w="12240">
+                      <a:solidFill>
+                        <a:srgbClr val="DDE6DF"/>
+                      </a:solidFill>
+                      <a:prstDash val="solid"/>
+                    </a:lnR>
+                    <a:lnT w="12240">
+                      <a:solidFill>
+                        <a:srgbClr val="DDE6DF"/>
+                      </a:solidFill>
+                      <a:prstDash val="solid"/>
+                    </a:lnT>
+                    <a:lnB w="12240">
+                      <a:solidFill>
+                        <a:srgbClr val="DDE6DF"/>
+                      </a:solidFill>
+                      <a:prstDash val="solid"/>
+                    </a:lnB>
+                    <a:solidFill>
+                      <a:srgbClr val="FFFFFF"/>
+                    </a:solidFill>
+                  </a:tcPr>
+                </a:tc>
+                <a:extLst>
+                  <a:ext uri="{0D108BD9-81ED-4DB2-BD59-A6C34878D82A}">
+                    <a16:rowId xmlns:a16="http://schemas.microsoft.com/office/drawing/2014/main" val="10001"/>
+                  </a:ext>
+                </a:extLst>
+              </a:tr>
+              <a:tr h="566640">
+                <a:tc>
+                  <a:txBody>
+                    <a:bodyPr/>
+                    <a:lstStyle/>
+                    <a:p>
+                      <a:pPr algn="l">
+                        <a:buNone/>
+                      </a:pPr>
+                      <a:r>
+                        <a:rPr lang="en-US" sz="1600" b="0" dirty="0">
+                          <a:effectLst/>
+                        </a:rPr>
+                        <a:t>Global</a:t>
+                      </a:r>
+                    </a:p>
+                  </a:txBody>
+                  <a:tcPr anchor="ctr">
+                    <a:lnL w="12240">
+                      <a:solidFill>
+                        <a:srgbClr val="DDE6DF"/>
+                      </a:solidFill>
+                      <a:prstDash val="solid"/>
+                    </a:lnL>
+                    <a:lnR w="12240">
+                      <a:solidFill>
+                        <a:srgbClr val="DDE6DF"/>
+                      </a:solidFill>
+                      <a:prstDash val="solid"/>
+                    </a:lnR>
+                    <a:lnT w="12240">
+                      <a:solidFill>
+                        <a:srgbClr val="DDE6DF"/>
+                      </a:solidFill>
+                      <a:prstDash val="solid"/>
+                    </a:lnT>
+                    <a:lnB w="12240">
+                      <a:solidFill>
+                        <a:srgbClr val="DDE6DF"/>
+                      </a:solidFill>
+                      <a:prstDash val="solid"/>
+                    </a:lnB>
+                    <a:solidFill>
+                      <a:srgbClr val="F2F5F1"/>
+                    </a:solidFill>
+                  </a:tcPr>
+                </a:tc>
+                <a:tc>
+                  <a:txBody>
+                    <a:bodyPr/>
+                    <a:lstStyle/>
+                    <a:p>
+                      <a:pPr algn="ctr">
+                        <a:buNone/>
+                      </a:pPr>
+                      <a:r>
+                        <a:rPr lang="en-US" sz="1600" b="0">
+                          <a:effectLst/>
+                        </a:rPr>
+                        <a:t>0.8143</a:t>
+                      </a:r>
+                    </a:p>
+                  </a:txBody>
+                  <a:tcPr anchor="ctr">
+                    <a:lnL w="12240">
+                      <a:solidFill>
+                        <a:srgbClr val="DDE6DF"/>
+                      </a:solidFill>
+                      <a:prstDash val="solid"/>
+                    </a:lnL>
+                    <a:lnR w="12240">
+                      <a:solidFill>
+                        <a:srgbClr val="DDE6DF"/>
+                      </a:solidFill>
+                      <a:prstDash val="solid"/>
+                    </a:lnR>
+                    <a:lnT w="12240">
+                      <a:solidFill>
+                        <a:srgbClr val="DDE6DF"/>
+                      </a:solidFill>
+                      <a:prstDash val="solid"/>
+                    </a:lnT>
+                    <a:lnB w="12240">
+                      <a:solidFill>
+                        <a:srgbClr val="DDE6DF"/>
+                      </a:solidFill>
+                      <a:prstDash val="solid"/>
+                    </a:lnB>
+                    <a:solidFill>
+                      <a:srgbClr val="F2F5F1"/>
+                    </a:solidFill>
+                  </a:tcPr>
+                </a:tc>
+                <a:tc>
+                  <a:txBody>
+                    <a:bodyPr/>
+                    <a:lstStyle/>
+                    <a:p>
+                      <a:pPr algn="ctr">
+                        <a:buNone/>
+                      </a:pPr>
+                      <a:r>
+                        <a:rPr lang="en-US" sz="1600" b="0">
+                          <a:effectLst/>
+                        </a:rPr>
+                        <a:t>0.7874 </a:t>
+                      </a:r>
+                      <a:r>
+                        <a:rPr lang="en-US" sz="1600" b="0" i="1">
+                          <a:effectLst/>
+                        </a:rPr>
+                        <a:t>(0.6636)</a:t>
+                      </a:r>
+                      <a:endParaRPr lang="en-US" sz="1600" b="0">
+                        <a:effectLst/>
+                      </a:endParaRPr>
+                    </a:p>
+                  </a:txBody>
+                  <a:tcPr anchor="ctr">
+                    <a:lnL w="12240">
+                      <a:solidFill>
+                        <a:srgbClr val="DDE6DF"/>
+                      </a:solidFill>
+                      <a:prstDash val="solid"/>
+                    </a:lnL>
+                    <a:lnR w="12240">
+                      <a:solidFill>
+                        <a:srgbClr val="DDE6DF"/>
+                      </a:solidFill>
+                      <a:prstDash val="solid"/>
+                    </a:lnR>
+                    <a:lnT w="12240">
+                      <a:solidFill>
+                        <a:srgbClr val="DDE6DF"/>
+                      </a:solidFill>
+                      <a:prstDash val="solid"/>
+                    </a:lnT>
+                    <a:lnB w="12240">
+                      <a:solidFill>
+                        <a:srgbClr val="DDE6DF"/>
+                      </a:solidFill>
+                      <a:prstDash val="solid"/>
+                    </a:lnB>
+                    <a:solidFill>
+                      <a:srgbClr val="F2F5F1"/>
+                    </a:solidFill>
+                  </a:tcPr>
+                </a:tc>
+                <a:tc>
+                  <a:txBody>
+                    <a:bodyPr/>
+                    <a:lstStyle/>
+                    <a:p>
+                      <a:pPr algn="ctr">
+                        <a:buNone/>
+                      </a:pPr>
+                      <a:r>
+                        <a:rPr lang="en-US" sz="1600" b="0">
+                          <a:effectLst/>
+                        </a:rPr>
+                        <a:t>0.9112</a:t>
+                      </a:r>
+                    </a:p>
+                  </a:txBody>
+                  <a:tcPr anchor="ctr">
+                    <a:lnL w="12240">
+                      <a:solidFill>
+                        <a:srgbClr val="DDE6DF"/>
+                      </a:solidFill>
+                      <a:prstDash val="solid"/>
+                    </a:lnL>
+                    <a:lnR w="12240">
+                      <a:solidFill>
+                        <a:srgbClr val="DDE6DF"/>
+                      </a:solidFill>
+                      <a:prstDash val="solid"/>
+                    </a:lnR>
+                    <a:lnT w="12240">
+                      <a:solidFill>
+                        <a:srgbClr val="DDE6DF"/>
+                      </a:solidFill>
+                      <a:prstDash val="solid"/>
+                    </a:lnT>
+                    <a:lnB w="12240">
+                      <a:solidFill>
+                        <a:srgbClr val="DDE6DF"/>
+                      </a:solidFill>
+                      <a:prstDash val="solid"/>
+                    </a:lnB>
+                    <a:solidFill>
+                      <a:srgbClr val="F2F5F1"/>
+                    </a:solidFill>
+                  </a:tcPr>
+                </a:tc>
+                <a:tc>
+                  <a:txBody>
+                    <a:bodyPr/>
+                    <a:lstStyle/>
+                    <a:p>
+                      <a:pPr algn="ctr">
+                        <a:buNone/>
+                      </a:pPr>
+                      <a:r>
+                        <a:rPr lang="en-US" sz="1600" b="0">
+                          <a:effectLst/>
+                        </a:rPr>
+                        <a:t>0.7583</a:t>
+                      </a:r>
+                    </a:p>
+                  </a:txBody>
+                  <a:tcPr anchor="ctr">
+                    <a:lnL w="12240">
+                      <a:solidFill>
+                        <a:srgbClr val="DDE6DF"/>
+                      </a:solidFill>
+                      <a:prstDash val="solid"/>
+                    </a:lnL>
+                    <a:lnR w="12240">
+                      <a:solidFill>
+                        <a:srgbClr val="DDE6DF"/>
+                      </a:solidFill>
+                      <a:prstDash val="solid"/>
+                    </a:lnR>
+                    <a:lnT w="12240">
+                      <a:solidFill>
+                        <a:srgbClr val="DDE6DF"/>
+                      </a:solidFill>
+                      <a:prstDash val="solid"/>
+                    </a:lnT>
+                    <a:lnB w="12240">
+                      <a:solidFill>
+                        <a:srgbClr val="DDE6DF"/>
+                      </a:solidFill>
+                      <a:prstDash val="solid"/>
+                    </a:lnB>
+                    <a:solidFill>
+                      <a:srgbClr val="F2F5F1"/>
+                    </a:solidFill>
+                  </a:tcPr>
+                </a:tc>
+                <a:extLst>
+                  <a:ext uri="{0D108BD9-81ED-4DB2-BD59-A6C34878D82A}">
+                    <a16:rowId xmlns:a16="http://schemas.microsoft.com/office/drawing/2014/main" val="10002"/>
+                  </a:ext>
+                </a:extLst>
+              </a:tr>
+              <a:tr h="566640">
+                <a:tc>
+                  <a:txBody>
+                    <a:bodyPr/>
+                    <a:lstStyle/>
+                    <a:p>
+                      <a:pPr algn="l">
+                        <a:buNone/>
+                      </a:pPr>
+                      <a:r>
+                        <a:rPr lang="en-US" sz="1600" b="0">
+                          <a:effectLst/>
+                        </a:rPr>
+                        <a:t>Global + EVA02</a:t>
+                      </a:r>
+                    </a:p>
+                  </a:txBody>
+                  <a:tcPr anchor="ctr">
+                    <a:lnL w="12240">
+                      <a:solidFill>
+                        <a:srgbClr val="DDE6DF"/>
+                      </a:solidFill>
+                      <a:prstDash val="solid"/>
+                    </a:lnL>
+                    <a:lnR w="12240">
+                      <a:solidFill>
+                        <a:srgbClr val="DDE6DF"/>
+                      </a:solidFill>
+                      <a:prstDash val="solid"/>
+                    </a:lnR>
+                    <a:lnT w="12240">
+                      <a:solidFill>
+                        <a:srgbClr val="DDE6DF"/>
+                      </a:solidFill>
+                      <a:prstDash val="solid"/>
+                    </a:lnT>
+                    <a:lnB w="12240">
+                      <a:solidFill>
+                        <a:srgbClr val="DDE6DF"/>
+                      </a:solidFill>
+                      <a:prstDash val="solid"/>
+                    </a:lnB>
+                    <a:solidFill>
+                      <a:srgbClr val="FFFFFF"/>
+                    </a:solidFill>
+                  </a:tcPr>
+                </a:tc>
+                <a:tc>
+                  <a:txBody>
+                    <a:bodyPr/>
+                    <a:lstStyle/>
+                    <a:p>
+                      <a:pPr algn="ctr">
+                        <a:buNone/>
+                      </a:pPr>
+                      <a:r>
+                        <a:rPr lang="en-US" sz="1600" b="0">
+                          <a:effectLst/>
+                        </a:rPr>
+                        <a:t>0.8176</a:t>
+                      </a:r>
+                    </a:p>
+                  </a:txBody>
+                  <a:tcPr anchor="ctr">
+                    <a:lnL w="12240">
+                      <a:solidFill>
+                        <a:srgbClr val="DDE6DF"/>
+                      </a:solidFill>
+                      <a:prstDash val="solid"/>
+                    </a:lnL>
+                    <a:lnR w="12240">
+                      <a:solidFill>
+                        <a:srgbClr val="DDE6DF"/>
+                      </a:solidFill>
+                      <a:prstDash val="solid"/>
+                    </a:lnR>
+                    <a:lnT w="12240">
+                      <a:solidFill>
+                        <a:srgbClr val="DDE6DF"/>
+                      </a:solidFill>
+                      <a:prstDash val="solid"/>
+                    </a:lnT>
+                    <a:lnB w="12240">
+                      <a:solidFill>
+                        <a:srgbClr val="DDE6DF"/>
+                      </a:solidFill>
+                      <a:prstDash val="solid"/>
+                    </a:lnB>
+                    <a:solidFill>
+                      <a:srgbClr val="FFFFFF"/>
+                    </a:solidFill>
+                  </a:tcPr>
+                </a:tc>
+                <a:tc>
+                  <a:txBody>
+                    <a:bodyPr/>
+                    <a:lstStyle/>
+                    <a:p>
+                      <a:pPr algn="ctr">
+                        <a:buNone/>
+                      </a:pPr>
+                      <a:r>
+                        <a:rPr lang="en-US" sz="1600" b="0" dirty="0">
+                          <a:effectLst/>
+                        </a:rPr>
+                        <a:t>0.7898 </a:t>
+                      </a:r>
+                      <a:r>
+                        <a:rPr lang="en-US" sz="1600" b="0" i="1" dirty="0">
+                          <a:effectLst/>
+                        </a:rPr>
+                        <a:t>(0.6683)</a:t>
+                      </a:r>
+                      <a:endParaRPr lang="en-US" sz="1600" b="0" dirty="0">
+                        <a:effectLst/>
+                      </a:endParaRPr>
+                    </a:p>
+                  </a:txBody>
+                  <a:tcPr anchor="ctr">
+                    <a:lnL w="12240">
+                      <a:solidFill>
+                        <a:srgbClr val="DDE6DF"/>
+                      </a:solidFill>
+                      <a:prstDash val="solid"/>
+                    </a:lnL>
+                    <a:lnR w="12240">
+                      <a:solidFill>
+                        <a:srgbClr val="DDE6DF"/>
+                      </a:solidFill>
+                      <a:prstDash val="solid"/>
+                    </a:lnR>
+                    <a:lnT w="12240">
+                      <a:solidFill>
+                        <a:srgbClr val="DDE6DF"/>
+                      </a:solidFill>
+                      <a:prstDash val="solid"/>
+                    </a:lnT>
+                    <a:lnB w="12240">
+                      <a:solidFill>
+                        <a:srgbClr val="DDE6DF"/>
+                      </a:solidFill>
+                      <a:prstDash val="solid"/>
+                    </a:lnB>
+                    <a:solidFill>
+                      <a:srgbClr val="FFFFFF"/>
+                    </a:solidFill>
+                  </a:tcPr>
+                </a:tc>
+                <a:tc>
+                  <a:txBody>
+                    <a:bodyPr/>
+                    <a:lstStyle/>
+                    <a:p>
+                      <a:pPr algn="ctr">
+                        <a:buNone/>
+                      </a:pPr>
+                      <a:r>
+                        <a:rPr lang="en-US" sz="1600" b="0">
+                          <a:effectLst/>
+                        </a:rPr>
+                        <a:t>0.9112</a:t>
+                      </a:r>
+                    </a:p>
+                  </a:txBody>
+                  <a:tcPr anchor="ctr">
+                    <a:lnL w="12240">
+                      <a:solidFill>
+                        <a:srgbClr val="DDE6DF"/>
+                      </a:solidFill>
+                      <a:prstDash val="solid"/>
+                    </a:lnL>
+                    <a:lnR w="12240">
+                      <a:solidFill>
+                        <a:srgbClr val="DDE6DF"/>
+                      </a:solidFill>
+                      <a:prstDash val="solid"/>
+                    </a:lnR>
+                    <a:lnT w="12240">
+                      <a:solidFill>
+                        <a:srgbClr val="DDE6DF"/>
+                      </a:solidFill>
+                      <a:prstDash val="solid"/>
+                    </a:lnT>
+                    <a:lnB w="12240">
+                      <a:solidFill>
+                        <a:srgbClr val="DDE6DF"/>
+                      </a:solidFill>
+                      <a:prstDash val="solid"/>
+                    </a:lnB>
+                    <a:solidFill>
+                      <a:srgbClr val="FFFFFF"/>
+                    </a:solidFill>
+                  </a:tcPr>
+                </a:tc>
+                <a:tc>
+                  <a:txBody>
+                    <a:bodyPr/>
+                    <a:lstStyle/>
+                    <a:p>
+                      <a:pPr algn="ctr">
+                        <a:buNone/>
+                      </a:pPr>
+                      <a:r>
+                        <a:rPr lang="en-US" sz="1600" b="0">
+                          <a:effectLst/>
+                        </a:rPr>
+                        <a:t>0.7582</a:t>
+                      </a:r>
+                    </a:p>
+                  </a:txBody>
+                  <a:tcPr anchor="ctr">
+                    <a:lnL w="12240">
+                      <a:solidFill>
+                        <a:srgbClr val="DDE6DF"/>
+                      </a:solidFill>
+                      <a:prstDash val="solid"/>
+                    </a:lnL>
+                    <a:lnR w="12240">
+                      <a:solidFill>
+                        <a:srgbClr val="DDE6DF"/>
+                      </a:solidFill>
+                      <a:prstDash val="solid"/>
+                    </a:lnR>
+                    <a:lnT w="12240">
+                      <a:solidFill>
+                        <a:srgbClr val="DDE6DF"/>
+                      </a:solidFill>
+                      <a:prstDash val="solid"/>
+                    </a:lnT>
+                    <a:lnB w="12240">
+                      <a:solidFill>
+                        <a:srgbClr val="DDE6DF"/>
+                      </a:solidFill>
+                      <a:prstDash val="solid"/>
+                    </a:lnB>
+                    <a:solidFill>
+                      <a:srgbClr val="FFFFFF"/>
+                    </a:solidFill>
+                  </a:tcPr>
+                </a:tc>
+                <a:extLst>
+                  <a:ext uri="{0D108BD9-81ED-4DB2-BD59-A6C34878D82A}">
+                    <a16:rowId xmlns:a16="http://schemas.microsoft.com/office/drawing/2014/main" val="10003"/>
+                  </a:ext>
+                </a:extLst>
+              </a:tr>
+              <a:tr h="566640">
+                <a:tc>
+                  <a:txBody>
+                    <a:bodyPr/>
+                    <a:lstStyle/>
+                    <a:p>
+                      <a:pPr algn="l">
+                        <a:buNone/>
+                      </a:pPr>
+                      <a:r>
+                        <a:rPr lang="en-US" sz="1600" b="0">
+                          <a:effectLst/>
+                        </a:rPr>
+                        <a:t>Global + ALIKED</a:t>
+                      </a:r>
+                    </a:p>
+                  </a:txBody>
+                  <a:tcPr anchor="ctr">
+                    <a:lnL w="12240">
+                      <a:solidFill>
+                        <a:srgbClr val="DDE6DF"/>
+                      </a:solidFill>
+                      <a:prstDash val="solid"/>
+                    </a:lnL>
+                    <a:lnR w="12240">
+                      <a:solidFill>
+                        <a:srgbClr val="DDE6DF"/>
+                      </a:solidFill>
+                      <a:prstDash val="solid"/>
+                    </a:lnR>
+                    <a:lnT w="12240">
+                      <a:solidFill>
+                        <a:srgbClr val="DDE6DF"/>
+                      </a:solidFill>
+                      <a:prstDash val="solid"/>
+                    </a:lnT>
+                    <a:lnB w="12240">
+                      <a:solidFill>
+                        <a:srgbClr val="DDE6DF"/>
+                      </a:solidFill>
+                      <a:prstDash val="solid"/>
+                    </a:lnB>
+                    <a:solidFill>
+                      <a:srgbClr val="F2F5F1"/>
+                    </a:solidFill>
+                  </a:tcPr>
+                </a:tc>
+                <a:tc>
+                  <a:txBody>
+                    <a:bodyPr/>
+                    <a:lstStyle/>
+                    <a:p>
+                      <a:pPr algn="ctr">
+                        <a:buNone/>
+                      </a:pPr>
+                      <a:r>
+                        <a:rPr lang="en-US" sz="1600" b="0">
+                          <a:effectLst/>
+                        </a:rPr>
+                        <a:t>0.7994</a:t>
+                      </a:r>
+                    </a:p>
+                  </a:txBody>
+                  <a:tcPr anchor="ctr">
+                    <a:lnL w="12240">
+                      <a:solidFill>
+                        <a:srgbClr val="DDE6DF"/>
+                      </a:solidFill>
+                      <a:prstDash val="solid"/>
+                    </a:lnL>
+                    <a:lnR w="12240">
+                      <a:solidFill>
+                        <a:srgbClr val="DDE6DF"/>
+                      </a:solidFill>
+                      <a:prstDash val="solid"/>
+                    </a:lnR>
+                    <a:lnT w="12240">
+                      <a:solidFill>
+                        <a:srgbClr val="DDE6DF"/>
+                      </a:solidFill>
+                      <a:prstDash val="solid"/>
+                    </a:lnT>
+                    <a:lnB w="12240">
+                      <a:solidFill>
+                        <a:srgbClr val="DDE6DF"/>
+                      </a:solidFill>
+                      <a:prstDash val="solid"/>
+                    </a:lnB>
+                    <a:solidFill>
+                      <a:srgbClr val="F2F5F1"/>
+                    </a:solidFill>
+                  </a:tcPr>
+                </a:tc>
+                <a:tc>
+                  <a:txBody>
+                    <a:bodyPr/>
+                    <a:lstStyle/>
+                    <a:p>
+                      <a:pPr algn="ctr">
+                        <a:buNone/>
+                      </a:pPr>
+                      <a:r>
+                        <a:rPr lang="en-US" sz="1600" b="0">
+                          <a:effectLst/>
+                        </a:rPr>
+                        <a:t>0.7978 </a:t>
+                      </a:r>
+                      <a:r>
+                        <a:rPr lang="en-US" sz="1600" b="0" i="1">
+                          <a:effectLst/>
+                        </a:rPr>
+                        <a:t>(0.6524)</a:t>
+                      </a:r>
+                      <a:endParaRPr lang="en-US" sz="1600" b="0">
+                        <a:effectLst/>
+                      </a:endParaRPr>
+                    </a:p>
+                  </a:txBody>
+                  <a:tcPr anchor="ctr">
+                    <a:lnL w="12240">
+                      <a:solidFill>
+                        <a:srgbClr val="DDE6DF"/>
+                      </a:solidFill>
+                      <a:prstDash val="solid"/>
+                    </a:lnL>
+                    <a:lnR w="12240">
+                      <a:solidFill>
+                        <a:srgbClr val="DDE6DF"/>
+                      </a:solidFill>
+                      <a:prstDash val="solid"/>
+                    </a:lnR>
+                    <a:lnT w="12240">
+                      <a:solidFill>
+                        <a:srgbClr val="DDE6DF"/>
+                      </a:solidFill>
+                      <a:prstDash val="solid"/>
+                    </a:lnT>
+                    <a:lnB w="12240">
+                      <a:solidFill>
+                        <a:srgbClr val="DDE6DF"/>
+                      </a:solidFill>
+                      <a:prstDash val="solid"/>
+                    </a:lnB>
+                    <a:solidFill>
+                      <a:srgbClr val="F2F5F1"/>
+                    </a:solidFill>
+                  </a:tcPr>
+                </a:tc>
+                <a:tc>
+                  <a:txBody>
+                    <a:bodyPr/>
+                    <a:lstStyle/>
+                    <a:p>
+                      <a:pPr algn="ctr">
+                        <a:buNone/>
+                      </a:pPr>
+                      <a:r>
+                        <a:rPr lang="en-US" sz="1600" b="0" dirty="0">
+                          <a:effectLst/>
+                        </a:rPr>
+                        <a:t>0.9432</a:t>
+                      </a:r>
+                    </a:p>
+                  </a:txBody>
+                  <a:tcPr anchor="ctr">
+                    <a:lnL w="12240">
+                      <a:solidFill>
+                        <a:srgbClr val="DDE6DF"/>
+                      </a:solidFill>
+                      <a:prstDash val="solid"/>
+                    </a:lnL>
+                    <a:lnR w="12240">
+                      <a:solidFill>
+                        <a:srgbClr val="DDE6DF"/>
+                      </a:solidFill>
+                      <a:prstDash val="solid"/>
+                    </a:lnR>
+                    <a:lnT w="12240">
+                      <a:solidFill>
+                        <a:srgbClr val="DDE6DF"/>
+                      </a:solidFill>
+                      <a:prstDash val="solid"/>
+                    </a:lnT>
+                    <a:lnB w="12240">
+                      <a:solidFill>
+                        <a:srgbClr val="DDE6DF"/>
+                      </a:solidFill>
+                      <a:prstDash val="solid"/>
+                    </a:lnB>
+                    <a:solidFill>
+                      <a:srgbClr val="F2F5F1"/>
+                    </a:solidFill>
+                  </a:tcPr>
+                </a:tc>
+                <a:tc>
+                  <a:txBody>
+                    <a:bodyPr/>
+                    <a:lstStyle/>
+                    <a:p>
+                      <a:pPr algn="ctr">
+                        <a:buNone/>
+                      </a:pPr>
+                      <a:r>
+                        <a:rPr lang="en-US" sz="1600" b="0" dirty="0">
+                          <a:effectLst/>
+                        </a:rPr>
+                        <a:t>0.7846</a:t>
+                      </a:r>
+                    </a:p>
+                  </a:txBody>
+                  <a:tcPr anchor="ctr">
+                    <a:lnL w="12240">
+                      <a:solidFill>
+                        <a:srgbClr val="DDE6DF"/>
+                      </a:solidFill>
+                      <a:prstDash val="solid"/>
+                    </a:lnL>
+                    <a:lnR w="12240">
+                      <a:solidFill>
+                        <a:srgbClr val="DDE6DF"/>
+                      </a:solidFill>
+                      <a:prstDash val="solid"/>
+                    </a:lnR>
+                    <a:lnT w="12240">
+                      <a:solidFill>
+                        <a:srgbClr val="DDE6DF"/>
+                      </a:solidFill>
+                      <a:prstDash val="solid"/>
+                    </a:lnT>
+                    <a:lnB w="12240">
+                      <a:solidFill>
+                        <a:srgbClr val="DDE6DF"/>
+                      </a:solidFill>
+                      <a:prstDash val="solid"/>
+                    </a:lnB>
+                    <a:solidFill>
+                      <a:srgbClr val="F2F5F1"/>
+                    </a:solidFill>
+                  </a:tcPr>
+                </a:tc>
+                <a:extLst>
+                  <a:ext uri="{0D108BD9-81ED-4DB2-BD59-A6C34878D82A}">
+                    <a16:rowId xmlns:a16="http://schemas.microsoft.com/office/drawing/2014/main" val="10004"/>
+                  </a:ext>
+                </a:extLst>
+              </a:tr>
+              <a:tr h="566640">
+                <a:tc>
+                  <a:txBody>
+                    <a:bodyPr/>
+                    <a:lstStyle/>
+                    <a:p>
+                      <a:pPr algn="l">
+                        <a:buNone/>
+                      </a:pPr>
+                      <a:r>
+                        <a:rPr lang="en-US" sz="1600" b="0">
+                          <a:effectLst/>
+                        </a:rPr>
+                        <a:t>All three, fused</a:t>
+                      </a:r>
+                    </a:p>
+                  </a:txBody>
+                  <a:tcPr anchor="ctr">
+                    <a:lnL w="12240">
+                      <a:solidFill>
+                        <a:srgbClr val="DDE6DF"/>
+                      </a:solidFill>
+                      <a:prstDash val="solid"/>
+                    </a:lnL>
+                    <a:lnR w="12240">
+                      <a:solidFill>
+                        <a:srgbClr val="DDE6DF"/>
+                      </a:solidFill>
+                      <a:prstDash val="solid"/>
+                    </a:lnR>
+                    <a:lnT w="12240">
+                      <a:solidFill>
+                        <a:srgbClr val="DDE6DF"/>
+                      </a:solidFill>
+                      <a:prstDash val="solid"/>
+                    </a:lnT>
+                    <a:lnB w="12240">
+                      <a:solidFill>
+                        <a:srgbClr val="DDE6DF"/>
+                      </a:solidFill>
+                      <a:prstDash val="solid"/>
+                    </a:lnB>
+                    <a:solidFill>
+                      <a:srgbClr val="FBF1DC"/>
+                    </a:solidFill>
+                  </a:tcPr>
+                </a:tc>
+                <a:tc>
+                  <a:txBody>
+                    <a:bodyPr/>
+                    <a:lstStyle/>
+                    <a:p>
+                      <a:pPr algn="ctr">
+                        <a:buNone/>
+                      </a:pPr>
+                      <a:r>
+                        <a:rPr lang="en-US" sz="1600" b="0">
+                          <a:effectLst/>
+                        </a:rPr>
+                        <a:t>0.8169</a:t>
+                      </a:r>
+                    </a:p>
+                  </a:txBody>
+                  <a:tcPr anchor="ctr">
+                    <a:lnL w="12240">
+                      <a:solidFill>
+                        <a:srgbClr val="DDE6DF"/>
+                      </a:solidFill>
+                      <a:prstDash val="solid"/>
+                    </a:lnL>
+                    <a:lnR w="12240">
+                      <a:solidFill>
+                        <a:srgbClr val="DDE6DF"/>
+                      </a:solidFill>
+                      <a:prstDash val="solid"/>
+                    </a:lnR>
+                    <a:lnT w="12240">
+                      <a:solidFill>
+                        <a:srgbClr val="DDE6DF"/>
+                      </a:solidFill>
+                      <a:prstDash val="solid"/>
+                    </a:lnT>
+                    <a:lnB w="12240">
+                      <a:solidFill>
+                        <a:srgbClr val="DDE6DF"/>
+                      </a:solidFill>
+                      <a:prstDash val="solid"/>
+                    </a:lnB>
+                    <a:solidFill>
+                      <a:srgbClr val="FBF1DC"/>
+                    </a:solidFill>
+                  </a:tcPr>
+                </a:tc>
+                <a:tc>
+                  <a:txBody>
+                    <a:bodyPr/>
+                    <a:lstStyle/>
+                    <a:p>
+                      <a:pPr algn="ctr">
+                        <a:buNone/>
+                      </a:pPr>
+                      <a:r>
+                        <a:rPr lang="en-US" sz="1600" b="0">
+                          <a:effectLst/>
+                        </a:rPr>
+                        <a:t>0.8131 </a:t>
+                      </a:r>
+                      <a:r>
+                        <a:rPr lang="en-US" sz="1600" b="0" i="1">
+                          <a:effectLst/>
+                        </a:rPr>
+                        <a:t>(0.6830)</a:t>
+                      </a:r>
+                      <a:endParaRPr lang="en-US" sz="1600" b="0">
+                        <a:effectLst/>
+                      </a:endParaRPr>
+                    </a:p>
+                  </a:txBody>
+                  <a:tcPr anchor="ctr">
+                    <a:lnL w="12240">
+                      <a:solidFill>
+                        <a:srgbClr val="DDE6DF"/>
+                      </a:solidFill>
+                      <a:prstDash val="solid"/>
+                    </a:lnL>
+                    <a:lnR w="12240">
+                      <a:solidFill>
+                        <a:srgbClr val="DDE6DF"/>
+                      </a:solidFill>
+                      <a:prstDash val="solid"/>
+                    </a:lnR>
+                    <a:lnT w="12240">
+                      <a:solidFill>
+                        <a:srgbClr val="DDE6DF"/>
+                      </a:solidFill>
+                      <a:prstDash val="solid"/>
+                    </a:lnT>
+                    <a:lnB w="12240">
+                      <a:solidFill>
+                        <a:srgbClr val="DDE6DF"/>
+                      </a:solidFill>
+                      <a:prstDash val="solid"/>
+                    </a:lnB>
+                    <a:solidFill>
+                      <a:srgbClr val="FBF1DC"/>
+                    </a:solidFill>
+                  </a:tcPr>
+                </a:tc>
+                <a:tc>
+                  <a:txBody>
+                    <a:bodyPr/>
+                    <a:lstStyle/>
+                    <a:p>
+                      <a:pPr algn="ctr">
+                        <a:buNone/>
+                      </a:pPr>
+                      <a:r>
+                        <a:rPr lang="en-US" sz="1600" b="0">
+                          <a:effectLst/>
+                        </a:rPr>
+                        <a:t>0.9432</a:t>
+                      </a:r>
+                    </a:p>
+                  </a:txBody>
+                  <a:tcPr anchor="ctr">
+                    <a:lnL w="12240">
+                      <a:solidFill>
+                        <a:srgbClr val="DDE6DF"/>
+                      </a:solidFill>
+                      <a:prstDash val="solid"/>
+                    </a:lnL>
+                    <a:lnR w="12240">
+                      <a:solidFill>
+                        <a:srgbClr val="DDE6DF"/>
+                      </a:solidFill>
+                      <a:prstDash val="solid"/>
+                    </a:lnR>
+                    <a:lnT w="12240">
+                      <a:solidFill>
+                        <a:srgbClr val="DDE6DF"/>
+                      </a:solidFill>
+                      <a:prstDash val="solid"/>
+                    </a:lnT>
+                    <a:lnB w="12240">
+                      <a:solidFill>
+                        <a:srgbClr val="DDE6DF"/>
+                      </a:solidFill>
+                      <a:prstDash val="solid"/>
+                    </a:lnB>
+                    <a:solidFill>
+                      <a:srgbClr val="FBF1DC"/>
+                    </a:solidFill>
+                  </a:tcPr>
+                </a:tc>
+                <a:tc>
+                  <a:txBody>
+                    <a:bodyPr/>
+                    <a:lstStyle/>
+                    <a:p>
+                      <a:pPr algn="ctr">
+                        <a:buNone/>
+                      </a:pPr>
+                      <a:r>
+                        <a:rPr lang="en-US" sz="1600" b="0" dirty="0">
+                          <a:effectLst/>
+                        </a:rPr>
+                        <a:t>0.7857</a:t>
+                      </a:r>
+                    </a:p>
+                  </a:txBody>
+                  <a:tcPr anchor="ctr">
+                    <a:lnL w="12240">
+                      <a:solidFill>
+                        <a:srgbClr val="DDE6DF"/>
+                      </a:solidFill>
+                      <a:prstDash val="solid"/>
+                    </a:lnL>
+                    <a:lnR w="12240">
+                      <a:solidFill>
+                        <a:srgbClr val="DDE6DF"/>
+                      </a:solidFill>
+                      <a:prstDash val="solid"/>
+                    </a:lnR>
+                    <a:lnT w="12240">
+                      <a:solidFill>
+                        <a:srgbClr val="DDE6DF"/>
+                      </a:solidFill>
+                      <a:prstDash val="solid"/>
+                    </a:lnT>
+                    <a:lnB w="12240">
+                      <a:solidFill>
+                        <a:srgbClr val="DDE6DF"/>
+                      </a:solidFill>
+                      <a:prstDash val="solid"/>
+                    </a:lnB>
+                    <a:solidFill>
+                      <a:srgbClr val="FBF1DC"/>
+                    </a:solidFill>
+                  </a:tcPr>
+                </a:tc>
+                <a:extLst>
+                  <a:ext uri="{0D108BD9-81ED-4DB2-BD59-A6C34878D82A}">
+                    <a16:rowId xmlns:a16="http://schemas.microsoft.com/office/drawing/2014/main" val="10005"/>
+                  </a:ext>
+                </a:extLst>
+              </a:tr>
+            </a:tbl>
+          </a:graphicData>
+        </a:graphic>
+      </p:graphicFrame>
+      <p:sp>
+        <p:nvSpPr>
+          <p:cNvPr id="93" name="Text 3"/>
+          <p:cNvSpPr/>
+          <p:nvPr/>
+        </p:nvSpPr>
+        <p:spPr>
+          <a:xfrm>
+            <a:off x="548640" y="5200320"/>
+            <a:ext cx="6948720" cy="730800"/>
+          </a:xfrm>
+          <a:prstGeom prst="rect">
+            <a:avLst/>
+          </a:prstGeom>
+          <a:noFill/>
+          <a:ln w="0">
+            <a:noFill/>
+          </a:ln>
+        </p:spPr>
+        <p:style>
+          <a:lnRef idx="0">
+            <a:scrgbClr r="0" g="0" b="0"/>
+          </a:lnRef>
+          <a:fillRef idx="0">
+            <a:scrgbClr r="0" g="0" b="0"/>
+          </a:fillRef>
+          <a:effectRef idx="0">
+            <a:scrgbClr r="0" g="0" b="0"/>
+          </a:effectRef>
+          <a:fontRef idx="minor"/>
+        </p:style>
+        <p:txBody>
+          <a:bodyPr lIns="0" tIns="0" rIns="0" bIns="0" anchor="t">
+            <a:noAutofit/>
+          </a:bodyPr>
+          <a:lstStyle/>
+          <a:p>
+            <a:pPr marL="216000" indent="-216000" defTabSz="914400">
+              <a:lnSpc>
+                <a:spcPct val="100000"/>
+              </a:lnSpc>
+              <a:buClr>
+                <a:srgbClr val="3B4A41"/>
+              </a:buClr>
+              <a:buSzPct val="45000"/>
+              <a:buFont typeface="Wingdings" charset="2"/>
+              <a:buChar char=""/>
+              <a:tabLst>
+                <a:tab pos="0" algn="l"/>
+              </a:tabLst>
+            </a:pPr>
+            <a:r>
+              <a:rPr lang="en-US" sz="1600" b="1" u="none" strike="noStrike" dirty="0">
+                <a:solidFill>
+                  <a:srgbClr val="3B4A41"/>
+                </a:solidFill>
+                <a:effectLst/>
+                <a:uFillTx/>
+                <a:latin typeface="Calibri"/>
+              </a:rPr>
+              <a:t>Metrics:</a:t>
+            </a:r>
+            <a:endParaRPr lang="en-ZA" sz="1600" b="0" u="none" strike="noStrike" dirty="0">
+              <a:solidFill>
+                <a:srgbClr val="000000"/>
+              </a:solidFill>
+              <a:effectLst/>
+              <a:uFillTx/>
+              <a:latin typeface="Arial"/>
+            </a:endParaRPr>
+          </a:p>
+          <a:p>
+            <a:pPr marL="216000" indent="-216000" defTabSz="914400">
+              <a:lnSpc>
+                <a:spcPct val="100000"/>
+              </a:lnSpc>
+              <a:buClr>
+                <a:srgbClr val="3B4A41"/>
+              </a:buClr>
+              <a:buSzPct val="45000"/>
+              <a:buFont typeface="Wingdings" charset="2"/>
+              <a:buChar char=""/>
+              <a:tabLst>
+                <a:tab pos="0" algn="l"/>
+              </a:tabLst>
+            </a:pPr>
+            <a:r>
+              <a:rPr lang="en-US" sz="1300" b="1" u="none" strike="noStrike" dirty="0">
+                <a:solidFill>
+                  <a:srgbClr val="3B4A41"/>
+                </a:solidFill>
+                <a:effectLst/>
+                <a:uFillTx/>
+                <a:latin typeface="Calibri"/>
+              </a:rPr>
+              <a:t>BAKS</a:t>
+            </a:r>
+            <a:r>
+              <a:rPr lang="en-US" sz="1300" b="0" u="none" strike="noStrike" dirty="0">
+                <a:solidFill>
+                  <a:srgbClr val="3B4A41"/>
+                </a:solidFill>
+                <a:effectLst/>
+                <a:uFillTx/>
+                <a:latin typeface="Calibri"/>
+              </a:rPr>
+              <a:t>: balanced accuracy on known animals. </a:t>
+            </a:r>
+            <a:endParaRPr lang="en-ZA" sz="1300" b="0" u="none" strike="noStrike" dirty="0">
+              <a:solidFill>
+                <a:srgbClr val="000000"/>
+              </a:solidFill>
+              <a:effectLst/>
+              <a:uFillTx/>
+              <a:latin typeface="Arial"/>
+            </a:endParaRPr>
+          </a:p>
+          <a:p>
+            <a:pPr marL="216000" indent="-216000" defTabSz="914400">
+              <a:lnSpc>
+                <a:spcPct val="100000"/>
+              </a:lnSpc>
+              <a:buClr>
+                <a:srgbClr val="3B4A41"/>
+              </a:buClr>
+              <a:buSzPct val="45000"/>
+              <a:buFont typeface="Wingdings" charset="2"/>
+              <a:buChar char=""/>
+              <a:tabLst>
+                <a:tab pos="0" algn="l"/>
+              </a:tabLst>
+            </a:pPr>
+            <a:r>
+              <a:rPr lang="en-US" sz="1300" b="1" u="none" strike="noStrike" dirty="0">
+                <a:solidFill>
+                  <a:srgbClr val="3B4A41"/>
+                </a:solidFill>
+                <a:effectLst/>
+                <a:uFillTx/>
+                <a:latin typeface="Calibri"/>
+              </a:rPr>
+              <a:t>BAUS</a:t>
+            </a:r>
+            <a:r>
+              <a:rPr lang="en-US" sz="1300" b="0" u="none" strike="noStrike" dirty="0">
+                <a:solidFill>
+                  <a:srgbClr val="3B4A41"/>
+                </a:solidFill>
+                <a:effectLst/>
+                <a:uFillTx/>
+                <a:latin typeface="Calibri"/>
+              </a:rPr>
+              <a:t>: unknown animals correctly called “new”. </a:t>
+            </a:r>
+            <a:endParaRPr lang="en-ZA" sz="1300" b="0" u="none" strike="noStrike" dirty="0">
+              <a:solidFill>
+                <a:srgbClr val="000000"/>
+              </a:solidFill>
+              <a:effectLst/>
+              <a:uFillTx/>
+              <a:latin typeface="Arial"/>
+            </a:endParaRPr>
+          </a:p>
+          <a:p>
+            <a:pPr marL="216000" indent="-216000" defTabSz="914400">
+              <a:lnSpc>
+                <a:spcPct val="100000"/>
+              </a:lnSpc>
+              <a:buClr>
+                <a:srgbClr val="3B4A41"/>
+              </a:buClr>
+              <a:buSzPct val="45000"/>
+              <a:buFont typeface="Wingdings" charset="2"/>
+              <a:buChar char=""/>
+              <a:tabLst>
+                <a:tab pos="0" algn="l"/>
+              </a:tabLst>
+            </a:pPr>
+            <a:r>
+              <a:rPr lang="en-US" sz="1300" b="1" u="none" strike="noStrike" dirty="0">
+                <a:solidFill>
+                  <a:srgbClr val="3B4A41"/>
+                </a:solidFill>
+                <a:effectLst/>
+                <a:uFillTx/>
+                <a:latin typeface="Calibri"/>
+              </a:rPr>
+              <a:t>Open score</a:t>
+            </a:r>
+            <a:r>
+              <a:rPr lang="en-US" sz="1300" b="0" u="none" strike="noStrike" dirty="0">
+                <a:solidFill>
+                  <a:srgbClr val="3B4A41"/>
+                </a:solidFill>
+                <a:effectLst/>
+                <a:uFillTx/>
+                <a:latin typeface="Calibri"/>
+              </a:rPr>
+              <a:t> = (BAKS + BAUS) / 2.</a:t>
+            </a:r>
+            <a:endParaRPr lang="en-ZA" sz="1300" b="0" u="none" strike="noStrike" dirty="0">
+              <a:solidFill>
+                <a:srgbClr val="000000"/>
+              </a:solidFill>
+              <a:effectLst/>
+              <a:uFillTx/>
+              <a:latin typeface="Arial"/>
+            </a:endParaRPr>
+          </a:p>
+          <a:p>
+            <a:pPr marL="216000" indent="-216000" defTabSz="914400">
+              <a:lnSpc>
+                <a:spcPct val="100000"/>
+              </a:lnSpc>
+              <a:buClr>
+                <a:srgbClr val="3B4A41"/>
+              </a:buClr>
+              <a:buSzPct val="45000"/>
+              <a:buFont typeface="Wingdings" charset="2"/>
+              <a:buChar char=""/>
+              <a:tabLst>
+                <a:tab pos="0" algn="l"/>
+              </a:tabLst>
+            </a:pPr>
+            <a:r>
+              <a:rPr lang="en-US" sz="1300" b="1" u="none" strike="noStrike" dirty="0">
+                <a:solidFill>
+                  <a:srgbClr val="3B4A41"/>
+                </a:solidFill>
+                <a:effectLst/>
+                <a:uFillTx/>
+                <a:latin typeface="Calibri"/>
+              </a:rPr>
+              <a:t>* Reduced validation subset (200 queries); other rows are the full test split. Local branch is preliminary.</a:t>
+            </a:r>
+            <a:endParaRPr lang="en-ZA" sz="1300" b="0" u="none" strike="noStrike" dirty="0">
+              <a:solidFill>
+                <a:srgbClr val="000000"/>
+              </a:solidFill>
+              <a:effectLst/>
+              <a:uFillTx/>
+              <a:latin typeface="Arial"/>
+            </a:endParaRPr>
+          </a:p>
+        </p:txBody>
+      </p:sp>
+      <p:sp>
+        <p:nvSpPr>
+          <p:cNvPr id="3" name="Shape 4">
+            <a:extLst>
+              <a:ext uri="{FF2B5EF4-FFF2-40B4-BE49-F238E27FC236}">
+                <a16:creationId xmlns:a16="http://schemas.microsoft.com/office/drawing/2014/main" id="{381556B4-6FD5-8283-86D1-46A7DF450DF8}"/>
+              </a:ext>
+            </a:extLst>
+          </p:cNvPr>
+          <p:cNvSpPr/>
+          <p:nvPr/>
+        </p:nvSpPr>
+        <p:spPr>
+          <a:xfrm>
+            <a:off x="7863840" y="1463040"/>
+            <a:ext cx="3748680" cy="2102760"/>
+          </a:xfrm>
+          <a:prstGeom prst="roundRect">
+            <a:avLst>
+              <a:gd name="adj" fmla="val 5217"/>
+            </a:avLst>
+          </a:prstGeom>
+          <a:solidFill>
+            <a:srgbClr val="FFFFFF"/>
+          </a:solidFill>
+          <a:ln w="19050">
+            <a:solidFill>
+              <a:srgbClr val="8FA698"/>
+            </a:solidFill>
+            <a:prstDash val="dash"/>
+            <a:round/>
+          </a:ln>
+        </p:spPr>
+        <p:style>
+          <a:lnRef idx="0">
+            <a:scrgbClr r="0" g="0" b="0"/>
+          </a:lnRef>
+          <a:fillRef idx="0">
+            <a:scrgbClr r="0" g="0" b="0"/>
+          </a:fillRef>
+          <a:effectRef idx="0">
+            <a:scrgbClr r="0" g="0" b="0"/>
+          </a:effectRef>
+          <a:fontRef idx="minor"/>
+        </p:style>
+        <p:txBody>
+          <a:bodyPr lIns="90000" tIns="45000" rIns="90000" bIns="45000" anchor="t">
+            <a:noAutofit/>
+          </a:bodyPr>
+          <a:lstStyle/>
+          <a:p>
+            <a:endParaRPr lang="en-ZA" sz="1800" b="0" u="none" strike="noStrike">
+              <a:solidFill>
+                <a:srgbClr val="000000"/>
+              </a:solidFill>
+              <a:effectLst/>
+              <a:uFillTx/>
+              <a:latin typeface="Arial"/>
+            </a:endParaRPr>
+          </a:p>
+        </p:txBody>
+      </p:sp>
+      <p:sp>
+        <p:nvSpPr>
+          <p:cNvPr id="5" name="Text 5">
+            <a:extLst>
+              <a:ext uri="{FF2B5EF4-FFF2-40B4-BE49-F238E27FC236}">
+                <a16:creationId xmlns:a16="http://schemas.microsoft.com/office/drawing/2014/main" id="{FCCCE9FA-8F0E-2FD2-CD25-0CC6D434FFA2}"/>
+              </a:ext>
+            </a:extLst>
+          </p:cNvPr>
+          <p:cNvSpPr/>
+          <p:nvPr/>
+        </p:nvSpPr>
+        <p:spPr>
+          <a:xfrm>
+            <a:off x="8046720" y="2103120"/>
+            <a:ext cx="3382920" cy="411120"/>
+          </a:xfrm>
+          <a:prstGeom prst="rect">
+            <a:avLst/>
+          </a:prstGeom>
+          <a:noFill/>
+          <a:ln w="0">
+            <a:noFill/>
+          </a:ln>
+        </p:spPr>
+        <p:style>
+          <a:lnRef idx="0">
+            <a:scrgbClr r="0" g="0" b="0"/>
+          </a:lnRef>
+          <a:fillRef idx="0">
+            <a:scrgbClr r="0" g="0" b="0"/>
+          </a:fillRef>
+          <a:effectRef idx="0">
+            <a:scrgbClr r="0" g="0" b="0"/>
+          </a:effectRef>
+          <a:fontRef idx="minor"/>
+        </p:style>
+        <p:txBody>
+          <a:bodyPr lIns="0" tIns="0" rIns="0" bIns="0" anchor="ctr">
+            <a:noAutofit/>
+          </a:bodyPr>
+          <a:lstStyle/>
+          <a:p>
+            <a:pPr algn="ctr" defTabSz="914400">
+              <a:lnSpc>
+                <a:spcPct val="100000"/>
+              </a:lnSpc>
+              <a:tabLst>
+                <a:tab pos="0" algn="l"/>
+              </a:tabLst>
+            </a:pPr>
+            <a:r>
+              <a:rPr lang="en-US" sz="1800" b="1" u="none" strike="noStrike" dirty="0">
+                <a:solidFill>
+                  <a:srgbClr val="14231C"/>
+                </a:solidFill>
+                <a:effectLst/>
+                <a:uFillTx/>
+                <a:latin typeface="Calibri"/>
+              </a:rPr>
+              <a:t>Plot: BAKS and BAUS vs τ</a:t>
+            </a:r>
+            <a:endParaRPr lang="en-ZA" sz="1800" b="0" u="none" strike="noStrike" dirty="0">
+              <a:solidFill>
+                <a:srgbClr val="000000"/>
+              </a:solidFill>
+              <a:effectLst/>
+              <a:uFillTx/>
+              <a:latin typeface="Arial"/>
+            </a:endParaRPr>
+          </a:p>
+        </p:txBody>
+      </p:sp>
+      <p:sp>
+        <p:nvSpPr>
+          <p:cNvPr id="7" name="Shape 7">
+            <a:extLst>
+              <a:ext uri="{FF2B5EF4-FFF2-40B4-BE49-F238E27FC236}">
+                <a16:creationId xmlns:a16="http://schemas.microsoft.com/office/drawing/2014/main" id="{F22E0AA9-A6DD-DADD-7847-1F13BA5D244D}"/>
+              </a:ext>
+            </a:extLst>
+          </p:cNvPr>
+          <p:cNvSpPr/>
+          <p:nvPr/>
+        </p:nvSpPr>
+        <p:spPr>
+          <a:xfrm>
+            <a:off x="7863840" y="3749040"/>
+            <a:ext cx="3748680" cy="2102760"/>
+          </a:xfrm>
+          <a:prstGeom prst="roundRect">
+            <a:avLst>
+              <a:gd name="adj" fmla="val 5217"/>
+            </a:avLst>
+          </a:prstGeom>
+          <a:solidFill>
+            <a:srgbClr val="FFFFFF"/>
+          </a:solidFill>
+          <a:ln w="19050">
+            <a:solidFill>
+              <a:srgbClr val="8FA698"/>
+            </a:solidFill>
+            <a:prstDash val="dash"/>
+            <a:round/>
+          </a:ln>
+        </p:spPr>
+        <p:style>
+          <a:lnRef idx="0">
+            <a:scrgbClr r="0" g="0" b="0"/>
+          </a:lnRef>
+          <a:fillRef idx="0">
+            <a:scrgbClr r="0" g="0" b="0"/>
+          </a:fillRef>
+          <a:effectRef idx="0">
+            <a:scrgbClr r="0" g="0" b="0"/>
+          </a:effectRef>
+          <a:fontRef idx="minor"/>
+        </p:style>
+        <p:txBody>
+          <a:bodyPr lIns="90000" tIns="45000" rIns="90000" bIns="45000" anchor="t">
+            <a:noAutofit/>
+          </a:bodyPr>
+          <a:lstStyle/>
+          <a:p>
+            <a:endParaRPr lang="en-ZA" sz="1800" b="0" u="none" strike="noStrike">
+              <a:solidFill>
+                <a:srgbClr val="000000"/>
+              </a:solidFill>
+              <a:effectLst/>
+              <a:uFillTx/>
+              <a:latin typeface="Arial"/>
+            </a:endParaRPr>
+          </a:p>
+        </p:txBody>
+      </p:sp>
+      <p:sp>
+        <p:nvSpPr>
+          <p:cNvPr id="9" name="Text 8">
+            <a:extLst>
+              <a:ext uri="{FF2B5EF4-FFF2-40B4-BE49-F238E27FC236}">
+                <a16:creationId xmlns:a16="http://schemas.microsoft.com/office/drawing/2014/main" id="{6B3343C2-C198-B315-0732-837CA5E86D07}"/>
+              </a:ext>
+            </a:extLst>
+          </p:cNvPr>
+          <p:cNvSpPr/>
+          <p:nvPr/>
+        </p:nvSpPr>
+        <p:spPr>
+          <a:xfrm>
+            <a:off x="8046720" y="4389120"/>
+            <a:ext cx="3382920" cy="411120"/>
+          </a:xfrm>
+          <a:prstGeom prst="rect">
+            <a:avLst/>
+          </a:prstGeom>
+          <a:noFill/>
+          <a:ln w="0">
+            <a:noFill/>
+          </a:ln>
+        </p:spPr>
+        <p:style>
+          <a:lnRef idx="0">
+            <a:scrgbClr r="0" g="0" b="0"/>
+          </a:lnRef>
+          <a:fillRef idx="0">
+            <a:scrgbClr r="0" g="0" b="0"/>
+          </a:fillRef>
+          <a:effectRef idx="0">
+            <a:scrgbClr r="0" g="0" b="0"/>
+          </a:effectRef>
+          <a:fontRef idx="minor"/>
+        </p:style>
+        <p:txBody>
+          <a:bodyPr lIns="0" tIns="0" rIns="0" bIns="0" anchor="ctr">
+            <a:noAutofit/>
+          </a:bodyPr>
+          <a:lstStyle/>
+          <a:p>
+            <a:pPr algn="ctr" defTabSz="914400">
+              <a:lnSpc>
+                <a:spcPct val="100000"/>
+              </a:lnSpc>
+              <a:tabLst>
+                <a:tab pos="0" algn="l"/>
+              </a:tabLst>
+            </a:pPr>
+            <a:r>
+              <a:rPr lang="en-US" sz="1800" b="1" u="none" strike="noStrike" dirty="0">
+                <a:solidFill>
+                  <a:srgbClr val="14231C"/>
+                </a:solidFill>
+                <a:effectLst/>
+                <a:uFillTx/>
+                <a:latin typeface="Calibri"/>
+              </a:rPr>
+              <a:t>Plot: PCA dimension sweep</a:t>
+            </a:r>
+            <a:endParaRPr lang="en-ZA" sz="1800" b="0" u="none" strike="noStrike" dirty="0">
+              <a:solidFill>
+                <a:srgbClr val="000000"/>
+              </a:solidFill>
+              <a:effectLst/>
+              <a:uFillTx/>
+              <a:latin typeface="Arial"/>
+            </a:endParaRPr>
+          </a:p>
+        </p:txBody>
+      </p:sp>
+      <p:sp>
+        <p:nvSpPr>
+          <p:cNvPr id="11" name="Text 9">
+            <a:extLst>
+              <a:ext uri="{FF2B5EF4-FFF2-40B4-BE49-F238E27FC236}">
+                <a16:creationId xmlns:a16="http://schemas.microsoft.com/office/drawing/2014/main" id="{B6B238D0-2198-11D4-ACCD-01CA2738B19B}"/>
+              </a:ext>
+            </a:extLst>
+          </p:cNvPr>
+          <p:cNvSpPr/>
+          <p:nvPr/>
+        </p:nvSpPr>
+        <p:spPr>
+          <a:xfrm>
+            <a:off x="8046720" y="4846320"/>
+            <a:ext cx="3382920" cy="365400"/>
+          </a:xfrm>
+          <a:prstGeom prst="rect">
+            <a:avLst/>
+          </a:prstGeom>
+          <a:noFill/>
+          <a:ln w="0">
+            <a:noFill/>
+          </a:ln>
+        </p:spPr>
+        <p:style>
+          <a:lnRef idx="0">
+            <a:scrgbClr r="0" g="0" b="0"/>
+          </a:lnRef>
+          <a:fillRef idx="0">
+            <a:scrgbClr r="0" g="0" b="0"/>
+          </a:fillRef>
+          <a:effectRef idx="0">
+            <a:scrgbClr r="0" g="0" b="0"/>
+          </a:effectRef>
+          <a:fontRef idx="minor"/>
+        </p:style>
+        <p:txBody>
+          <a:bodyPr lIns="0" tIns="0" rIns="0" bIns="0" anchor="ctr">
+            <a:noAutofit/>
+          </a:bodyPr>
+          <a:lstStyle/>
+          <a:p>
+            <a:pPr algn="ctr" defTabSz="914400">
+              <a:lnSpc>
+                <a:spcPct val="100000"/>
+              </a:lnSpc>
+              <a:tabLst>
+                <a:tab pos="0" algn="l"/>
+              </a:tabLst>
+            </a:pPr>
+            <a:r>
+              <a:rPr lang="en-US" sz="1300" b="0" u="none" strike="noStrike" dirty="0">
+                <a:solidFill>
+                  <a:srgbClr val="3B4A41"/>
+                </a:solidFill>
+                <a:effectLst/>
+                <a:uFillTx/>
+                <a:latin typeface="Calibri"/>
+              </a:rPr>
+              <a:t>32 to 512 dimensions vs uncompressed</a:t>
+            </a:r>
+            <a:endParaRPr lang="en-ZA" sz="1300" b="0" u="none" strike="noStrike" dirty="0">
+              <a:solidFill>
+                <a:srgbClr val="000000"/>
+              </a:solidFill>
+              <a:effectLst/>
+              <a:uFillTx/>
+              <a:latin typeface="Arial"/>
+            </a:endParaRPr>
+          </a:p>
+        </p:txBody>
+      </p:sp>
+      <p:pic>
+        <p:nvPicPr>
+          <p:cNvPr id="13" name="Picture 12">
+            <a:extLst>
+              <a:ext uri="{FF2B5EF4-FFF2-40B4-BE49-F238E27FC236}">
+                <a16:creationId xmlns:a16="http://schemas.microsoft.com/office/drawing/2014/main" id="{54895556-4163-89B1-ED2C-51CB454C24DC}"/>
+              </a:ext>
+            </a:extLst>
+          </p:cNvPr>
+          <p:cNvPicPr>
+            <a:picLocks noChangeAspect="1"/>
+          </p:cNvPicPr>
+          <p:nvPr/>
+        </p:nvPicPr>
+        <p:blipFill>
+          <a:blip r:embed="rId3"/>
+          <a:stretch>
+            <a:fillRect/>
+          </a:stretch>
+        </p:blipFill>
+        <p:spPr>
+          <a:xfrm>
+            <a:off x="7863840" y="1303867"/>
+            <a:ext cx="3815172" cy="2333987"/>
+          </a:xfrm>
+          <a:prstGeom prst="rect">
+            <a:avLst/>
+          </a:prstGeom>
+        </p:spPr>
+      </p:pic>
+      <p:pic>
+        <p:nvPicPr>
+          <p:cNvPr id="15" name="Picture 14">
+            <a:extLst>
+              <a:ext uri="{FF2B5EF4-FFF2-40B4-BE49-F238E27FC236}">
+                <a16:creationId xmlns:a16="http://schemas.microsoft.com/office/drawing/2014/main" id="{EEDAC48F-23F8-4E79-25FB-0305FBAEFAFA}"/>
+              </a:ext>
+            </a:extLst>
+          </p:cNvPr>
+          <p:cNvPicPr>
+            <a:picLocks noChangeAspect="1"/>
+          </p:cNvPicPr>
+          <p:nvPr/>
+        </p:nvPicPr>
+        <p:blipFill>
+          <a:blip r:embed="rId4"/>
+          <a:stretch>
+            <a:fillRect/>
+          </a:stretch>
+        </p:blipFill>
+        <p:spPr>
+          <a:xfrm>
+            <a:off x="7863479" y="3732323"/>
+            <a:ext cx="3748679" cy="2249207"/>
+          </a:xfrm>
+          <a:prstGeom prst="rect">
+            <a:avLst/>
+          </a:prstGeom>
+        </p:spPr>
+      </p:pic>
+    </p:spTree>
+  </p:cSld>
+  <p:clrMapOvr>
+    <a:masterClrMapping/>
+  </p:clrMapOvr>
+</p:sld>
+</file>
+
+<file path=ppt/slides/slide5.xml><?xml version="1.0" encoding="utf-8"?>
+<p:sld xmlns:a="http://schemas.openxmlformats.org/drawingml/2006/main" xmlns:r="http://schemas.openxmlformats.org/officeDocument/2006/relationships" xmlns:p="http://schemas.openxmlformats.org/presentationml/2006/main">
+  <p:cSld>
+    <p:bg>
+      <p:bgPr>
+        <a:solidFill>
+          <a:srgbClr val="FFFFFF"/>
+        </a:solidFill>
+        <a:effectLst/>
+      </p:bgPr>
+    </p:bg>
+    <p:spTree>
+      <p:nvGrpSpPr>
+        <p:cNvPr id="1" name=""/>
+        <p:cNvGrpSpPr/>
+        <p:nvPr/>
+      </p:nvGrpSpPr>
+      <p:grpSpPr>
+        <a:xfrm>
+          <a:off x="0" y="0"/>
+          <a:ext cx="0" cy="0"/>
+          <a:chOff x="0" y="0"/>
+          <a:chExt cx="0" cy="0"/>
+        </a:xfrm>
+      </p:grpSpPr>
+      <p:sp>
+        <p:nvSpPr>
+          <p:cNvPr id="102" name="Title"/>
+          <p:cNvSpPr/>
+          <p:nvPr/>
+        </p:nvSpPr>
+        <p:spPr>
+          <a:xfrm>
+            <a:off x="548640" y="365760"/>
+            <a:ext cx="11063520" cy="822240"/>
+          </a:xfrm>
+          <a:prstGeom prst="rect">
+            <a:avLst/>
+          </a:prstGeom>
+          <a:noFill/>
+          <a:ln w="0">
+            <a:noFill/>
+          </a:ln>
+        </p:spPr>
+        <p:style>
+          <a:lnRef idx="0">
+            <a:scrgbClr r="0" g="0" b="0"/>
+          </a:lnRef>
+          <a:fillRef idx="0">
+            <a:scrgbClr r="0" g="0" b="0"/>
+          </a:fillRef>
+          <a:effectRef idx="0">
+            <a:scrgbClr r="0" g="0" b="0"/>
+          </a:effectRef>
+          <a:fontRef idx="minor"/>
+        </p:style>
+        <p:txBody>
+          <a:bodyPr lIns="0" tIns="0" rIns="0" bIns="0" anchor="ctr">
+            <a:noAutofit/>
+          </a:bodyPr>
+          <a:lstStyle/>
+          <a:p>
+            <a:pPr defTabSz="914400">
+              <a:lnSpc>
+                <a:spcPct val="100000"/>
+              </a:lnSpc>
+              <a:tabLst>
+                <a:tab pos="0" algn="l"/>
+              </a:tabLst>
+            </a:pPr>
+            <a:r>
+              <a:rPr lang="en-US" sz="3800" b="1" u="none" strike="noStrike">
+                <a:solidFill>
+                  <a:schemeClr val="dk1"/>
+                </a:solidFill>
+                <a:effectLst/>
+                <a:uFillTx/>
+                <a:latin typeface="Cambria"/>
+                <a:ea typeface="Cambria"/>
+              </a:rPr>
+              <a:t>Conclusion and ablation</a:t>
+            </a:r>
+            <a:endParaRPr lang="en-ZA" sz="3800" b="0" u="none" strike="noStrike">
+              <a:solidFill>
+                <a:srgbClr val="000000"/>
+              </a:solidFill>
+              <a:effectLst/>
+              <a:uFillTx/>
+              <a:latin typeface="Arial"/>
+            </a:endParaRPr>
+          </a:p>
+        </p:txBody>
+      </p:sp>
+      <p:sp>
+        <p:nvSpPr>
+          <p:cNvPr id="103" name="PageNo"/>
+          <p:cNvSpPr/>
+          <p:nvPr/>
+        </p:nvSpPr>
+        <p:spPr>
+          <a:xfrm>
+            <a:off x="10698480" y="6400800"/>
+            <a:ext cx="913680" cy="273600"/>
+          </a:xfrm>
+          <a:prstGeom prst="rect">
+            <a:avLst/>
+          </a:prstGeom>
+          <a:noFill/>
+          <a:ln w="0">
+            <a:noFill/>
+          </a:ln>
+        </p:spPr>
+        <p:style>
+          <a:lnRef idx="0">
+            <a:scrgbClr r="0" g="0" b="0"/>
+          </a:lnRef>
+          <a:fillRef idx="0">
+            <a:scrgbClr r="0" g="0" b="0"/>
+          </a:fillRef>
+          <a:effectRef idx="0">
+            <a:scrgbClr r="0" g="0" b="0"/>
+          </a:effectRef>
+          <a:fontRef idx="minor"/>
+        </p:style>
+        <p:txBody>
+          <a:bodyPr lIns="0" tIns="0" rIns="0" bIns="0" anchor="ctr">
+            <a:noAutofit/>
+          </a:bodyPr>
+          <a:lstStyle/>
+          <a:p>
+            <a:pPr algn="r" defTabSz="914400">
+              <a:lnSpc>
+                <a:spcPct val="100000"/>
+              </a:lnSpc>
+              <a:tabLst>
+                <a:tab pos="0" algn="l"/>
+              </a:tabLst>
+            </a:pPr>
+            <a:r>
+              <a:rPr lang="en-US" sz="1100" b="0" u="none" strike="noStrike">
+                <a:solidFill>
+                  <a:srgbClr val="5B7F6B"/>
+                </a:solidFill>
+                <a:effectLst/>
+                <a:uFillTx/>
+                <a:latin typeface="Calibri"/>
+              </a:rPr>
+              <a:t>5 / 5</a:t>
+            </a:r>
+            <a:endParaRPr lang="en-ZA" sz="1100" b="0" u="none" strike="noStrike">
+              <a:solidFill>
+                <a:srgbClr val="000000"/>
+              </a:solidFill>
+              <a:effectLst/>
+              <a:uFillTx/>
+              <a:latin typeface="Arial"/>
+            </a:endParaRPr>
+          </a:p>
+        </p:txBody>
+      </p:sp>
+      <p:sp>
+        <p:nvSpPr>
+          <p:cNvPr id="104" name="Text 3"/>
+          <p:cNvSpPr/>
+          <p:nvPr/>
+        </p:nvSpPr>
+        <p:spPr>
+          <a:xfrm>
+            <a:off x="548640" y="1463040"/>
+            <a:ext cx="4479840" cy="1370880"/>
+          </a:xfrm>
+          <a:prstGeom prst="rect">
+            <a:avLst/>
+          </a:prstGeom>
+          <a:noFill/>
+          <a:ln w="0">
+            <a:noFill/>
+          </a:ln>
+        </p:spPr>
+        <p:style>
+          <a:lnRef idx="0">
+            <a:scrgbClr r="0" g="0" b="0"/>
+          </a:lnRef>
+          <a:fillRef idx="0">
+            <a:scrgbClr r="0" g="0" b="0"/>
+          </a:fillRef>
+          <a:effectRef idx="0">
+            <a:scrgbClr r="0" g="0" b="0"/>
+          </a:effectRef>
+          <a:fontRef idx="minor"/>
+        </p:style>
+        <p:txBody>
+          <a:bodyPr lIns="0" tIns="0" rIns="0" bIns="0" anchor="t">
+            <a:noAutofit/>
+          </a:bodyPr>
+          <a:lstStyle/>
+          <a:p>
+            <a:pPr defTabSz="914400">
+              <a:lnSpc>
+                <a:spcPct val="100000"/>
+              </a:lnSpc>
+              <a:tabLst>
+                <a:tab pos="0" algn="l"/>
+              </a:tabLst>
+            </a:pPr>
+            <a:r>
+              <a:rPr lang="en-US" sz="2600" b="1" u="none" strike="noStrike">
+                <a:solidFill>
+                  <a:srgbClr val="2C5F2D"/>
+                </a:solidFill>
+                <a:effectLst/>
+                <a:uFillTx/>
+                <a:latin typeface="Cambria"/>
+                <a:ea typeface="Cambria"/>
+              </a:rPr>
+              <a:t>Different evidence fails in different ways, so we fuse it.</a:t>
+            </a:r>
+            <a:endParaRPr lang="en-ZA" sz="2600" b="0" u="none" strike="noStrike">
+              <a:solidFill>
+                <a:srgbClr val="000000"/>
+              </a:solidFill>
+              <a:effectLst/>
+              <a:uFillTx/>
+              <a:latin typeface="Arial"/>
+            </a:endParaRPr>
+          </a:p>
+        </p:txBody>
+      </p:sp>
+      <p:sp>
+        <p:nvSpPr>
+          <p:cNvPr id="105" name="Text 4"/>
+          <p:cNvSpPr/>
+          <p:nvPr/>
+        </p:nvSpPr>
+        <p:spPr>
+          <a:xfrm>
+            <a:off x="548640" y="3017520"/>
+            <a:ext cx="4479840" cy="2376720"/>
+          </a:xfrm>
+          <a:prstGeom prst="rect">
+            <a:avLst/>
+          </a:prstGeom>
+          <a:noFill/>
+          <a:ln w="0">
+            <a:noFill/>
+          </a:ln>
+        </p:spPr>
+        <p:style>
+          <a:lnRef idx="0">
+            <a:scrgbClr r="0" g="0" b="0"/>
+          </a:lnRef>
+          <a:fillRef idx="0">
+            <a:scrgbClr r="0" g="0" b="0"/>
+          </a:fillRef>
+          <a:effectRef idx="0">
+            <a:scrgbClr r="0" g="0" b="0"/>
+          </a:effectRef>
+          <a:fontRef idx="minor"/>
+        </p:style>
+        <p:txBody>
+          <a:bodyPr lIns="0" tIns="0" rIns="0" bIns="0" anchor="t">
+            <a:noAutofit/>
+          </a:bodyPr>
+          <a:lstStyle/>
+          <a:p>
+            <a:pPr marL="343080" indent="-343080" defTabSz="914400">
+              <a:lnSpc>
+                <a:spcPct val="100000"/>
+              </a:lnSpc>
+              <a:spcAft>
+                <a:spcPts val="1001"/>
+              </a:spcAft>
+              <a:buClr>
+                <a:srgbClr val="3B4A41"/>
+              </a:buClr>
+              <a:buFont typeface="Symbol" charset="2"/>
+              <a:buChar char=""/>
+            </a:pPr>
+            <a:r>
+              <a:rPr lang="en-US" sz="1600" b="0" u="none" strike="noStrike">
+                <a:solidFill>
+                  <a:srgbClr val="3B4A41"/>
+                </a:solidFill>
+                <a:effectLst/>
+                <a:uFillTx/>
+                <a:latin typeface="Calibri"/>
+              </a:rPr>
+              <a:t>Calibration makes unlike scores comparable</a:t>
+            </a:r>
+            <a:endParaRPr lang="en-ZA" sz="1600" b="0" u="none" strike="noStrike">
+              <a:solidFill>
+                <a:srgbClr val="000000"/>
+              </a:solidFill>
+              <a:effectLst/>
+              <a:uFillTx/>
+              <a:latin typeface="Arial"/>
+            </a:endParaRPr>
+          </a:p>
+          <a:p>
+            <a:pPr marL="343080" indent="-343080" defTabSz="914400">
+              <a:lnSpc>
+                <a:spcPct val="100000"/>
+              </a:lnSpc>
+              <a:spcAft>
+                <a:spcPts val="1001"/>
+              </a:spcAft>
+              <a:buClr>
+                <a:srgbClr val="3B4A41"/>
+              </a:buClr>
+              <a:buFont typeface="Symbol" charset="2"/>
+              <a:buChar char=""/>
+            </a:pPr>
+            <a:r>
+              <a:rPr lang="en-US" sz="1600" b="0" u="none" strike="noStrike">
+                <a:solidFill>
+                  <a:srgbClr val="3B4A41"/>
+                </a:solidFill>
+                <a:effectLst/>
+                <a:uFillTx/>
+                <a:latin typeface="Calibri"/>
+              </a:rPr>
+              <a:t>Local matching runs only on a shortlist, so it stays affordable</a:t>
+            </a:r>
+            <a:endParaRPr lang="en-ZA" sz="1600" b="0" u="none" strike="noStrike">
+              <a:solidFill>
+                <a:srgbClr val="000000"/>
+              </a:solidFill>
+              <a:effectLst/>
+              <a:uFillTx/>
+              <a:latin typeface="Arial"/>
+            </a:endParaRPr>
+          </a:p>
+          <a:p>
+            <a:pPr marL="343080" indent="-343080" defTabSz="914400">
+              <a:lnSpc>
+                <a:spcPct val="100000"/>
+              </a:lnSpc>
+              <a:spcAft>
+                <a:spcPts val="1001"/>
+              </a:spcAft>
+              <a:buClr>
+                <a:srgbClr val="3B4A41"/>
+              </a:buClr>
+              <a:buFont typeface="Symbol" charset="2"/>
+              <a:buChar char=""/>
+            </a:pPr>
+            <a:r>
+              <a:rPr lang="en-US" sz="1600" b="0" u="none" strike="noStrike">
+                <a:solidFill>
+                  <a:srgbClr val="3B4A41"/>
+                </a:solidFill>
+                <a:effectLst/>
+                <a:uFillTx/>
+                <a:latin typeface="Calibri"/>
+              </a:rPr>
+              <a:t>One threshold τ separates known from new animals</a:t>
+            </a:r>
+            <a:endParaRPr lang="en-ZA" sz="1600" b="0" u="none" strike="noStrike">
+              <a:solidFill>
+                <a:srgbClr val="000000"/>
+              </a:solidFill>
+              <a:effectLst/>
+              <a:uFillTx/>
+              <a:latin typeface="Arial"/>
+            </a:endParaRPr>
+          </a:p>
+        </p:txBody>
+      </p:sp>
+      <p:graphicFrame>
+        <p:nvGraphicFramePr>
+          <p:cNvPr id="106" name="Table 0"/>
+          <p:cNvGraphicFramePr/>
+          <p:nvPr/>
+        </p:nvGraphicFramePr>
+        <p:xfrm>
+          <a:off x="5486400" y="1463040"/>
+          <a:ext cx="6126480" cy="4003920"/>
+        </p:xfrm>
+        <a:graphic>
+          <a:graphicData uri="http://schemas.openxmlformats.org/drawingml/2006/table">
+            <a:tbl>
+              <a:tblPr/>
+              <a:tblGrid>
+                <a:gridCol w="2194560">
+                  <a:extLst>
+                    <a:ext uri="{9D8B030D-6E8A-4147-A177-3AD203B41FA5}">
+                      <a16:colId xmlns:a16="http://schemas.microsoft.com/office/drawing/2014/main" val="20000"/>
+                    </a:ext>
+                  </a:extLst>
+                </a:gridCol>
+                <a:gridCol w="3931920">
+                  <a:extLst>
+                    <a:ext uri="{9D8B030D-6E8A-4147-A177-3AD203B41FA5}">
+                      <a16:colId xmlns:a16="http://schemas.microsoft.com/office/drawing/2014/main" val="20001"/>
+                    </a:ext>
+                  </a:extLst>
+                </a:gridCol>
+              </a:tblGrid>
+              <a:tr h="566640">
+                <a:tc>
+                  <a:txBody>
+                    <a:bodyPr/>
+                    <a:lstStyle/>
+                    <a:p>
+                      <a:pPr defTabSz="914400">
+                        <a:lnSpc>
+                          <a:spcPct val="100000"/>
+                        </a:lnSpc>
+                        <a:tabLst>
+                          <a:tab pos="0" algn="l"/>
+                        </a:tabLst>
+                      </a:pPr>
+                      <a:r>
+                        <a:rPr lang="en-US" sz="1600" b="1" u="none" strike="noStrike">
+                          <a:solidFill>
+                            <a:srgbClr val="FFFFFF"/>
+                          </a:solidFill>
+                          <a:effectLst/>
+                          <a:uFillTx/>
+                          <a:latin typeface="Calibri"/>
+                        </a:rPr>
+                        <a:t>Configuration</a:t>
+                      </a:r>
+                      <a:endParaRPr lang="en-ZA" sz="1600" b="0" u="none" strike="noStrike">
+                        <a:solidFill>
+                          <a:srgbClr val="FFFFFF"/>
+                        </a:solidFill>
+                        <a:effectLst/>
+                        <a:uFillTx/>
+                        <a:latin typeface="Arial"/>
+                      </a:endParaRPr>
+                    </a:p>
+                  </a:txBody>
+                  <a:tcPr anchor="ctr">
+                    <a:lnL w="12240">
+                      <a:solidFill>
+                        <a:srgbClr val="DDE6DF"/>
+                      </a:solidFill>
+                      <a:prstDash val="solid"/>
+                    </a:lnL>
+                    <a:lnR w="12240">
+                      <a:solidFill>
+                        <a:srgbClr val="DDE6DF"/>
+                      </a:solidFill>
+                      <a:prstDash val="solid"/>
+                    </a:lnR>
+                    <a:lnT w="12240">
+                      <a:solidFill>
+                        <a:srgbClr val="DDE6DF"/>
+                      </a:solidFill>
+                      <a:prstDash val="solid"/>
+                    </a:lnT>
+                    <a:lnB w="12240">
+                      <a:solidFill>
+                        <a:srgbClr val="DDE6DF"/>
+                      </a:solidFill>
+                      <a:prstDash val="solid"/>
+                    </a:lnB>
+                    <a:solidFill>
+                      <a:srgbClr val="2C5F2D"/>
+                    </a:solidFill>
+                  </a:tcPr>
+                </a:tc>
+                <a:tc>
+                  <a:txBody>
+                    <a:bodyPr/>
+                    <a:lstStyle/>
+                    <a:p>
+                      <a:pPr defTabSz="914400">
+                        <a:lnSpc>
+                          <a:spcPct val="100000"/>
+                        </a:lnSpc>
+                        <a:tabLst>
+                          <a:tab pos="0" algn="l"/>
+                        </a:tabLst>
+                      </a:pPr>
+                      <a:r>
+                        <a:rPr lang="en-US" sz="1600" b="1" u="none" strike="noStrike">
+                          <a:solidFill>
+                            <a:srgbClr val="FFFFFF"/>
+                          </a:solidFill>
+                          <a:effectLst/>
+                          <a:uFillTx/>
+                          <a:latin typeface="Calibri"/>
+                        </a:rPr>
+                        <a:t>What it tells us</a:t>
+                      </a:r>
+                      <a:endParaRPr lang="en-ZA" sz="1600" b="0" u="none" strike="noStrike">
+                        <a:solidFill>
+                          <a:srgbClr val="FFFFFF"/>
+                        </a:solidFill>
+                        <a:effectLst/>
+                        <a:uFillTx/>
+                        <a:latin typeface="Arial"/>
+                      </a:endParaRPr>
+                    </a:p>
+                  </a:txBody>
+                  <a:tcPr anchor="ctr">
+                    <a:lnL w="12240">
+                      <a:solidFill>
+                        <a:srgbClr val="DDE6DF"/>
+                      </a:solidFill>
+                      <a:prstDash val="solid"/>
+                    </a:lnL>
+                    <a:lnR w="12240">
+                      <a:solidFill>
+                        <a:srgbClr val="DDE6DF"/>
+                      </a:solidFill>
+                      <a:prstDash val="solid"/>
+                    </a:lnR>
+                    <a:lnT w="12240">
+                      <a:solidFill>
+                        <a:srgbClr val="DDE6DF"/>
+                      </a:solidFill>
+                      <a:prstDash val="solid"/>
+                    </a:lnT>
+                    <a:lnB w="12240">
+                      <a:solidFill>
+                        <a:srgbClr val="DDE6DF"/>
+                      </a:solidFill>
+                      <a:prstDash val="solid"/>
+                    </a:lnB>
+                    <a:solidFill>
+                      <a:srgbClr val="2C5F2D"/>
+                    </a:solidFill>
+                  </a:tcPr>
+                </a:tc>
+                <a:extLst>
+                  <a:ext uri="{0D108BD9-81ED-4DB2-BD59-A6C34878D82A}">
+                    <a16:rowId xmlns:a16="http://schemas.microsoft.com/office/drawing/2014/main" val="10000"/>
+                  </a:ext>
+                </a:extLst>
+              </a:tr>
+              <a:tr h="566640">
+                <a:tc>
+                  <a:txBody>
+                    <a:bodyPr/>
+                    <a:lstStyle/>
                     <a:p>
                       <a:pPr defTabSz="914400">
                         <a:lnSpc>
@@ -7051,7 +10440,7 @@
                           <a:uFillTx/>
                           <a:latin typeface="Calibri"/>
                         </a:rPr>
-                        <a:t>DINOv2 baseline</a:t>
+                        <a:t>Global alone</a:t>
                       </a:r>
                       <a:endParaRPr lang="en-ZA" sz="1600" b="0" u="none" strike="noStrike">
                         <a:solidFill>
@@ -7063,7 +10452,7 @@
                       </a:endParaRPr>
                     </a:p>
                   </a:txBody>
-                  <a:tcPr anchor="ctr" marL="91440" marR="91440" marT="45720" marB="45720">
+                  <a:tcPr anchor="ctr">
                     <a:lnL w="12240">
                       <a:solidFill>
                         <a:srgbClr val="DDE6DF"/>
@@ -7095,11 +10484,10 @@
                 </a:tc>
                 <a:tc>
                   <a:txBody>
-                    <a:bodyPr anchor="ctr">
-                      <a:noAutofit/>
-                    </a:bodyPr>
+                    <a:bodyPr/>
+                    <a:lstStyle/>
                     <a:p>
-                      <a:pPr algn="r" defTabSz="914400">
+                      <a:pPr defTabSz="914400">
                         <a:lnSpc>
                           <a:spcPct val="100000"/>
                         </a:lnSpc>
@@ -7116,7 +10504,7 @@
                           <a:uFillTx/>
                           <a:latin typeface="Calibri"/>
                         </a:rPr>
-                        <a:t>52.3</a:t>
+                        <a:t>Fine-tuned model carries the system: 81.1 BAKS, 73.3 open</a:t>
                       </a:r>
                       <a:endParaRPr lang="en-ZA" sz="1600" b="0" u="none" strike="noStrike">
                         <a:solidFill>
@@ -7128,7 +10516,7 @@
                       </a:endParaRPr>
                     </a:p>
                   </a:txBody>
-                  <a:tcPr anchor="ctr" marL="91440" marR="91440" marT="45720" marB="45720">
+                  <a:tcPr anchor="ctr">
                     <a:lnL w="12240">
                       <a:solidFill>
                         <a:srgbClr val="DDE6DF"/>
@@ -7158,208 +10546,17 @@
                     </a:solidFill>
                   </a:tcPr>
                 </a:tc>
-                <a:tc>
-                  <a:txBody>
-                    <a:bodyPr anchor="ctr">
-                      <a:noAutofit/>
-                    </a:bodyPr>
-                    <a:p>
-                      <a:pPr algn="r" defTabSz="914400">
-                        <a:lnSpc>
-                          <a:spcPct val="100000"/>
-                        </a:lnSpc>
-                        <a:tabLst>
-                          <a:tab pos="0" algn="l"/>
-                        </a:tabLst>
-                      </a:pPr>
-                      <a:r>
-                        <a:rPr lang="en-US" sz="1600" b="0" u="none" strike="noStrike">
-                          <a:solidFill>
-                            <a:srgbClr val="14231C"/>
-                          </a:solidFill>
-                          <a:effectLst/>
-                          <a:uFillTx/>
-                          <a:latin typeface="Calibri"/>
-                        </a:rPr>
-                        <a:t>52.0</a:t>
-                      </a:r>
-                      <a:endParaRPr lang="en-ZA" sz="1600" b="0" u="none" strike="noStrike">
-                        <a:solidFill>
-                          <a:srgbClr val="000000"/>
-                        </a:solidFill>
-                        <a:effectLst/>
-                        <a:uFillTx/>
-                        <a:latin typeface="Arial"/>
-                      </a:endParaRPr>
-                    </a:p>
-                  </a:txBody>
-                  <a:tcPr anchor="ctr" marL="91440" marR="91440" marT="45720" marB="45720">
-                    <a:lnL w="12240">
-                      <a:solidFill>
-                        <a:srgbClr val="DDE6DF"/>
-                      </a:solidFill>
-                      <a:prstDash val="solid"/>
-                    </a:lnL>
-                    <a:lnR w="12240">
-                      <a:solidFill>
-                        <a:srgbClr val="DDE6DF"/>
-                      </a:solidFill>
-                      <a:prstDash val="solid"/>
-                    </a:lnR>
-                    <a:lnT w="12240">
-                      <a:solidFill>
-                        <a:srgbClr val="DDE6DF"/>
-                      </a:solidFill>
-                      <a:prstDash val="solid"/>
-                    </a:lnT>
-                    <a:lnB w="12240">
-                      <a:solidFill>
-                        <a:srgbClr val="DDE6DF"/>
-                      </a:solidFill>
-                      <a:prstDash val="solid"/>
-                    </a:lnB>
-                    <a:solidFill>
-                      <a:srgbClr val="FFFFFF"/>
-                    </a:solidFill>
-                  </a:tcPr>
-                </a:tc>
-                <a:tc>
-                  <a:txBody>
-                    <a:bodyPr anchor="ctr">
-                      <a:noAutofit/>
-                    </a:bodyPr>
-                    <a:p>
-                      <a:pPr algn="r" defTabSz="914400">
-                        <a:lnSpc>
-                          <a:spcPct val="100000"/>
-                        </a:lnSpc>
-                        <a:tabLst>
-                          <a:tab pos="0" algn="l"/>
-                        </a:tabLst>
-                      </a:pPr>
-                      <a:r>
-                        <a:rPr lang="en-US" sz="1600" b="0" u="none" strike="noStrike">
-                          <a:solidFill>
-                            <a:srgbClr val="14231C"/>
-                          </a:solidFill>
-                          <a:effectLst/>
-                          <a:uFillTx/>
-                          <a:latin typeface="Calibri"/>
-                        </a:rPr>
-                        <a:t>98.4</a:t>
-                      </a:r>
-                      <a:endParaRPr lang="en-ZA" sz="1600" b="0" u="none" strike="noStrike">
-                        <a:solidFill>
-                          <a:srgbClr val="000000"/>
-                        </a:solidFill>
-                        <a:effectLst/>
-                        <a:uFillTx/>
-                        <a:latin typeface="Arial"/>
-                      </a:endParaRPr>
-                    </a:p>
-                  </a:txBody>
-                  <a:tcPr anchor="ctr" marL="91440" marR="91440" marT="45720" marB="45720">
-                    <a:lnL w="12240">
-                      <a:solidFill>
-                        <a:srgbClr val="DDE6DF"/>
-                      </a:solidFill>
-                      <a:prstDash val="solid"/>
-                    </a:lnL>
-                    <a:lnR w="12240">
-                      <a:solidFill>
-                        <a:srgbClr val="DDE6DF"/>
-                      </a:solidFill>
-                      <a:prstDash val="solid"/>
-                    </a:lnR>
-                    <a:lnT w="12240">
-                      <a:solidFill>
-                        <a:srgbClr val="DDE6DF"/>
-                      </a:solidFill>
-                      <a:prstDash val="solid"/>
-                    </a:lnT>
-                    <a:lnB w="12240">
-                      <a:solidFill>
-                        <a:srgbClr val="DDE6DF"/>
-                      </a:solidFill>
-                      <a:prstDash val="solid"/>
-                    </a:lnB>
-                    <a:solidFill>
-                      <a:srgbClr val="FFFFFF"/>
-                    </a:solidFill>
-                  </a:tcPr>
-                </a:tc>
-                <a:tc>
-                  <a:txBody>
-                    <a:bodyPr anchor="ctr">
-                      <a:noAutofit/>
-                    </a:bodyPr>
-                    <a:p>
-                      <a:pPr algn="r" defTabSz="914400">
-                        <a:lnSpc>
-                          <a:spcPct val="100000"/>
-                        </a:lnSpc>
-                        <a:tabLst>
-                          <a:tab pos="0" algn="l"/>
-                        </a:tabLst>
-                      </a:pPr>
-                      <a:r>
-                        <a:rPr lang="en-US" sz="1600" b="0" u="none" strike="noStrike">
-                          <a:solidFill>
-                            <a:srgbClr val="14231C"/>
-                          </a:solidFill>
-                          <a:effectLst/>
-                          <a:uFillTx/>
-                          <a:latin typeface="Calibri"/>
-                        </a:rPr>
-                        <a:t>21.0</a:t>
-                      </a:r>
-                      <a:endParaRPr lang="en-ZA" sz="1600" b="0" u="none" strike="noStrike">
-                        <a:solidFill>
-                          <a:srgbClr val="000000"/>
-                        </a:solidFill>
-                        <a:effectLst/>
-                        <a:uFillTx/>
-                        <a:latin typeface="Arial"/>
-                      </a:endParaRPr>
-                    </a:p>
-                  </a:txBody>
-                  <a:tcPr anchor="ctr" marL="91440" marR="91440" marT="45720" marB="45720">
-                    <a:lnL w="12240">
-                      <a:solidFill>
-                        <a:srgbClr val="DDE6DF"/>
-                      </a:solidFill>
-                      <a:prstDash val="solid"/>
-                    </a:lnL>
-                    <a:lnR w="12240">
-                      <a:solidFill>
-                        <a:srgbClr val="DDE6DF"/>
-                      </a:solidFill>
-                      <a:prstDash val="solid"/>
-                    </a:lnR>
-                    <a:lnT w="12240">
-                      <a:solidFill>
-                        <a:srgbClr val="DDE6DF"/>
-                      </a:solidFill>
-                      <a:prstDash val="solid"/>
-                    </a:lnT>
-                    <a:lnB w="12240">
-                      <a:solidFill>
-                        <a:srgbClr val="DDE6DF"/>
-                      </a:solidFill>
-                      <a:prstDash val="solid"/>
-                    </a:lnB>
-                    <a:solidFill>
-                      <a:srgbClr val="FFFFFF"/>
-                    </a:solidFill>
-                  </a:tcPr>
-                </a:tc>
+                <a:extLst>
+                  <a:ext uri="{0D108BD9-81ED-4DB2-BD59-A6C34878D82A}">
+                    <a16:rowId xmlns:a16="http://schemas.microsoft.com/office/drawing/2014/main" val="10001"/>
+                  </a:ext>
+                </a:extLst>
               </a:tr>
               <a:tr h="566640">
                 <a:tc>
                   <a:txBody>
-                    <a:bodyPr anchor="ctr">
-                      <a:noAutofit/>
-                    </a:bodyPr>
+                    <a:bodyPr/>
+                    <a:lstStyle/>
                     <a:p>
                       <a:pPr defTabSz="914400">
                         <a:lnSpc>
@@ -7390,7 +10587,7 @@
                       </a:endParaRPr>
                     </a:p>
                   </a:txBody>
-                  <a:tcPr anchor="ctr" marL="91440" marR="91440" marT="45720" marB="45720">
+                  <a:tcPr anchor="ctr">
                     <a:lnL w="12240">
                       <a:solidFill>
                         <a:srgbClr val="DDE6DF"/>
@@ -7422,271 +10619,8 @@
                 </a:tc>
                 <a:tc>
                   <a:txBody>
-                    <a:bodyPr anchor="ctr">
-                      <a:noAutofit/>
-                    </a:bodyPr>
-                    <a:p>
-                      <a:pPr algn="r" defTabSz="914400">
-                        <a:lnSpc>
-                          <a:spcPct val="100000"/>
-                        </a:lnSpc>
-                        <a:tabLst>
-                          <a:tab pos="0" algn="l"/>
-                        </a:tabLst>
-                      </a:pPr>
-                      <a:r>
-                        <a:rPr lang="en-US" sz="1600" b="0" u="none" strike="noStrike">
-                          <a:solidFill>
-                            <a:srgbClr val="14231C"/>
-                          </a:solidFill>
-                          <a:effectLst/>
-                          <a:uFillTx/>
-                          <a:latin typeface="Calibri"/>
-                        </a:rPr>
-                        <a:t>42.7</a:t>
-                      </a:r>
-                      <a:endParaRPr lang="en-ZA" sz="1600" b="0" u="none" strike="noStrike">
-                        <a:solidFill>
-                          <a:srgbClr val="000000"/>
-                        </a:solidFill>
-                        <a:effectLst/>
-                        <a:uFillTx/>
-                        <a:latin typeface="Arial"/>
-                      </a:endParaRPr>
-                    </a:p>
-                  </a:txBody>
-                  <a:tcPr anchor="ctr" marL="91440" marR="91440" marT="45720" marB="45720">
-                    <a:lnL w="12240">
-                      <a:solidFill>
-                        <a:srgbClr val="DDE6DF"/>
-                      </a:solidFill>
-                      <a:prstDash val="solid"/>
-                    </a:lnL>
-                    <a:lnR w="12240">
-                      <a:solidFill>
-                        <a:srgbClr val="DDE6DF"/>
-                      </a:solidFill>
-                      <a:prstDash val="solid"/>
-                    </a:lnR>
-                    <a:lnT w="12240">
-                      <a:solidFill>
-                        <a:srgbClr val="DDE6DF"/>
-                      </a:solidFill>
-                      <a:prstDash val="solid"/>
-                    </a:lnT>
-                    <a:lnB w="12240">
-                      <a:solidFill>
-                        <a:srgbClr val="DDE6DF"/>
-                      </a:solidFill>
-                      <a:prstDash val="solid"/>
-                    </a:lnB>
-                    <a:solidFill>
-                      <a:srgbClr val="F2F5F1"/>
-                    </a:solidFill>
-                  </a:tcPr>
-                </a:tc>
-                <a:tc>
-                  <a:txBody>
-                    <a:bodyPr anchor="ctr">
-                      <a:noAutofit/>
-                    </a:bodyPr>
-                    <a:p>
-                      <a:pPr algn="r" defTabSz="914400">
-                        <a:lnSpc>
-                          <a:spcPct val="100000"/>
-                        </a:lnSpc>
-                        <a:tabLst>
-                          <a:tab pos="0" algn="l"/>
-                        </a:tabLst>
-                      </a:pPr>
-                      <a:r>
-                        <a:rPr lang="en-US" sz="1600" b="0" u="none" strike="noStrike">
-                          <a:solidFill>
-                            <a:srgbClr val="14231C"/>
-                          </a:solidFill>
-                          <a:effectLst/>
-                          <a:uFillTx/>
-                          <a:latin typeface="Calibri"/>
-                        </a:rPr>
-                        <a:t>50.4</a:t>
-                      </a:r>
-                      <a:endParaRPr lang="en-ZA" sz="1600" b="0" u="none" strike="noStrike">
-                        <a:solidFill>
-                          <a:srgbClr val="000000"/>
-                        </a:solidFill>
-                        <a:effectLst/>
-                        <a:uFillTx/>
-                        <a:latin typeface="Arial"/>
-                      </a:endParaRPr>
-                    </a:p>
-                  </a:txBody>
-                  <a:tcPr anchor="ctr" marL="91440" marR="91440" marT="45720" marB="45720">
-                    <a:lnL w="12240">
-                      <a:solidFill>
-                        <a:srgbClr val="DDE6DF"/>
-                      </a:solidFill>
-                      <a:prstDash val="solid"/>
-                    </a:lnL>
-                    <a:lnR w="12240">
-                      <a:solidFill>
-                        <a:srgbClr val="DDE6DF"/>
-                      </a:solidFill>
-                      <a:prstDash val="solid"/>
-                    </a:lnR>
-                    <a:lnT w="12240">
-                      <a:solidFill>
-                        <a:srgbClr val="DDE6DF"/>
-                      </a:solidFill>
-                      <a:prstDash val="solid"/>
-                    </a:lnT>
-                    <a:lnB w="12240">
-                      <a:solidFill>
-                        <a:srgbClr val="DDE6DF"/>
-                      </a:solidFill>
-                      <a:prstDash val="solid"/>
-                    </a:lnB>
-                    <a:solidFill>
-                      <a:srgbClr val="F2F5F1"/>
-                    </a:solidFill>
-                  </a:tcPr>
-                </a:tc>
-                <a:tc>
-                  <a:txBody>
-                    <a:bodyPr anchor="ctr">
-                      <a:noAutofit/>
-                    </a:bodyPr>
-                    <a:p>
-                      <a:pPr algn="r" defTabSz="914400">
-                        <a:lnSpc>
-                          <a:spcPct val="100000"/>
-                        </a:lnSpc>
-                        <a:tabLst>
-                          <a:tab pos="0" algn="l"/>
-                        </a:tabLst>
-                      </a:pPr>
-                      <a:r>
-                        <a:rPr lang="en-US" sz="1600" b="0" u="none" strike="noStrike">
-                          <a:solidFill>
-                            <a:srgbClr val="14231C"/>
-                          </a:solidFill>
-                          <a:effectLst/>
-                          <a:uFillTx/>
-                          <a:latin typeface="Calibri"/>
-                        </a:rPr>
-                        <a:t>95.1</a:t>
-                      </a:r>
-                      <a:endParaRPr lang="en-ZA" sz="1600" b="0" u="none" strike="noStrike">
-                        <a:solidFill>
-                          <a:srgbClr val="000000"/>
-                        </a:solidFill>
-                        <a:effectLst/>
-                        <a:uFillTx/>
-                        <a:latin typeface="Arial"/>
-                      </a:endParaRPr>
-                    </a:p>
-                  </a:txBody>
-                  <a:tcPr anchor="ctr" marL="91440" marR="91440" marT="45720" marB="45720">
-                    <a:lnL w="12240">
-                      <a:solidFill>
-                        <a:srgbClr val="DDE6DF"/>
-                      </a:solidFill>
-                      <a:prstDash val="solid"/>
-                    </a:lnL>
-                    <a:lnR w="12240">
-                      <a:solidFill>
-                        <a:srgbClr val="DDE6DF"/>
-                      </a:solidFill>
-                      <a:prstDash val="solid"/>
-                    </a:lnR>
-                    <a:lnT w="12240">
-                      <a:solidFill>
-                        <a:srgbClr val="DDE6DF"/>
-                      </a:solidFill>
-                      <a:prstDash val="solid"/>
-                    </a:lnT>
-                    <a:lnB w="12240">
-                      <a:solidFill>
-                        <a:srgbClr val="DDE6DF"/>
-                      </a:solidFill>
-                      <a:prstDash val="solid"/>
-                    </a:lnB>
-                    <a:solidFill>
-                      <a:srgbClr val="F2F5F1"/>
-                    </a:solidFill>
-                  </a:tcPr>
-                </a:tc>
-                <a:tc>
-                  <a:txBody>
-                    <a:bodyPr anchor="ctr">
-                      <a:noAutofit/>
-                    </a:bodyPr>
-                    <a:p>
-                      <a:pPr algn="r" defTabSz="914400">
-                        <a:lnSpc>
-                          <a:spcPct val="100000"/>
-                        </a:lnSpc>
-                        <a:tabLst>
-                          <a:tab pos="0" algn="l"/>
-                        </a:tabLst>
-                      </a:pPr>
-                      <a:r>
-                        <a:rPr lang="en-US" sz="1600" b="0" u="none" strike="noStrike">
-                          <a:solidFill>
-                            <a:srgbClr val="14231C"/>
-                          </a:solidFill>
-                          <a:effectLst/>
-                          <a:uFillTx/>
-                          <a:latin typeface="Calibri"/>
-                        </a:rPr>
-                        <a:t>16.1</a:t>
-                      </a:r>
-                      <a:endParaRPr lang="en-ZA" sz="1600" b="0" u="none" strike="noStrike">
-                        <a:solidFill>
-                          <a:srgbClr val="000000"/>
-                        </a:solidFill>
-                        <a:effectLst/>
-                        <a:uFillTx/>
-                        <a:latin typeface="Arial"/>
-                      </a:endParaRPr>
-                    </a:p>
-                  </a:txBody>
-                  <a:tcPr anchor="ctr" marL="91440" marR="91440" marT="45720" marB="45720">
-                    <a:lnL w="12240">
-                      <a:solidFill>
-                        <a:srgbClr val="DDE6DF"/>
-                      </a:solidFill>
-                      <a:prstDash val="solid"/>
-                    </a:lnL>
-                    <a:lnR w="12240">
-                      <a:solidFill>
-                        <a:srgbClr val="DDE6DF"/>
-                      </a:solidFill>
-                      <a:prstDash val="solid"/>
-                    </a:lnR>
-                    <a:lnT w="12240">
-                      <a:solidFill>
-                        <a:srgbClr val="DDE6DF"/>
-                      </a:solidFill>
-                      <a:prstDash val="solid"/>
-                    </a:lnT>
-                    <a:lnB w="12240">
-                      <a:solidFill>
-                        <a:srgbClr val="DDE6DF"/>
-                      </a:solidFill>
-                      <a:prstDash val="solid"/>
-                    </a:lnB>
-                    <a:solidFill>
-                      <a:srgbClr val="F2F5F1"/>
-                    </a:solidFill>
-                  </a:tcPr>
-                </a:tc>
-              </a:tr>
-              <a:tr h="566640">
-                <a:tc>
-                  <a:txBody>
-                    <a:bodyPr anchor="ctr">
-                      <a:noAutofit/>
-                    </a:bodyPr>
+                    <a:bodyPr/>
+                    <a:lstStyle/>
                     <a:p>
                       <a:pPr defTabSz="914400">
                         <a:lnSpc>
@@ -7705,7 +10639,7 @@
                           <a:uFillTx/>
                           <a:latin typeface="Calibri"/>
                         </a:rPr>
-                        <a:t>Global (fine-tuned)</a:t>
+                        <a:t>Weak alone: 42.7 BAKS, 50.4 open (about reject-all)</a:t>
                       </a:r>
                       <a:endParaRPr lang="en-ZA" sz="1600" b="0" u="none" strike="noStrike">
                         <a:solidFill>
@@ -7717,7 +10651,7 @@
                       </a:endParaRPr>
                     </a:p>
                   </a:txBody>
-                  <a:tcPr anchor="ctr" marL="91440" marR="91440" marT="45720" marB="45720">
+                  <a:tcPr anchor="ctr">
                     <a:lnL w="12240">
                       <a:solidFill>
                         <a:srgbClr val="DDE6DF"/>
@@ -7743,17 +10677,23 @@
                       <a:prstDash val="solid"/>
                     </a:lnB>
                     <a:solidFill>
-                      <a:srgbClr val="FFFFFF"/>
+                      <a:srgbClr val="F2F5F1"/>
                     </a:solidFill>
                   </a:tcPr>
                 </a:tc>
+                <a:extLst>
+                  <a:ext uri="{0D108BD9-81ED-4DB2-BD59-A6C34878D82A}">
+                    <a16:rowId xmlns:a16="http://schemas.microsoft.com/office/drawing/2014/main" val="10002"/>
+                  </a:ext>
+                </a:extLst>
+              </a:tr>
+              <a:tr h="566640">
                 <a:tc>
                   <a:txBody>
-                    <a:bodyPr anchor="ctr">
-                      <a:noAutofit/>
-                    </a:bodyPr>
+                    <a:bodyPr/>
+                    <a:lstStyle/>
                     <a:p>
-                      <a:pPr algn="r" defTabSz="914400">
+                      <a:pPr defTabSz="914400">
                         <a:lnSpc>
                           <a:spcPct val="100000"/>
                         </a:lnSpc>
@@ -7770,7 +10710,7 @@
                           <a:uFillTx/>
                           <a:latin typeface="Calibri"/>
                         </a:rPr>
-                        <a:t>81.1</a:t>
+                        <a:t>ALIKED alone</a:t>
                       </a:r>
                       <a:endParaRPr lang="en-ZA" sz="1600" b="0" u="none" strike="noStrike">
                         <a:solidFill>
@@ -7782,7 +10722,7 @@
                       </a:endParaRPr>
                     </a:p>
                   </a:txBody>
-                  <a:tcPr anchor="ctr" marL="91440" marR="91440" marT="45720" marB="45720">
+                  <a:tcPr anchor="ctr">
                     <a:lnL w="12240">
                       <a:solidFill>
                         <a:srgbClr val="DDE6DF"/>
@@ -7814,11 +10754,10 @@
                 </a:tc>
                 <a:tc>
                   <a:txBody>
-                    <a:bodyPr anchor="ctr">
-                      <a:noAutofit/>
-                    </a:bodyPr>
+                    <a:bodyPr/>
+                    <a:lstStyle/>
                     <a:p>
-                      <a:pPr algn="r" defTabSz="914400">
+                      <a:pPr defTabSz="914400">
                         <a:lnSpc>
                           <a:spcPct val="100000"/>
                         </a:lnSpc>
@@ -7835,7 +10774,7 @@
                           <a:uFillTx/>
                           <a:latin typeface="Calibri"/>
                         </a:rPr>
-                        <a:t>73.3</a:t>
+                        <a:t>Local branch alone: not run separately</a:t>
                       </a:r>
                       <a:endParaRPr lang="en-ZA" sz="1600" b="0" u="none" strike="noStrike">
                         <a:solidFill>
@@ -7847,7 +10786,7 @@
                       </a:endParaRPr>
                     </a:p>
                   </a:txBody>
-                  <a:tcPr anchor="ctr" marL="91440" marR="91440" marT="45720" marB="45720">
+                  <a:tcPr anchor="ctr">
                     <a:lnL w="12240">
                       <a:solidFill>
                         <a:srgbClr val="DDE6DF"/>
@@ -7877,143 +10816,17 @@
                     </a:solidFill>
                   </a:tcPr>
                 </a:tc>
-                <a:tc>
-                  <a:txBody>
-                    <a:bodyPr anchor="ctr">
-                      <a:noAutofit/>
-                    </a:bodyPr>
-                    <a:p>
-                      <a:pPr algn="r" defTabSz="914400">
-                        <a:lnSpc>
-                          <a:spcPct val="100000"/>
-                        </a:lnSpc>
-                        <a:tabLst>
-                          <a:tab pos="0" algn="l"/>
-                        </a:tabLst>
-                      </a:pPr>
-                      <a:r>
-                        <a:rPr lang="en-US" sz="1600" b="0" u="none" strike="noStrike">
-                          <a:solidFill>
-                            <a:srgbClr val="14231C"/>
-                          </a:solidFill>
-                          <a:effectLst/>
-                          <a:uFillTx/>
-                          <a:latin typeface="Calibri"/>
-                        </a:rPr>
-                        <a:t>83.3</a:t>
-                      </a:r>
-                      <a:endParaRPr lang="en-ZA" sz="1600" b="0" u="none" strike="noStrike">
-                        <a:solidFill>
-                          <a:srgbClr val="000000"/>
-                        </a:solidFill>
-                        <a:effectLst/>
-                        <a:uFillTx/>
-                        <a:latin typeface="Arial"/>
-                      </a:endParaRPr>
-                    </a:p>
-                  </a:txBody>
-                  <a:tcPr anchor="ctr" marL="91440" marR="91440" marT="45720" marB="45720">
-                    <a:lnL w="12240">
-                      <a:solidFill>
-                        <a:srgbClr val="DDE6DF"/>
-                      </a:solidFill>
-                      <a:prstDash val="solid"/>
-                    </a:lnL>
-                    <a:lnR w="12240">
-                      <a:solidFill>
-                        <a:srgbClr val="DDE6DF"/>
-                      </a:solidFill>
-                      <a:prstDash val="solid"/>
-                    </a:lnR>
-                    <a:lnT w="12240">
-                      <a:solidFill>
-                        <a:srgbClr val="DDE6DF"/>
-                      </a:solidFill>
-                      <a:prstDash val="solid"/>
-                    </a:lnT>
-                    <a:lnB w="12240">
-                      <a:solidFill>
-                        <a:srgbClr val="DDE6DF"/>
-                      </a:solidFill>
-                      <a:prstDash val="solid"/>
-                    </a:lnB>
-                    <a:solidFill>
-                      <a:srgbClr val="FFFFFF"/>
-                    </a:solidFill>
-                  </a:tcPr>
-                </a:tc>
-                <a:tc>
-                  <a:txBody>
-                    <a:bodyPr anchor="ctr">
-                      <a:noAutofit/>
-                    </a:bodyPr>
-                    <a:p>
-                      <a:pPr algn="r" defTabSz="914400">
-                        <a:lnSpc>
-                          <a:spcPct val="100000"/>
-                        </a:lnSpc>
-                        <a:tabLst>
-                          <a:tab pos="0" algn="l"/>
-                        </a:tabLst>
-                      </a:pPr>
-                      <a:r>
-                        <a:rPr lang="en-US" sz="1600" b="0" u="none" strike="noStrike">
-                          <a:solidFill>
-                            <a:srgbClr val="14231C"/>
-                          </a:solidFill>
-                          <a:effectLst/>
-                          <a:uFillTx/>
-                          <a:latin typeface="Calibri"/>
-                        </a:rPr>
-                        <a:t>72.8</a:t>
-                      </a:r>
-                      <a:endParaRPr lang="en-ZA" sz="1600" b="0" u="none" strike="noStrike">
-                        <a:solidFill>
-                          <a:srgbClr val="000000"/>
-                        </a:solidFill>
-                        <a:effectLst/>
-                        <a:uFillTx/>
-                        <a:latin typeface="Arial"/>
-                      </a:endParaRPr>
-                    </a:p>
-                  </a:txBody>
-                  <a:tcPr anchor="ctr" marL="91440" marR="91440" marT="45720" marB="45720">
-                    <a:lnL w="12240">
-                      <a:solidFill>
-                        <a:srgbClr val="DDE6DF"/>
-                      </a:solidFill>
-                      <a:prstDash val="solid"/>
-                    </a:lnL>
-                    <a:lnR w="12240">
-                      <a:solidFill>
-                        <a:srgbClr val="DDE6DF"/>
-                      </a:solidFill>
-                      <a:prstDash val="solid"/>
-                    </a:lnR>
-                    <a:lnT w="12240">
-                      <a:solidFill>
-                        <a:srgbClr val="DDE6DF"/>
-                      </a:solidFill>
-                      <a:prstDash val="solid"/>
-                    </a:lnT>
-                    <a:lnB w="12240">
-                      <a:solidFill>
-                        <a:srgbClr val="DDE6DF"/>
-                      </a:solidFill>
-                      <a:prstDash val="solid"/>
-                    </a:lnB>
-                    <a:solidFill>
-                      <a:srgbClr val="FFFFFF"/>
-                    </a:solidFill>
-                  </a:tcPr>
-                </a:tc>
+                <a:extLst>
+                  <a:ext uri="{0D108BD9-81ED-4DB2-BD59-A6C34878D82A}">
+                    <a16:rowId xmlns:a16="http://schemas.microsoft.com/office/drawing/2014/main" val="10003"/>
+                  </a:ext>
+                </a:extLst>
               </a:tr>
               <a:tr h="566640">
                 <a:tc>
                   <a:txBody>
-                    <a:bodyPr anchor="ctr">
-                      <a:noAutofit/>
-                    </a:bodyPr>
+                    <a:bodyPr/>
+                    <a:lstStyle/>
                     <a:p>
                       <a:pPr defTabSz="914400">
                         <a:lnSpc>
@@ -8044,7 +10857,7 @@
                       </a:endParaRPr>
                     </a:p>
                   </a:txBody>
-                  <a:tcPr anchor="ctr" marL="91440" marR="91440" marT="45720" marB="45720">
+                  <a:tcPr anchor="ctr">
                     <a:lnL w="12240">
                       <a:solidFill>
                         <a:srgbClr val="DDE6DF"/>
@@ -8076,2578 +10889,8 @@
                 </a:tc>
                 <a:tc>
                   <a:txBody>
-                    <a:bodyPr anchor="ctr">
-                      <a:noAutofit/>
-                    </a:bodyPr>
-                    <a:p>
-                      <a:pPr algn="r" defTabSz="914400">
-                        <a:lnSpc>
-                          <a:spcPct val="100000"/>
-                        </a:lnSpc>
-                        <a:tabLst>
-                          <a:tab pos="0" algn="l"/>
-                        </a:tabLst>
-                      </a:pPr>
-                      <a:r>
-                        <a:rPr lang="en-US" sz="1600" b="0" u="none" strike="noStrike">
-                          <a:solidFill>
-                            <a:srgbClr val="14231C"/>
-                          </a:solidFill>
-                          <a:effectLst/>
-                          <a:uFillTx/>
-                          <a:latin typeface="Calibri"/>
-                        </a:rPr>
-                        <a:t>81.1</a:t>
-                      </a:r>
-                      <a:endParaRPr lang="en-ZA" sz="1600" b="0" u="none" strike="noStrike">
-                        <a:solidFill>
-                          <a:srgbClr val="000000"/>
-                        </a:solidFill>
-                        <a:effectLst/>
-                        <a:uFillTx/>
-                        <a:latin typeface="Arial"/>
-                      </a:endParaRPr>
-                    </a:p>
-                  </a:txBody>
-                  <a:tcPr anchor="ctr" marL="91440" marR="91440" marT="45720" marB="45720">
-                    <a:lnL w="12240">
-                      <a:solidFill>
-                        <a:srgbClr val="DDE6DF"/>
-                      </a:solidFill>
-                      <a:prstDash val="solid"/>
-                    </a:lnL>
-                    <a:lnR w="12240">
-                      <a:solidFill>
-                        <a:srgbClr val="DDE6DF"/>
-                      </a:solidFill>
-                      <a:prstDash val="solid"/>
-                    </a:lnR>
-                    <a:lnT w="12240">
-                      <a:solidFill>
-                        <a:srgbClr val="DDE6DF"/>
-                      </a:solidFill>
-                      <a:prstDash val="solid"/>
-                    </a:lnT>
-                    <a:lnB w="12240">
-                      <a:solidFill>
-                        <a:srgbClr val="DDE6DF"/>
-                      </a:solidFill>
-                      <a:prstDash val="solid"/>
-                    </a:lnB>
-                    <a:solidFill>
-                      <a:srgbClr val="F2F5F1"/>
-                    </a:solidFill>
-                  </a:tcPr>
-                </a:tc>
-                <a:tc>
-                  <a:txBody>
-                    <a:bodyPr anchor="ctr">
-                      <a:noAutofit/>
-                    </a:bodyPr>
-                    <a:p>
-                      <a:pPr algn="r" defTabSz="914400">
-                        <a:lnSpc>
-                          <a:spcPct val="100000"/>
-                        </a:lnSpc>
-                        <a:tabLst>
-                          <a:tab pos="0" algn="l"/>
-                        </a:tabLst>
-                      </a:pPr>
-                      <a:r>
-                        <a:rPr lang="en-US" sz="1600" b="0" u="none" strike="noStrike">
-                          <a:solidFill>
-                            <a:srgbClr val="14231C"/>
-                          </a:solidFill>
-                          <a:effectLst/>
-                          <a:uFillTx/>
-                          <a:latin typeface="Calibri"/>
-                        </a:rPr>
-                        <a:t>73.3</a:t>
-                      </a:r>
-                      <a:endParaRPr lang="en-ZA" sz="1600" b="0" u="none" strike="noStrike">
-                        <a:solidFill>
-                          <a:srgbClr val="000000"/>
-                        </a:solidFill>
-                        <a:effectLst/>
-                        <a:uFillTx/>
-                        <a:latin typeface="Arial"/>
-                      </a:endParaRPr>
-                    </a:p>
-                  </a:txBody>
-                  <a:tcPr anchor="ctr" marL="91440" marR="91440" marT="45720" marB="45720">
-                    <a:lnL w="12240">
-                      <a:solidFill>
-                        <a:srgbClr val="DDE6DF"/>
-                      </a:solidFill>
-                      <a:prstDash val="solid"/>
-                    </a:lnL>
-                    <a:lnR w="12240">
-                      <a:solidFill>
-                        <a:srgbClr val="DDE6DF"/>
-                      </a:solidFill>
-                      <a:prstDash val="solid"/>
-                    </a:lnR>
-                    <a:lnT w="12240">
-                      <a:solidFill>
-                        <a:srgbClr val="DDE6DF"/>
-                      </a:solidFill>
-                      <a:prstDash val="solid"/>
-                    </a:lnT>
-                    <a:lnB w="12240">
-                      <a:solidFill>
-                        <a:srgbClr val="DDE6DF"/>
-                      </a:solidFill>
-                      <a:prstDash val="solid"/>
-                    </a:lnB>
-                    <a:solidFill>
-                      <a:srgbClr val="F2F5F1"/>
-                    </a:solidFill>
-                  </a:tcPr>
-                </a:tc>
-                <a:tc>
-                  <a:txBody>
-                    <a:bodyPr anchor="ctr">
-                      <a:noAutofit/>
-                    </a:bodyPr>
-                    <a:p>
-                      <a:pPr algn="r" defTabSz="914400">
-                        <a:lnSpc>
-                          <a:spcPct val="100000"/>
-                        </a:lnSpc>
-                        <a:tabLst>
-                          <a:tab pos="0" algn="l"/>
-                        </a:tabLst>
-                      </a:pPr>
-                      <a:r>
-                        <a:rPr lang="en-US" sz="1600" b="0" u="none" strike="noStrike">
-                          <a:solidFill>
-                            <a:srgbClr val="14231C"/>
-                          </a:solidFill>
-                          <a:effectLst/>
-                          <a:uFillTx/>
-                          <a:latin typeface="Calibri"/>
-                        </a:rPr>
-                        <a:t>83.5</a:t>
-                      </a:r>
-                      <a:endParaRPr lang="en-ZA" sz="1600" b="0" u="none" strike="noStrike">
-                        <a:solidFill>
-                          <a:srgbClr val="000000"/>
-                        </a:solidFill>
-                        <a:effectLst/>
-                        <a:uFillTx/>
-                        <a:latin typeface="Arial"/>
-                      </a:endParaRPr>
-                    </a:p>
-                  </a:txBody>
-                  <a:tcPr anchor="ctr" marL="91440" marR="91440" marT="45720" marB="45720">
-                    <a:lnL w="12240">
-                      <a:solidFill>
-                        <a:srgbClr val="DDE6DF"/>
-                      </a:solidFill>
-                      <a:prstDash val="solid"/>
-                    </a:lnL>
-                    <a:lnR w="12240">
-                      <a:solidFill>
-                        <a:srgbClr val="DDE6DF"/>
-                      </a:solidFill>
-                      <a:prstDash val="solid"/>
-                    </a:lnR>
-                    <a:lnT w="12240">
-                      <a:solidFill>
-                        <a:srgbClr val="DDE6DF"/>
-                      </a:solidFill>
-                      <a:prstDash val="solid"/>
-                    </a:lnT>
-                    <a:lnB w="12240">
-                      <a:solidFill>
-                        <a:srgbClr val="DDE6DF"/>
-                      </a:solidFill>
-                      <a:prstDash val="solid"/>
-                    </a:lnB>
-                    <a:solidFill>
-                      <a:srgbClr val="F2F5F1"/>
-                    </a:solidFill>
-                  </a:tcPr>
-                </a:tc>
-                <a:tc>
-                  <a:txBody>
-                    <a:bodyPr anchor="ctr">
-                      <a:noAutofit/>
-                    </a:bodyPr>
-                    <a:p>
-                      <a:pPr algn="r" defTabSz="914400">
-                        <a:lnSpc>
-                          <a:spcPct val="100000"/>
-                        </a:lnSpc>
-                        <a:tabLst>
-                          <a:tab pos="0" algn="l"/>
-                        </a:tabLst>
-                      </a:pPr>
-                      <a:r>
-                        <a:rPr lang="en-US" sz="1600" b="0" u="none" strike="noStrike">
-                          <a:solidFill>
-                            <a:srgbClr val="14231C"/>
-                          </a:solidFill>
-                          <a:effectLst/>
-                          <a:uFillTx/>
-                          <a:latin typeface="Calibri"/>
-                        </a:rPr>
-                        <a:t>72.9</a:t>
-                      </a:r>
-                      <a:endParaRPr lang="en-ZA" sz="1600" b="0" u="none" strike="noStrike">
-                        <a:solidFill>
-                          <a:srgbClr val="000000"/>
-                        </a:solidFill>
-                        <a:effectLst/>
-                        <a:uFillTx/>
-                        <a:latin typeface="Arial"/>
-                      </a:endParaRPr>
-                    </a:p>
-                  </a:txBody>
-                  <a:tcPr anchor="ctr" marL="91440" marR="91440" marT="45720" marB="45720">
-                    <a:lnL w="12240">
-                      <a:solidFill>
-                        <a:srgbClr val="DDE6DF"/>
-                      </a:solidFill>
-                      <a:prstDash val="solid"/>
-                    </a:lnL>
-                    <a:lnR w="12240">
-                      <a:solidFill>
-                        <a:srgbClr val="DDE6DF"/>
-                      </a:solidFill>
-                      <a:prstDash val="solid"/>
-                    </a:lnR>
-                    <a:lnT w="12240">
-                      <a:solidFill>
-                        <a:srgbClr val="DDE6DF"/>
-                      </a:solidFill>
-                      <a:prstDash val="solid"/>
-                    </a:lnT>
-                    <a:lnB w="12240">
-                      <a:solidFill>
-                        <a:srgbClr val="DDE6DF"/>
-                      </a:solidFill>
-                      <a:prstDash val="solid"/>
-                    </a:lnB>
-                    <a:solidFill>
-                      <a:srgbClr val="F2F5F1"/>
-                    </a:solidFill>
-                  </a:tcPr>
-                </a:tc>
-              </a:tr>
-              <a:tr h="566640">
-                <a:tc>
-                  <a:txBody>
-                    <a:bodyPr anchor="ctr">
-                      <a:noAutofit/>
-                    </a:bodyPr>
-                    <a:p>
-                      <a:pPr defTabSz="914400">
-                        <a:lnSpc>
-                          <a:spcPct val="100000"/>
-                        </a:lnSpc>
-                        <a:tabLst>
-                          <a:tab pos="0" algn="l"/>
-                        </a:tabLst>
-                      </a:pPr>
-                      <a:r>
-                        <a:rPr lang="en-US" sz="1600" b="1" u="none" strike="noStrike">
-                          <a:solidFill>
-                            <a:srgbClr val="14231C"/>
-                          </a:solidFill>
-                          <a:effectLst/>
-                          <a:uFillTx/>
-                          <a:latin typeface="Calibri"/>
-                        </a:rPr>
-                        <a:t>Global + EVA02 *</a:t>
-                      </a:r>
-                      <a:endParaRPr lang="en-ZA" sz="1600" b="0" u="none" strike="noStrike">
-                        <a:solidFill>
-                          <a:srgbClr val="000000"/>
-                        </a:solidFill>
-                        <a:effectLst/>
-                        <a:uFillTx/>
-                        <a:latin typeface="Arial"/>
-                      </a:endParaRPr>
-                    </a:p>
-                  </a:txBody>
-                  <a:tcPr anchor="ctr" marL="91440" marR="91440" marT="45720" marB="45720">
-                    <a:lnL w="12240">
-                      <a:solidFill>
-                        <a:srgbClr val="DDE6DF"/>
-                      </a:solidFill>
-                      <a:prstDash val="solid"/>
-                    </a:lnL>
-                    <a:lnR w="12240">
-                      <a:solidFill>
-                        <a:srgbClr val="DDE6DF"/>
-                      </a:solidFill>
-                      <a:prstDash val="solid"/>
-                    </a:lnR>
-                    <a:lnT w="12240">
-                      <a:solidFill>
-                        <a:srgbClr val="DDE6DF"/>
-                      </a:solidFill>
-                      <a:prstDash val="solid"/>
-                    </a:lnT>
-                    <a:lnB w="12240">
-                      <a:solidFill>
-                        <a:srgbClr val="DDE6DF"/>
-                      </a:solidFill>
-                      <a:prstDash val="solid"/>
-                    </a:lnB>
-                    <a:solidFill>
-                      <a:srgbClr val="FBF1DC"/>
-                    </a:solidFill>
-                  </a:tcPr>
-                </a:tc>
-                <a:tc>
-                  <a:txBody>
-                    <a:bodyPr anchor="ctr">
-                      <a:noAutofit/>
-                    </a:bodyPr>
-                    <a:p>
-                      <a:pPr algn="r" defTabSz="914400">
-                        <a:lnSpc>
-                          <a:spcPct val="100000"/>
-                        </a:lnSpc>
-                        <a:tabLst>
-                          <a:tab pos="0" algn="l"/>
-                        </a:tabLst>
-                      </a:pPr>
-                      <a:r>
-                        <a:rPr lang="en-US" sz="1600" b="1" u="none" strike="noStrike">
-                          <a:solidFill>
-                            <a:srgbClr val="14231C"/>
-                          </a:solidFill>
-                          <a:effectLst/>
-                          <a:uFillTx/>
-                          <a:latin typeface="Calibri"/>
-                        </a:rPr>
-                        <a:t>81.8</a:t>
-                      </a:r>
-                      <a:endParaRPr lang="en-ZA" sz="1600" b="0" u="none" strike="noStrike">
-                        <a:solidFill>
-                          <a:srgbClr val="000000"/>
-                        </a:solidFill>
-                        <a:effectLst/>
-                        <a:uFillTx/>
-                        <a:latin typeface="Arial"/>
-                      </a:endParaRPr>
-                    </a:p>
-                  </a:txBody>
-                  <a:tcPr anchor="ctr" marL="91440" marR="91440" marT="45720" marB="45720">
-                    <a:lnL w="12240">
-                      <a:solidFill>
-                        <a:srgbClr val="DDE6DF"/>
-                      </a:solidFill>
-                      <a:prstDash val="solid"/>
-                    </a:lnL>
-                    <a:lnR w="12240">
-                      <a:solidFill>
-                        <a:srgbClr val="DDE6DF"/>
-                      </a:solidFill>
-                      <a:prstDash val="solid"/>
-                    </a:lnR>
-                    <a:lnT w="12240">
-                      <a:solidFill>
-                        <a:srgbClr val="DDE6DF"/>
-                      </a:solidFill>
-                      <a:prstDash val="solid"/>
-                    </a:lnT>
-                    <a:lnB w="12240">
-                      <a:solidFill>
-                        <a:srgbClr val="DDE6DF"/>
-                      </a:solidFill>
-                      <a:prstDash val="solid"/>
-                    </a:lnB>
-                    <a:solidFill>
-                      <a:srgbClr val="FBF1DC"/>
-                    </a:solidFill>
-                  </a:tcPr>
-                </a:tc>
-                <a:tc>
-                  <a:txBody>
-                    <a:bodyPr anchor="ctr">
-                      <a:noAutofit/>
-                    </a:bodyPr>
-                    <a:p>
-                      <a:pPr algn="r" defTabSz="914400">
-                        <a:lnSpc>
-                          <a:spcPct val="100000"/>
-                        </a:lnSpc>
-                        <a:tabLst>
-                          <a:tab pos="0" algn="l"/>
-                        </a:tabLst>
-                      </a:pPr>
-                      <a:r>
-                        <a:rPr lang="en-US" sz="1600" b="1" u="none" strike="noStrike">
-                          <a:solidFill>
-                            <a:srgbClr val="14231C"/>
-                          </a:solidFill>
-                          <a:effectLst/>
-                          <a:uFillTx/>
-                          <a:latin typeface="Calibri"/>
-                        </a:rPr>
-                        <a:t>79.0</a:t>
-                      </a:r>
-                      <a:endParaRPr lang="en-ZA" sz="1600" b="0" u="none" strike="noStrike">
-                        <a:solidFill>
-                          <a:srgbClr val="000000"/>
-                        </a:solidFill>
-                        <a:effectLst/>
-                        <a:uFillTx/>
-                        <a:latin typeface="Arial"/>
-                      </a:endParaRPr>
-                    </a:p>
-                  </a:txBody>
-                  <a:tcPr anchor="ctr" marL="91440" marR="91440" marT="45720" marB="45720">
-                    <a:lnL w="12240">
-                      <a:solidFill>
-                        <a:srgbClr val="DDE6DF"/>
-                      </a:solidFill>
-                      <a:prstDash val="solid"/>
-                    </a:lnL>
-                    <a:lnR w="12240">
-                      <a:solidFill>
-                        <a:srgbClr val="DDE6DF"/>
-                      </a:solidFill>
-                      <a:prstDash val="solid"/>
-                    </a:lnR>
-                    <a:lnT w="12240">
-                      <a:solidFill>
-                        <a:srgbClr val="DDE6DF"/>
-                      </a:solidFill>
-                      <a:prstDash val="solid"/>
-                    </a:lnT>
-                    <a:lnB w="12240">
-                      <a:solidFill>
-                        <a:srgbClr val="DDE6DF"/>
-                      </a:solidFill>
-                      <a:prstDash val="solid"/>
-                    </a:lnB>
-                    <a:solidFill>
-                      <a:srgbClr val="FBF1DC"/>
-                    </a:solidFill>
-                  </a:tcPr>
-                </a:tc>
-                <a:tc>
-                  <a:txBody>
-                    <a:bodyPr anchor="ctr">
-                      <a:noAutofit/>
-                    </a:bodyPr>
-                    <a:p>
-                      <a:pPr algn="r" defTabSz="914400">
-                        <a:lnSpc>
-                          <a:spcPct val="100000"/>
-                        </a:lnSpc>
-                        <a:tabLst>
-                          <a:tab pos="0" algn="l"/>
-                        </a:tabLst>
-                      </a:pPr>
-                      <a:r>
-                        <a:rPr lang="en-US" sz="1600" b="1" u="none" strike="noStrike">
-                          <a:solidFill>
-                            <a:srgbClr val="14231C"/>
-                          </a:solidFill>
-                          <a:effectLst/>
-                          <a:uFillTx/>
-                          <a:latin typeface="Calibri"/>
-                        </a:rPr>
-                        <a:t>91.1</a:t>
-                      </a:r>
-                      <a:endParaRPr lang="en-ZA" sz="1600" b="0" u="none" strike="noStrike">
-                        <a:solidFill>
-                          <a:srgbClr val="000000"/>
-                        </a:solidFill>
-                        <a:effectLst/>
-                        <a:uFillTx/>
-                        <a:latin typeface="Arial"/>
-                      </a:endParaRPr>
-                    </a:p>
-                  </a:txBody>
-                  <a:tcPr anchor="ctr" marL="91440" marR="91440" marT="45720" marB="45720">
-                    <a:lnL w="12240">
-                      <a:solidFill>
-                        <a:srgbClr val="DDE6DF"/>
-                      </a:solidFill>
-                      <a:prstDash val="solid"/>
-                    </a:lnL>
-                    <a:lnR w="12240">
-                      <a:solidFill>
-                        <a:srgbClr val="DDE6DF"/>
-                      </a:solidFill>
-                      <a:prstDash val="solid"/>
-                    </a:lnR>
-                    <a:lnT w="12240">
-                      <a:solidFill>
-                        <a:srgbClr val="DDE6DF"/>
-                      </a:solidFill>
-                      <a:prstDash val="solid"/>
-                    </a:lnT>
-                    <a:lnB w="12240">
-                      <a:solidFill>
-                        <a:srgbClr val="DDE6DF"/>
-                      </a:solidFill>
-                      <a:prstDash val="solid"/>
-                    </a:lnB>
-                    <a:solidFill>
-                      <a:srgbClr val="FBF1DC"/>
-                    </a:solidFill>
-                  </a:tcPr>
-                </a:tc>
-                <a:tc>
-                  <a:txBody>
-                    <a:bodyPr anchor="ctr">
-                      <a:noAutofit/>
-                    </a:bodyPr>
-                    <a:p>
-                      <a:pPr algn="r" defTabSz="914400">
-                        <a:lnSpc>
-                          <a:spcPct val="100000"/>
-                        </a:lnSpc>
-                        <a:tabLst>
-                          <a:tab pos="0" algn="l"/>
-                        </a:tabLst>
-                      </a:pPr>
-                      <a:r>
-                        <a:rPr lang="en-US" sz="1600" b="1" u="none" strike="noStrike">
-                          <a:solidFill>
-                            <a:srgbClr val="14231C"/>
-                          </a:solidFill>
-                          <a:effectLst/>
-                          <a:uFillTx/>
-                          <a:latin typeface="Calibri"/>
-                        </a:rPr>
-                        <a:t>75.8</a:t>
-                      </a:r>
-                      <a:endParaRPr lang="en-ZA" sz="1600" b="0" u="none" strike="noStrike">
-                        <a:solidFill>
-                          <a:srgbClr val="000000"/>
-                        </a:solidFill>
-                        <a:effectLst/>
-                        <a:uFillTx/>
-                        <a:latin typeface="Arial"/>
-                      </a:endParaRPr>
-                    </a:p>
-                  </a:txBody>
-                  <a:tcPr anchor="ctr" marL="91440" marR="91440" marT="45720" marB="45720">
-                    <a:lnL w="12240">
-                      <a:solidFill>
-                        <a:srgbClr val="DDE6DF"/>
-                      </a:solidFill>
-                      <a:prstDash val="solid"/>
-                    </a:lnL>
-                    <a:lnR w="12240">
-                      <a:solidFill>
-                        <a:srgbClr val="DDE6DF"/>
-                      </a:solidFill>
-                      <a:prstDash val="solid"/>
-                    </a:lnR>
-                    <a:lnT w="12240">
-                      <a:solidFill>
-                        <a:srgbClr val="DDE6DF"/>
-                      </a:solidFill>
-                      <a:prstDash val="solid"/>
-                    </a:lnT>
-                    <a:lnB w="12240">
-                      <a:solidFill>
-                        <a:srgbClr val="DDE6DF"/>
-                      </a:solidFill>
-                      <a:prstDash val="solid"/>
-                    </a:lnB>
-                    <a:solidFill>
-                      <a:srgbClr val="FBF1DC"/>
-                    </a:solidFill>
-                  </a:tcPr>
-                </a:tc>
-              </a:tr>
-              <a:tr h="566640">
-                <a:tc>
-                  <a:txBody>
-                    <a:bodyPr anchor="ctr">
-                      <a:noAutofit/>
-                    </a:bodyPr>
-                    <a:p>
-                      <a:pPr defTabSz="914400">
-                        <a:lnSpc>
-                          <a:spcPct val="100000"/>
-                        </a:lnSpc>
-                        <a:tabLst>
-                          <a:tab pos="0" algn="l"/>
-                        </a:tabLst>
-                      </a:pPr>
-                      <a:r>
-                        <a:rPr lang="en-US" sz="1600" b="1" u="none" strike="noStrike">
-                          <a:solidFill>
-                            <a:srgbClr val="14231C"/>
-                          </a:solidFill>
-                          <a:effectLst/>
-                          <a:uFillTx/>
-                          <a:latin typeface="Calibri"/>
-                        </a:rPr>
-                        <a:t>All three, fused *</a:t>
-                      </a:r>
-                      <a:endParaRPr lang="en-ZA" sz="1600" b="0" u="none" strike="noStrike">
-                        <a:solidFill>
-                          <a:srgbClr val="000000"/>
-                        </a:solidFill>
-                        <a:effectLst/>
-                        <a:uFillTx/>
-                        <a:latin typeface="Arial"/>
-                      </a:endParaRPr>
-                    </a:p>
-                  </a:txBody>
-                  <a:tcPr anchor="ctr" marL="91440" marR="91440" marT="45720" marB="45720">
-                    <a:lnL w="12240">
-                      <a:solidFill>
-                        <a:srgbClr val="DDE6DF"/>
-                      </a:solidFill>
-                      <a:prstDash val="solid"/>
-                    </a:lnL>
-                    <a:lnR w="12240">
-                      <a:solidFill>
-                        <a:srgbClr val="DDE6DF"/>
-                      </a:solidFill>
-                      <a:prstDash val="solid"/>
-                    </a:lnR>
-                    <a:lnT w="12240">
-                      <a:solidFill>
-                        <a:srgbClr val="DDE6DF"/>
-                      </a:solidFill>
-                      <a:prstDash val="solid"/>
-                    </a:lnT>
-                    <a:lnB w="12240">
-                      <a:solidFill>
-                        <a:srgbClr val="DDE6DF"/>
-                      </a:solidFill>
-                      <a:prstDash val="solid"/>
-                    </a:lnB>
-                    <a:solidFill>
-                      <a:srgbClr val="FBF1DC"/>
-                    </a:solidFill>
-                  </a:tcPr>
-                </a:tc>
-                <a:tc>
-                  <a:txBody>
-                    <a:bodyPr anchor="ctr">
-                      <a:noAutofit/>
-                    </a:bodyPr>
-                    <a:p>
-                      <a:pPr algn="r" defTabSz="914400">
-                        <a:lnSpc>
-                          <a:spcPct val="100000"/>
-                        </a:lnSpc>
-                        <a:tabLst>
-                          <a:tab pos="0" algn="l"/>
-                        </a:tabLst>
-                      </a:pPr>
-                      <a:r>
-                        <a:rPr lang="en-US" sz="1600" b="1" u="none" strike="noStrike">
-                          <a:solidFill>
-                            <a:srgbClr val="14231C"/>
-                          </a:solidFill>
-                          <a:effectLst/>
-                          <a:uFillTx/>
-                          <a:latin typeface="Calibri"/>
-                        </a:rPr>
-                        <a:t>81.7</a:t>
-                      </a:r>
-                      <a:endParaRPr lang="en-ZA" sz="1600" b="0" u="none" strike="noStrike">
-                        <a:solidFill>
-                          <a:srgbClr val="000000"/>
-                        </a:solidFill>
-                        <a:effectLst/>
-                        <a:uFillTx/>
-                        <a:latin typeface="Arial"/>
-                      </a:endParaRPr>
-                    </a:p>
-                  </a:txBody>
-                  <a:tcPr anchor="ctr" marL="91440" marR="91440" marT="45720" marB="45720">
-                    <a:lnL w="12240">
-                      <a:solidFill>
-                        <a:srgbClr val="DDE6DF"/>
-                      </a:solidFill>
-                      <a:prstDash val="solid"/>
-                    </a:lnL>
-                    <a:lnR w="12240">
-                      <a:solidFill>
-                        <a:srgbClr val="DDE6DF"/>
-                      </a:solidFill>
-                      <a:prstDash val="solid"/>
-                    </a:lnR>
-                    <a:lnT w="12240">
-                      <a:solidFill>
-                        <a:srgbClr val="DDE6DF"/>
-                      </a:solidFill>
-                      <a:prstDash val="solid"/>
-                    </a:lnT>
-                    <a:lnB w="12240">
-                      <a:solidFill>
-                        <a:srgbClr val="DDE6DF"/>
-                      </a:solidFill>
-                      <a:prstDash val="solid"/>
-                    </a:lnB>
-                    <a:solidFill>
-                      <a:srgbClr val="FBF1DC"/>
-                    </a:solidFill>
-                  </a:tcPr>
-                </a:tc>
-                <a:tc>
-                  <a:txBody>
-                    <a:bodyPr anchor="ctr">
-                      <a:noAutofit/>
-                    </a:bodyPr>
-                    <a:p>
-                      <a:pPr algn="r" defTabSz="914400">
-                        <a:lnSpc>
-                          <a:spcPct val="100000"/>
-                        </a:lnSpc>
-                        <a:tabLst>
-                          <a:tab pos="0" algn="l"/>
-                        </a:tabLst>
-                      </a:pPr>
-                      <a:r>
-                        <a:rPr lang="en-US" sz="1600" b="1" u="none" strike="noStrike">
-                          <a:solidFill>
-                            <a:srgbClr val="14231C"/>
-                          </a:solidFill>
-                          <a:effectLst/>
-                          <a:uFillTx/>
-                          <a:latin typeface="Calibri"/>
-                        </a:rPr>
-                        <a:t>81.3</a:t>
-                      </a:r>
-                      <a:endParaRPr lang="en-ZA" sz="1600" b="0" u="none" strike="noStrike">
-                        <a:solidFill>
-                          <a:srgbClr val="000000"/>
-                        </a:solidFill>
-                        <a:effectLst/>
-                        <a:uFillTx/>
-                        <a:latin typeface="Arial"/>
-                      </a:endParaRPr>
-                    </a:p>
-                  </a:txBody>
-                  <a:tcPr anchor="ctr" marL="91440" marR="91440" marT="45720" marB="45720">
-                    <a:lnL w="12240">
-                      <a:solidFill>
-                        <a:srgbClr val="DDE6DF"/>
-                      </a:solidFill>
-                      <a:prstDash val="solid"/>
-                    </a:lnL>
-                    <a:lnR w="12240">
-                      <a:solidFill>
-                        <a:srgbClr val="DDE6DF"/>
-                      </a:solidFill>
-                      <a:prstDash val="solid"/>
-                    </a:lnR>
-                    <a:lnT w="12240">
-                      <a:solidFill>
-                        <a:srgbClr val="DDE6DF"/>
-                      </a:solidFill>
-                      <a:prstDash val="solid"/>
-                    </a:lnT>
-                    <a:lnB w="12240">
-                      <a:solidFill>
-                        <a:srgbClr val="DDE6DF"/>
-                      </a:solidFill>
-                      <a:prstDash val="solid"/>
-                    </a:lnB>
-                    <a:solidFill>
-                      <a:srgbClr val="FBF1DC"/>
-                    </a:solidFill>
-                  </a:tcPr>
-                </a:tc>
-                <a:tc>
-                  <a:txBody>
-                    <a:bodyPr anchor="ctr">
-                      <a:noAutofit/>
-                    </a:bodyPr>
-                    <a:p>
-                      <a:pPr algn="r" defTabSz="914400">
-                        <a:lnSpc>
-                          <a:spcPct val="100000"/>
-                        </a:lnSpc>
-                        <a:tabLst>
-                          <a:tab pos="0" algn="l"/>
-                        </a:tabLst>
-                      </a:pPr>
-                      <a:r>
-                        <a:rPr lang="en-US" sz="1600" b="1" u="none" strike="noStrike">
-                          <a:solidFill>
-                            <a:srgbClr val="14231C"/>
-                          </a:solidFill>
-                          <a:effectLst/>
-                          <a:uFillTx/>
-                          <a:latin typeface="Calibri"/>
-                        </a:rPr>
-                        <a:t>94.3</a:t>
-                      </a:r>
-                      <a:endParaRPr lang="en-ZA" sz="1600" b="0" u="none" strike="noStrike">
-                        <a:solidFill>
-                          <a:srgbClr val="000000"/>
-                        </a:solidFill>
-                        <a:effectLst/>
-                        <a:uFillTx/>
-                        <a:latin typeface="Arial"/>
-                      </a:endParaRPr>
-                    </a:p>
-                  </a:txBody>
-                  <a:tcPr anchor="ctr" marL="91440" marR="91440" marT="45720" marB="45720">
-                    <a:lnL w="12240">
-                      <a:solidFill>
-                        <a:srgbClr val="DDE6DF"/>
-                      </a:solidFill>
-                      <a:prstDash val="solid"/>
-                    </a:lnL>
-                    <a:lnR w="12240">
-                      <a:solidFill>
-                        <a:srgbClr val="DDE6DF"/>
-                      </a:solidFill>
-                      <a:prstDash val="solid"/>
-                    </a:lnR>
-                    <a:lnT w="12240">
-                      <a:solidFill>
-                        <a:srgbClr val="DDE6DF"/>
-                      </a:solidFill>
-                      <a:prstDash val="solid"/>
-                    </a:lnT>
-                    <a:lnB w="12240">
-                      <a:solidFill>
-                        <a:srgbClr val="DDE6DF"/>
-                      </a:solidFill>
-                      <a:prstDash val="solid"/>
-                    </a:lnB>
-                    <a:solidFill>
-                      <a:srgbClr val="FBF1DC"/>
-                    </a:solidFill>
-                  </a:tcPr>
-                </a:tc>
-                <a:tc>
-                  <a:txBody>
-                    <a:bodyPr anchor="ctr">
-                      <a:noAutofit/>
-                    </a:bodyPr>
-                    <a:p>
-                      <a:pPr algn="r" defTabSz="914400">
-                        <a:lnSpc>
-                          <a:spcPct val="100000"/>
-                        </a:lnSpc>
-                        <a:tabLst>
-                          <a:tab pos="0" algn="l"/>
-                        </a:tabLst>
-                      </a:pPr>
-                      <a:r>
-                        <a:rPr lang="en-US" sz="1600" b="1" u="none" strike="noStrike">
-                          <a:solidFill>
-                            <a:srgbClr val="14231C"/>
-                          </a:solidFill>
-                          <a:effectLst/>
-                          <a:uFillTx/>
-                          <a:latin typeface="Calibri"/>
-                        </a:rPr>
-                        <a:t>78.6</a:t>
-                      </a:r>
-                      <a:endParaRPr lang="en-ZA" sz="1600" b="0" u="none" strike="noStrike">
-                        <a:solidFill>
-                          <a:srgbClr val="000000"/>
-                        </a:solidFill>
-                        <a:effectLst/>
-                        <a:uFillTx/>
-                        <a:latin typeface="Arial"/>
-                      </a:endParaRPr>
-                    </a:p>
-                  </a:txBody>
-                  <a:tcPr anchor="ctr" marL="91440" marR="91440" marT="45720" marB="45720">
-                    <a:lnL w="12240">
-                      <a:solidFill>
-                        <a:srgbClr val="DDE6DF"/>
-                      </a:solidFill>
-                      <a:prstDash val="solid"/>
-                    </a:lnL>
-                    <a:lnR w="12240">
-                      <a:solidFill>
-                        <a:srgbClr val="DDE6DF"/>
-                      </a:solidFill>
-                      <a:prstDash val="solid"/>
-                    </a:lnR>
-                    <a:lnT w="12240">
-                      <a:solidFill>
-                        <a:srgbClr val="DDE6DF"/>
-                      </a:solidFill>
-                      <a:prstDash val="solid"/>
-                    </a:lnT>
-                    <a:lnB w="12240">
-                      <a:solidFill>
-                        <a:srgbClr val="DDE6DF"/>
-                      </a:solidFill>
-                      <a:prstDash val="solid"/>
-                    </a:lnB>
-                    <a:solidFill>
-                      <a:srgbClr val="FBF1DC"/>
-                    </a:solidFill>
-                  </a:tcPr>
-                </a:tc>
-              </a:tr>
-            </a:tbl>
-          </a:graphicData>
-        </a:graphic>
-      </p:graphicFrame>
-      <p:sp>
-        <p:nvSpPr>
-          <p:cNvPr id="93" name="Text 3"/>
-          <p:cNvSpPr/>
-          <p:nvPr/>
-        </p:nvSpPr>
-        <p:spPr>
-          <a:xfrm>
-            <a:off x="548640" y="5559840"/>
-            <a:ext cx="6948720" cy="730800"/>
-          </a:xfrm>
-          <a:prstGeom prst="rect">
-            <a:avLst/>
-          </a:prstGeom>
-          <a:noFill/>
-          <a:ln w="0">
-            <a:noFill/>
-          </a:ln>
-        </p:spPr>
-        <p:style>
-          <a:lnRef idx="0"/>
-          <a:fillRef idx="0"/>
-          <a:effectRef idx="0"/>
-          <a:fontRef idx="minor"/>
-        </p:style>
-        <p:txBody>
-          <a:bodyPr lIns="0" tIns="0" rIns="0" bIns="0" anchor="t">
-            <a:noAutofit/>
-          </a:bodyPr>
-          <a:p>
-            <a:pPr marL="216000" indent="-216000" defTabSz="914400">
-              <a:lnSpc>
-                <a:spcPct val="100000"/>
-              </a:lnSpc>
-              <a:buClr>
-                <a:srgbClr val="3B4A41"/>
-              </a:buClr>
-              <a:buSzPct val="45000"/>
-              <a:buFont typeface="Wingdings" charset="2"/>
-              <a:buChar char=""/>
-              <a:tabLst>
-                <a:tab pos="0" algn="l"/>
-              </a:tabLst>
-            </a:pPr>
-            <a:r>
-              <a:rPr lang="en-US" sz="1600" b="1" u="none" strike="noStrike">
-                <a:solidFill>
-                  <a:srgbClr val="3B4A41"/>
-                </a:solidFill>
-                <a:effectLst/>
-                <a:uFillTx/>
-                <a:latin typeface="Calibri"/>
-              </a:rPr>
-              <a:t>Metrics:</a:t>
-            </a:r>
-            <a:endParaRPr lang="en-ZA" sz="1600" b="0" u="none" strike="noStrike">
-              <a:solidFill>
-                <a:srgbClr val="000000"/>
-              </a:solidFill>
-              <a:effectLst/>
-              <a:uFillTx/>
-              <a:latin typeface="Arial"/>
-            </a:endParaRPr>
-          </a:p>
-          <a:p>
-            <a:pPr marL="216000" indent="-216000" defTabSz="914400">
-              <a:lnSpc>
-                <a:spcPct val="100000"/>
-              </a:lnSpc>
-              <a:buClr>
-                <a:srgbClr val="3B4A41"/>
-              </a:buClr>
-              <a:buSzPct val="45000"/>
-              <a:buFont typeface="Wingdings" charset="2"/>
-              <a:buChar char=""/>
-              <a:tabLst>
-                <a:tab pos="0" algn="l"/>
-              </a:tabLst>
-            </a:pPr>
-            <a:r>
-              <a:rPr lang="en-US" sz="1300" b="1" u="none" strike="noStrike">
-                <a:solidFill>
-                  <a:srgbClr val="3B4A41"/>
-                </a:solidFill>
-                <a:effectLst/>
-                <a:uFillTx/>
-                <a:latin typeface="Calibri"/>
-              </a:rPr>
-              <a:t>BAKS</a:t>
-            </a:r>
-            <a:r>
-              <a:rPr lang="en-US" sz="1300" b="0" u="none" strike="noStrike">
-                <a:solidFill>
-                  <a:srgbClr val="3B4A41"/>
-                </a:solidFill>
-                <a:effectLst/>
-                <a:uFillTx/>
-                <a:latin typeface="Calibri"/>
-              </a:rPr>
-              <a:t>: balanced accuracy on known animals. </a:t>
-            </a:r>
-            <a:endParaRPr lang="en-ZA" sz="1300" b="0" u="none" strike="noStrike">
-              <a:solidFill>
-                <a:srgbClr val="000000"/>
-              </a:solidFill>
-              <a:effectLst/>
-              <a:uFillTx/>
-              <a:latin typeface="Arial"/>
-            </a:endParaRPr>
-          </a:p>
-          <a:p>
-            <a:pPr marL="216000" indent="-216000" defTabSz="914400">
-              <a:lnSpc>
-                <a:spcPct val="100000"/>
-              </a:lnSpc>
-              <a:buClr>
-                <a:srgbClr val="3B4A41"/>
-              </a:buClr>
-              <a:buSzPct val="45000"/>
-              <a:buFont typeface="Wingdings" charset="2"/>
-              <a:buChar char=""/>
-              <a:tabLst>
-                <a:tab pos="0" algn="l"/>
-              </a:tabLst>
-            </a:pPr>
-            <a:r>
-              <a:rPr lang="en-US" sz="1300" b="1" u="none" strike="noStrike">
-                <a:solidFill>
-                  <a:srgbClr val="3B4A41"/>
-                </a:solidFill>
-                <a:effectLst/>
-                <a:uFillTx/>
-                <a:latin typeface="Calibri"/>
-              </a:rPr>
-              <a:t>BAUS</a:t>
-            </a:r>
-            <a:r>
-              <a:rPr lang="en-US" sz="1300" b="0" u="none" strike="noStrike">
-                <a:solidFill>
-                  <a:srgbClr val="3B4A41"/>
-                </a:solidFill>
-                <a:effectLst/>
-                <a:uFillTx/>
-                <a:latin typeface="Calibri"/>
-              </a:rPr>
-              <a:t>: unknown animals correctly called “new”. </a:t>
-            </a:r>
-            <a:endParaRPr lang="en-ZA" sz="1300" b="0" u="none" strike="noStrike">
-              <a:solidFill>
-                <a:srgbClr val="000000"/>
-              </a:solidFill>
-              <a:effectLst/>
-              <a:uFillTx/>
-              <a:latin typeface="Arial"/>
-            </a:endParaRPr>
-          </a:p>
-          <a:p>
-            <a:pPr marL="216000" indent="-216000" defTabSz="914400">
-              <a:lnSpc>
-                <a:spcPct val="100000"/>
-              </a:lnSpc>
-              <a:buClr>
-                <a:srgbClr val="3B4A41"/>
-              </a:buClr>
-              <a:buSzPct val="45000"/>
-              <a:buFont typeface="Wingdings" charset="2"/>
-              <a:buChar char=""/>
-              <a:tabLst>
-                <a:tab pos="0" algn="l"/>
-              </a:tabLst>
-            </a:pPr>
-            <a:r>
-              <a:rPr lang="en-US" sz="1300" b="1" u="none" strike="noStrike">
-                <a:solidFill>
-                  <a:srgbClr val="3B4A41"/>
-                </a:solidFill>
-                <a:effectLst/>
-                <a:uFillTx/>
-                <a:latin typeface="Calibri"/>
-              </a:rPr>
-              <a:t>Open score</a:t>
-            </a:r>
-            <a:r>
-              <a:rPr lang="en-US" sz="1300" b="0" u="none" strike="noStrike">
-                <a:solidFill>
-                  <a:srgbClr val="3B4A41"/>
-                </a:solidFill>
-                <a:effectLst/>
-                <a:uFillTx/>
-                <a:latin typeface="Calibri"/>
-              </a:rPr>
-              <a:t> = (BAKS + BAUS) / 2.</a:t>
-            </a:r>
-            <a:endParaRPr lang="en-ZA" sz="1300" b="0" u="none" strike="noStrike">
-              <a:solidFill>
-                <a:srgbClr val="000000"/>
-              </a:solidFill>
-              <a:effectLst/>
-              <a:uFillTx/>
-              <a:latin typeface="Arial"/>
-            </a:endParaRPr>
-          </a:p>
-          <a:p>
-            <a:pPr marL="216000" indent="-216000" defTabSz="914400">
-              <a:lnSpc>
-                <a:spcPct val="100000"/>
-              </a:lnSpc>
-              <a:buClr>
-                <a:srgbClr val="3B4A41"/>
-              </a:buClr>
-              <a:buSzPct val="45000"/>
-              <a:buFont typeface="Wingdings" charset="2"/>
-              <a:buChar char=""/>
-              <a:tabLst>
-                <a:tab pos="0" algn="l"/>
-              </a:tabLst>
-            </a:pPr>
-            <a:r>
-              <a:rPr lang="en-US" sz="1300" b="1" u="none" strike="noStrike">
-                <a:solidFill>
-                  <a:srgbClr val="3B4A41"/>
-                </a:solidFill>
-                <a:effectLst/>
-                <a:uFillTx/>
-                <a:latin typeface="Calibri"/>
-              </a:rPr>
-              <a:t>* Reduced validation subset (200 queries); other rows are the full test split. Local branch is preliminary.</a:t>
-            </a:r>
-            <a:endParaRPr lang="en-ZA" sz="1300" b="0" u="none" strike="noStrike">
-              <a:solidFill>
-                <a:srgbClr val="000000"/>
-              </a:solidFill>
-              <a:effectLst/>
-              <a:uFillTx/>
-              <a:latin typeface="Arial"/>
-            </a:endParaRPr>
-          </a:p>
-        </p:txBody>
-      </p:sp>
-      <p:sp>
-        <p:nvSpPr>
-          <p:cNvPr id="94" name="Shape 4"/>
-          <p:cNvSpPr/>
-          <p:nvPr/>
-        </p:nvSpPr>
-        <p:spPr>
-          <a:xfrm>
-            <a:off x="7863840" y="830520"/>
-            <a:ext cx="3748320" cy="1689480"/>
-          </a:xfrm>
-          <a:prstGeom prst="roundRect">
-            <a:avLst>
-              <a:gd name="adj" fmla="val 5217"/>
-            </a:avLst>
-          </a:prstGeom>
-          <a:solidFill>
-            <a:srgbClr val="FFFFFF"/>
-          </a:solidFill>
-          <a:ln w="19050">
-            <a:solidFill>
-              <a:srgbClr val="8FA698"/>
-            </a:solidFill>
-            <a:prstDash val="dash"/>
-            <a:round/>
-          </a:ln>
-        </p:spPr>
-        <p:style>
-          <a:lnRef idx="0"/>
-          <a:fillRef idx="0"/>
-          <a:effectRef idx="0"/>
-          <a:fontRef idx="minor"/>
-        </p:style>
-        <p:txBody>
-          <a:bodyPr lIns="90000" tIns="45000" rIns="90000" bIns="45000" anchor="t">
-            <a:noAutofit/>
-          </a:bodyPr>
-          <a:p>
-            <a:endParaRPr lang="en-ZA" sz="1800" b="0" u="none" strike="noStrike">
-              <a:solidFill>
-                <a:srgbClr val="000000"/>
-              </a:solidFill>
-              <a:effectLst/>
-              <a:uFillTx/>
-              <a:latin typeface="Arial"/>
-            </a:endParaRPr>
-          </a:p>
-        </p:txBody>
-      </p:sp>
-      <p:sp>
-        <p:nvSpPr>
-          <p:cNvPr id="95" name="Text 5"/>
-          <p:cNvSpPr/>
-          <p:nvPr/>
-        </p:nvSpPr>
-        <p:spPr>
-          <a:xfrm>
-            <a:off x="8046720" y="1712880"/>
-            <a:ext cx="3382560" cy="410760"/>
-          </a:xfrm>
-          <a:prstGeom prst="rect">
-            <a:avLst/>
-          </a:prstGeom>
-          <a:noFill/>
-          <a:ln w="0">
-            <a:noFill/>
-          </a:ln>
-        </p:spPr>
-        <p:style>
-          <a:lnRef idx="0"/>
-          <a:fillRef idx="0"/>
-          <a:effectRef idx="0"/>
-          <a:fontRef idx="minor"/>
-        </p:style>
-        <p:txBody>
-          <a:bodyPr lIns="0" tIns="0" rIns="0" bIns="0" anchor="ctr">
-            <a:noAutofit/>
-          </a:bodyPr>
-          <a:p>
-            <a:pPr algn="ctr" defTabSz="914400">
-              <a:lnSpc>
-                <a:spcPct val="100000"/>
-              </a:lnSpc>
-              <a:tabLst>
-                <a:tab pos="0" algn="l"/>
-              </a:tabLst>
-            </a:pPr>
-            <a:r>
-              <a:rPr lang="en-US" sz="1800" b="1" u="none" strike="noStrike">
-                <a:solidFill>
-                  <a:srgbClr val="14231C"/>
-                </a:solidFill>
-                <a:effectLst/>
-                <a:uFillTx/>
-                <a:latin typeface="Calibri"/>
-              </a:rPr>
-              <a:t>Plot: BAKS and BAUS vs τ</a:t>
-            </a:r>
-            <a:endParaRPr lang="en-ZA" sz="1800" b="0" u="none" strike="noStrike">
-              <a:solidFill>
-                <a:srgbClr val="000000"/>
-              </a:solidFill>
-              <a:effectLst/>
-              <a:uFillTx/>
-              <a:latin typeface="Arial"/>
-            </a:endParaRPr>
-          </a:p>
-        </p:txBody>
-      </p:sp>
-      <p:sp>
-        <p:nvSpPr>
-          <p:cNvPr id="96" name="Shape 7"/>
-          <p:cNvSpPr/>
-          <p:nvPr/>
-        </p:nvSpPr>
-        <p:spPr>
-          <a:xfrm>
-            <a:off x="7863840" y="2892960"/>
-            <a:ext cx="3748320" cy="1329480"/>
-          </a:xfrm>
-          <a:prstGeom prst="roundRect">
-            <a:avLst>
-              <a:gd name="adj" fmla="val 5217"/>
-            </a:avLst>
-          </a:prstGeom>
-          <a:solidFill>
-            <a:srgbClr val="FFFFFF"/>
-          </a:solidFill>
-          <a:ln w="19050">
-            <a:solidFill>
-              <a:srgbClr val="8FA698"/>
-            </a:solidFill>
-            <a:prstDash val="dash"/>
-            <a:round/>
-          </a:ln>
-        </p:spPr>
-        <p:style>
-          <a:lnRef idx="0"/>
-          <a:fillRef idx="0"/>
-          <a:effectRef idx="0"/>
-          <a:fontRef idx="minor"/>
-        </p:style>
-        <p:txBody>
-          <a:bodyPr lIns="90000" tIns="45000" rIns="90000" bIns="45000" anchor="t">
-            <a:noAutofit/>
-          </a:bodyPr>
-          <a:p>
-            <a:endParaRPr lang="en-ZA" sz="1800" b="0" u="none" strike="noStrike">
-              <a:solidFill>
-                <a:srgbClr val="000000"/>
-              </a:solidFill>
-              <a:effectLst/>
-              <a:uFillTx/>
-              <a:latin typeface="Arial"/>
-            </a:endParaRPr>
-          </a:p>
-        </p:txBody>
-      </p:sp>
-      <p:sp>
-        <p:nvSpPr>
-          <p:cNvPr id="97" name="Text 8"/>
-          <p:cNvSpPr/>
-          <p:nvPr/>
-        </p:nvSpPr>
-        <p:spPr>
-          <a:xfrm>
-            <a:off x="8046720" y="3143160"/>
-            <a:ext cx="3382560" cy="410760"/>
-          </a:xfrm>
-          <a:prstGeom prst="rect">
-            <a:avLst/>
-          </a:prstGeom>
-          <a:noFill/>
-          <a:ln w="0">
-            <a:noFill/>
-          </a:ln>
-        </p:spPr>
-        <p:style>
-          <a:lnRef idx="0"/>
-          <a:fillRef idx="0"/>
-          <a:effectRef idx="0"/>
-          <a:fontRef idx="minor"/>
-        </p:style>
-        <p:txBody>
-          <a:bodyPr lIns="0" tIns="0" rIns="0" bIns="0" anchor="ctr">
-            <a:noAutofit/>
-          </a:bodyPr>
-          <a:p>
-            <a:pPr algn="ctr" defTabSz="914400">
-              <a:lnSpc>
-                <a:spcPct val="100000"/>
-              </a:lnSpc>
-              <a:tabLst>
-                <a:tab pos="0" algn="l"/>
-              </a:tabLst>
-            </a:pPr>
-            <a:r>
-              <a:rPr lang="en-US" sz="1800" b="1" u="none" strike="noStrike">
-                <a:solidFill>
-                  <a:srgbClr val="14231C"/>
-                </a:solidFill>
-                <a:effectLst/>
-                <a:uFillTx/>
-                <a:latin typeface="Calibri"/>
-              </a:rPr>
-              <a:t>Plot: PCA dimension sweep</a:t>
-            </a:r>
-            <a:endParaRPr lang="en-ZA" sz="1800" b="0" u="none" strike="noStrike">
-              <a:solidFill>
-                <a:srgbClr val="000000"/>
-              </a:solidFill>
-              <a:effectLst/>
-              <a:uFillTx/>
-              <a:latin typeface="Arial"/>
-            </a:endParaRPr>
-          </a:p>
-        </p:txBody>
-      </p:sp>
-      <p:sp>
-        <p:nvSpPr>
-          <p:cNvPr id="98" name="Text 9"/>
-          <p:cNvSpPr/>
-          <p:nvPr/>
-        </p:nvSpPr>
-        <p:spPr>
-          <a:xfrm>
-            <a:off x="8046720" y="3593160"/>
-            <a:ext cx="3382560" cy="365040"/>
-          </a:xfrm>
-          <a:prstGeom prst="rect">
-            <a:avLst/>
-          </a:prstGeom>
-          <a:noFill/>
-          <a:ln w="0">
-            <a:noFill/>
-          </a:ln>
-        </p:spPr>
-        <p:style>
-          <a:lnRef idx="0"/>
-          <a:fillRef idx="0"/>
-          <a:effectRef idx="0"/>
-          <a:fontRef idx="minor"/>
-        </p:style>
-        <p:txBody>
-          <a:bodyPr lIns="0" tIns="0" rIns="0" bIns="0" anchor="ctr">
-            <a:noAutofit/>
-          </a:bodyPr>
-          <a:p>
-            <a:pPr algn="ctr" defTabSz="914400">
-              <a:lnSpc>
-                <a:spcPct val="100000"/>
-              </a:lnSpc>
-              <a:tabLst>
-                <a:tab pos="0" algn="l"/>
-              </a:tabLst>
-            </a:pPr>
-            <a:r>
-              <a:rPr lang="en-US" sz="1300" b="0" u="none" strike="noStrike">
-                <a:solidFill>
-                  <a:srgbClr val="3B4A41"/>
-                </a:solidFill>
-                <a:effectLst/>
-                <a:uFillTx/>
-                <a:latin typeface="Calibri"/>
-              </a:rPr>
-              <a:t>32 to 512 dimensions vs uncompressed</a:t>
-            </a:r>
-            <a:endParaRPr lang="en-ZA" sz="1300" b="0" u="none" strike="noStrike">
-              <a:solidFill>
-                <a:srgbClr val="000000"/>
-              </a:solidFill>
-              <a:effectLst/>
-              <a:uFillTx/>
-              <a:latin typeface="Arial"/>
-            </a:endParaRPr>
-          </a:p>
-        </p:txBody>
-      </p:sp>
-      <p:sp>
-        <p:nvSpPr>
-          <p:cNvPr id="99" name="Extra 0"/>
-          <p:cNvSpPr/>
-          <p:nvPr/>
-        </p:nvSpPr>
-        <p:spPr>
-          <a:xfrm>
-            <a:off x="7863840" y="4860000"/>
-            <a:ext cx="3748320" cy="1329480"/>
-          </a:xfrm>
-          <a:prstGeom prst="roundRect">
-            <a:avLst>
-              <a:gd name="adj" fmla="val 5217"/>
-            </a:avLst>
-          </a:prstGeom>
-          <a:solidFill>
-            <a:srgbClr val="FFFFFF"/>
-          </a:solidFill>
-          <a:ln w="19050">
-            <a:solidFill>
-              <a:srgbClr val="8FA698"/>
-            </a:solidFill>
-            <a:prstDash val="dash"/>
-            <a:round/>
-          </a:ln>
-        </p:spPr>
-        <p:style>
-          <a:lnRef idx="0"/>
-          <a:fillRef idx="0"/>
-          <a:effectRef idx="0"/>
-          <a:fontRef idx="minor"/>
-        </p:style>
-        <p:txBody>
-          <a:bodyPr lIns="90000" tIns="45000" rIns="90000" bIns="45000" anchor="t">
-            <a:noAutofit/>
-          </a:bodyPr>
-          <a:p>
-            <a:endParaRPr lang="en-ZA" sz="1800" b="0" u="none" strike="noStrike">
-              <a:solidFill>
-                <a:srgbClr val="000000"/>
-              </a:solidFill>
-              <a:effectLst/>
-              <a:uFillTx/>
-              <a:latin typeface="Arial"/>
-            </a:endParaRPr>
-          </a:p>
-        </p:txBody>
-      </p:sp>
-      <p:sp>
-        <p:nvSpPr>
-          <p:cNvPr id="100" name="Extra 1"/>
-          <p:cNvSpPr/>
-          <p:nvPr/>
-        </p:nvSpPr>
-        <p:spPr>
-          <a:xfrm>
-            <a:off x="8046720" y="4573080"/>
-            <a:ext cx="3382560" cy="410760"/>
-          </a:xfrm>
-          <a:prstGeom prst="rect">
-            <a:avLst/>
-          </a:prstGeom>
-          <a:noFill/>
-          <a:ln w="0">
-            <a:noFill/>
-          </a:ln>
-        </p:spPr>
-        <p:style>
-          <a:lnRef idx="0"/>
-          <a:fillRef idx="0"/>
-          <a:effectRef idx="0"/>
-          <a:fontRef idx="minor"/>
-        </p:style>
-        <p:txBody>
-          <a:bodyPr lIns="0" tIns="0" rIns="0" bIns="0" anchor="ctr">
-            <a:noAutofit/>
-          </a:bodyPr>
-          <a:p>
-            <a:pPr algn="ctr" defTabSz="914400">
-              <a:lnSpc>
-                <a:spcPct val="100000"/>
-              </a:lnSpc>
-              <a:tabLst>
-                <a:tab pos="0" algn="l"/>
-              </a:tabLst>
-            </a:pPr>
-            <a:r>
-              <a:rPr lang="en-US" sz="1800" b="1" u="none" strike="noStrike">
-                <a:solidFill>
-                  <a:srgbClr val="14231C"/>
-                </a:solidFill>
-                <a:effectLst/>
-                <a:uFillTx/>
-                <a:latin typeface="Calibri"/>
-              </a:rPr>
-              <a:t>Slot: additional result</a:t>
-            </a:r>
-            <a:endParaRPr lang="en-ZA" sz="1800" b="0" u="none" strike="noStrike">
-              <a:solidFill>
-                <a:srgbClr val="000000"/>
-              </a:solidFill>
-              <a:effectLst/>
-              <a:uFillTx/>
-              <a:latin typeface="Arial"/>
-            </a:endParaRPr>
-          </a:p>
-        </p:txBody>
-      </p:sp>
-      <p:sp>
-        <p:nvSpPr>
-          <p:cNvPr id="101" name="Extra 2"/>
-          <p:cNvSpPr/>
-          <p:nvPr/>
-        </p:nvSpPr>
-        <p:spPr>
-          <a:xfrm>
-            <a:off x="8046720" y="5023080"/>
-            <a:ext cx="3382560" cy="365040"/>
-          </a:xfrm>
-          <a:prstGeom prst="rect">
-            <a:avLst/>
-          </a:prstGeom>
-          <a:noFill/>
-          <a:ln w="0">
-            <a:noFill/>
-          </a:ln>
-        </p:spPr>
-        <p:style>
-          <a:lnRef idx="0"/>
-          <a:fillRef idx="0"/>
-          <a:effectRef idx="0"/>
-          <a:fontRef idx="minor"/>
-        </p:style>
-        <p:txBody>
-          <a:bodyPr lIns="0" tIns="0" rIns="0" bIns="0" anchor="ctr">
-            <a:noAutofit/>
-          </a:bodyPr>
-          <a:p>
-            <a:pPr algn="ctr" defTabSz="914400">
-              <a:lnSpc>
-                <a:spcPct val="100000"/>
-              </a:lnSpc>
-              <a:tabLst>
-                <a:tab pos="0" algn="l"/>
-              </a:tabLst>
-            </a:pPr>
-            <a:r>
-              <a:rPr lang="en-US" sz="1300" b="0" u="none" strike="noStrike">
-                <a:solidFill>
-                  <a:srgbClr val="3B4A41"/>
-                </a:solidFill>
-                <a:effectLst/>
-                <a:uFillTx/>
-                <a:latin typeface="Calibri"/>
-              </a:rPr>
-              <a:t>Your extra plot or table</a:t>
-            </a:r>
-            <a:endParaRPr lang="en-ZA" sz="1300" b="0" u="none" strike="noStrike">
-              <a:solidFill>
-                <a:srgbClr val="000000"/>
-              </a:solidFill>
-              <a:effectLst/>
-              <a:uFillTx/>
-              <a:latin typeface="Arial"/>
-            </a:endParaRPr>
-          </a:p>
-        </p:txBody>
-      </p:sp>
-    </p:spTree>
-  </p:cSld>
-  <mc:AlternateContent>
-    <mc:Choice Requires="p14">
-      <p:transition spd="slow" p14:dur="2000"/>
-    </mc:Choice>
-    <mc:Fallback>
-      <p:transition spd="slow"/>
-    </mc:Fallback>
-  </mc:AlternateContent>
-</p:sld>
-</file>
-
-<file path=ppt/slides/slide5.xml><?xml version="1.0" encoding="utf-8"?>
-<p:sld xmlns:a="http://schemas.openxmlformats.org/drawingml/2006/main" xmlns:p="http://schemas.openxmlformats.org/presentationml/2006/main" xmlns:r="http://schemas.openxmlformats.org/officeDocument/2006/relationships" xmlns:p14="http://schemas.microsoft.com/office/powerpoint/2010/main" xmlns:p15="http://schemas.microsoft.com/office/powerpoint/2012/main" xmlns:mc="http://schemas.openxmlformats.org/markup-compatibility/2006">
-  <p:cSld>
-    <p:bg>
-      <p:bgPr>
-        <a:solidFill>
-          <a:srgbClr val="FFFFFF"/>
-        </a:solidFill>
-      </p:bgPr>
-    </p:bg>
-    <p:spTree>
-      <p:nvGrpSpPr>
-        <p:cNvPr id="1" name=""/>
-        <p:cNvGrpSpPr/>
-        <p:nvPr/>
-      </p:nvGrpSpPr>
-      <p:grpSpPr>
-        <a:xfrm>
-          <a:off x="0" y="0"/>
-          <a:ext cx="0" cy="0"/>
-          <a:chOff x="0" y="0"/>
-          <a:chExt cx="0" cy="0"/>
-        </a:xfrm>
-      </p:grpSpPr>
-      <p:sp>
-        <p:nvSpPr>
-          <p:cNvPr id="102" name="Title"/>
-          <p:cNvSpPr/>
-          <p:nvPr/>
-        </p:nvSpPr>
-        <p:spPr>
-          <a:xfrm>
-            <a:off x="548640" y="365760"/>
-            <a:ext cx="11063520" cy="822240"/>
-          </a:xfrm>
-          <a:prstGeom prst="rect">
-            <a:avLst/>
-          </a:prstGeom>
-          <a:noFill/>
-          <a:ln w="0">
-            <a:noFill/>
-          </a:ln>
-        </p:spPr>
-        <p:style>
-          <a:lnRef idx="0"/>
-          <a:fillRef idx="0"/>
-          <a:effectRef idx="0"/>
-          <a:fontRef idx="minor"/>
-        </p:style>
-        <p:txBody>
-          <a:bodyPr lIns="0" tIns="0" rIns="0" bIns="0" anchor="ctr">
-            <a:noAutofit/>
-          </a:bodyPr>
-          <a:p>
-            <a:pPr defTabSz="914400">
-              <a:lnSpc>
-                <a:spcPct val="100000"/>
-              </a:lnSpc>
-              <a:tabLst>
-                <a:tab pos="0" algn="l"/>
-              </a:tabLst>
-            </a:pPr>
-            <a:r>
-              <a:rPr lang="en-US" sz="3800" b="1" u="none" strike="noStrike">
-                <a:solidFill>
-                  <a:schemeClr val="dk1"/>
-                </a:solidFill>
-                <a:effectLst/>
-                <a:uFillTx/>
-                <a:latin typeface="Cambria"/>
-                <a:ea typeface="Cambria"/>
-              </a:rPr>
-              <a:t>Conclusion and ablation</a:t>
-            </a:r>
-            <a:endParaRPr lang="en-ZA" sz="3800" b="0" u="none" strike="noStrike">
-              <a:solidFill>
-                <a:srgbClr val="000000"/>
-              </a:solidFill>
-              <a:effectLst/>
-              <a:uFillTx/>
-              <a:latin typeface="Arial"/>
-            </a:endParaRPr>
-          </a:p>
-        </p:txBody>
-      </p:sp>
-      <p:sp>
-        <p:nvSpPr>
-          <p:cNvPr id="103" name="PageNo"/>
-          <p:cNvSpPr/>
-          <p:nvPr/>
-        </p:nvSpPr>
-        <p:spPr>
-          <a:xfrm>
-            <a:off x="10698480" y="6400800"/>
-            <a:ext cx="913680" cy="273600"/>
-          </a:xfrm>
-          <a:prstGeom prst="rect">
-            <a:avLst/>
-          </a:prstGeom>
-          <a:noFill/>
-          <a:ln w="0">
-            <a:noFill/>
-          </a:ln>
-        </p:spPr>
-        <p:style>
-          <a:lnRef idx="0"/>
-          <a:fillRef idx="0"/>
-          <a:effectRef idx="0"/>
-          <a:fontRef idx="minor"/>
-        </p:style>
-        <p:txBody>
-          <a:bodyPr lIns="0" tIns="0" rIns="0" bIns="0" anchor="ctr">
-            <a:noAutofit/>
-          </a:bodyPr>
-          <a:p>
-            <a:pPr algn="r" defTabSz="914400">
-              <a:lnSpc>
-                <a:spcPct val="100000"/>
-              </a:lnSpc>
-              <a:tabLst>
-                <a:tab pos="0" algn="l"/>
-              </a:tabLst>
-            </a:pPr>
-            <a:r>
-              <a:rPr lang="en-US" sz="1100" b="0" u="none" strike="noStrike">
-                <a:solidFill>
-                  <a:srgbClr val="5B7F6B"/>
-                </a:solidFill>
-                <a:effectLst/>
-                <a:uFillTx/>
-                <a:latin typeface="Calibri"/>
-              </a:rPr>
-              <a:t>5 / 5</a:t>
-            </a:r>
-            <a:endParaRPr lang="en-ZA" sz="1100" b="0" u="none" strike="noStrike">
-              <a:solidFill>
-                <a:srgbClr val="000000"/>
-              </a:solidFill>
-              <a:effectLst/>
-              <a:uFillTx/>
-              <a:latin typeface="Arial"/>
-            </a:endParaRPr>
-          </a:p>
-        </p:txBody>
-      </p:sp>
-      <p:sp>
-        <p:nvSpPr>
-          <p:cNvPr id="104" name="Text 3"/>
-          <p:cNvSpPr/>
-          <p:nvPr/>
-        </p:nvSpPr>
-        <p:spPr>
-          <a:xfrm>
-            <a:off x="548640" y="1463040"/>
-            <a:ext cx="4479840" cy="1370880"/>
-          </a:xfrm>
-          <a:prstGeom prst="rect">
-            <a:avLst/>
-          </a:prstGeom>
-          <a:noFill/>
-          <a:ln w="0">
-            <a:noFill/>
-          </a:ln>
-        </p:spPr>
-        <p:style>
-          <a:lnRef idx="0"/>
-          <a:fillRef idx="0"/>
-          <a:effectRef idx="0"/>
-          <a:fontRef idx="minor"/>
-        </p:style>
-        <p:txBody>
-          <a:bodyPr lIns="0" tIns="0" rIns="0" bIns="0" anchor="t">
-            <a:noAutofit/>
-          </a:bodyPr>
-          <a:p>
-            <a:pPr defTabSz="914400">
-              <a:lnSpc>
-                <a:spcPct val="100000"/>
-              </a:lnSpc>
-              <a:tabLst>
-                <a:tab pos="0" algn="l"/>
-              </a:tabLst>
-            </a:pPr>
-            <a:r>
-              <a:rPr lang="en-US" sz="2600" b="1" u="none" strike="noStrike">
-                <a:solidFill>
-                  <a:srgbClr val="2C5F2D"/>
-                </a:solidFill>
-                <a:effectLst/>
-                <a:uFillTx/>
-                <a:latin typeface="Cambria"/>
-                <a:ea typeface="Cambria"/>
-              </a:rPr>
-              <a:t>Different evidence fails in different ways, so we fuse it.</a:t>
-            </a:r>
-            <a:endParaRPr lang="en-ZA" sz="2600" b="0" u="none" strike="noStrike">
-              <a:solidFill>
-                <a:srgbClr val="000000"/>
-              </a:solidFill>
-              <a:effectLst/>
-              <a:uFillTx/>
-              <a:latin typeface="Arial"/>
-            </a:endParaRPr>
-          </a:p>
-        </p:txBody>
-      </p:sp>
-      <p:sp>
-        <p:nvSpPr>
-          <p:cNvPr id="105" name="Text 4"/>
-          <p:cNvSpPr/>
-          <p:nvPr/>
-        </p:nvSpPr>
-        <p:spPr>
-          <a:xfrm>
-            <a:off x="548640" y="3017520"/>
-            <a:ext cx="4479840" cy="2376720"/>
-          </a:xfrm>
-          <a:prstGeom prst="rect">
-            <a:avLst/>
-          </a:prstGeom>
-          <a:noFill/>
-          <a:ln w="0">
-            <a:noFill/>
-          </a:ln>
-        </p:spPr>
-        <p:style>
-          <a:lnRef idx="0"/>
-          <a:fillRef idx="0"/>
-          <a:effectRef idx="0"/>
-          <a:fontRef idx="minor"/>
-        </p:style>
-        <p:txBody>
-          <a:bodyPr lIns="0" tIns="0" rIns="0" bIns="0" anchor="t">
-            <a:noAutofit/>
-          </a:bodyPr>
-          <a:p>
-            <a:pPr marL="343080" indent="-343080" defTabSz="914400">
-              <a:lnSpc>
-                <a:spcPct val="100000"/>
-              </a:lnSpc>
-              <a:spcAft>
-                <a:spcPts val="1001"/>
-              </a:spcAft>
-              <a:buClr>
-                <a:srgbClr val="3B4A41"/>
-              </a:buClr>
-              <a:buFont typeface="Symbol" charset="2"/>
-              <a:buChar char=""/>
-            </a:pPr>
-            <a:r>
-              <a:rPr lang="en-US" sz="1600" b="0" u="none" strike="noStrike">
-                <a:solidFill>
-                  <a:srgbClr val="3B4A41"/>
-                </a:solidFill>
-                <a:effectLst/>
-                <a:uFillTx/>
-                <a:latin typeface="Calibri"/>
-              </a:rPr>
-              <a:t>Calibration makes unlike scores comparable</a:t>
-            </a:r>
-            <a:endParaRPr lang="en-ZA" sz="1600" b="0" u="none" strike="noStrike">
-              <a:solidFill>
-                <a:srgbClr val="000000"/>
-              </a:solidFill>
-              <a:effectLst/>
-              <a:uFillTx/>
-              <a:latin typeface="Arial"/>
-            </a:endParaRPr>
-          </a:p>
-          <a:p>
-            <a:pPr marL="343080" indent="-343080" defTabSz="914400">
-              <a:lnSpc>
-                <a:spcPct val="100000"/>
-              </a:lnSpc>
-              <a:spcAft>
-                <a:spcPts val="1001"/>
-              </a:spcAft>
-              <a:buClr>
-                <a:srgbClr val="3B4A41"/>
-              </a:buClr>
-              <a:buFont typeface="Symbol" charset="2"/>
-              <a:buChar char=""/>
-            </a:pPr>
-            <a:r>
-              <a:rPr lang="en-US" sz="1600" b="0" u="none" strike="noStrike">
-                <a:solidFill>
-                  <a:srgbClr val="3B4A41"/>
-                </a:solidFill>
-                <a:effectLst/>
-                <a:uFillTx/>
-                <a:latin typeface="Calibri"/>
-              </a:rPr>
-              <a:t>Local matching runs only on a shortlist, so it stays affordable</a:t>
-            </a:r>
-            <a:endParaRPr lang="en-ZA" sz="1600" b="0" u="none" strike="noStrike">
-              <a:solidFill>
-                <a:srgbClr val="000000"/>
-              </a:solidFill>
-              <a:effectLst/>
-              <a:uFillTx/>
-              <a:latin typeface="Arial"/>
-            </a:endParaRPr>
-          </a:p>
-          <a:p>
-            <a:pPr marL="343080" indent="-343080" defTabSz="914400">
-              <a:lnSpc>
-                <a:spcPct val="100000"/>
-              </a:lnSpc>
-              <a:spcAft>
-                <a:spcPts val="1001"/>
-              </a:spcAft>
-              <a:buClr>
-                <a:srgbClr val="3B4A41"/>
-              </a:buClr>
-              <a:buFont typeface="Symbol" charset="2"/>
-              <a:buChar char=""/>
-            </a:pPr>
-            <a:r>
-              <a:rPr lang="en-US" sz="1600" b="0" u="none" strike="noStrike">
-                <a:solidFill>
-                  <a:srgbClr val="3B4A41"/>
-                </a:solidFill>
-                <a:effectLst/>
-                <a:uFillTx/>
-                <a:latin typeface="Calibri"/>
-              </a:rPr>
-              <a:t>One threshold τ separates known from new animals</a:t>
-            </a:r>
-            <a:endParaRPr lang="en-ZA" sz="1600" b="0" u="none" strike="noStrike">
-              <a:solidFill>
-                <a:srgbClr val="000000"/>
-              </a:solidFill>
-              <a:effectLst/>
-              <a:uFillTx/>
-              <a:latin typeface="Arial"/>
-            </a:endParaRPr>
-          </a:p>
-        </p:txBody>
-      </p:sp>
-      <p:graphicFrame>
-        <p:nvGraphicFramePr>
-          <p:cNvPr id="106" name="Table 0"/>
-          <p:cNvGraphicFramePr/>
-          <p:nvPr/>
-        </p:nvGraphicFramePr>
-        <p:xfrm>
-          <a:off x="5486400" y="1463040"/>
-          <a:ext cx="6126120" cy="4004280"/>
-        </p:xfrm>
-        <a:graphic>
-          <a:graphicData uri="http://schemas.openxmlformats.org/drawingml/2006/table">
-            <a:tbl>
-              <a:tblPr/>
-              <a:tblGrid>
-                <a:gridCol w="2194560"/>
-                <a:gridCol w="3931920"/>
-              </a:tblGrid>
-              <a:tr h="566640">
-                <a:tc>
-                  <a:txBody>
-                    <a:bodyPr anchor="ctr">
-                      <a:noAutofit/>
-                    </a:bodyPr>
-                    <a:p>
-                      <a:pPr defTabSz="914400">
-                        <a:lnSpc>
-                          <a:spcPct val="100000"/>
-                        </a:lnSpc>
-                        <a:tabLst>
-                          <a:tab pos="0" algn="l"/>
-                        </a:tabLst>
-                      </a:pPr>
-                      <a:r>
-                        <a:rPr lang="en-US" sz="1600" b="1" u="none" strike="noStrike">
-                          <a:solidFill>
-                            <a:srgbClr val="FFFFFF"/>
-                          </a:solidFill>
-                          <a:effectLst/>
-                          <a:uFillTx/>
-                          <a:latin typeface="Calibri"/>
-                        </a:rPr>
-                        <a:t>Configuration</a:t>
-                      </a:r>
-                      <a:endParaRPr lang="en-ZA" sz="1600" b="0" u="none" strike="noStrike">
-                        <a:solidFill>
-                          <a:srgbClr val="FFFFFF"/>
-                        </a:solidFill>
-                        <a:effectLst/>
-                        <a:uFillTx/>
-                        <a:latin typeface="Arial"/>
-                      </a:endParaRPr>
-                    </a:p>
-                  </a:txBody>
-                  <a:tcPr anchor="ctr" marL="91440" marR="91440" marT="45720" marB="45720">
-                    <a:lnL w="12240">
-                      <a:solidFill>
-                        <a:srgbClr val="DDE6DF"/>
-                      </a:solidFill>
-                      <a:prstDash val="solid"/>
-                    </a:lnL>
-                    <a:lnR w="12240">
-                      <a:solidFill>
-                        <a:srgbClr val="DDE6DF"/>
-                      </a:solidFill>
-                      <a:prstDash val="solid"/>
-                    </a:lnR>
-                    <a:lnT w="12240">
-                      <a:solidFill>
-                        <a:srgbClr val="DDE6DF"/>
-                      </a:solidFill>
-                      <a:prstDash val="solid"/>
-                    </a:lnT>
-                    <a:lnB w="12240">
-                      <a:solidFill>
-                        <a:srgbClr val="DDE6DF"/>
-                      </a:solidFill>
-                      <a:prstDash val="solid"/>
-                    </a:lnB>
-                    <a:solidFill>
-                      <a:srgbClr val="2C5F2D"/>
-                    </a:solidFill>
-                  </a:tcPr>
-                </a:tc>
-                <a:tc>
-                  <a:txBody>
-                    <a:bodyPr anchor="ctr">
-                      <a:noAutofit/>
-                    </a:bodyPr>
-                    <a:p>
-                      <a:pPr defTabSz="914400">
-                        <a:lnSpc>
-                          <a:spcPct val="100000"/>
-                        </a:lnSpc>
-                        <a:tabLst>
-                          <a:tab pos="0" algn="l"/>
-                        </a:tabLst>
-                      </a:pPr>
-                      <a:r>
-                        <a:rPr lang="en-US" sz="1600" b="1" u="none" strike="noStrike">
-                          <a:solidFill>
-                            <a:srgbClr val="FFFFFF"/>
-                          </a:solidFill>
-                          <a:effectLst/>
-                          <a:uFillTx/>
-                          <a:latin typeface="Calibri"/>
-                        </a:rPr>
-                        <a:t>What it tells us</a:t>
-                      </a:r>
-                      <a:endParaRPr lang="en-ZA" sz="1600" b="0" u="none" strike="noStrike">
-                        <a:solidFill>
-                          <a:srgbClr val="FFFFFF"/>
-                        </a:solidFill>
-                        <a:effectLst/>
-                        <a:uFillTx/>
-                        <a:latin typeface="Arial"/>
-                      </a:endParaRPr>
-                    </a:p>
-                  </a:txBody>
-                  <a:tcPr anchor="ctr" marL="91440" marR="91440" marT="45720" marB="45720">
-                    <a:lnL w="12240">
-                      <a:solidFill>
-                        <a:srgbClr val="DDE6DF"/>
-                      </a:solidFill>
-                      <a:prstDash val="solid"/>
-                    </a:lnL>
-                    <a:lnR w="12240">
-                      <a:solidFill>
-                        <a:srgbClr val="DDE6DF"/>
-                      </a:solidFill>
-                      <a:prstDash val="solid"/>
-                    </a:lnR>
-                    <a:lnT w="12240">
-                      <a:solidFill>
-                        <a:srgbClr val="DDE6DF"/>
-                      </a:solidFill>
-                      <a:prstDash val="solid"/>
-                    </a:lnT>
-                    <a:lnB w="12240">
-                      <a:solidFill>
-                        <a:srgbClr val="DDE6DF"/>
-                      </a:solidFill>
-                      <a:prstDash val="solid"/>
-                    </a:lnB>
-                    <a:solidFill>
-                      <a:srgbClr val="2C5F2D"/>
-                    </a:solidFill>
-                  </a:tcPr>
-                </a:tc>
-              </a:tr>
-              <a:tr h="566640">
-                <a:tc>
-                  <a:txBody>
-                    <a:bodyPr anchor="ctr">
-                      <a:noAutofit/>
-                    </a:bodyPr>
-                    <a:p>
-                      <a:pPr defTabSz="914400">
-                        <a:lnSpc>
-                          <a:spcPct val="100000"/>
-                        </a:lnSpc>
-                        <a:tabLst>
-                          <a:tab pos="0" algn="l"/>
-                        </a:tabLst>
-                      </a:pPr>
-                      <a:r>
-                        <a:rPr lang="en-US" sz="1600" b="0" u="none" strike="noStrike">
-                          <a:solidFill>
-                            <a:srgbClr val="14231C"/>
-                          </a:solidFill>
-                          <a:effectLst/>
-                          <a:uFillTx/>
-                          <a:latin typeface="Calibri"/>
-                        </a:rPr>
-                        <a:t>Global alone</a:t>
-                      </a:r>
-                      <a:endParaRPr lang="en-ZA" sz="1600" b="0" u="none" strike="noStrike">
-                        <a:solidFill>
-                          <a:srgbClr val="000000"/>
-                        </a:solidFill>
-                        <a:effectLst/>
-                        <a:uFillTx/>
-                        <a:latin typeface="Arial"/>
-                      </a:endParaRPr>
-                    </a:p>
-                  </a:txBody>
-                  <a:tcPr anchor="ctr" marL="91440" marR="91440" marT="45720" marB="45720">
-                    <a:lnL w="12240">
-                      <a:solidFill>
-                        <a:srgbClr val="DDE6DF"/>
-                      </a:solidFill>
-                      <a:prstDash val="solid"/>
-                    </a:lnL>
-                    <a:lnR w="12240">
-                      <a:solidFill>
-                        <a:srgbClr val="DDE6DF"/>
-                      </a:solidFill>
-                      <a:prstDash val="solid"/>
-                    </a:lnR>
-                    <a:lnT w="12240">
-                      <a:solidFill>
-                        <a:srgbClr val="DDE6DF"/>
-                      </a:solidFill>
-                      <a:prstDash val="solid"/>
-                    </a:lnT>
-                    <a:lnB w="12240">
-                      <a:solidFill>
-                        <a:srgbClr val="DDE6DF"/>
-                      </a:solidFill>
-                      <a:prstDash val="solid"/>
-                    </a:lnB>
-                    <a:solidFill>
-                      <a:srgbClr val="FFFFFF"/>
-                    </a:solidFill>
-                  </a:tcPr>
-                </a:tc>
-                <a:tc>
-                  <a:txBody>
-                    <a:bodyPr anchor="ctr">
-                      <a:noAutofit/>
-                    </a:bodyPr>
-                    <a:p>
-                      <a:pPr defTabSz="914400">
-                        <a:lnSpc>
-                          <a:spcPct val="100000"/>
-                        </a:lnSpc>
-                        <a:tabLst>
-                          <a:tab pos="0" algn="l"/>
-                        </a:tabLst>
-                      </a:pPr>
-                      <a:r>
-                        <a:rPr lang="en-US" sz="1600" b="0" u="none" strike="noStrike">
-                          <a:solidFill>
-                            <a:srgbClr val="14231C"/>
-                          </a:solidFill>
-                          <a:effectLst/>
-                          <a:uFillTx/>
-                          <a:latin typeface="Calibri"/>
-                        </a:rPr>
-                        <a:t>Fine-tuned model carries the system: 81.1 BAKS, 73.3 open</a:t>
-                      </a:r>
-                      <a:endParaRPr lang="en-ZA" sz="1600" b="0" u="none" strike="noStrike">
-                        <a:solidFill>
-                          <a:srgbClr val="000000"/>
-                        </a:solidFill>
-                        <a:effectLst/>
-                        <a:uFillTx/>
-                        <a:latin typeface="Arial"/>
-                      </a:endParaRPr>
-                    </a:p>
-                  </a:txBody>
-                  <a:tcPr anchor="ctr" marL="91440" marR="91440" marT="45720" marB="45720">
-                    <a:lnL w="12240">
-                      <a:solidFill>
-                        <a:srgbClr val="DDE6DF"/>
-                      </a:solidFill>
-                      <a:prstDash val="solid"/>
-                    </a:lnL>
-                    <a:lnR w="12240">
-                      <a:solidFill>
-                        <a:srgbClr val="DDE6DF"/>
-                      </a:solidFill>
-                      <a:prstDash val="solid"/>
-                    </a:lnR>
-                    <a:lnT w="12240">
-                      <a:solidFill>
-                        <a:srgbClr val="DDE6DF"/>
-                      </a:solidFill>
-                      <a:prstDash val="solid"/>
-                    </a:lnT>
-                    <a:lnB w="12240">
-                      <a:solidFill>
-                        <a:srgbClr val="DDE6DF"/>
-                      </a:solidFill>
-                      <a:prstDash val="solid"/>
-                    </a:lnB>
-                    <a:solidFill>
-                      <a:srgbClr val="FFFFFF"/>
-                    </a:solidFill>
-                  </a:tcPr>
-                </a:tc>
-              </a:tr>
-              <a:tr h="566640">
-                <a:tc>
-                  <a:txBody>
-                    <a:bodyPr anchor="ctr">
-                      <a:noAutofit/>
-                    </a:bodyPr>
-                    <a:p>
-                      <a:pPr defTabSz="914400">
-                        <a:lnSpc>
-                          <a:spcPct val="100000"/>
-                        </a:lnSpc>
-                        <a:tabLst>
-                          <a:tab pos="0" algn="l"/>
-                        </a:tabLst>
-                      </a:pPr>
-                      <a:r>
-                        <a:rPr lang="en-US" sz="1600" b="0" u="none" strike="noStrike">
-                          <a:solidFill>
-                            <a:srgbClr val="14231C"/>
-                          </a:solidFill>
-                          <a:effectLst/>
-                          <a:uFillTx/>
-                          <a:latin typeface="Calibri"/>
-                        </a:rPr>
-                        <a:t>EVA02 alone</a:t>
-                      </a:r>
-                      <a:endParaRPr lang="en-ZA" sz="1600" b="0" u="none" strike="noStrike">
-                        <a:solidFill>
-                          <a:srgbClr val="000000"/>
-                        </a:solidFill>
-                        <a:effectLst/>
-                        <a:uFillTx/>
-                        <a:latin typeface="Arial"/>
-                      </a:endParaRPr>
-                    </a:p>
-                  </a:txBody>
-                  <a:tcPr anchor="ctr" marL="91440" marR="91440" marT="45720" marB="45720">
-                    <a:lnL w="12240">
-                      <a:solidFill>
-                        <a:srgbClr val="DDE6DF"/>
-                      </a:solidFill>
-                      <a:prstDash val="solid"/>
-                    </a:lnL>
-                    <a:lnR w="12240">
-                      <a:solidFill>
-                        <a:srgbClr val="DDE6DF"/>
-                      </a:solidFill>
-                      <a:prstDash val="solid"/>
-                    </a:lnR>
-                    <a:lnT w="12240">
-                      <a:solidFill>
-                        <a:srgbClr val="DDE6DF"/>
-                      </a:solidFill>
-                      <a:prstDash val="solid"/>
-                    </a:lnT>
-                    <a:lnB w="12240">
-                      <a:solidFill>
-                        <a:srgbClr val="DDE6DF"/>
-                      </a:solidFill>
-                      <a:prstDash val="solid"/>
-                    </a:lnB>
-                    <a:solidFill>
-                      <a:srgbClr val="F2F5F1"/>
-                    </a:solidFill>
-                  </a:tcPr>
-                </a:tc>
-                <a:tc>
-                  <a:txBody>
-                    <a:bodyPr anchor="ctr">
-                      <a:noAutofit/>
-                    </a:bodyPr>
-                    <a:p>
-                      <a:pPr defTabSz="914400">
-                        <a:lnSpc>
-                          <a:spcPct val="100000"/>
-                        </a:lnSpc>
-                        <a:tabLst>
-                          <a:tab pos="0" algn="l"/>
-                        </a:tabLst>
-                      </a:pPr>
-                      <a:r>
-                        <a:rPr lang="en-US" sz="1600" b="0" u="none" strike="noStrike">
-                          <a:solidFill>
-                            <a:srgbClr val="14231C"/>
-                          </a:solidFill>
-                          <a:effectLst/>
-                          <a:uFillTx/>
-                          <a:latin typeface="Calibri"/>
-                        </a:rPr>
-                        <a:t>Weak alone: 42.7 BAKS, 50.4 open (about reject-all)</a:t>
-                      </a:r>
-                      <a:endParaRPr lang="en-ZA" sz="1600" b="0" u="none" strike="noStrike">
-                        <a:solidFill>
-                          <a:srgbClr val="000000"/>
-                        </a:solidFill>
-                        <a:effectLst/>
-                        <a:uFillTx/>
-                        <a:latin typeface="Arial"/>
-                      </a:endParaRPr>
-                    </a:p>
-                  </a:txBody>
-                  <a:tcPr anchor="ctr" marL="91440" marR="91440" marT="45720" marB="45720">
-                    <a:lnL w="12240">
-                      <a:solidFill>
-                        <a:srgbClr val="DDE6DF"/>
-                      </a:solidFill>
-                      <a:prstDash val="solid"/>
-                    </a:lnL>
-                    <a:lnR w="12240">
-                      <a:solidFill>
-                        <a:srgbClr val="DDE6DF"/>
-                      </a:solidFill>
-                      <a:prstDash val="solid"/>
-                    </a:lnR>
-                    <a:lnT w="12240">
-                      <a:solidFill>
-                        <a:srgbClr val="DDE6DF"/>
-                      </a:solidFill>
-                      <a:prstDash val="solid"/>
-                    </a:lnT>
-                    <a:lnB w="12240">
-                      <a:solidFill>
-                        <a:srgbClr val="DDE6DF"/>
-                      </a:solidFill>
-                      <a:prstDash val="solid"/>
-                    </a:lnB>
-                    <a:solidFill>
-                      <a:srgbClr val="F2F5F1"/>
-                    </a:solidFill>
-                  </a:tcPr>
-                </a:tc>
-              </a:tr>
-              <a:tr h="566640">
-                <a:tc>
-                  <a:txBody>
-                    <a:bodyPr anchor="ctr">
-                      <a:noAutofit/>
-                    </a:bodyPr>
-                    <a:p>
-                      <a:pPr defTabSz="914400">
-                        <a:lnSpc>
-                          <a:spcPct val="100000"/>
-                        </a:lnSpc>
-                        <a:tabLst>
-                          <a:tab pos="0" algn="l"/>
-                        </a:tabLst>
-                      </a:pPr>
-                      <a:r>
-                        <a:rPr lang="en-US" sz="1600" b="0" u="none" strike="noStrike">
-                          <a:solidFill>
-                            <a:srgbClr val="14231C"/>
-                          </a:solidFill>
-                          <a:effectLst/>
-                          <a:uFillTx/>
-                          <a:latin typeface="Calibri"/>
-                        </a:rPr>
-                        <a:t>ALIKED alone</a:t>
-                      </a:r>
-                      <a:endParaRPr lang="en-ZA" sz="1600" b="0" u="none" strike="noStrike">
-                        <a:solidFill>
-                          <a:srgbClr val="000000"/>
-                        </a:solidFill>
-                        <a:effectLst/>
-                        <a:uFillTx/>
-                        <a:latin typeface="Arial"/>
-                      </a:endParaRPr>
-                    </a:p>
-                  </a:txBody>
-                  <a:tcPr anchor="ctr" marL="91440" marR="91440" marT="45720" marB="45720">
-                    <a:lnL w="12240">
-                      <a:solidFill>
-                        <a:srgbClr val="DDE6DF"/>
-                      </a:solidFill>
-                      <a:prstDash val="solid"/>
-                    </a:lnL>
-                    <a:lnR w="12240">
-                      <a:solidFill>
-                        <a:srgbClr val="DDE6DF"/>
-                      </a:solidFill>
-                      <a:prstDash val="solid"/>
-                    </a:lnR>
-                    <a:lnT w="12240">
-                      <a:solidFill>
-                        <a:srgbClr val="DDE6DF"/>
-                      </a:solidFill>
-                      <a:prstDash val="solid"/>
-                    </a:lnT>
-                    <a:lnB w="12240">
-                      <a:solidFill>
-                        <a:srgbClr val="DDE6DF"/>
-                      </a:solidFill>
-                      <a:prstDash val="solid"/>
-                    </a:lnB>
-                    <a:solidFill>
-                      <a:srgbClr val="FFFFFF"/>
-                    </a:solidFill>
-                  </a:tcPr>
-                </a:tc>
-                <a:tc>
-                  <a:txBody>
-                    <a:bodyPr anchor="ctr">
-                      <a:noAutofit/>
-                    </a:bodyPr>
-                    <a:p>
-                      <a:pPr defTabSz="914400">
-                        <a:lnSpc>
-                          <a:spcPct val="100000"/>
-                        </a:lnSpc>
-                        <a:tabLst>
-                          <a:tab pos="0" algn="l"/>
-                        </a:tabLst>
-                      </a:pPr>
-                      <a:r>
-                        <a:rPr lang="en-US" sz="1600" b="0" u="none" strike="noStrike">
-                          <a:solidFill>
-                            <a:srgbClr val="14231C"/>
-                          </a:solidFill>
-                          <a:effectLst/>
-                          <a:uFillTx/>
-                          <a:latin typeface="Calibri"/>
-                        </a:rPr>
-                        <a:t>Local branch alone: not run separately</a:t>
-                      </a:r>
-                      <a:endParaRPr lang="en-ZA" sz="1600" b="0" u="none" strike="noStrike">
-                        <a:solidFill>
-                          <a:srgbClr val="000000"/>
-                        </a:solidFill>
-                        <a:effectLst/>
-                        <a:uFillTx/>
-                        <a:latin typeface="Arial"/>
-                      </a:endParaRPr>
-                    </a:p>
-                  </a:txBody>
-                  <a:tcPr anchor="ctr" marL="91440" marR="91440" marT="45720" marB="45720">
-                    <a:lnL w="12240">
-                      <a:solidFill>
-                        <a:srgbClr val="DDE6DF"/>
-                      </a:solidFill>
-                      <a:prstDash val="solid"/>
-                    </a:lnL>
-                    <a:lnR w="12240">
-                      <a:solidFill>
-                        <a:srgbClr val="DDE6DF"/>
-                      </a:solidFill>
-                      <a:prstDash val="solid"/>
-                    </a:lnR>
-                    <a:lnT w="12240">
-                      <a:solidFill>
-                        <a:srgbClr val="DDE6DF"/>
-                      </a:solidFill>
-                      <a:prstDash val="solid"/>
-                    </a:lnT>
-                    <a:lnB w="12240">
-                      <a:solidFill>
-                        <a:srgbClr val="DDE6DF"/>
-                      </a:solidFill>
-                      <a:prstDash val="solid"/>
-                    </a:lnB>
-                    <a:solidFill>
-                      <a:srgbClr val="FFFFFF"/>
-                    </a:solidFill>
-                  </a:tcPr>
-                </a:tc>
-              </a:tr>
-              <a:tr h="566640">
-                <a:tc>
-                  <a:txBody>
-                    <a:bodyPr anchor="ctr">
-                      <a:noAutofit/>
-                    </a:bodyPr>
-                    <a:p>
-                      <a:pPr defTabSz="914400">
-                        <a:lnSpc>
-                          <a:spcPct val="100000"/>
-                        </a:lnSpc>
-                        <a:tabLst>
-                          <a:tab pos="0" algn="l"/>
-                        </a:tabLst>
-                      </a:pPr>
-                      <a:r>
-                        <a:rPr lang="en-US" sz="1600" b="0" u="none" strike="noStrike">
-                          <a:solidFill>
-                            <a:srgbClr val="14231C"/>
-                          </a:solidFill>
-                          <a:effectLst/>
-                          <a:uFillTx/>
-                          <a:latin typeface="Calibri"/>
-                        </a:rPr>
-                        <a:t>Global + EVA02</a:t>
-                      </a:r>
-                      <a:endParaRPr lang="en-ZA" sz="1600" b="0" u="none" strike="noStrike">
-                        <a:solidFill>
-                          <a:srgbClr val="000000"/>
-                        </a:solidFill>
-                        <a:effectLst/>
-                        <a:uFillTx/>
-                        <a:latin typeface="Arial"/>
-                      </a:endParaRPr>
-                    </a:p>
-                  </a:txBody>
-                  <a:tcPr anchor="ctr" marL="91440" marR="91440" marT="45720" marB="45720">
-                    <a:lnL w="12240">
-                      <a:solidFill>
-                        <a:srgbClr val="DDE6DF"/>
-                      </a:solidFill>
-                      <a:prstDash val="solid"/>
-                    </a:lnL>
-                    <a:lnR w="12240">
-                      <a:solidFill>
-                        <a:srgbClr val="DDE6DF"/>
-                      </a:solidFill>
-                      <a:prstDash val="solid"/>
-                    </a:lnR>
-                    <a:lnT w="12240">
-                      <a:solidFill>
-                        <a:srgbClr val="DDE6DF"/>
-                      </a:solidFill>
-                      <a:prstDash val="solid"/>
-                    </a:lnT>
-                    <a:lnB w="12240">
-                      <a:solidFill>
-                        <a:srgbClr val="DDE6DF"/>
-                      </a:solidFill>
-                      <a:prstDash val="solid"/>
-                    </a:lnB>
-                    <a:solidFill>
-                      <a:srgbClr val="F2F5F1"/>
-                    </a:solidFill>
-                  </a:tcPr>
-                </a:tc>
-                <a:tc>
-                  <a:txBody>
-                    <a:bodyPr anchor="ctr">
-                      <a:noAutofit/>
-                    </a:bodyPr>
+                    <a:bodyPr/>
+                    <a:lstStyle/>
                     <a:p>
                       <a:pPr defTabSz="914400">
                         <a:lnSpc>
@@ -10678,7 +10921,7 @@
                       </a:endParaRPr>
                     </a:p>
                   </a:txBody>
-                  <a:tcPr anchor="ctr" marL="91440" marR="91440" marT="45720" marB="45720">
+                  <a:tcPr anchor="ctr">
                     <a:lnL w="12240">
                       <a:solidFill>
                         <a:srgbClr val="DDE6DF"/>
@@ -10708,13 +10951,17 @@
                     </a:solidFill>
                   </a:tcPr>
                 </a:tc>
+                <a:extLst>
+                  <a:ext uri="{0D108BD9-81ED-4DB2-BD59-A6C34878D82A}">
+                    <a16:rowId xmlns:a16="http://schemas.microsoft.com/office/drawing/2014/main" val="10004"/>
+                  </a:ext>
+                </a:extLst>
               </a:tr>
               <a:tr h="566640">
                 <a:tc>
                   <a:txBody>
-                    <a:bodyPr anchor="ctr">
-                      <a:noAutofit/>
-                    </a:bodyPr>
+                    <a:bodyPr/>
+                    <a:lstStyle/>
                     <a:p>
                       <a:pPr defTabSz="914400">
                         <a:lnSpc>
@@ -10745,7 +10992,7 @@
                       </a:endParaRPr>
                     </a:p>
                   </a:txBody>
-                  <a:tcPr anchor="ctr" marL="91440" marR="91440" marT="45720" marB="45720">
+                  <a:tcPr anchor="ctr">
                     <a:lnL w="12240">
                       <a:solidFill>
                         <a:srgbClr val="DDE6DF"/>
@@ -10777,9 +11024,8 @@
                 </a:tc>
                 <a:tc>
                   <a:txBody>
-                    <a:bodyPr anchor="ctr">
-                      <a:noAutofit/>
-                    </a:bodyPr>
+                    <a:bodyPr/>
+                    <a:lstStyle/>
                     <a:p>
                       <a:pPr defTabSz="914400">
                         <a:lnSpc>
@@ -10810,7 +11056,7 @@
                       </a:endParaRPr>
                     </a:p>
                   </a:txBody>
-                  <a:tcPr anchor="ctr" marL="91440" marR="91440" marT="45720" marB="45720">
+                  <a:tcPr anchor="ctr">
                     <a:lnL w="12240">
                       <a:solidFill>
                         <a:srgbClr val="DDE6DF"/>
@@ -10840,13 +11086,17 @@
                     </a:solidFill>
                   </a:tcPr>
                 </a:tc>
+                <a:extLst>
+                  <a:ext uri="{0D108BD9-81ED-4DB2-BD59-A6C34878D82A}">
+                    <a16:rowId xmlns:a16="http://schemas.microsoft.com/office/drawing/2014/main" val="10005"/>
+                  </a:ext>
+                </a:extLst>
               </a:tr>
               <a:tr h="566640">
                 <a:tc>
                   <a:txBody>
-                    <a:bodyPr anchor="ctr">
-                      <a:noAutofit/>
-                    </a:bodyPr>
+                    <a:bodyPr/>
+                    <a:lstStyle/>
                     <a:p>
                       <a:pPr defTabSz="914400">
                         <a:lnSpc>
@@ -10877,7 +11127,7 @@
                       </a:endParaRPr>
                     </a:p>
                   </a:txBody>
-                  <a:tcPr anchor="ctr" marL="91440" marR="91440" marT="45720" marB="45720">
+                  <a:tcPr anchor="ctr">
                     <a:lnL w="12240">
                       <a:solidFill>
                         <a:srgbClr val="DDE6DF"/>
@@ -10909,9 +11159,8 @@
                 </a:tc>
                 <a:tc>
                   <a:txBody>
-                    <a:bodyPr anchor="ctr">
-                      <a:noAutofit/>
-                    </a:bodyPr>
+                    <a:bodyPr/>
+                    <a:lstStyle/>
                     <a:p>
                       <a:pPr defTabSz="914400">
                         <a:lnSpc>
@@ -10942,7 +11191,7 @@
                       </a:endParaRPr>
                     </a:p>
                   </a:txBody>
-                  <a:tcPr anchor="ctr" marL="91440" marR="91440" marT="45720" marB="45720">
+                  <a:tcPr anchor="ctr">
                     <a:lnL w="12240">
                       <a:solidFill>
                         <a:srgbClr val="DDE6DF"/>
@@ -10972,6 +11221,11 @@
                     </a:solidFill>
                   </a:tcPr>
                 </a:tc>
+                <a:extLst>
+                  <a:ext uri="{0D108BD9-81ED-4DB2-BD59-A6C34878D82A}">
+                    <a16:rowId xmlns:a16="http://schemas.microsoft.com/office/drawing/2014/main" val="10006"/>
+                  </a:ext>
+                </a:extLst>
               </a:tr>
             </a:tbl>
           </a:graphicData>
@@ -10979,19 +11233,14 @@
       </p:graphicFrame>
     </p:spTree>
   </p:cSld>
-  <mc:AlternateContent>
-    <mc:Choice Requires="p14">
-      <p:transition spd="slow" p14:dur="2000"/>
-    </mc:Choice>
-    <mc:Fallback>
-      <p:transition spd="slow"/>
-    </mc:Fallback>
-  </mc:AlternateContent>
+  <p:clrMapOvr>
+    <a:masterClrMapping/>
+  </p:clrMapOvr>
 </p:sld>
 </file>
 
 <file path=ppt/theme/theme1.xml><?xml version="1.0" encoding="utf-8"?>
-<a:theme xmlns:a="http://schemas.openxmlformats.org/drawingml/2006/main" xmlns:r="http://schemas.openxmlformats.org/officeDocument/2006/relationships" name="WildlifeReID">
+<a:theme xmlns:a="http://schemas.openxmlformats.org/drawingml/2006/main" name="WildlifeReID">
   <a:themeElements>
     <a:clrScheme name="WildlifeReID">
       <a:dk1>
@@ -11033,12 +11282,12 @@
     </a:clrScheme>
     <a:fontScheme name="WildlifeReID">
       <a:majorFont>
-        <a:latin typeface="Cambria" pitchFamily="0" charset="1"/>
+        <a:latin typeface="Cambria"/>
         <a:ea typeface=""/>
         <a:cs typeface=""/>
       </a:majorFont>
       <a:minorFont>
-        <a:latin typeface="Calibri" pitchFamily="0" charset="1"/>
+        <a:latin typeface="Calibri"/>
         <a:ea typeface=""/>
         <a:cs typeface=""/>
       </a:minorFont>
@@ -11070,7 +11319,7 @@
             </a:gs>
           </a:gsLst>
           <a:lin ang="5400000" scaled="0"/>
-          <a:tileRect l="0" t="0" r="0" b="0"/>
+          <a:tileRect/>
         </a:gradFill>
         <a:gradFill>
           <a:gsLst>
@@ -11094,7 +11343,7 @@
             </a:gs>
           </a:gsLst>
           <a:lin ang="5400000" scaled="0"/>
-          <a:tileRect l="0" t="0" r="0" b="0"/>
+          <a:tileRect/>
         </a:gradFill>
       </a:fillStyleLst>
       <a:lnStyleLst>
@@ -11154,16 +11403,18 @@
             </a:gs>
           </a:gsLst>
           <a:lin ang="5400000" scaled="0"/>
-          <a:tileRect l="0" t="0" r="0" b="0"/>
+          <a:tileRect/>
         </a:gradFill>
       </a:bgFillStyleLst>
     </a:fmtScheme>
   </a:themeElements>
+  <a:objectDefaults/>
+  <a:extraClrSchemeLst/>
 </a:theme>
 </file>
 
 <file path=ppt/theme/theme2.xml><?xml version="1.0" encoding="utf-8"?>
-<a:theme xmlns:a="http://schemas.openxmlformats.org/drawingml/2006/main" xmlns:r="http://schemas.openxmlformats.org/officeDocument/2006/relationships" name="Office Theme">
+<a:theme xmlns:a="http://schemas.openxmlformats.org/drawingml/2006/main" name="Office Theme">
   <a:themeElements>
     <a:clrScheme name="LibreOffice">
       <a:dk1>
@@ -11205,14 +11456,14 @@
     </a:clrScheme>
     <a:fontScheme name="Office">
       <a:majorFont>
-        <a:latin typeface="Arial" pitchFamily="0" charset="1"/>
-        <a:ea typeface="DejaVu Sans" pitchFamily="0" charset="1"/>
-        <a:cs typeface="DejaVu Sans" pitchFamily="0" charset="1"/>
+        <a:latin typeface="Arial"/>
+        <a:ea typeface="DejaVu Sans"/>
+        <a:cs typeface="DejaVu Sans"/>
       </a:majorFont>
       <a:minorFont>
-        <a:latin typeface="Arial" pitchFamily="0" charset="1"/>
-        <a:ea typeface="DejaVu Sans" pitchFamily="0" charset="1"/>
-        <a:cs typeface="DejaVu Sans" pitchFamily="0" charset="1"/>
+        <a:latin typeface="Arial"/>
+        <a:ea typeface="DejaVu Sans"/>
+        <a:cs typeface="DejaVu Sans"/>
       </a:minorFont>
     </a:fontScheme>
     <a:fmtScheme>
@@ -11265,5 +11516,7 @@
       </a:bgFillStyleLst>
     </a:fmtScheme>
   </a:themeElements>
+  <a:objectDefaults/>
+  <a:extraClrSchemeLst/>
 </a:theme>
 </file>